--- a/slides/discussion/19_ML_intro_discussion.pptx
+++ b/slides/discussion/19_ML_intro_discussion.pptx
@@ -15,9 +15,8 @@
     <p:sldId id="516" r:id="rId9"/>
     <p:sldId id="517" r:id="rId10"/>
     <p:sldId id="518" r:id="rId11"/>
-    <p:sldId id="269" r:id="rId12"/>
-    <p:sldId id="519" r:id="rId13"/>
-    <p:sldId id="271" r:id="rId14"/>
+    <p:sldId id="519" r:id="rId12"/>
+    <p:sldId id="271" r:id="rId13"/>
   </p:sldIdLst>
   <p:sldSz cx="12192000" cy="6858000"/>
   <p:notesSz cx="6858000" cy="9144000"/>
@@ -1319,161 +1318,6 @@
 </inkml:ink>
 </file>
 
-<file path=ppt/ink/ink135.xml><?xml version="1.0" encoding="utf-8"?>
-<inkml:ink xmlns:inkml="http://www.w3.org/2003/InkML">
-  <inkml:definitions>
-    <inkml:context xml:id="ctx0">
-      <inkml:inkSource xml:id="inkSrc0">
-        <inkml:traceFormat>
-          <inkml:channel name="X" type="integer" min="-2.14748E9" max="2.14748E9" units="cm"/>
-          <inkml:channel name="Y" type="integer" min="-2.14748E9" max="2.14748E9" units="cm"/>
-          <inkml:channel name="F" type="integer" max="32767" units="dev"/>
-          <inkml:channel name="OA" type="integer" max="360" units="deg"/>
-          <inkml:channel name="OE" type="integer" max="90" units="deg"/>
-        </inkml:traceFormat>
-        <inkml:channelProperties>
-          <inkml:channelProperty channel="X" name="resolution" value="1000" units="1/cm"/>
-          <inkml:channelProperty channel="Y" name="resolution" value="1000" units="1/cm"/>
-          <inkml:channelProperty channel="F" name="resolution" value="0" units="1/dev"/>
-          <inkml:channelProperty channel="OA" name="resolution" value="1000" units="1/deg"/>
-          <inkml:channelProperty channel="OE" name="resolution" value="1000" units="1/deg"/>
-        </inkml:channelProperties>
-      </inkml:inkSource>
-      <inkml:timestamp xml:id="ts0" timeString="2025-04-28T15:52:00.507"/>
-    </inkml:context>
-    <inkml:brush xml:id="br0">
-      <inkml:brushProperty name="width" value="0.05" units="cm"/>
-      <inkml:brushProperty name="height" value="0.05" units="cm"/>
-    </inkml:brush>
-  </inkml:definitions>
-  <inkml:trace contextRef="#ctx0" brushRef="#br0">70 139 576 0 0,'-31'-38'7195'0'0,"27"32"-6769"0"0,1-1 0 0 0,0-1 1 0 0,0 1-1 0 0,1 0 1 0 0,0-1-1 0 0,0 1 0 0 0,-1-12 1 0 0,-3-12 5039 0 0,-5 61-2753 0 0,17 144 683 0 0,29 87-2744 0 0,-20-161-291 0 0,17 102-251 0 0,21 183 941 0 0,-27-140-892 0 0,-4-61 72 0 0,-2-13-2444 0 0,-15-56-6730 0 0,-5-112 8679 0 0,1 8-462 0 0,-1 0 1 0 0,0 0-1 0 0,0 0 1 0 0,-1 0 0 0 0,-1 0-1 0 0,0 0 1 0 0,0 0-1 0 0,-1 0 1 0 0,-1-1 0 0 0,-5 14-1 0 0,8-23 558 0 0,1 0 0 0 0,-1 0 0 0 0,1-1 0 0 0,-1 1 0 0 0,0 0 0 0 0,1-1 0 0 0,-1 1 0 0 0,0-1 0 0 0,0 1 0 0 0,1 0 0 0 0,-1-1 0 0 0,0 0 0 0 0,0 1 0 0 0,0-1-1 0 0,0 1 1 0 0,1-1 0 0 0,-1 0 0 0 0,-2 1 0 0 0</inkml:trace>
-</inkml:ink>
-</file>
-
-<file path=ppt/ink/ink136.xml><?xml version="1.0" encoding="utf-8"?>
-<inkml:ink xmlns:inkml="http://www.w3.org/2003/InkML">
-  <inkml:definitions>
-    <inkml:context xml:id="ctx0">
-      <inkml:inkSource xml:id="inkSrc0">
-        <inkml:traceFormat>
-          <inkml:channel name="X" type="integer" min="-2.14748E9" max="2.14748E9" units="cm"/>
-          <inkml:channel name="Y" type="integer" min="-2.14748E9" max="2.14748E9" units="cm"/>
-          <inkml:channel name="F" type="integer" max="32767" units="dev"/>
-          <inkml:channel name="OA" type="integer" max="360" units="deg"/>
-          <inkml:channel name="OE" type="integer" max="90" units="deg"/>
-        </inkml:traceFormat>
-        <inkml:channelProperties>
-          <inkml:channelProperty channel="X" name="resolution" value="1000" units="1/cm"/>
-          <inkml:channelProperty channel="Y" name="resolution" value="1000" units="1/cm"/>
-          <inkml:channelProperty channel="F" name="resolution" value="0" units="1/dev"/>
-          <inkml:channelProperty channel="OA" name="resolution" value="1000" units="1/deg"/>
-          <inkml:channelProperty channel="OE" name="resolution" value="1000" units="1/deg"/>
-        </inkml:channelProperties>
-      </inkml:inkSource>
-      <inkml:timestamp xml:id="ts0" timeString="2025-04-28T15:52:01.139"/>
-    </inkml:context>
-    <inkml:brush xml:id="br0">
-      <inkml:brushProperty name="width" value="0.05" units="cm"/>
-      <inkml:brushProperty name="height" value="0.05" units="cm"/>
-    </inkml:brush>
-  </inkml:definitions>
-  <inkml:trace contextRef="#ctx0" brushRef="#br0">13 0 6941 0 0,'0'0'2109'0'0,"-13"20"7165"0"0,21 324-5756 0 0,-1-68-3160 0 0,-8-93 639 0 0,1 332 972 0 0,22-258-1882 0 0,24-4-3319 0 0,-42-206-4023 0 0,-6-12 3445 0 0,2-34 3726 0 0,0-1 0 0 0,0 1 0 0 0,0-1 0 0 0,0 1 0 0 0,0-1 0 0 0,0 1 0 0 0,0-1 0 0 0,0 1 0 0 0,0-1 1 0 0,0 1-1 0 0,0-1 0 0 0,0 1 0 0 0,0-1 0 0 0,-1 1 0 0 0,1-1 0 0 0,0 1 0 0 0,0-1 0 0 0,-1 0 0 0 0,1 1 0 0 0,0-1 0 0 0,0 1 0 0 0,-1-1 1 0 0,1 0-1 0 0,-1 1 0 0 0,1-1 0 0 0,0 0 0 0 0,-1 0 0 0 0,1 1 0 0 0,-1-1 0 0 0,1 0 0 0 0,0 0 0 0 0,-1 1 0 0 0,1-1 0 0 0,-1 0 1 0 0,1 0-1 0 0,-1 0 0 0 0,1 0 0 0 0,-1 0 0 0 0,1 0 0 0 0,-1 0 0 0 0,1 0 0 0 0,-1 0 0 0 0,0 0 0 0 0,-26-12-4451 0 0</inkml:trace>
-</inkml:ink>
-</file>
-
-<file path=ppt/ink/ink137.xml><?xml version="1.0" encoding="utf-8"?>
-<inkml:ink xmlns:inkml="http://www.w3.org/2003/InkML">
-  <inkml:definitions>
-    <inkml:context xml:id="ctx0">
-      <inkml:inkSource xml:id="inkSrc0">
-        <inkml:traceFormat>
-          <inkml:channel name="X" type="integer" min="-2.14748E9" max="2.14748E9" units="cm"/>
-          <inkml:channel name="Y" type="integer" min="-2.14748E9" max="2.14748E9" units="cm"/>
-          <inkml:channel name="F" type="integer" max="32767" units="dev"/>
-          <inkml:channel name="OA" type="integer" max="360" units="deg"/>
-          <inkml:channel name="OE" type="integer" max="90" units="deg"/>
-        </inkml:traceFormat>
-        <inkml:channelProperties>
-          <inkml:channelProperty channel="X" name="resolution" value="1000" units="1/cm"/>
-          <inkml:channelProperty channel="Y" name="resolution" value="1000" units="1/cm"/>
-          <inkml:channelProperty channel="F" name="resolution" value="0" units="1/dev"/>
-          <inkml:channelProperty channel="OA" name="resolution" value="1000" units="1/deg"/>
-          <inkml:channelProperty channel="OE" name="resolution" value="1000" units="1/deg"/>
-        </inkml:channelProperties>
-      </inkml:inkSource>
-      <inkml:timestamp xml:id="ts0" timeString="2025-04-28T15:52:01.828"/>
-    </inkml:context>
-    <inkml:brush xml:id="br0">
-      <inkml:brushProperty name="width" value="0.05" units="cm"/>
-      <inkml:brushProperty name="height" value="0.05" units="cm"/>
-    </inkml:brush>
-  </inkml:definitions>
-  <inkml:trace contextRef="#ctx0" brushRef="#br0">0 76 6377 0 0,'2'-12'6243'0'0,"3"-13"-1663"0"0,-1 21-4352 0 0,1 1 0 0 0,-1 1 1 0 0,1-1-1 0 0,-1 1 0 0 0,1-1 0 0 0,0 1 0 0 0,0 1 0 0 0,0-1 0 0 0,0 1 0 0 0,0 0 0 0 0,8-1 0 0 0,58-3 341 0 0,349 7 2653 0 0,191-9-1679 0 0,-440 5-1162 0 0,323 35 0 0 0,-300-13 16 0 0,-149-16-375 0 0,34 3-1141 0 0,-33-4-3316 0 0,-42-3 1676 0 0,12 4-4734 0 0,-29-11 3872 0 0,-19-2-676 0 0</inkml:trace>
-</inkml:ink>
-</file>
-
-<file path=ppt/ink/ink138.xml><?xml version="1.0" encoding="utf-8"?>
-<inkml:ink xmlns:inkml="http://www.w3.org/2003/InkML">
-  <inkml:definitions>
-    <inkml:context xml:id="ctx0">
-      <inkml:inkSource xml:id="inkSrc0">
-        <inkml:traceFormat>
-          <inkml:channel name="X" type="integer" min="-2.14748E9" max="2.14748E9" units="cm"/>
-          <inkml:channel name="Y" type="integer" min="-2.14748E9" max="2.14748E9" units="cm"/>
-          <inkml:channel name="F" type="integer" max="32767" units="dev"/>
-          <inkml:channel name="OA" type="integer" max="360" units="deg"/>
-          <inkml:channel name="OE" type="integer" max="90" units="deg"/>
-        </inkml:traceFormat>
-        <inkml:channelProperties>
-          <inkml:channelProperty channel="X" name="resolution" value="1000" units="1/cm"/>
-          <inkml:channelProperty channel="Y" name="resolution" value="1000" units="1/cm"/>
-          <inkml:channelProperty channel="F" name="resolution" value="0" units="1/dev"/>
-          <inkml:channelProperty channel="OA" name="resolution" value="1000" units="1/deg"/>
-          <inkml:channelProperty channel="OE" name="resolution" value="1000" units="1/deg"/>
-        </inkml:channelProperties>
-      </inkml:inkSource>
-      <inkml:timestamp xml:id="ts0" timeString="2025-04-28T15:52:02.568"/>
-    </inkml:context>
-    <inkml:brush xml:id="br0">
-      <inkml:brushProperty name="width" value="0.05" units="cm"/>
-      <inkml:brushProperty name="height" value="0.05" units="cm"/>
-    </inkml:brush>
-  </inkml:definitions>
-  <inkml:trace contextRef="#ctx0" brushRef="#br0">1 94 6257 0 0,'1'-4'666'0'0,"1"0"0"0"0,0 1 1 0 0,0-1-1 0 0,1 0 0 0 0,-1 1 1 0 0,1 0-1 0 0,-1-1 0 0 0,1 1 1 0 0,0 0-1 0 0,0 1 1 0 0,1-1-1 0 0,-1 0 0 0 0,1 1 1 0 0,-1 0-1 0 0,5-2 0 0 0,4-2 68 0 0,1 0-1 0 0,0 1 0 0 0,0 1 0 0 0,22-5 0 0 0,-4 4-568 0 0,57-3 0 0 0,-20 9 524 0 0,79 8 251 0 0,233 8 501 0 0,43 0-592 0 0,-73 0-755 0 0,-171-14 21 0 0,199 5 180 0 0,-126 6-1094 0 0,-116 2-1471 0 0,170 50-9592 0 0,-214-33 8500 0 0,-50-11-954 0 0</inkml:trace>
-</inkml:ink>
-</file>
-
-<file path=ppt/ink/ink139.xml><?xml version="1.0" encoding="utf-8"?>
-<inkml:ink xmlns:inkml="http://www.w3.org/2003/InkML">
-  <inkml:definitions>
-    <inkml:context xml:id="ctx0">
-      <inkml:inkSource xml:id="inkSrc0">
-        <inkml:traceFormat>
-          <inkml:channel name="X" type="integer" min="-2.14748E9" max="2.14748E9" units="cm"/>
-          <inkml:channel name="Y" type="integer" min="-2.14748E9" max="2.14748E9" units="cm"/>
-          <inkml:channel name="F" type="integer" max="32767" units="dev"/>
-          <inkml:channel name="OA" type="integer" max="360" units="deg"/>
-          <inkml:channel name="OE" type="integer" max="90" units="deg"/>
-        </inkml:traceFormat>
-        <inkml:channelProperties>
-          <inkml:channelProperty channel="X" name="resolution" value="1000" units="1/cm"/>
-          <inkml:channelProperty channel="Y" name="resolution" value="1000" units="1/cm"/>
-          <inkml:channelProperty channel="F" name="resolution" value="0" units="1/dev"/>
-          <inkml:channelProperty channel="OA" name="resolution" value="1000" units="1/deg"/>
-          <inkml:channelProperty channel="OE" name="resolution" value="1000" units="1/deg"/>
-        </inkml:channelProperties>
-      </inkml:inkSource>
-      <inkml:timestamp xml:id="ts0" timeString="2025-04-28T15:53:04.040"/>
-    </inkml:context>
-    <inkml:brush xml:id="br0">
-      <inkml:brushProperty name="width" value="0.05" units="cm"/>
-      <inkml:brushProperty name="height" value="0.05" units="cm"/>
-    </inkml:brush>
-  </inkml:definitions>
-  <inkml:trace contextRef="#ctx0" brushRef="#br0">0 1 2224 0 0,'0'0'5377'0'0,"27"23"-2074"0"0,-11-8-2856 0 0,0 1 1 0 0,-1 1 0 0 0,0 0 0 0 0,18 29 0 0 0,-15-19-1529 0 0,37 40 1 0 0,-42-55 171 0 0,0 0 0 0 0,1 0 0 0 0,17 10-1 0 0,-10-7 409 0 0,-6-4-158 0 0,0 0-1 0 0,1-1 0 0 0,29 13 0 0 0,-10-15-817 0 0</inkml:trace>
-</inkml:ink>
-</file>
-
 <file path=ppt/ink/ink14.xml><?xml version="1.0" encoding="utf-8"?>
 <inkml:ink xmlns:inkml="http://www.w3.org/2003/InkML">
   <inkml:definitions>
@@ -1502,316 +1346,6 @@
     </inkml:brush>
   </inkml:definitions>
   <inkml:trace contextRef="#ctx0" brushRef="#br0">1 94 6257 0 0,'1'-4'666'0'0,"1"0"0"0"0,0 1 1 0 0,0-1-1 0 0,1 0 0 0 0,-1 1 1 0 0,1 0-1 0 0,-1-1 0 0 0,1 1 1 0 0,0 0-1 0 0,0 1 1 0 0,1-1-1 0 0,-1 0 0 0 0,1 1 1 0 0,-1 0-1 0 0,5-2 0 0 0,4-2 68 0 0,1 0-1 0 0,0 1 0 0 0,0 1 0 0 0,22-5 0 0 0,-4 4-568 0 0,57-3 0 0 0,-20 9 524 0 0,79 8 251 0 0,233 8 501 0 0,43 0-592 0 0,-73 0-755 0 0,-171-14 21 0 0,199 5 180 0 0,-126 6-1094 0 0,-116 2-1471 0 0,170 50-9592 0 0,-214-33 8500 0 0,-50-11-954 0 0</inkml:trace>
-</inkml:ink>
-</file>
-
-<file path=ppt/ink/ink140.xml><?xml version="1.0" encoding="utf-8"?>
-<inkml:ink xmlns:inkml="http://www.w3.org/2003/InkML">
-  <inkml:definitions>
-    <inkml:context xml:id="ctx0">
-      <inkml:inkSource xml:id="inkSrc0">
-        <inkml:traceFormat>
-          <inkml:channel name="X" type="integer" min="-2.14748E9" max="2.14748E9" units="cm"/>
-          <inkml:channel name="Y" type="integer" min="-2.14748E9" max="2.14748E9" units="cm"/>
-          <inkml:channel name="F" type="integer" max="32767" units="dev"/>
-          <inkml:channel name="OA" type="integer" max="360" units="deg"/>
-          <inkml:channel name="OE" type="integer" max="90" units="deg"/>
-        </inkml:traceFormat>
-        <inkml:channelProperties>
-          <inkml:channelProperty channel="X" name="resolution" value="1000" units="1/cm"/>
-          <inkml:channelProperty channel="Y" name="resolution" value="1000" units="1/cm"/>
-          <inkml:channelProperty channel="F" name="resolution" value="0" units="1/dev"/>
-          <inkml:channelProperty channel="OA" name="resolution" value="1000" units="1/deg"/>
-          <inkml:channelProperty channel="OE" name="resolution" value="1000" units="1/deg"/>
-        </inkml:channelProperties>
-      </inkml:inkSource>
-      <inkml:timestamp xml:id="ts0" timeString="2025-04-28T15:53:04.369"/>
-    </inkml:context>
-    <inkml:brush xml:id="br0">
-      <inkml:brushProperty name="width" value="0.05" units="cm"/>
-      <inkml:brushProperty name="height" value="0.05" units="cm"/>
-    </inkml:brush>
-  </inkml:definitions>
-  <inkml:trace contextRef="#ctx0" brushRef="#br0">1 435 1624 0 0,'14'-48'10253'0'0,"-11"40"-9815"0"0,0 1 0 0 0,1 0 0 0 0,0 0 0 0 0,1 1 0 0 0,-1-1 0 0 0,1 1 0 0 0,8-8 0 0 0,-1 2-224 0 0,121-119-972 0 0,-24 43-5838 0 0,-89 75 5989 0 0,-4 3-106 0 0,-1-1 0 0 0,0 0 0 0 0,16-17 0 0 0,-15 8-1341 0 0</inkml:trace>
-</inkml:ink>
-</file>
-
-<file path=ppt/ink/ink141.xml><?xml version="1.0" encoding="utf-8"?>
-<inkml:ink xmlns:inkml="http://www.w3.org/2003/InkML">
-  <inkml:definitions>
-    <inkml:context xml:id="ctx0">
-      <inkml:inkSource xml:id="inkSrc0">
-        <inkml:traceFormat>
-          <inkml:channel name="X" type="integer" min="-2.14748E9" max="2.14748E9" units="cm"/>
-          <inkml:channel name="Y" type="integer" min="-2.14748E9" max="2.14748E9" units="cm"/>
-          <inkml:channel name="F" type="integer" max="32767" units="dev"/>
-          <inkml:channel name="OA" type="integer" max="360" units="deg"/>
-          <inkml:channel name="OE" type="integer" max="90" units="deg"/>
-        </inkml:traceFormat>
-        <inkml:channelProperties>
-          <inkml:channelProperty channel="X" name="resolution" value="1000" units="1/cm"/>
-          <inkml:channelProperty channel="Y" name="resolution" value="1000" units="1/cm"/>
-          <inkml:channelProperty channel="F" name="resolution" value="0" units="1/dev"/>
-          <inkml:channelProperty channel="OA" name="resolution" value="1000" units="1/deg"/>
-          <inkml:channelProperty channel="OE" name="resolution" value="1000" units="1/deg"/>
-        </inkml:channelProperties>
-      </inkml:inkSource>
-      <inkml:timestamp xml:id="ts0" timeString="2025-04-28T15:53:05.262"/>
-    </inkml:context>
-    <inkml:brush xml:id="br0">
-      <inkml:brushProperty name="width" value="0.05" units="cm"/>
-      <inkml:brushProperty name="height" value="0.05" units="cm"/>
-    </inkml:brush>
-  </inkml:definitions>
-  <inkml:trace contextRef="#ctx0" brushRef="#br0">132 188 2572 0 0,'0'0'5075'0'0,"16"34"-548"0"0,-12-32-4457 0 0,-1 1 0 0 0,1 0 0 0 0,0-1 0 0 0,0 0 0 0 0,0 0 0 0 0,0 0 0 0 0,1 0 1 0 0,-1-1-1 0 0,0 0 0 0 0,1 0 0 0 0,-1 0 0 0 0,1 0 0 0 0,-1-1 0 0 0,1 1 0 0 0,-1-1 0 0 0,1 0 1 0 0,-1-1-1 0 0,10-1 0 0 0,-6 1 47 0 0,0-2 0 0 0,1 1 0 0 0,-1-1 0 0 0,0 0 0 0 0,0 0 0 0 0,-1-1 0 0 0,1 0 0 0 0,-1-1 0 0 0,0 0 0 0 0,8-6 0 0 0,-11 7 23 0 0,0 1 1 0 0,0-1-1 0 0,0 0 1 0 0,0 0-1 0 0,-1-1 1 0 0,0 1 0 0 0,0-1-1 0 0,0 1 1 0 0,0-1-1 0 0,-1 0 1 0 0,1 0-1 0 0,-1 0 1 0 0,-1-1-1 0 0,1 1 1 0 0,0-8 0 0 0,-1 9 34 0 0,-1 0 1 0 0,-1 0 0 0 0,1 0 0 0 0,-1 0-1 0 0,0 0 1 0 0,0 0 0 0 0,0 0-1 0 0,0 0 1 0 0,-1 0 0 0 0,1 0 0 0 0,-1 1-1 0 0,0-1 1 0 0,0 0 0 0 0,0 1 0 0 0,-1 0-1 0 0,1-1 1 0 0,-1 1 0 0 0,0 0 0 0 0,0 0-1 0 0,0 1 1 0 0,0-1 0 0 0,-1 1 0 0 0,-3-3-1 0 0,1 1-182 0 0,0 0-1 0 0,0 0 1 0 0,0 1-1 0 0,0 0 1 0 0,-1 1-1 0 0,0-1 1 0 0,1 1-1 0 0,-1 0 1 0 0,0 1-1 0 0,0-1 1 0 0,0 1-1 0 0,0 1 1 0 0,0-1-1 0 0,0 1 1 0 0,-12 2-1 0 0,12-1-490 0 0,0 1 0 0 0,-1 0 0 0 0,1 1 0 0 0,0-1 0 0 0,1 1 0 0 0,-1 1-1 0 0,0-1 1 0 0,1 1 0 0 0,0 1 0 0 0,0-1 0 0 0,0 1 0 0 0,0 0 0 0 0,1 0 0 0 0,-1 0-1 0 0,1 1 1 0 0,1 0 0 0 0,-5 6 0 0 0,-73 119-5489 0 0,67-95 2529 0 0</inkml:trace>
-</inkml:ink>
-</file>
-
-<file path=ppt/ink/ink142.xml><?xml version="1.0" encoding="utf-8"?>
-<inkml:ink xmlns:inkml="http://www.w3.org/2003/InkML">
-  <inkml:definitions>
-    <inkml:context xml:id="ctx0">
-      <inkml:inkSource xml:id="inkSrc0">
-        <inkml:traceFormat>
-          <inkml:channel name="X" type="integer" min="-2.14748E9" max="2.14748E9" units="cm"/>
-          <inkml:channel name="Y" type="integer" min="-2.14748E9" max="2.14748E9" units="cm"/>
-          <inkml:channel name="F" type="integer" max="32767" units="dev"/>
-          <inkml:channel name="OA" type="integer" max="360" units="deg"/>
-          <inkml:channel name="OE" type="integer" max="90" units="deg"/>
-        </inkml:traceFormat>
-        <inkml:channelProperties>
-          <inkml:channelProperty channel="X" name="resolution" value="1000" units="1/cm"/>
-          <inkml:channelProperty channel="Y" name="resolution" value="1000" units="1/cm"/>
-          <inkml:channelProperty channel="F" name="resolution" value="0" units="1/dev"/>
-          <inkml:channelProperty channel="OA" name="resolution" value="1000" units="1/deg"/>
-          <inkml:channelProperty channel="OE" name="resolution" value="1000" units="1/deg"/>
-        </inkml:channelProperties>
-      </inkml:inkSource>
-      <inkml:timestamp xml:id="ts0" timeString="2025-04-28T15:53:06.070"/>
-    </inkml:context>
-    <inkml:brush xml:id="br0">
-      <inkml:brushProperty name="width" value="0.05" units="cm"/>
-      <inkml:brushProperty name="height" value="0.05" units="cm"/>
-    </inkml:brush>
-  </inkml:definitions>
-  <inkml:trace contextRef="#ctx0" brushRef="#br0">0 1 3224 0 0,'0'0'7536'0'0,"21"17"-4189"0"0,2-6-3159 0 0,1-2 0 0 0,0 0 1 0 0,0-1-1 0 0,1-2 0 0 0,0 0 1 0 0,35 2-1 0 0,5 3-3393 0 0,88 26-4034 0 0,-149-36 4986 0 0</inkml:trace>
-</inkml:ink>
-</file>
-
-<file path=ppt/ink/ink143.xml><?xml version="1.0" encoding="utf-8"?>
-<inkml:ink xmlns:inkml="http://www.w3.org/2003/InkML">
-  <inkml:definitions>
-    <inkml:context xml:id="ctx0">
-      <inkml:inkSource xml:id="inkSrc0">
-        <inkml:traceFormat>
-          <inkml:channel name="X" type="integer" min="-2.14748E9" max="2.14748E9" units="cm"/>
-          <inkml:channel name="Y" type="integer" min="-2.14748E9" max="2.14748E9" units="cm"/>
-          <inkml:channel name="F" type="integer" max="32767" units="dev"/>
-          <inkml:channel name="OA" type="integer" max="360" units="deg"/>
-          <inkml:channel name="OE" type="integer" max="90" units="deg"/>
-        </inkml:traceFormat>
-        <inkml:channelProperties>
-          <inkml:channelProperty channel="X" name="resolution" value="1000" units="1/cm"/>
-          <inkml:channelProperty channel="Y" name="resolution" value="1000" units="1/cm"/>
-          <inkml:channelProperty channel="F" name="resolution" value="0" units="1/dev"/>
-          <inkml:channelProperty channel="OA" name="resolution" value="1000" units="1/deg"/>
-          <inkml:channelProperty channel="OE" name="resolution" value="1000" units="1/deg"/>
-        </inkml:channelProperties>
-      </inkml:inkSource>
-      <inkml:timestamp xml:id="ts0" timeString="2025-04-28T15:53:06.276"/>
-    </inkml:context>
-    <inkml:brush xml:id="br0">
-      <inkml:brushProperty name="width" value="0.05" units="cm"/>
-      <inkml:brushProperty name="height" value="0.05" units="cm"/>
-    </inkml:brush>
-  </inkml:definitions>
-  <inkml:trace contextRef="#ctx0" brushRef="#br0">0 439 7345 0 0,'6'-19'2272'0'0,"8"4"360"0"0,1-1-340 0 0,2 2-395 0 0,0-1-461 0 0,1-2-188 0 0,2 2-284 0 0,4-3-184 0 0,3-2-308 0 0,12-5-868 0 0,0 2-568 0 0,1-1-1220 0 0,-11 6-765 0 0,115-69-2099 0 0,-77 22 2560 0 0,-24 17-2093 0 0</inkml:trace>
-</inkml:ink>
-</file>
-
-<file path=ppt/ink/ink144.xml><?xml version="1.0" encoding="utf-8"?>
-<inkml:ink xmlns:inkml="http://www.w3.org/2003/InkML">
-  <inkml:definitions>
-    <inkml:context xml:id="ctx0">
-      <inkml:inkSource xml:id="inkSrc0">
-        <inkml:traceFormat>
-          <inkml:channel name="X" type="integer" min="-2.14748E9" max="2.14748E9" units="cm"/>
-          <inkml:channel name="Y" type="integer" min="-2.14748E9" max="2.14748E9" units="cm"/>
-          <inkml:channel name="F" type="integer" max="32767" units="dev"/>
-          <inkml:channel name="OA" type="integer" max="360" units="deg"/>
-          <inkml:channel name="OE" type="integer" max="90" units="deg"/>
-        </inkml:traceFormat>
-        <inkml:channelProperties>
-          <inkml:channelProperty channel="X" name="resolution" value="1000" units="1/cm"/>
-          <inkml:channelProperty channel="Y" name="resolution" value="1000" units="1/cm"/>
-          <inkml:channelProperty channel="F" name="resolution" value="0" units="1/dev"/>
-          <inkml:channelProperty channel="OA" name="resolution" value="1000" units="1/deg"/>
-          <inkml:channelProperty channel="OE" name="resolution" value="1000" units="1/deg"/>
-        </inkml:channelProperties>
-      </inkml:inkSource>
-      <inkml:timestamp xml:id="ts0" timeString="2025-04-28T15:53:07.106"/>
-    </inkml:context>
-    <inkml:brush xml:id="br0">
-      <inkml:brushProperty name="width" value="0.05" units="cm"/>
-      <inkml:brushProperty name="height" value="0.05" units="cm"/>
-    </inkml:brush>
-  </inkml:definitions>
-  <inkml:trace contextRef="#ctx0" brushRef="#br0">116 0 1500 0 0,'0'0'4338'0'0,"-14"9"-1481"0"0,9-2-2511 0 0,1 1 1 0 0,0 1-1 0 0,0-1 0 0 0,1 1 1 0 0,0-1-1 0 0,0 1 1 0 0,1 0-1 0 0,0 0 0 0 0,0 0 1 0 0,1 12-1 0 0,0-15-323 0 0,1-1 0 0 0,0 1 0 0 0,1 0 0 0 0,-1-1 0 0 0,1 1 0 0 0,0-1 0 0 0,1 0 0 0 0,-1 1 0 0 0,1-1 0 0 0,0 0 0 0 0,0 0 0 0 0,1 0 0 0 0,0 0 0 0 0,0 0 0 0 0,0-1 0 0 0,0 1 0 0 0,1-1 0 0 0,4 5 0 0 0,-6-8 31 0 0,0 1-1 0 0,0-1 1 0 0,0 0 0 0 0,1 0 0 0 0,-1 0 0 0 0,0 0 0 0 0,1-1-1 0 0,-1 1 1 0 0,0-1 0 0 0,1 1 0 0 0,-1-1 0 0 0,1 0 0 0 0,-1 0-1 0 0,1 0 1 0 0,-1 0 0 0 0,0 0 0 0 0,1-1 0 0 0,-1 1-1 0 0,1-1 1 0 0,-1 1 0 0 0,0-1 0 0 0,1 0 0 0 0,-1 0 0 0 0,0 0-1 0 0,0 0 1 0 0,0-1 0 0 0,0 1 0 0 0,3-3 0 0 0,4-2 183 0 0,0 0 1 0 0,-1-1 0 0 0,0 0-1 0 0,14-16 1 0 0,-18 19-64 0 0,-1 0 0 0 0,1 0 0 0 0,-1 0 1 0 0,0 0-1 0 0,0 0 0 0 0,-1-1 0 0 0,1 1 0 0 0,-1-1 0 0 0,0 0 1 0 0,0 0-1 0 0,0 1 0 0 0,-1-1 0 0 0,0-1 0 0 0,0 1 1 0 0,0 0-1 0 0,0 0 0 0 0,-1 0 0 0 0,0-7 0 0 0,-1 11-251 0 0,1 0-1 0 0,-1-1 0 0 0,1 1 0 0 0,-1 0 0 0 0,0 0 1 0 0,1 0-1 0 0,-1 0 0 0 0,0 0 0 0 0,0 0 0 0 0,0 0 0 0 0,0 0 1 0 0,0 0-1 0 0,0 0 0 0 0,0 1 0 0 0,0-1 0 0 0,0 0 1 0 0,0 1-1 0 0,0-1 0 0 0,0 1 0 0 0,-1-1 0 0 0,1 1 0 0 0,0-1 1 0 0,0 1-1 0 0,0 0 0 0 0,-1 0 0 0 0,1 0 0 0 0,0-1 1 0 0,-1 1-1 0 0,1 0 0 0 0,-2 1 0 0 0,-35 4-3066 0 0,10 12 961 0 0,-100 82-3153 0 0,85-63 2139 0 0</inkml:trace>
-</inkml:ink>
-</file>
-
-<file path=ppt/ink/ink145.xml><?xml version="1.0" encoding="utf-8"?>
-<inkml:ink xmlns:inkml="http://www.w3.org/2003/InkML">
-  <inkml:definitions>
-    <inkml:context xml:id="ctx0">
-      <inkml:inkSource xml:id="inkSrc0">
-        <inkml:traceFormat>
-          <inkml:channel name="X" type="integer" min="-2.14748E9" max="2.14748E9" units="cm"/>
-          <inkml:channel name="Y" type="integer" min="-2.14748E9" max="2.14748E9" units="cm"/>
-          <inkml:channel name="F" type="integer" max="32767" units="dev"/>
-          <inkml:channel name="OA" type="integer" max="360" units="deg"/>
-          <inkml:channel name="OE" type="integer" max="90" units="deg"/>
-        </inkml:traceFormat>
-        <inkml:channelProperties>
-          <inkml:channelProperty channel="X" name="resolution" value="1000" units="1/cm"/>
-          <inkml:channelProperty channel="Y" name="resolution" value="1000" units="1/cm"/>
-          <inkml:channelProperty channel="F" name="resolution" value="0" units="1/dev"/>
-          <inkml:channelProperty channel="OA" name="resolution" value="1000" units="1/deg"/>
-          <inkml:channelProperty channel="OE" name="resolution" value="1000" units="1/deg"/>
-        </inkml:channelProperties>
-      </inkml:inkSource>
-      <inkml:timestamp xml:id="ts0" timeString="2025-04-28T15:56:57.504"/>
-    </inkml:context>
-    <inkml:brush xml:id="br0">
-      <inkml:brushProperty name="width" value="0.05" units="cm"/>
-      <inkml:brushProperty name="height" value="0.05" units="cm"/>
-    </inkml:brush>
-  </inkml:definitions>
-  <inkml:trace contextRef="#ctx0" brushRef="#br0">310 3 1188 0 0,'0'0'4331'0'0,"-10"-3"910"0"0,-13 203-1894 0 0,-62 243 0 0 0,33-180-1825 0 0,-26 368 0 0 0,48-408-594 0 0,4-51 110 0 0,24-159-962 0 0,-1 15-1680 0 0,3-11-2351 0 0,16-43-4974 0 0,-15 25 8718 0 0,6-35-1985 0 0,-5-7-721 0 0</inkml:trace>
-</inkml:ink>
-</file>
-
-<file path=ppt/ink/ink146.xml><?xml version="1.0" encoding="utf-8"?>
-<inkml:ink xmlns:inkml="http://www.w3.org/2003/InkML">
-  <inkml:definitions>
-    <inkml:context xml:id="ctx0">
-      <inkml:inkSource xml:id="inkSrc0">
-        <inkml:traceFormat>
-          <inkml:channel name="X" type="integer" min="-2.14748E9" max="2.14748E9" units="cm"/>
-          <inkml:channel name="Y" type="integer" min="-2.14748E9" max="2.14748E9" units="cm"/>
-          <inkml:channel name="F" type="integer" max="32767" units="dev"/>
-          <inkml:channel name="OA" type="integer" max="360" units="deg"/>
-          <inkml:channel name="OE" type="integer" max="90" units="deg"/>
-        </inkml:traceFormat>
-        <inkml:channelProperties>
-          <inkml:channelProperty channel="X" name="resolution" value="1000" units="1/cm"/>
-          <inkml:channelProperty channel="Y" name="resolution" value="1000" units="1/cm"/>
-          <inkml:channelProperty channel="F" name="resolution" value="0" units="1/dev"/>
-          <inkml:channelProperty channel="OA" name="resolution" value="1000" units="1/deg"/>
-          <inkml:channelProperty channel="OE" name="resolution" value="1000" units="1/deg"/>
-        </inkml:channelProperties>
-      </inkml:inkSource>
-      <inkml:timestamp xml:id="ts0" timeString="2025-04-28T15:56:58.158"/>
-    </inkml:context>
-    <inkml:brush xml:id="br0">
-      <inkml:brushProperty name="width" value="0.05" units="cm"/>
-      <inkml:brushProperty name="height" value="0.05" units="cm"/>
-    </inkml:brush>
-  </inkml:definitions>
-  <inkml:trace contextRef="#ctx0" brushRef="#br0">63 0 5288 0 0,'0'0'8935'0'0,"5"32"-7500"0"0,13 997 1931 0 0,-62-205-1467 0 0,42-708-1759 0 0,0-3-354 0 0,-2-40-3627 0 0,2-90-2897 0 0,-7-8 4663 0 0,2 5 649 0 0,-8-34-2615 0 0</inkml:trace>
-</inkml:ink>
-</file>
-
-<file path=ppt/ink/ink147.xml><?xml version="1.0" encoding="utf-8"?>
-<inkml:ink xmlns:inkml="http://www.w3.org/2003/InkML">
-  <inkml:definitions>
-    <inkml:context xml:id="ctx0">
-      <inkml:inkSource xml:id="inkSrc0">
-        <inkml:traceFormat>
-          <inkml:channel name="X" type="integer" min="-2.14748E9" max="2.14748E9" units="cm"/>
-          <inkml:channel name="Y" type="integer" min="-2.14748E9" max="2.14748E9" units="cm"/>
-          <inkml:channel name="F" type="integer" max="32767" units="dev"/>
-          <inkml:channel name="OA" type="integer" max="360" units="deg"/>
-          <inkml:channel name="OE" type="integer" max="90" units="deg"/>
-        </inkml:traceFormat>
-        <inkml:channelProperties>
-          <inkml:channelProperty channel="X" name="resolution" value="1000" units="1/cm"/>
-          <inkml:channelProperty channel="Y" name="resolution" value="1000" units="1/cm"/>
-          <inkml:channelProperty channel="F" name="resolution" value="0" units="1/dev"/>
-          <inkml:channelProperty channel="OA" name="resolution" value="1000" units="1/deg"/>
-          <inkml:channelProperty channel="OE" name="resolution" value="1000" units="1/deg"/>
-        </inkml:channelProperties>
-      </inkml:inkSource>
-      <inkml:timestamp xml:id="ts0" timeString="2025-04-28T15:56:58.956"/>
-    </inkml:context>
-    <inkml:brush xml:id="br0">
-      <inkml:brushProperty name="width" value="0.05" units="cm"/>
-      <inkml:brushProperty name="height" value="0.05" units="cm"/>
-    </inkml:brush>
-  </inkml:definitions>
-  <inkml:trace contextRef="#ctx0" brushRef="#br0">1 1 2008 0 0,'13'10'10286'0'0,"16"-3"-7367"0"0,37 1-3606 0 0,-54-7 2070 0 0,255 9 1353 0 0,-68-4-2284 0 0,959-8 775 0 0,-929 0-745 0 0,49-5 495 0 0,622-15 725 0 0,-862 24-2085 0 0,12 3-4869 0 0,-37 3-8 0 0,-9 7 3428 0 0,-5-14 1085 0 0,1 0 618 0 0,-1 0 0 0 0,1 0 0 0 0,-1-1 0 0 0,0 1 0 0 0,1 0 0 0 0,-1 0 0 0 0,0-1 0 0 0,0 1 0 0 0,1-1 0 0 0,-1 1 1 0 0,0-1-1 0 0,0 1 0 0 0,0-1 0 0 0,0 1 0 0 0,0-1 0 0 0,0 0 0 0 0,0 1 0 0 0,0-1 0 0 0,0 0 0 0 0,0 0 0 0 0,0 0 0 0 0,1 0 1 0 0,-3 0-1 0 0,-42 4-4060 0 0</inkml:trace>
-</inkml:ink>
-</file>
-
-<file path=ppt/ink/ink148.xml><?xml version="1.0" encoding="utf-8"?>
-<inkml:ink xmlns:inkml="http://www.w3.org/2003/InkML">
-  <inkml:definitions>
-    <inkml:context xml:id="ctx0">
-      <inkml:inkSource xml:id="inkSrc0">
-        <inkml:traceFormat>
-          <inkml:channel name="X" type="integer" min="-2.14748E9" max="2.14748E9" units="cm"/>
-          <inkml:channel name="Y" type="integer" min="-2.14748E9" max="2.14748E9" units="cm"/>
-          <inkml:channel name="F" type="integer" max="32767" units="dev"/>
-          <inkml:channel name="OA" type="integer" max="360" units="deg"/>
-          <inkml:channel name="OE" type="integer" max="90" units="deg"/>
-        </inkml:traceFormat>
-        <inkml:channelProperties>
-          <inkml:channelProperty channel="X" name="resolution" value="1000" units="1/cm"/>
-          <inkml:channelProperty channel="Y" name="resolution" value="1000" units="1/cm"/>
-          <inkml:channelProperty channel="F" name="resolution" value="0" units="1/dev"/>
-          <inkml:channelProperty channel="OA" name="resolution" value="1000" units="1/deg"/>
-          <inkml:channelProperty channel="OE" name="resolution" value="1000" units="1/deg"/>
-        </inkml:channelProperties>
-      </inkml:inkSource>
-      <inkml:timestamp xml:id="ts0" timeString="2025-04-28T15:56:59.732"/>
-    </inkml:context>
-    <inkml:brush xml:id="br0">
-      <inkml:brushProperty name="width" value="0.05" units="cm"/>
-      <inkml:brushProperty name="height" value="0.05" units="cm"/>
-    </inkml:brush>
-  </inkml:definitions>
-  <inkml:trace contextRef="#ctx0" brushRef="#br0">2 127 6009 0 0,'0'0'5791'0'0,"0"0"-5600"0"0,0-1-1 0 0,0 1 1 0 0,0 0 0 0 0,-1-1 0 0 0,1 1-1 0 0,0 0 1 0 0,0-1 0 0 0,0 1 0 0 0,0-1-1 0 0,-1 1 1 0 0,1-1 0 0 0,0 1 0 0 0,0 0-1 0 0,0-1 1 0 0,0 1 0 0 0,0-1 0 0 0,0 1-1 0 0,0-1 1 0 0,0 1 0 0 0,1 0 0 0 0,-1-1-1 0 0,0 1 1 0 0,0-1 0 0 0,0 1 0 0 0,0 0-1 0 0,0-1 1 0 0,1 0 0 0 0,72-9 986 0 0,122-4-1 0 0,-6 3-1114 0 0,902-36 1949 0 0,-1065 47-1991 0 0,130-5 162 0 0,110 3 141 0 0,619 8 974 0 0,-630-11-633 0 0,502-7-285 0 0,-688 7-5475 0 0,-28 0-6496 0 0,-72 0 6576 0 0</inkml:trace>
-</inkml:ink>
-</file>
-
-<file path=ppt/ink/ink149.xml><?xml version="1.0" encoding="utf-8"?>
-<inkml:ink xmlns:inkml="http://www.w3.org/2003/InkML">
-  <inkml:definitions>
-    <inkml:context xml:id="ctx0">
-      <inkml:inkSource xml:id="inkSrc0">
-        <inkml:traceFormat>
-          <inkml:channel name="X" type="integer" min="-2.14748E9" max="2.14748E9" units="cm"/>
-          <inkml:channel name="Y" type="integer" min="-2.14748E9" max="2.14748E9" units="cm"/>
-          <inkml:channel name="F" type="integer" max="32767" units="dev"/>
-          <inkml:channel name="OA" type="integer" max="360" units="deg"/>
-          <inkml:channel name="OE" type="integer" max="90" units="deg"/>
-        </inkml:traceFormat>
-        <inkml:channelProperties>
-          <inkml:channelProperty channel="X" name="resolution" value="1000" units="1/cm"/>
-          <inkml:channelProperty channel="Y" name="resolution" value="1000" units="1/cm"/>
-          <inkml:channelProperty channel="F" name="resolution" value="0" units="1/dev"/>
-          <inkml:channelProperty channel="OA" name="resolution" value="1000" units="1/deg"/>
-          <inkml:channelProperty channel="OE" name="resolution" value="1000" units="1/deg"/>
-        </inkml:channelProperties>
-      </inkml:inkSource>
-      <inkml:timestamp xml:id="ts0" timeString="2025-04-28T15:57:00.512"/>
-    </inkml:context>
-    <inkml:brush xml:id="br0">
-      <inkml:brushProperty name="width" value="0.05" units="cm"/>
-      <inkml:brushProperty name="height" value="0.05" units="cm"/>
-    </inkml:brush>
-  </inkml:definitions>
-  <inkml:trace contextRef="#ctx0" brushRef="#br0">5 15 3052 0 0,'-1'-2'3305'0'0,"-2"-11"6632"0"0,31 30-9815 0 0,0 2-1 0 0,-1 0 1 0 0,-1 1-1 0 0,44 46 1 0 0,24 41-175 0 0,-40-34 95 0 0,-35-44-343 0 0,28 59-8383 0 0,-35-55 7575 0 0,-12-31 953 0 0,1 1 0 0 0,0-1 1 0 0,-1 0-1 0 0,0 1 0 0 0,1-1 1 0 0,-1 0-1 0 0,0 1 1 0 0,0-1-1 0 0,0 0 0 0 0,0 1 1 0 0,-2 3-1 0 0,-10 9-2045 0 0</inkml:trace>
 </inkml:ink>
 </file>
 
@@ -1846,301 +1380,6 @@
 </inkml:ink>
 </file>
 
-<file path=ppt/ink/ink150.xml><?xml version="1.0" encoding="utf-8"?>
-<inkml:ink xmlns:inkml="http://www.w3.org/2003/InkML">
-  <inkml:definitions>
-    <inkml:context xml:id="ctx0">
-      <inkml:inkSource xml:id="inkSrc0">
-        <inkml:traceFormat>
-          <inkml:channel name="X" type="integer" min="-2.14748E9" max="2.14748E9" units="cm"/>
-          <inkml:channel name="Y" type="integer" min="-2.14748E9" max="2.14748E9" units="cm"/>
-          <inkml:channel name="F" type="integer" max="32767" units="dev"/>
-          <inkml:channel name="OA" type="integer" max="360" units="deg"/>
-          <inkml:channel name="OE" type="integer" max="90" units="deg"/>
-        </inkml:traceFormat>
-        <inkml:channelProperties>
-          <inkml:channelProperty channel="X" name="resolution" value="1000" units="1/cm"/>
-          <inkml:channelProperty channel="Y" name="resolution" value="1000" units="1/cm"/>
-          <inkml:channelProperty channel="F" name="resolution" value="0" units="1/dev"/>
-          <inkml:channelProperty channel="OA" name="resolution" value="1000" units="1/deg"/>
-          <inkml:channelProperty channel="OE" name="resolution" value="1000" units="1/deg"/>
-        </inkml:channelProperties>
-      </inkml:inkSource>
-      <inkml:timestamp xml:id="ts0" timeString="2025-04-28T15:57:00.761"/>
-    </inkml:context>
-    <inkml:brush xml:id="br0">
-      <inkml:brushProperty name="width" value="0.05" units="cm"/>
-      <inkml:brushProperty name="height" value="0.05" units="cm"/>
-    </inkml:brush>
-  </inkml:definitions>
-  <inkml:trace contextRef="#ctx0" brushRef="#br0">1 286 6717 0 0,'0'0'6684'0'0,"20"-31"-1042"0"0,35-8-4094 0 0,3 3-3933 0 0,-4 3-2418 0 0,17-8 716 0 0,-48 28 2905 0 0,-1-1-1 0 0,35-27 1 0 0,-16 4-1859 0 0</inkml:trace>
-</inkml:ink>
-</file>
-
-<file path=ppt/ink/ink151.xml><?xml version="1.0" encoding="utf-8"?>
-<inkml:ink xmlns:inkml="http://www.w3.org/2003/InkML">
-  <inkml:definitions>
-    <inkml:context xml:id="ctx0">
-      <inkml:inkSource xml:id="inkSrc0">
-        <inkml:traceFormat>
-          <inkml:channel name="X" type="integer" min="-2.14748E9" max="2.14748E9" units="cm"/>
-          <inkml:channel name="Y" type="integer" min="-2.14748E9" max="2.14748E9" units="cm"/>
-          <inkml:channel name="F" type="integer" max="32767" units="dev"/>
-          <inkml:channel name="OA" type="integer" max="360" units="deg"/>
-          <inkml:channel name="OE" type="integer" max="90" units="deg"/>
-        </inkml:traceFormat>
-        <inkml:channelProperties>
-          <inkml:channelProperty channel="X" name="resolution" value="1000" units="1/cm"/>
-          <inkml:channelProperty channel="Y" name="resolution" value="1000" units="1/cm"/>
-          <inkml:channelProperty channel="F" name="resolution" value="0" units="1/dev"/>
-          <inkml:channelProperty channel="OA" name="resolution" value="1000" units="1/deg"/>
-          <inkml:channelProperty channel="OE" name="resolution" value="1000" units="1/deg"/>
-        </inkml:channelProperties>
-      </inkml:inkSource>
-      <inkml:timestamp xml:id="ts0" timeString="2025-04-28T15:57:04.687"/>
-    </inkml:context>
-    <inkml:brush xml:id="br0">
-      <inkml:brushProperty name="width" value="0.05" units="cm"/>
-      <inkml:brushProperty name="height" value="0.05" units="cm"/>
-    </inkml:brush>
-  </inkml:definitions>
-  <inkml:trace contextRef="#ctx0" brushRef="#br0">1 3 1728 0 0,'0'0'8632'0'0,"19"-3"-7426"0"0,-5 6-972 0 0,1 0 0 0 0,-1 1-1 0 0,0 0 1 0 0,-1 1-1 0 0,1 1 1 0 0,-1 0 0 0 0,18 12-1 0 0,84 66 1519 0 0,-82-57-3083 0 0,62 38 0 0 0,-77-55-94 0 0,-1 1 0 0 0,0 0 0 0 0,16 15-1 0 0,-19-15 174 0 0,-10-7-1592 0 0</inkml:trace>
-</inkml:ink>
-</file>
-
-<file path=ppt/ink/ink152.xml><?xml version="1.0" encoding="utf-8"?>
-<inkml:ink xmlns:inkml="http://www.w3.org/2003/InkML">
-  <inkml:definitions>
-    <inkml:context xml:id="ctx0">
-      <inkml:inkSource xml:id="inkSrc0">
-        <inkml:traceFormat>
-          <inkml:channel name="X" type="integer" min="-2.14748E9" max="2.14748E9" units="cm"/>
-          <inkml:channel name="Y" type="integer" min="-2.14748E9" max="2.14748E9" units="cm"/>
-          <inkml:channel name="F" type="integer" max="32767" units="dev"/>
-          <inkml:channel name="OA" type="integer" max="360" units="deg"/>
-          <inkml:channel name="OE" type="integer" max="90" units="deg"/>
-        </inkml:traceFormat>
-        <inkml:channelProperties>
-          <inkml:channelProperty channel="X" name="resolution" value="1000" units="1/cm"/>
-          <inkml:channelProperty channel="Y" name="resolution" value="1000" units="1/cm"/>
-          <inkml:channelProperty channel="F" name="resolution" value="0" units="1/dev"/>
-          <inkml:channelProperty channel="OA" name="resolution" value="1000" units="1/deg"/>
-          <inkml:channelProperty channel="OE" name="resolution" value="1000" units="1/deg"/>
-        </inkml:channelProperties>
-      </inkml:inkSource>
-      <inkml:timestamp xml:id="ts0" timeString="2025-04-28T15:57:04.984"/>
-    </inkml:context>
-    <inkml:brush xml:id="br0">
-      <inkml:brushProperty name="width" value="0.05" units="cm"/>
-      <inkml:brushProperty name="height" value="0.05" units="cm"/>
-    </inkml:brush>
-  </inkml:definitions>
-  <inkml:trace contextRef="#ctx0" brushRef="#br0">12 506 4828 0 0,'-1'-1'452'0'0,"0"1"0"0"0,1 0 0 0 0,-1-1 0 0 0,0 1 0 0 0,1-1 0 0 0,-1 1 0 0 0,0-1 0 0 0,1 1-1 0 0,-1-1 1 0 0,1 1 0 0 0,-1-1 0 0 0,1 0 0 0 0,-1 1 0 0 0,1-1 0 0 0,-1 0 0 0 0,1 1 0 0 0,0-1-1 0 0,-1 0 1 0 0,1 0 0 0 0,0 1 0 0 0,0-1 0 0 0,0 0 0 0 0,-1-1 0 0 0,11-14 3047 0 0,32-13-4545 0 0,-30 23 2018 0 0,73-48-611 0 0,44-36-697 0 0,-98 66-1283 0 0,-1-2-1 0 0,-1-1 0 0 0,-1-1 0 0 0,36-49 1 0 0,-33 27-1675 0 0,-30 48 3174 0 0,0 0 1 0 0,-1 0-1 0 0,1 0 0 0 0,0 0 0 0 0,0 0 1 0 0,-1 0-1 0 0,1-1 0 0 0,-1 1 0 0 0,0 0 0 0 0,0 0 1 0 0,0 0-1 0 0,0 0 0 0 0,0-1 0 0 0,0 1 1 0 0,0 0-1 0 0,-1 0 0 0 0,1 0 0 0 0,-1 0 0 0 0,1 0 1 0 0,-1 0-1 0 0,-1-3 0 0 0,0 4-77 0 0,1-1-1 0 0,-1 1 1 0 0,1 0 0 0 0,-1 0-1 0 0,1-1 1 0 0,-1 1-1 0 0,0 0 1 0 0,0 0-1 0 0,1 1 1 0 0,-1-1 0 0 0,-3-1-1 0 0</inkml:trace>
-</inkml:ink>
-</file>
-
-<file path=ppt/ink/ink153.xml><?xml version="1.0" encoding="utf-8"?>
-<inkml:ink xmlns:inkml="http://www.w3.org/2003/InkML">
-  <inkml:definitions>
-    <inkml:context xml:id="ctx0">
-      <inkml:inkSource xml:id="inkSrc0">
-        <inkml:traceFormat>
-          <inkml:channel name="X" type="integer" min="-2.14748E9" max="2.14748E9" units="cm"/>
-          <inkml:channel name="Y" type="integer" min="-2.14748E9" max="2.14748E9" units="cm"/>
-          <inkml:channel name="F" type="integer" max="32767" units="dev"/>
-          <inkml:channel name="OA" type="integer" max="360" units="deg"/>
-          <inkml:channel name="OE" type="integer" max="90" units="deg"/>
-        </inkml:traceFormat>
-        <inkml:channelProperties>
-          <inkml:channelProperty channel="X" name="resolution" value="1000" units="1/cm"/>
-          <inkml:channelProperty channel="Y" name="resolution" value="1000" units="1/cm"/>
-          <inkml:channelProperty channel="F" name="resolution" value="0" units="1/dev"/>
-          <inkml:channelProperty channel="OA" name="resolution" value="1000" units="1/deg"/>
-          <inkml:channelProperty channel="OE" name="resolution" value="1000" units="1/deg"/>
-        </inkml:channelProperties>
-      </inkml:inkSource>
-      <inkml:timestamp xml:id="ts0" timeString="2025-04-28T15:57:06.036"/>
-    </inkml:context>
-    <inkml:brush xml:id="br0">
-      <inkml:brushProperty name="width" value="0.05" units="cm"/>
-      <inkml:brushProperty name="height" value="0.05" units="cm"/>
-    </inkml:brush>
-  </inkml:definitions>
-  <inkml:trace contextRef="#ctx0" brushRef="#br0">1 107 1068 0 0,'2'3'945'0'0,"0"0"-1"0"0,0-1 1 0 0,0 1 0 0 0,1-1-1 0 0,-1 1 1 0 0,1-1 0 0 0,-1 0-1 0 0,1 0 1 0 0,3 2-1 0 0,50 27 2218 0 0,-43-25-2934 0 0,1-1-1 0 0,-1-1 1 0 0,29 6 0 0 0,-36-9 35 0 0,0 0-1 0 0,0-1 1 0 0,1 0 0 0 0,-1 0 0 0 0,0 0 0 0 0,7-2 0 0 0,-10 2-187 0 0,-1-1 0 0 0,1 1-1 0 0,-1-1 1 0 0,0 0 0 0 0,1 0 0 0 0,-1 0 0 0 0,1 0 0 0 0,-1 0 0 0 0,0 0-1 0 0,0-1 1 0 0,0 1 0 0 0,0-1 0 0 0,0 1 0 0 0,0-1 0 0 0,0 0 0 0 0,0 0 0 0 0,-1 0-1 0 0,1 0 1 0 0,-1 0 0 0 0,2-3 0 0 0,-2 2-52 0 0,0 0-1 0 0,-1 0 1 0 0,1 0 0 0 0,-1 0 0 0 0,1 0-1 0 0,-1 0 1 0 0,0 0 0 0 0,0 0 0 0 0,-1-1-1 0 0,1 1 1 0 0,-1 0 0 0 0,1 0 0 0 0,-1 0-1 0 0,0 0 1 0 0,0 0 0 0 0,0 1 0 0 0,-1-1-1 0 0,-1-3 1 0 0,1 3-71 0 0,-4-11 432 0 0,-2 0 1 0 0,0 1 0 0 0,-13-18-1 0 0,-5 10-3309 0 0,25 20 2754 0 0,0 1 0 0 0,1 0 0 0 0,-1 0 0 0 0,0 0 0 0 0,0-1 0 0 0,0 1 0 0 0,0 0 0 0 0,1 0 0 0 0,-1 0 0 0 0,0 0 0 0 0,0 1 0 0 0,0-1 0 0 0,0 0 0 0 0,1 0 0 0 0,-1 0 0 0 0,0 1 0 0 0,0-1 0 0 0,0 0 0 0 0,1 1 0 0 0,-1-1 0 0 0,0 1 0 0 0,0-1 0 0 0,1 1 0 0 0,-1-1 0 0 0,0 1 0 0 0,1-1 0 0 0,-1 1 0 0 0,0 1 0 0 0,-24 34-2403 0 0,-53 119-1688 0 0,51-92 1711 0 0</inkml:trace>
-</inkml:ink>
-</file>
-
-<file path=ppt/ink/ink154.xml><?xml version="1.0" encoding="utf-8"?>
-<inkml:ink xmlns:inkml="http://www.w3.org/2003/InkML">
-  <inkml:definitions>
-    <inkml:context xml:id="ctx0">
-      <inkml:inkSource xml:id="inkSrc0">
-        <inkml:traceFormat>
-          <inkml:channel name="X" type="integer" min="-2.14748E9" max="2.14748E9" units="cm"/>
-          <inkml:channel name="Y" type="integer" min="-2.14748E9" max="2.14748E9" units="cm"/>
-          <inkml:channel name="F" type="integer" max="32767" units="dev"/>
-          <inkml:channel name="OA" type="integer" max="360" units="deg"/>
-          <inkml:channel name="OE" type="integer" max="90" units="deg"/>
-        </inkml:traceFormat>
-        <inkml:channelProperties>
-          <inkml:channelProperty channel="X" name="resolution" value="1000" units="1/cm"/>
-          <inkml:channelProperty channel="Y" name="resolution" value="1000" units="1/cm"/>
-          <inkml:channelProperty channel="F" name="resolution" value="0" units="1/dev"/>
-          <inkml:channelProperty channel="OA" name="resolution" value="1000" units="1/deg"/>
-          <inkml:channelProperty channel="OE" name="resolution" value="1000" units="1/deg"/>
-        </inkml:channelProperties>
-      </inkml:inkSource>
-      <inkml:timestamp xml:id="ts0" timeString="2025-04-28T15:57:07.076"/>
-    </inkml:context>
-    <inkml:brush xml:id="br0">
-      <inkml:brushProperty name="width" value="0.05" units="cm"/>
-      <inkml:brushProperty name="height" value="0.05" units="cm"/>
-    </inkml:brush>
-  </inkml:definitions>
-  <inkml:trace contextRef="#ctx0" brushRef="#br0">222 18 1944 0 0,'0'0'7832'0'0,"-23"7"-8593"0"0,19 1 991 0 0,1 0 1 0 0,0 0-1 0 0,0 1 1 0 0,1 0-1 0 0,0-1 1 0 0,1 1 0 0 0,0 0-1 0 0,0 0 1 0 0,1 0-1 0 0,0 0 1 0 0,1 0-1 0 0,-1-1 1 0 0,2 1-1 0 0,-1 0 1 0 0,5 12-1 0 0,-5-17-153 0 0,1 1 0 0 0,-1-1-1 0 0,1 0 1 0 0,-1 0 0 0 0,1 0 0 0 0,1-1-1 0 0,-1 1 1 0 0,0 0 0 0 0,1-1-1 0 0,0 0 1 0 0,0 1 0 0 0,0-1-1 0 0,0 0 1 0 0,0 0 0 0 0,1-1 0 0 0,-1 1-1 0 0,1-1 1 0 0,0 0 0 0 0,0 0-1 0 0,0 0 1 0 0,0 0 0 0 0,0-1 0 0 0,0 1-1 0 0,0-1 1 0 0,0 0 0 0 0,1 0-1 0 0,-1-1 1 0 0,0 1 0 0 0,1-1 0 0 0,-1 0-1 0 0,0 0 1 0 0,1-1 0 0 0,7-1-1 0 0,6-1 96 0 0,-1-2 0 0 0,0 0 0 0 0,0-1 0 0 0,0-1 0 0 0,0-1 0 0 0,19-12 0 0 0,-29 16-130 0 0,-1 1 1 0 0,0-2 0 0 0,0 1 0 0 0,0-1 0 0 0,0 0 0 0 0,-1 0-1 0 0,1-1 1 0 0,-2 0 0 0 0,1 1 0 0 0,0-2 0 0 0,-1 1 0 0 0,0 0-1 0 0,-1-1 1 0 0,0 0 0 0 0,0 0 0 0 0,0 0 0 0 0,2-11 0 0 0,-4 15-76 0 0,-1 1 1 0 0,1-1 0 0 0,-1 0-1 0 0,0 1 1 0 0,0-1-1 0 0,0 0 1 0 0,0 1 0 0 0,-1-1-1 0 0,1 0 1 0 0,-1 1 0 0 0,0-1-1 0 0,0 0 1 0 0,0 1 0 0 0,0-1-1 0 0,0 1 1 0 0,0 0 0 0 0,0-1-1 0 0,-1 1 1 0 0,0 0 0 0 0,-2-3-1 0 0,1 2-168 0 0,0 1 0 0 0,-1-1-1 0 0,1 1 1 0 0,-1 0 0 0 0,1 0-1 0 0,-1 0 1 0 0,0 0 0 0 0,0 1 0 0 0,0 0-1 0 0,0 0 1 0 0,-8-2 0 0 0,-2 2-422 0 0,1 0 1 0 0,-1 1 0 0 0,1 0-1 0 0,-1 1 1 0 0,1 0-1 0 0,-1 1 1 0 0,-14 5 0 0 0,-35 17-729 0 0,-159 85-1961 0 0,162-77 1491 0 0</inkml:trace>
-</inkml:ink>
-</file>
-
-<file path=ppt/ink/ink155.xml><?xml version="1.0" encoding="utf-8"?>
-<inkml:ink xmlns:inkml="http://www.w3.org/2003/InkML">
-  <inkml:definitions>
-    <inkml:context xml:id="ctx0">
-      <inkml:inkSource xml:id="inkSrc0">
-        <inkml:traceFormat>
-          <inkml:channel name="X" type="integer" min="-2.14748E9" max="2.14748E9" units="cm"/>
-          <inkml:channel name="Y" type="integer" min="-2.14748E9" max="2.14748E9" units="cm"/>
-          <inkml:channel name="F" type="integer" max="32767" units="dev"/>
-        </inkml:traceFormat>
-        <inkml:channelProperties>
-          <inkml:channelProperty channel="X" name="resolution" value="1000" units="1/cm"/>
-          <inkml:channelProperty channel="Y" name="resolution" value="1000" units="1/cm"/>
-          <inkml:channelProperty channel="F" name="resolution" value="0" units="1/dev"/>
-        </inkml:channelProperties>
-      </inkml:inkSource>
-      <inkml:timestamp xml:id="ts0" timeString="2025-12-01T18:02:24.523"/>
-    </inkml:context>
-    <inkml:brush xml:id="br0">
-      <inkml:brushProperty name="width" value="0.1" units="cm"/>
-      <inkml:brushProperty name="height" value="0.1" units="cm"/>
-      <inkml:brushProperty name="color" value="#E71224"/>
-    </inkml:brush>
-  </inkml:definitions>
-  <inkml:trace contextRef="#ctx0" brushRef="#br0">117 9 5017,'-6'-2'-35,"-10"-4"3627,15 5-3436,0 1 0,1 1 1,-1-1-1,1 0 0,-1 0 0,0 0 1,1 0-1,-1 0 0,0 1 1,1-1-1,-1 0 0,1 0 0,-1 0 1,1 1-1,-1-1 0,0 1 1,1-1-1,0 1 0,-1-1 0,1 0 1,-1 1-1,1-1 0,-1 1 1,1 0-1,0-1 0,0 1 0,-8 13 530,1 1 0,1-1-1,0 1 1,2 0 0,-1 0-1,-2 20 1,-5 98 613,9-95-1082,-19 285-1596,21-317-496</inkml:trace>
-</inkml:ink>
-</file>
-
-<file path=ppt/ink/ink156.xml><?xml version="1.0" encoding="utf-8"?>
-<inkml:ink xmlns:inkml="http://www.w3.org/2003/InkML">
-  <inkml:definitions>
-    <inkml:context xml:id="ctx0">
-      <inkml:inkSource xml:id="inkSrc0">
-        <inkml:traceFormat>
-          <inkml:channel name="X" type="integer" min="-2.14748E9" max="2.14748E9" units="cm"/>
-          <inkml:channel name="Y" type="integer" min="-2.14748E9" max="2.14748E9" units="cm"/>
-          <inkml:channel name="F" type="integer" max="32767" units="dev"/>
-        </inkml:traceFormat>
-        <inkml:channelProperties>
-          <inkml:channelProperty channel="X" name="resolution" value="1000" units="1/cm"/>
-          <inkml:channelProperty channel="Y" name="resolution" value="1000" units="1/cm"/>
-          <inkml:channelProperty channel="F" name="resolution" value="0" units="1/dev"/>
-        </inkml:channelProperties>
-      </inkml:inkSource>
-      <inkml:timestamp xml:id="ts0" timeString="2025-12-01T18:02:24.524"/>
-    </inkml:context>
-    <inkml:brush xml:id="br0">
-      <inkml:brushProperty name="width" value="0.1" units="cm"/>
-      <inkml:brushProperty name="height" value="0.1" units="cm"/>
-      <inkml:brushProperty name="color" value="#E71224"/>
-    </inkml:brush>
-  </inkml:definitions>
-  <inkml:trace contextRef="#ctx0" brushRef="#br0">0 76 6481,'0'-11'1529,"7"3"1535,6-1-255,9 0-1073,2 0-407,3 0-241,3 0-256,1 2-368,-2 4-96,0 2-216,-1 1-136,-6 2-624,-3 0-704,-4 4-3849,-1-1 2448</inkml:trace>
-</inkml:ink>
-</file>
-
-<file path=ppt/ink/ink157.xml><?xml version="1.0" encoding="utf-8"?>
-<inkml:ink xmlns:inkml="http://www.w3.org/2003/InkML">
-  <inkml:definitions>
-    <inkml:context xml:id="ctx0">
-      <inkml:inkSource xml:id="inkSrc0">
-        <inkml:traceFormat>
-          <inkml:channel name="X" type="integer" min="-2.14748E9" max="2.14748E9" units="cm"/>
-          <inkml:channel name="Y" type="integer" min="-2.14748E9" max="2.14748E9" units="cm"/>
-          <inkml:channel name="F" type="integer" max="32767" units="dev"/>
-        </inkml:traceFormat>
-        <inkml:channelProperties>
-          <inkml:channelProperty channel="X" name="resolution" value="1000" units="1/cm"/>
-          <inkml:channelProperty channel="Y" name="resolution" value="1000" units="1/cm"/>
-          <inkml:channelProperty channel="F" name="resolution" value="0" units="1/dev"/>
-        </inkml:channelProperties>
-      </inkml:inkSource>
-      <inkml:timestamp xml:id="ts0" timeString="2025-12-01T18:02:24.525"/>
-    </inkml:context>
-    <inkml:brush xml:id="br0">
-      <inkml:brushProperty name="width" value="0.1" units="cm"/>
-      <inkml:brushProperty name="height" value="0.1" units="cm"/>
-      <inkml:brushProperty name="color" value="#E71224"/>
-    </inkml:brush>
-  </inkml:definitions>
-  <inkml:trace contextRef="#ctx0" brushRef="#br0">24 1 7210,'-1'0'126,"0"1"0,0 0 0,0-1 0,0 0 0,0 1 1,0 0-1,0 0 0,0-1 0,0 1 0,0 0 0,0 0 1,1 0-1,-1 0 0,0 0 0,0 0 0,1 0 1,0 0-1,-1 0 0,1 1 0,-1-2 0,1 2 0,-1-1 1,1 2-1,-3 31 2589,2-27-2214,0 22 845,1 1 0,6 46 0,-4-64-1228,0-1 0,0 1 1,2 0-1,0-1 0,-1-1 1,2 2-1,0-2 0,1 1 0,8 12 1,-12-21-104,-1-1 0,0 1 1,1-1-1,-1 1 0,1-1 1,-1 0-1,1 1 0,-1-2 1,1 2-1,-1-1 0,1-1 1,0 2-1,0-1 0,0-1 1,-1 0-1,5 2 1,-4-2-4,-1 0 1,1 0 0,-1-1-1,1 1 1,-1 0 0,1-1-1,-1 1 1,0 0 0,1-1-1,-1 0 1,1 0 0,-2 1-1,2-1 1,-1 0 0,0 0 0,1 0-1,-1 0 1,0 0 0,0 0-1,0-1 1,-1 2 0,1-2-1,1-2 1,4-4 10,-2-1 0,1 0 0,-2-1 0,0 1 0,5-19 0,5-52-1210,-6 28-2285,-4 39 2140</inkml:trace>
-</inkml:ink>
-</file>
-
-<file path=ppt/ink/ink158.xml><?xml version="1.0" encoding="utf-8"?>
-<inkml:ink xmlns:inkml="http://www.w3.org/2003/InkML">
-  <inkml:definitions>
-    <inkml:context xml:id="ctx0">
-      <inkml:inkSource xml:id="inkSrc0">
-        <inkml:traceFormat>
-          <inkml:channel name="X" type="integer" min="-2.14748E9" max="2.14748E9" units="cm"/>
-          <inkml:channel name="Y" type="integer" min="-2.14748E9" max="2.14748E9" units="cm"/>
-          <inkml:channel name="F" type="integer" max="32767" units="dev"/>
-        </inkml:traceFormat>
-        <inkml:channelProperties>
-          <inkml:channelProperty channel="X" name="resolution" value="1000" units="1/cm"/>
-          <inkml:channelProperty channel="Y" name="resolution" value="1000" units="1/cm"/>
-          <inkml:channelProperty channel="F" name="resolution" value="0" units="1/dev"/>
-        </inkml:channelProperties>
-      </inkml:inkSource>
-      <inkml:timestamp xml:id="ts0" timeString="2025-12-01T18:02:24.526"/>
-    </inkml:context>
-    <inkml:brush xml:id="br0">
-      <inkml:brushProperty name="width" value="0.1" units="cm"/>
-      <inkml:brushProperty name="height" value="0.1" units="cm"/>
-      <inkml:brushProperty name="color" value="#E71224"/>
-    </inkml:brush>
-  </inkml:definitions>
-  <inkml:trace contextRef="#ctx0" brushRef="#br0">72 134 5401,'-4'3'525,"1"0"-1,0 0 1,1 0 0,-1 0-1,0 0 1,0 0-1,1 0 1,0 1 0,0 0-1,0-1 1,1 1 0,-3 7-1,-1 0 282,-1 1-204,1 3 0,0-2 0,0 2 0,2-1 0,0 0 0,-2 20 0,5-30-514,0 0 0,0 0 0,0-1-1,1 1 1,0 1 0,-1-2 0,1 1-1,0 0 1,0-1 0,1 1 0,-1-1-1,4 6 1,-3-7-60,0 1 0,0-1 0,1 0 0,-1 1 0,0-1 0,1 0 0,0 0 0,0-1 0,-1 1 0,1-1 0,0 1 0,0-1 0,0 0 0,0 0-1,1 0 1,-1-1 0,4 2 0,-1-2-13,1 1 0,0-1 0,-1 0 0,1-1 0,-1 0 0,1 0 0,-1-1 0,1 1 0,-1-2 0,1 1 0,-1 0 0,0-1 0,0 0-1,0 0 1,-1-1 0,1 0 0,4-4 0,3-3 11,-2 1-1,1-1 0,-2-2 1,1 1-1,-2 0 1,9-16-1,-9 14-1,-2 0 1,0-1-1,0 0 0,-1-1 1,3-16-1,-7 25-12,0 1-1,-2-1 0,2 0 1,-1 0-1,-1 1 1,0-1-1,0 0 1,-1 0-1,0 0 0,0 0 1,-1 1-1,1-1 1,-2 0-1,-3-9 1,4 13-8,1 0 0,-1 0 0,0 0 0,0 0 1,0 1-1,0 0 0,0-1 0,-1 1 1,0-1-1,1 2 0,-1-1 0,1-1 1,-1 2-1,0-1 0,0 1 0,0-1 1,-1 2-1,1-2 0,0 1 0,0 1 1,-1-1-1,1 0 0,-6 1 0,3 0 5,0 1 0,1 0-1,-1-1 1,0 2 0,0-1 0,1 1-1,0 0 1,0 0 0,-1 1 0,1 0-1,0 0 1,0 0 0,-5 4 0,-5 5 134,2 1 0,-1 0 1,1 1-1,1 0 0,-13 20 1,17-22-9,1 0 0,0 1 0,1-1 0,0 1 1,1 1-1,1-1 0,-6 24 0,9-30-113,1-1 0,0 1 0,0 0 0,0-1 1,0 0-1,1 1 0,0 0 0,0-1 0,1 1 0,-1-1 0,2 0 0,0 0 0,-1 0 0,6 8 0,-5-9-21,0 0-1,1-1 1,0 0 0,-1 1 0,1-1-1,1-1 1,-1 0 0,0 1 0,1-1-1,0 0 1,-1-1 0,2 1 0,-1 0-1,0-2 1,0 1 0,1 0 0,7 1-1,-4-2 9,1-1 0,-1 0 0,1 0-1,0 0 1,0-2 0,-1 1-1,0-1 1,0 0 0,0-1 0,1 0-1,-1-1 1,0 0 0,-1 0 0,0-1-1,9-5 1,-5 1 22,1 0 1,-2 0-1,0-1 1,0-1-1,-1 0 1,0 0-1,0-1 1,14-25-1,-20 30-8,-1 0 0,0 0-1,0-1 1,2-10 0,-5 16-15,1-1 0,-1 1 0,1-1 0,-1 1 0,0 0 0,0-1 0,-1 1 0,0-4 0,1 5-4,-1 1-1,1-1 0,0-1 1,0 2-1,-1-1 0,1 0 1,-1 0-1,0 1 0,1-1 1,0 0-1,-1 1 0,0-1 1,0 1-1,1-1 0,-1 0 1,1 1-1,-2-1 0,2 1 1,-1 0-1,0-1 0,0 1 1,0-1-1,-1 1 3,0 0-1,1-1 1,-2 1-1,2 0 1,-1 1 0,0-1-1,0 0 1,1 1 0,-1-1-1,0 1 1,1-1-1,-1 0 1,1 1 0,-1 0-1,1 0 1,-1 0 0,1 0-1,-2 1 1,-3 3 32,0-1 0,1 1 0,-6 7 0,5-5 23,0-1 0,2 2 0,-1-1 0,1 1 0,-1-1 0,2 2 1,0-1-1,0 0 0,0 1 0,-1 10 0,2-15-46,2 0-1,0 0 1,-1 0 0,1 1 0,0-2-1,0 2 1,1-1 0,-1-1-1,1 2 1,0-1 0,0-1 0,0 1-1,1 1 1,-1-2 0,1 0-1,0 1 1,-1 0 0,2 0 0,-1-1-1,1 0 1,-1 0 0,1 0-1,0 0 1,5 4 0,-1-3-11,-1-1 1,0 0-1,1 0 0,-1-1 1,1 1-1,0-1 1,-1-1-1,2 1 0,-1-1 1,0-1-1,-1 1 0,14-2 1,-5 1 0,0-3 1,0 1-1,0-1 0,28-10 1,-28 7-10,0 0 0,-1-1 0,0-1 0,0-1 0,-1 0 0,-1 0 0,20-19 0,-25 21 7,-1 1-1,0 0 1,-1-1 0,0-1-1,1 1 1,-2-1 0,1 1-1,-2-2 1,1 1 0,-1 0-1,0 0 1,0-1 0,-1 0-1,-1 1 1,2-11 0,-3 18-2,0 1 0,0-1 1,0 0-1,0 0 1,0 0-1,0 0 1,0 0-1,0 1 1,0-1-1,0 0 1,-1 0-1,1 0 1,-1 0-1,0-1 1,1 2-2,0 0 0,0 0 1,0-1-1,-1 1 1,1 0-1,0 0 0,-1 0 1,1 0-1,0 0 1,-1-1-1,1 1 0,0 0 1,0 0-1,0 0 1,-1 0-1,1 0 0,0 0 1,-1 0-1,1 0 1,0 0-1,-1 1 0,1-1 1,0 0-1,0 0 1,0 0-1,-1 0 1,1 0-1,0 1 0,-1-1 1,0 1 6,-2 1 0,2-1 0,-1 1 0,1-1-1,-1 1 1,1 0 0,-1 0 0,1 0 0,0-1 0,-1 4 0,-2 4 58,1-1 0,1 1 0,-1 0 0,2 0 0,-1 0 0,1 0 0,1 0 0,0 17 0,1-12-5,1 0 0,-1 0 0,2 0 0,1-1 1,4 15-1,-6-23-94,0-1 0,0 1 0,1-1 0,-1 0-1,1 0 1,-1 0 0,1-1 0,0 1 0,1 0 0,-1-1 0,5 4 0,-5-6-155,-1 1 0,0-1 0,1 1 0,-1-1 0,1 0 0,0 0-1,0 0 1,-1-1 0,1 1 0,0 0 0,-1-1 0,1 1 0,0-1 0,0 0 0,0 0 0,0-1 0,0 1-1,-1-1 1,1 0 0,4 0 0,-2-1-490,-1-1 0,0 1 0,1 0 0,5-5 0,17-14-1902</inkml:trace>
-</inkml:ink>
-</file>
-
-<file path=ppt/ink/ink159.xml><?xml version="1.0" encoding="utf-8"?>
-<inkml:ink xmlns:inkml="http://www.w3.org/2003/InkML">
-  <inkml:definitions>
-    <inkml:context xml:id="ctx0">
-      <inkml:inkSource xml:id="inkSrc0">
-        <inkml:traceFormat>
-          <inkml:channel name="X" type="integer" min="-2.14748E9" max="2.14748E9" units="cm"/>
-          <inkml:channel name="Y" type="integer" min="-2.14748E9" max="2.14748E9" units="cm"/>
-          <inkml:channel name="F" type="integer" max="32767" units="dev"/>
-        </inkml:traceFormat>
-        <inkml:channelProperties>
-          <inkml:channelProperty channel="X" name="resolution" value="1000" units="1/cm"/>
-          <inkml:channelProperty channel="Y" name="resolution" value="1000" units="1/cm"/>
-          <inkml:channelProperty channel="F" name="resolution" value="0" units="1/dev"/>
-        </inkml:channelProperties>
-      </inkml:inkSource>
-      <inkml:timestamp xml:id="ts0" timeString="2025-12-01T18:02:24.527"/>
-    </inkml:context>
-    <inkml:brush xml:id="br0">
-      <inkml:brushProperty name="width" value="0.1" units="cm"/>
-      <inkml:brushProperty name="height" value="0.1" units="cm"/>
-      <inkml:brushProperty name="color" value="#E71224"/>
-    </inkml:brush>
-  </inkml:definitions>
-  <inkml:trace contextRef="#ctx0" brushRef="#br0">107 57 6937,'-32'-37'3113,"8"23"3305,5 8-3386,5 12-1351,2 4-633,9 5-656,1 3-160,7 0-192,3 2-24,4-1-376,4 4-416,-1 3-1433,1 2-2672,4 10 1768</inkml:trace>
-</inkml:ink>
-</file>
-
 <file path=ppt/ink/ink16.xml><?xml version="1.0" encoding="utf-8"?>
 <inkml:ink xmlns:inkml="http://www.w3.org/2003/InkML">
   <inkml:definitions>
@@ -2169,118 +1408,6 @@
     </inkml:brush>
   </inkml:definitions>
   <inkml:trace contextRef="#ctx0" brushRef="#br0">1 435 1624 0 0,'14'-48'10253'0'0,"-11"40"-9815"0"0,0 1 0 0 0,1 0 0 0 0,0 0 0 0 0,1 1 0 0 0,-1-1 0 0 0,1 1 0 0 0,8-8 0 0 0,-1 2-224 0 0,121-119-972 0 0,-24 43-5838 0 0,-89 75 5989 0 0,-4 3-106 0 0,-1-1 0 0 0,0 0 0 0 0,16-17 0 0 0,-15 8-1341 0 0</inkml:trace>
-</inkml:ink>
-</file>
-
-<file path=ppt/ink/ink160.xml><?xml version="1.0" encoding="utf-8"?>
-<inkml:ink xmlns:inkml="http://www.w3.org/2003/InkML">
-  <inkml:definitions>
-    <inkml:context xml:id="ctx0">
-      <inkml:inkSource xml:id="inkSrc0">
-        <inkml:traceFormat>
-          <inkml:channel name="X" type="integer" min="-2.14748E9" max="2.14748E9" units="cm"/>
-          <inkml:channel name="Y" type="integer" min="-2.14748E9" max="2.14748E9" units="cm"/>
-          <inkml:channel name="F" type="integer" max="32767" units="dev"/>
-        </inkml:traceFormat>
-        <inkml:channelProperties>
-          <inkml:channelProperty channel="X" name="resolution" value="1000" units="1/cm"/>
-          <inkml:channelProperty channel="Y" name="resolution" value="1000" units="1/cm"/>
-          <inkml:channelProperty channel="F" name="resolution" value="0" units="1/dev"/>
-        </inkml:channelProperties>
-      </inkml:inkSource>
-      <inkml:timestamp xml:id="ts0" timeString="2025-12-01T18:02:24.528"/>
-    </inkml:context>
-    <inkml:brush xml:id="br0">
-      <inkml:brushProperty name="width" value="0.1" units="cm"/>
-      <inkml:brushProperty name="height" value="0.1" units="cm"/>
-      <inkml:brushProperty name="color" value="#E71224"/>
-    </inkml:brush>
-  </inkml:definitions>
-  <inkml:trace contextRef="#ctx0" brushRef="#br0">14 2 5985,'4'-1'6304,"-1"6"-3408,-1 10-328,-3 11-1027,-1-1 0,-7 40 0,-1 13-525,10-74-989,0 0 1,-1-1 0,2 1-1,-1 0 1,0-1-1,1 1 1,-1-1 0,1 1-1,2 5 1,-2-8-26,0 0 1,-1 0 0,1 0-1,0 0 1,0 0-1,-1 0 1,1 0-1,1-1 1,-2 1-1,1 0 1,1 0-1,-2-1 1,1 0-1,1 1 1,-2 0 0,2-1-1,-1 1 1,0-1-1,1 0 1,-2 1-1,2-1 1,-1 0-1,0 0 1,1 0-1,-2 0 1,2 0 0,-1 0-1,0-1 1,1 1-1,-2 0 1,2-1-1,0 0 1,7-2 7,0 0 0,-1-1 1,-1 1-1,2-2 0,-2 1 1,1-2-1,8-6 0,46-46 16,-45 40-38,-1-1 0,0-1 1,-2 0-1,15-26 0,-21 34 14,-8 12 31,0 2 16,-7 24 213,3-14-142,1-3-50,1 1 1,0-1 0,1 1 0,0 0 0,1-1 0,0 1 0,1 15 0,0-22-77,0 0 0,0 1 1,-1-1-1,1 0 0,1 0 1,-1 0-1,1 0 0,-1 0 0,1 0 1,-1-1-1,2 1 0,-1 0 1,0 0-1,0-1 0,1 0 0,-1 1 1,1-1-1,-1-1 0,1 2 1,-1-2-1,1 1 0,0-1 0,0 1 1,0-1-1,6 1 0,-1 0-375,0-1 0,1-1 0,-1 1 0,0-1 0,0-1 0,1 1 0,-1-1 0,0-1 0,1 0 0,-2 0 0,1 0 0,10-5 0,25-11-1579</inkml:trace>
-</inkml:ink>
-</file>
-
-<file path=ppt/ink/ink161.xml><?xml version="1.0" encoding="utf-8"?>
-<inkml:ink xmlns:inkml="http://www.w3.org/2003/InkML">
-  <inkml:definitions>
-    <inkml:context xml:id="ctx0">
-      <inkml:inkSource xml:id="inkSrc0">
-        <inkml:traceFormat>
-          <inkml:channel name="X" type="integer" min="-2.14748E9" max="2.14748E9" units="cm"/>
-          <inkml:channel name="Y" type="integer" min="-2.14748E9" max="2.14748E9" units="cm"/>
-          <inkml:channel name="F" type="integer" max="32767" units="dev"/>
-        </inkml:traceFormat>
-        <inkml:channelProperties>
-          <inkml:channelProperty channel="X" name="resolution" value="1000" units="1/cm"/>
-          <inkml:channelProperty channel="Y" name="resolution" value="1000" units="1/cm"/>
-          <inkml:channelProperty channel="F" name="resolution" value="0" units="1/dev"/>
-        </inkml:channelProperties>
-      </inkml:inkSource>
-      <inkml:timestamp xml:id="ts0" timeString="2025-12-01T18:02:24.529"/>
-    </inkml:context>
-    <inkml:brush xml:id="br0">
-      <inkml:brushProperty name="width" value="0.1" units="cm"/>
-      <inkml:brushProperty name="height" value="0.1" units="cm"/>
-      <inkml:brushProperty name="color" value="#E71224"/>
-    </inkml:brush>
-  </inkml:definitions>
-  <inkml:trace contextRef="#ctx0" brushRef="#br0">94 2 2881,'-7'-1'6850,"6"1"-6629,-4 10 3215,0 20-1715,4-20-881,-27 165 3229,-7 92-2996,34-256-1121,-1 6-552,-6 24 0,9-62-7048</inkml:trace>
-</inkml:ink>
-</file>
-
-<file path=ppt/ink/ink162.xml><?xml version="1.0" encoding="utf-8"?>
-<inkml:ink xmlns:inkml="http://www.w3.org/2003/InkML">
-  <inkml:definitions>
-    <inkml:context xml:id="ctx0">
-      <inkml:inkSource xml:id="inkSrc0">
-        <inkml:traceFormat>
-          <inkml:channel name="X" type="integer" min="-2.14748E9" max="2.14748E9" units="cm"/>
-          <inkml:channel name="Y" type="integer" min="-2.14748E9" max="2.14748E9" units="cm"/>
-          <inkml:channel name="F" type="integer" max="32767" units="dev"/>
-        </inkml:traceFormat>
-        <inkml:channelProperties>
-          <inkml:channelProperty channel="X" name="resolution" value="1000" units="1/cm"/>
-          <inkml:channelProperty channel="Y" name="resolution" value="1000" units="1/cm"/>
-          <inkml:channelProperty channel="F" name="resolution" value="0" units="1/dev"/>
-        </inkml:channelProperties>
-      </inkml:inkSource>
-      <inkml:timestamp xml:id="ts0" timeString="2025-12-01T18:02:24.530"/>
-    </inkml:context>
-    <inkml:brush xml:id="br0">
-      <inkml:brushProperty name="width" value="0.1" units="cm"/>
-      <inkml:brushProperty name="height" value="0.1" units="cm"/>
-      <inkml:brushProperty name="color" value="#E71224"/>
-    </inkml:brush>
-  </inkml:definitions>
-  <inkml:trace contextRef="#ctx0" brushRef="#br0">22 6 6513,'-4'-6'5587,"4"6"-5451,-3 10 2770,-2 24-1126,4-28-1404,-1 9 86,0 5-83,0 0 0,0 0 0,2 0 0,2 23 1,-1-37-332,0-1 0,0 0 0,1 0 0,-1 1 0,2-2 0,-1 2 0,0-1 1,6 8-1,-6-10-31,0-1 1,0 1-1,1 0 1,0-1 0,0 0-1,0 1 1,0-1-1,0 0 1,0 0-1,0 0 1,1 0 0,-1-1-1,1 0 1,4 1-1,-1 0-1,1-1 0,0 0 0,0 0 1,1-1-1,-2 0 0,1-1 0,1 0 0,-2 0 0,1-1 0,0 1 0,0-2 0,9-4 0,-4 2 9,1-1 1,-1-1-1,0 0 1,-1-1-1,22-18 1,-25 17-11,1 0 0,0-2-1,-1 1 1,-1-1 0,1 0 0,-2 0 0,0-1 0,-1 0 0,0-1 0,8-24 0,-14 37-13,0 0-1,0 0 1,0 0 0,0 0 0,1 0 0,-1-1-1,0 1 1,0 0 0,0 0 0,0 0 0,0 0 0,0 0-1,0 0 1,0 0 0,0-1 0,0 1 0,0 0-1,0 0 1,0 0 0,0 0 0,0 0 0,0 0-1,0 0 1,0 0 0,-1 0 0,1 0 0,0 0 0,0 0-1,0 0 1,0 0 0,0 0 0,0 0 0,0 0-1,0 0 1,0-1 0,0 1 0,0 0 0,0 0-1,0 0 1,0 0 0,0 0 0,0 0 0,0 0 0,0 0-1,0 0 1,0 0 0,0 0 0,-1 0 0,1 0-1,0 0 1,0 0 0,0 0 0,0 0 0,0 0-1,0 0 1,0 0 0,-1 0 0,1 0 0,0 0 0,0 0-1,0 0 1,0 0 0,0 0 0,0 0 0,0 0-1,-1 0 1,1 1 0,-6 3 144,-1 4 45,1 1 0,0 0 0,0 1 0,0 0 0,1 0 0,1 0 0,0 0 0,0 1 0,1-1 0,-3 20 0,1-2 25,2 0 0,2 0 0,2 32 0,-1-48-178,0-1 1,2 0-1,-1 1 0,2-2 1,0 1-1,7 18 1,-9-26-191,1 0 0,-1 0 0,1 0 0,-1 0 1,1-1-1,1 1 0,-2 0 0,2-1 1,-1 0-1,1 0 0,-1 1 0,1-1 1,0-1-1,-1 2 0,1-2 0,0 1 1,0-1-1,0 0 0,0 0 0,1 0 1,-1 0-1,0 0 0,1-1 0,-1 1 0,1-1 1,4 0-1,20-3-3490,0-4 908</inkml:trace>
-</inkml:ink>
-</file>
-
-<file path=ppt/ink/ink163.xml><?xml version="1.0" encoding="utf-8"?>
-<inkml:ink xmlns:inkml="http://www.w3.org/2003/InkML">
-  <inkml:definitions>
-    <inkml:context xml:id="ctx0">
-      <inkml:inkSource xml:id="inkSrc0">
-        <inkml:traceFormat>
-          <inkml:channel name="X" type="integer" min="-2.14748E9" max="2.14748E9" units="cm"/>
-          <inkml:channel name="Y" type="integer" min="-2.14748E9" max="2.14748E9" units="cm"/>
-          <inkml:channel name="F" type="integer" max="32767" units="dev"/>
-        </inkml:traceFormat>
-        <inkml:channelProperties>
-          <inkml:channelProperty channel="X" name="resolution" value="1000" units="1/cm"/>
-          <inkml:channelProperty channel="Y" name="resolution" value="1000" units="1/cm"/>
-          <inkml:channelProperty channel="F" name="resolution" value="0" units="1/dev"/>
-        </inkml:channelProperties>
-      </inkml:inkSource>
-      <inkml:timestamp xml:id="ts0" timeString="2025-12-01T18:02:24.531"/>
-    </inkml:context>
-    <inkml:brush xml:id="br0">
-      <inkml:brushProperty name="width" value="0.1" units="cm"/>
-      <inkml:brushProperty name="height" value="0.1" units="cm"/>
-      <inkml:brushProperty name="color" value="#E71224"/>
-    </inkml:brush>
-  </inkml:definitions>
-  <inkml:trace contextRef="#ctx0" brushRef="#br0">94 8 7114,'2'-8'7356,"-4"22"-4657,-6 26-1165,-23 77 1189,-20 102-539,49-210-2106,2 0-1,-1 1 0,0 0 0,2 0 1,0 12-1,-1-20-44,1 0 1,0 0-1,-1 1 1,1-1-1,-1 0 1,2 0-1,-1 1 1,-1-1-1,2-1 1,-1 2-1,0-2 1,1 2-1,-1-2 1,1 1-1,-1 0 1,1-1-1,0 1 1,0-1-1,0 1 1,0-1-1,-1 0 1,2 0-1,-1 0 1,0 0-1,0 0 1,1 0-1,-1-1 1,2 1-1,6 0 70,-1 0 0,1-1 0,0 0-1,-1-1 1,1 0 0,-1 0 0,16-5-1,64-25 327,-86 30-417,73-33 287,-39 17-149,45-14-1,-81 30-204,1 0 1,1 1-1,-1 0 1,0-1-1,1 1 1,-1-1-1,0 1 1,5 1-1,-6-1-66,-1 0 1,2 1-1,-1-1 1,-1 0-1,1 1 0,0-1 1,0 1-1,-1 0 1,1-1-1,0 0 0,0 1 1,-1 0-1,0 0 1,1-1-1,0 1 0,-1 0 1,1 0-1,-1-1 0,0 2 1,0-1-1,1-1 1,0 3-1,4 10-1131</inkml:trace>
 </inkml:ink>
 </file>
 
@@ -5165,7 +4292,7 @@
           <a:p>
             <a:fld id="{8BB42C94-4EF8-4597-AF3E-41FB0A245854}" type="datetimeFigureOut">
               <a:rPr lang="en-US" smtClean="0"/>
-              <a:t>12/1/2025</a:t>
+              <a:t>4/23/2026</a:t>
             </a:fld>
             <a:endParaRPr lang="en-US"/>
           </a:p>
@@ -5363,7 +4490,7 @@
           <a:p>
             <a:fld id="{8BB42C94-4EF8-4597-AF3E-41FB0A245854}" type="datetimeFigureOut">
               <a:rPr lang="en-US" smtClean="0"/>
-              <a:t>12/1/2025</a:t>
+              <a:t>4/23/2026</a:t>
             </a:fld>
             <a:endParaRPr lang="en-US"/>
           </a:p>
@@ -5571,7 +4698,7 @@
           <a:p>
             <a:fld id="{8BB42C94-4EF8-4597-AF3E-41FB0A245854}" type="datetimeFigureOut">
               <a:rPr lang="en-US" smtClean="0"/>
-              <a:t>12/1/2025</a:t>
+              <a:t>4/23/2026</a:t>
             </a:fld>
             <a:endParaRPr lang="en-US"/>
           </a:p>
@@ -5769,7 +4896,7 @@
           <a:p>
             <a:fld id="{8BB42C94-4EF8-4597-AF3E-41FB0A245854}" type="datetimeFigureOut">
               <a:rPr lang="en-US" smtClean="0"/>
-              <a:t>12/1/2025</a:t>
+              <a:t>4/23/2026</a:t>
             </a:fld>
             <a:endParaRPr lang="en-US"/>
           </a:p>
@@ -6044,7 +5171,7 @@
           <a:p>
             <a:fld id="{8BB42C94-4EF8-4597-AF3E-41FB0A245854}" type="datetimeFigureOut">
               <a:rPr lang="en-US" smtClean="0"/>
-              <a:t>12/1/2025</a:t>
+              <a:t>4/23/2026</a:t>
             </a:fld>
             <a:endParaRPr lang="en-US"/>
           </a:p>
@@ -6309,7 +5436,7 @@
           <a:p>
             <a:fld id="{8BB42C94-4EF8-4597-AF3E-41FB0A245854}" type="datetimeFigureOut">
               <a:rPr lang="en-US" smtClean="0"/>
-              <a:t>12/1/2025</a:t>
+              <a:t>4/23/2026</a:t>
             </a:fld>
             <a:endParaRPr lang="en-US"/>
           </a:p>
@@ -6721,7 +5848,7 @@
           <a:p>
             <a:fld id="{8BB42C94-4EF8-4597-AF3E-41FB0A245854}" type="datetimeFigureOut">
               <a:rPr lang="en-US" smtClean="0"/>
-              <a:t>12/1/2025</a:t>
+              <a:t>4/23/2026</a:t>
             </a:fld>
             <a:endParaRPr lang="en-US"/>
           </a:p>
@@ -6862,7 +5989,7 @@
           <a:p>
             <a:fld id="{8BB42C94-4EF8-4597-AF3E-41FB0A245854}" type="datetimeFigureOut">
               <a:rPr lang="en-US" smtClean="0"/>
-              <a:t>12/1/2025</a:t>
+              <a:t>4/23/2026</a:t>
             </a:fld>
             <a:endParaRPr lang="en-US"/>
           </a:p>
@@ -6975,7 +6102,7 @@
           <a:p>
             <a:fld id="{8BB42C94-4EF8-4597-AF3E-41FB0A245854}" type="datetimeFigureOut">
               <a:rPr lang="en-US" smtClean="0"/>
-              <a:t>12/1/2025</a:t>
+              <a:t>4/23/2026</a:t>
             </a:fld>
             <a:endParaRPr lang="en-US"/>
           </a:p>
@@ -7286,7 +6413,7 @@
           <a:p>
             <a:fld id="{8BB42C94-4EF8-4597-AF3E-41FB0A245854}" type="datetimeFigureOut">
               <a:rPr lang="en-US" smtClean="0"/>
-              <a:t>12/1/2025</a:t>
+              <a:t>4/23/2026</a:t>
             </a:fld>
             <a:endParaRPr lang="en-US"/>
           </a:p>
@@ -7574,7 +6701,7 @@
           <a:p>
             <a:fld id="{8BB42C94-4EF8-4597-AF3E-41FB0A245854}" type="datetimeFigureOut">
               <a:rPr lang="en-US" smtClean="0"/>
-              <a:t>12/1/2025</a:t>
+              <a:t>4/23/2026</a:t>
             </a:fld>
             <a:endParaRPr lang="en-US"/>
           </a:p>
@@ -7815,7 +6942,7 @@
           <a:p>
             <a:fld id="{8BB42C94-4EF8-4597-AF3E-41FB0A245854}" type="datetimeFigureOut">
               <a:rPr lang="en-US" smtClean="0"/>
-              <a:t>12/1/2025</a:t>
+              <a:t>4/23/2026</a:t>
             </a:fld>
             <a:endParaRPr lang="en-US"/>
           </a:p>
@@ -13081,8 +12208,8 @@
           </a:p>
         </p:txBody>
       </p:sp>
-      <mc:AlternateContent xmlns:mc="http://schemas.openxmlformats.org/markup-compatibility/2006">
-        <mc:Choice xmlns:a14="http://schemas.microsoft.com/office/drawing/2010/main" Requires="a14">
+      <mc:AlternateContent xmlns:mc="http://schemas.openxmlformats.org/markup-compatibility/2006" xmlns:a14="http://schemas.microsoft.com/office/drawing/2010/main">
+        <mc:Choice Requires="a14">
           <p:sp>
             <p:nvSpPr>
               <p:cNvPr id="17" name="TextBox 16">
@@ -13274,7 +12401,7 @@
             </p:txBody>
           </p:sp>
         </mc:Choice>
-        <mc:Fallback>
+        <mc:Fallback xmlns="">
           <p:sp>
             <p:nvSpPr>
               <p:cNvPr id="17" name="TextBox 16">
@@ -13576,2949 +12703,6 @@
 </file>
 
 <file path=ppt/slides/slide11.xml><?xml version="1.0" encoding="utf-8"?>
-<p:sld xmlns:a="http://schemas.openxmlformats.org/drawingml/2006/main" xmlns:r="http://schemas.openxmlformats.org/officeDocument/2006/relationships" xmlns:p="http://schemas.openxmlformats.org/presentationml/2006/main">
-  <p:cSld>
-    <p:spTree>
-      <p:nvGrpSpPr>
-        <p:cNvPr id="1" name="">
-          <a:extLst>
-            <a:ext uri="{FF2B5EF4-FFF2-40B4-BE49-F238E27FC236}">
-              <a16:creationId xmlns:a16="http://schemas.microsoft.com/office/drawing/2014/main" id="{F1294FF1-691A-5E02-6114-1B9F914363D1}"/>
-            </a:ext>
-          </a:extLst>
-        </p:cNvPr>
-        <p:cNvGrpSpPr/>
-        <p:nvPr/>
-      </p:nvGrpSpPr>
-      <p:grpSpPr>
-        <a:xfrm>
-          <a:off x="0" y="0"/>
-          <a:ext cx="0" cy="0"/>
-          <a:chOff x="0" y="0"/>
-          <a:chExt cx="0" cy="0"/>
-        </a:xfrm>
-      </p:grpSpPr>
-      <mc:AlternateContent xmlns:mc="http://schemas.openxmlformats.org/markup-compatibility/2006" xmlns:a14="http://schemas.microsoft.com/office/drawing/2010/main">
-        <mc:Choice Requires="a14">
-          <p:graphicFrame>
-            <p:nvGraphicFramePr>
-              <p:cNvPr id="5" name="Table 4">
-                <a:extLst>
-                  <a:ext uri="{FF2B5EF4-FFF2-40B4-BE49-F238E27FC236}">
-                    <a16:creationId xmlns:a16="http://schemas.microsoft.com/office/drawing/2014/main" id="{F34D206A-D85D-D9E4-6AC2-0921A44C6307}"/>
-                  </a:ext>
-                </a:extLst>
-              </p:cNvPr>
-              <p:cNvGraphicFramePr>
-                <a:graphicFrameLocks noGrp="1"/>
-              </p:cNvGraphicFramePr>
-              <p:nvPr>
-                <p:extLst>
-                  <p:ext uri="{D42A27DB-BD31-4B8C-83A1-F6EECF244321}">
-                    <p14:modId xmlns:p14="http://schemas.microsoft.com/office/powerpoint/2010/main" val="210461856"/>
-                  </p:ext>
-                </p:extLst>
-              </p:nvPr>
-            </p:nvGraphicFramePr>
-            <p:xfrm>
-              <a:off x="1499368" y="1583490"/>
-              <a:ext cx="8128000" cy="3649723"/>
-            </p:xfrm>
-            <a:graphic>
-              <a:graphicData uri="http://schemas.openxmlformats.org/drawingml/2006/table">
-                <a:tbl>
-                  <a:tblPr firstRow="1" bandRow="1">
-                    <a:tableStyleId>{5C22544A-7EE6-4342-B048-85BDC9FD1C3A}</a:tableStyleId>
-                  </a:tblPr>
-                  <a:tblGrid>
-                    <a:gridCol w="1625600">
-                      <a:extLst>
-                        <a:ext uri="{9D8B030D-6E8A-4147-A177-3AD203B41FA5}">
-                          <a16:colId xmlns:a16="http://schemas.microsoft.com/office/drawing/2014/main" val="2075231717"/>
-                        </a:ext>
-                      </a:extLst>
-                    </a:gridCol>
-                    <a:gridCol w="1625600">
-                      <a:extLst>
-                        <a:ext uri="{9D8B030D-6E8A-4147-A177-3AD203B41FA5}">
-                          <a16:colId xmlns:a16="http://schemas.microsoft.com/office/drawing/2014/main" val="3983029180"/>
-                        </a:ext>
-                      </a:extLst>
-                    </a:gridCol>
-                    <a:gridCol w="1625600">
-                      <a:extLst>
-                        <a:ext uri="{9D8B030D-6E8A-4147-A177-3AD203B41FA5}">
-                          <a16:colId xmlns:a16="http://schemas.microsoft.com/office/drawing/2014/main" val="1758694013"/>
-                        </a:ext>
-                      </a:extLst>
-                    </a:gridCol>
-                    <a:gridCol w="1625600">
-                      <a:extLst>
-                        <a:ext uri="{9D8B030D-6E8A-4147-A177-3AD203B41FA5}">
-                          <a16:colId xmlns:a16="http://schemas.microsoft.com/office/drawing/2014/main" val="4159486076"/>
-                        </a:ext>
-                      </a:extLst>
-                    </a:gridCol>
-                    <a:gridCol w="1625600">
-                      <a:extLst>
-                        <a:ext uri="{9D8B030D-6E8A-4147-A177-3AD203B41FA5}">
-                          <a16:colId xmlns:a16="http://schemas.microsoft.com/office/drawing/2014/main" val="2621157299"/>
-                        </a:ext>
-                      </a:extLst>
-                    </a:gridCol>
-                  </a:tblGrid>
-                  <a:tr h="1059042">
-                    <a:tc>
-                      <a:txBody>
-                        <a:bodyPr/>
-                        <a:lstStyle/>
-                        <a:p>
-                          <a:pPr marL="0" marR="0" lvl="0" indent="0" algn="ctr" defTabSz="914400" rtl="0" eaLnBrk="1" fontAlgn="auto" latinLnBrk="0" hangingPunct="1">
-                            <a:lnSpc>
-                              <a:spcPct val="100000"/>
-                            </a:lnSpc>
-                            <a:spcBef>
-                              <a:spcPts val="0"/>
-                            </a:spcBef>
-                            <a:spcAft>
-                              <a:spcPts val="0"/>
-                            </a:spcAft>
-                            <a:buClrTx/>
-                            <a:buSzTx/>
-                            <a:buFontTx/>
-                            <a:buNone/>
-                            <a:tabLst/>
-                            <a:defRPr/>
-                          </a:pPr>
-                          <a:r>
-                            <a:rPr lang="en-US" sz="1800" b="0" dirty="0"/>
-                            <a:t>State </a:t>
-                          </a:r>
-                          <a14:m>
-                            <m:oMath xmlns:m="http://schemas.openxmlformats.org/officeDocument/2006/math">
-                              <m:r>
-                                <a:rPr lang="en-US" sz="1800" b="0" i="1" smtClean="0">
-                                  <a:latin typeface="Cambria Math" panose="02040503050406030204" pitchFamily="18" charset="0"/>
-                                </a:rPr>
-                                <m:t>𝑠</m:t>
-                              </m:r>
-                            </m:oMath>
-                          </a14:m>
-                          <a:endParaRPr lang="en-US" sz="1800" dirty="0"/>
-                        </a:p>
-                      </a:txBody>
-                      <a:tcPr/>
-                    </a:tc>
-                    <a:tc>
-                      <a:txBody>
-                        <a:bodyPr/>
-                        <a:lstStyle/>
-                        <a:p>
-                          <a:pPr algn="ctr"/>
-                          <a14:m>
-                            <m:oMathPara xmlns:m="http://schemas.openxmlformats.org/officeDocument/2006/math">
-                              <m:oMathParaPr>
-                                <m:jc m:val="centerGroup"/>
-                              </m:oMathParaPr>
-                              <m:oMath xmlns:m="http://schemas.openxmlformats.org/officeDocument/2006/math">
-                                <m:r>
-                                  <a:rPr lang="en-US" sz="1800" b="0" i="1" smtClean="0">
-                                    <a:latin typeface="Cambria Math" panose="02040503050406030204" pitchFamily="18" charset="0"/>
-                                  </a:rPr>
-                                  <m:t>𝑚𝑖𝑛𝑖𝑚𝑎𝑥</m:t>
-                                </m:r>
-                                <m:r>
-                                  <a:rPr lang="en-US" sz="1800" b="0" i="1" smtClean="0">
-                                    <a:latin typeface="Cambria Math" panose="02040503050406030204" pitchFamily="18" charset="0"/>
-                                  </a:rPr>
-                                  <m:t>(</m:t>
-                                </m:r>
-                                <m:r>
-                                  <a:rPr lang="en-US" sz="1800" b="0" i="1" smtClean="0">
-                                    <a:latin typeface="Cambria Math" panose="02040503050406030204" pitchFamily="18" charset="0"/>
-                                  </a:rPr>
-                                  <m:t>𝑠</m:t>
-                                </m:r>
-                                <m:r>
-                                  <a:rPr lang="en-US" sz="1800" b="0" i="1" smtClean="0">
-                                    <a:latin typeface="Cambria Math" panose="02040503050406030204" pitchFamily="18" charset="0"/>
-                                  </a:rPr>
-                                  <m:t>)</m:t>
-                                </m:r>
-                              </m:oMath>
-                            </m:oMathPara>
-                          </a14:m>
-                          <a:endParaRPr lang="en-US" sz="1800" b="0" dirty="0"/>
-                        </a:p>
-                      </a:txBody>
-                      <a:tcPr/>
-                    </a:tc>
-                    <a:tc>
-                      <a:txBody>
-                        <a:bodyPr/>
-                        <a:lstStyle/>
-                        <a:p>
-                          <a:pPr marL="0" marR="0" lvl="0" indent="0" algn="ctr" defTabSz="914400" rtl="0" eaLnBrk="1" fontAlgn="auto" latinLnBrk="0" hangingPunct="1">
-                            <a:lnSpc>
-                              <a:spcPct val="100000"/>
-                            </a:lnSpc>
-                            <a:spcBef>
-                              <a:spcPts val="0"/>
-                            </a:spcBef>
-                            <a:spcAft>
-                              <a:spcPts val="0"/>
-                            </a:spcAft>
-                            <a:buClrTx/>
-                            <a:buSzTx/>
-                            <a:buFontTx/>
-                            <a:buNone/>
-                            <a:tabLst/>
-                            <a:defRPr/>
-                          </a:pPr>
-                          <a:r>
-                            <a:rPr lang="en-US" sz="1800" b="0" dirty="0"/>
-                            <a:t>Expert code</a:t>
-                          </a:r>
-                          <a:endParaRPr lang="en-US" sz="1800" b="0" i="1" dirty="0">
-                            <a:latin typeface="Cambria Math" panose="02040503050406030204" pitchFamily="18" charset="0"/>
-                          </a:endParaRPr>
-                        </a:p>
-                        <a:p>
-                          <a:pPr marL="0" marR="0" lvl="0" indent="0" algn="ctr" defTabSz="914400" rtl="0" eaLnBrk="1" fontAlgn="auto" latinLnBrk="0" hangingPunct="1">
-                            <a:lnSpc>
-                              <a:spcPct val="100000"/>
-                            </a:lnSpc>
-                            <a:spcBef>
-                              <a:spcPts val="0"/>
-                            </a:spcBef>
-                            <a:spcAft>
-                              <a:spcPts val="0"/>
-                            </a:spcAft>
-                            <a:buClrTx/>
-                            <a:buSzTx/>
-                            <a:buFontTx/>
-                            <a:buNone/>
-                            <a:tabLst/>
-                            <a:defRPr/>
-                          </a:pPr>
-                          <a14:m>
-                            <m:oMathPara xmlns:m="http://schemas.openxmlformats.org/officeDocument/2006/math">
-                              <m:oMathParaPr>
-                                <m:jc m:val="centerGroup"/>
-                              </m:oMathParaPr>
-                              <m:oMath xmlns:m="http://schemas.openxmlformats.org/officeDocument/2006/math">
-                                <m:r>
-                                  <a:rPr lang="en-US" sz="1800" b="0" i="1" smtClean="0">
-                                    <a:latin typeface="Cambria Math" panose="02040503050406030204" pitchFamily="18" charset="0"/>
-                                  </a:rPr>
-                                  <m:t>𝑒𝑣𝑎𝑙</m:t>
-                                </m:r>
-                                <m:r>
-                                  <a:rPr lang="en-US" sz="1800" b="0" i="1" smtClean="0">
-                                    <a:latin typeface="Cambria Math" panose="02040503050406030204" pitchFamily="18" charset="0"/>
-                                  </a:rPr>
-                                  <m:t>(</m:t>
-                                </m:r>
-                                <m:r>
-                                  <a:rPr lang="en-US" sz="1800" b="0" i="1" smtClean="0">
-                                    <a:latin typeface="Cambria Math" panose="02040503050406030204" pitchFamily="18" charset="0"/>
-                                  </a:rPr>
-                                  <m:t>𝑠</m:t>
-                                </m:r>
-                                <m:r>
-                                  <a:rPr lang="en-US" sz="1800" b="0" i="1" smtClean="0">
-                                    <a:latin typeface="Cambria Math" panose="02040503050406030204" pitchFamily="18" charset="0"/>
-                                  </a:rPr>
-                                  <m:t>)</m:t>
-                                </m:r>
-                              </m:oMath>
-                            </m:oMathPara>
-                          </a14:m>
-                          <a:endParaRPr lang="en-US" sz="1800" b="0" dirty="0"/>
-                        </a:p>
-                      </a:txBody>
-                      <a:tcPr/>
-                    </a:tc>
-                    <a:tc>
-                      <a:txBody>
-                        <a:bodyPr/>
-                        <a:lstStyle/>
-                        <a:p>
-                          <a:pPr marL="0" marR="0" lvl="0" indent="0" algn="ctr" defTabSz="914400" rtl="0" eaLnBrk="1" fontAlgn="auto" latinLnBrk="0" hangingPunct="1">
-                            <a:lnSpc>
-                              <a:spcPct val="100000"/>
-                            </a:lnSpc>
-                            <a:spcBef>
-                              <a:spcPts val="0"/>
-                            </a:spcBef>
-                            <a:spcAft>
-                              <a:spcPts val="0"/>
-                            </a:spcAft>
-                            <a:buClrTx/>
-                            <a:buSzTx/>
-                            <a:buFontTx/>
-                            <a:buNone/>
-                            <a:tabLst/>
-                            <a:defRPr/>
-                          </a:pPr>
-                          <a:r>
-                            <a:rPr lang="en-US" sz="1800" b="0" dirty="0"/>
-                            <a:t>Monte Carlo simulation</a:t>
-                          </a:r>
-                          <a:endParaRPr lang="en-US" sz="1800" b="0" i="1" dirty="0">
-                            <a:latin typeface="Cambria Math" panose="02040503050406030204" pitchFamily="18" charset="0"/>
-                          </a:endParaRPr>
-                        </a:p>
-                        <a:p>
-                          <a:pPr marL="0" marR="0" lvl="0" indent="0" algn="ctr" defTabSz="914400" rtl="0" eaLnBrk="1" fontAlgn="auto" latinLnBrk="0" hangingPunct="1">
-                            <a:lnSpc>
-                              <a:spcPct val="100000"/>
-                            </a:lnSpc>
-                            <a:spcBef>
-                              <a:spcPts val="0"/>
-                            </a:spcBef>
-                            <a:spcAft>
-                              <a:spcPts val="0"/>
-                            </a:spcAft>
-                            <a:buClrTx/>
-                            <a:buSzTx/>
-                            <a:buFontTx/>
-                            <a:buNone/>
-                            <a:tabLst/>
-                            <a:defRPr/>
-                          </a:pPr>
-                          <a14:m>
-                            <m:oMathPara xmlns:m="http://schemas.openxmlformats.org/officeDocument/2006/math">
-                              <m:oMathParaPr>
-                                <m:jc m:val="centerGroup"/>
-                              </m:oMathParaPr>
-                              <m:oMath xmlns:m="http://schemas.openxmlformats.org/officeDocument/2006/math">
-                                <m:r>
-                                  <a:rPr lang="en-US" sz="1800" b="0" i="1" smtClean="0">
-                                    <a:latin typeface="Cambria Math" panose="02040503050406030204" pitchFamily="18" charset="0"/>
-                                  </a:rPr>
-                                  <m:t>𝑒𝑣𝑎𝑙</m:t>
-                                </m:r>
-                                <m:r>
-                                  <a:rPr lang="en-US" sz="1800" b="0" i="1" smtClean="0">
-                                    <a:latin typeface="Cambria Math" panose="02040503050406030204" pitchFamily="18" charset="0"/>
-                                  </a:rPr>
-                                  <m:t>(</m:t>
-                                </m:r>
-                                <m:r>
-                                  <a:rPr lang="en-US" sz="1800" b="0" i="1" smtClean="0">
-                                    <a:latin typeface="Cambria Math" panose="02040503050406030204" pitchFamily="18" charset="0"/>
-                                  </a:rPr>
-                                  <m:t>𝑠</m:t>
-                                </m:r>
-                                <m:r>
-                                  <a:rPr lang="en-US" sz="1800" b="0" i="1" smtClean="0">
-                                    <a:latin typeface="Cambria Math" panose="02040503050406030204" pitchFamily="18" charset="0"/>
-                                  </a:rPr>
-                                  <m:t>)</m:t>
-                                </m:r>
-                              </m:oMath>
-                            </m:oMathPara>
-                          </a14:m>
-                          <a:endParaRPr lang="en-US" sz="1800" b="0" dirty="0"/>
-                        </a:p>
-                      </a:txBody>
-                      <a:tcPr/>
-                    </a:tc>
-                    <a:tc>
-                      <a:txBody>
-                        <a:bodyPr/>
-                        <a:lstStyle/>
-                        <a:p>
-                          <a:pPr algn="ctr"/>
-                          <a:r>
-                            <a:rPr lang="en-US" b="0" dirty="0"/>
-                            <a:t>Machine Learning</a:t>
-                          </a:r>
-                        </a:p>
-                        <a:p>
-                          <a:pPr algn="ctr"/>
-                          <a14:m>
-                            <m:oMathPara xmlns:m="http://schemas.openxmlformats.org/officeDocument/2006/math">
-                              <m:oMathParaPr>
-                                <m:jc m:val="centerGroup"/>
-                              </m:oMathParaPr>
-                              <m:oMath xmlns:m="http://schemas.openxmlformats.org/officeDocument/2006/math">
-                                <m:r>
-                                  <a:rPr lang="en-US" b="0" i="1" smtClean="0">
-                                    <a:latin typeface="Cambria Math" panose="02040503050406030204" pitchFamily="18" charset="0"/>
-                                  </a:rPr>
-                                  <m:t>h</m:t>
-                                </m:r>
-                                <m:r>
-                                  <a:rPr lang="en-US" b="0" i="1" smtClean="0">
-                                    <a:latin typeface="Cambria Math" panose="02040503050406030204" pitchFamily="18" charset="0"/>
-                                  </a:rPr>
-                                  <m:t>(</m:t>
-                                </m:r>
-                                <m:r>
-                                  <a:rPr lang="en-US" b="0" i="1" smtClean="0">
-                                    <a:latin typeface="Cambria Math" panose="02040503050406030204" pitchFamily="18" charset="0"/>
-                                  </a:rPr>
-                                  <m:t>𝑠</m:t>
-                                </m:r>
-                                <m:r>
-                                  <a:rPr lang="en-US" b="0" i="1" smtClean="0">
-                                    <a:latin typeface="Cambria Math" panose="02040503050406030204" pitchFamily="18" charset="0"/>
-                                  </a:rPr>
-                                  <m:t>)</m:t>
-                                </m:r>
-                              </m:oMath>
-                            </m:oMathPara>
-                          </a14:m>
-                          <a:endParaRPr lang="en-US" b="0" dirty="0"/>
-                        </a:p>
-                      </a:txBody>
-                      <a:tcPr/>
-                    </a:tc>
-                    <a:extLst>
-                      <a:ext uri="{0D108BD9-81ED-4DB2-BD59-A6C34878D82A}">
-                        <a16:rowId xmlns:a16="http://schemas.microsoft.com/office/drawing/2014/main" val="4245311786"/>
-                      </a:ext>
-                    </a:extLst>
-                  </a:tr>
-                  <a:tr h="1019219">
-                    <a:tc>
-                      <a:txBody>
-                        <a:bodyPr/>
-                        <a:lstStyle/>
-                        <a:p>
-                          <a:pPr algn="ctr"/>
-                          <a:endParaRPr lang="en-US" dirty="0"/>
-                        </a:p>
-                      </a:txBody>
-                      <a:tcPr anchor="ctr"/>
-                    </a:tc>
-                    <a:tc>
-                      <a:txBody>
-                        <a:bodyPr/>
-                        <a:lstStyle/>
-                        <a:p>
-                          <a:pPr algn="ctr"/>
-                          <a:r>
-                            <a:rPr lang="en-US" dirty="0"/>
-                            <a:t>1</a:t>
-                          </a:r>
-                        </a:p>
-                      </a:txBody>
-                      <a:tcPr anchor="ctr"/>
-                    </a:tc>
-                    <a:tc>
-                      <a:txBody>
-                        <a:bodyPr/>
-                        <a:lstStyle/>
-                        <a:p>
-                          <a:pPr algn="ctr"/>
-                          <a:r>
-                            <a:rPr lang="en-US" dirty="0"/>
-                            <a:t>+0.4</a:t>
-                          </a:r>
-                        </a:p>
-                      </a:txBody>
-                      <a:tcPr anchor="ctr"/>
-                    </a:tc>
-                    <a:tc>
-                      <a:txBody>
-                        <a:bodyPr/>
-                        <a:lstStyle/>
-                        <a:p>
-                          <a:pPr algn="ctr"/>
-                          <a:r>
-                            <a:rPr lang="en-US" dirty="0"/>
-                            <a:t>0.634</a:t>
-                          </a:r>
-                        </a:p>
-                      </a:txBody>
-                      <a:tcPr anchor="ctr"/>
-                    </a:tc>
-                    <a:tc>
-                      <a:txBody>
-                        <a:bodyPr/>
-                        <a:lstStyle/>
-                        <a:p>
-                          <a:pPr algn="ctr"/>
-                          <a:endParaRPr lang="en-US" dirty="0"/>
-                        </a:p>
-                      </a:txBody>
-                      <a:tcPr anchor="ctr"/>
-                    </a:tc>
-                    <a:extLst>
-                      <a:ext uri="{0D108BD9-81ED-4DB2-BD59-A6C34878D82A}">
-                        <a16:rowId xmlns:a16="http://schemas.microsoft.com/office/drawing/2014/main" val="49936605"/>
-                      </a:ext>
-                    </a:extLst>
-                  </a:tr>
-                  <a:tr h="1023457">
-                    <a:tc>
-                      <a:txBody>
-                        <a:bodyPr/>
-                        <a:lstStyle/>
-                        <a:p>
-                          <a:pPr algn="ctr"/>
-                          <a:endParaRPr lang="en-US" dirty="0"/>
-                        </a:p>
-                      </a:txBody>
-                      <a:tcPr anchor="ctr"/>
-                    </a:tc>
-                    <a:tc>
-                      <a:txBody>
-                        <a:bodyPr/>
-                        <a:lstStyle/>
-                        <a:p>
-                          <a:pPr algn="ctr"/>
-                          <a:r>
-                            <a:rPr lang="en-US" dirty="0"/>
-                            <a:t>0</a:t>
-                          </a:r>
-                        </a:p>
-                      </a:txBody>
-                      <a:tcPr anchor="ctr"/>
-                    </a:tc>
-                    <a:tc>
-                      <a:txBody>
-                        <a:bodyPr/>
-                        <a:lstStyle/>
-                        <a:p>
-                          <a:pPr algn="ctr"/>
-                          <a:r>
-                            <a:rPr lang="en-US" dirty="0"/>
-                            <a:t>-0.4</a:t>
-                          </a:r>
-                        </a:p>
-                      </a:txBody>
-                      <a:tcPr anchor="ctr"/>
-                    </a:tc>
-                    <a:tc>
-                      <a:txBody>
-                        <a:bodyPr/>
-                        <a:lstStyle/>
-                        <a:p>
-                          <a:pPr algn="ctr"/>
-                          <a:r>
-                            <a:rPr lang="en-US" dirty="0"/>
-                            <a:t>-0.021</a:t>
-                          </a:r>
-                        </a:p>
-                      </a:txBody>
-                      <a:tcPr anchor="ctr"/>
-                    </a:tc>
-                    <a:tc>
-                      <a:txBody>
-                        <a:bodyPr/>
-                        <a:lstStyle/>
-                        <a:p>
-                          <a:pPr algn="ctr"/>
-                          <a:endParaRPr lang="en-US" dirty="0"/>
-                        </a:p>
-                      </a:txBody>
-                      <a:tcPr anchor="ctr"/>
-                    </a:tc>
-                    <a:extLst>
-                      <a:ext uri="{0D108BD9-81ED-4DB2-BD59-A6C34878D82A}">
-                        <a16:rowId xmlns:a16="http://schemas.microsoft.com/office/drawing/2014/main" val="1095918322"/>
-                      </a:ext>
-                    </a:extLst>
-                  </a:tr>
-                  <a:tr h="534987">
-                    <a:tc>
-                      <a:txBody>
-                        <a:bodyPr/>
-                        <a:lstStyle/>
-                        <a:p>
-                          <a:pPr marL="0" marR="0" lvl="0" indent="0" algn="ctr" defTabSz="914400" rtl="0" eaLnBrk="1" fontAlgn="auto" latinLnBrk="0" hangingPunct="1">
-                            <a:lnSpc>
-                              <a:spcPts val="1000"/>
-                            </a:lnSpc>
-                            <a:spcBef>
-                              <a:spcPts val="0"/>
-                            </a:spcBef>
-                            <a:spcAft>
-                              <a:spcPts val="0"/>
-                            </a:spcAft>
-                            <a:buClrTx/>
-                            <a:buSzTx/>
-                            <a:buFontTx/>
-                            <a:buNone/>
-                            <a:tabLst/>
-                            <a:defRPr/>
-                          </a:pPr>
-                          <a:r>
-                            <a:rPr lang="en-US" sz="3200" dirty="0"/>
-                            <a:t>.</a:t>
-                          </a:r>
-                        </a:p>
-                        <a:p>
-                          <a:pPr marL="0" marR="0" lvl="0" indent="0" algn="ctr" defTabSz="914400" rtl="0" eaLnBrk="1" fontAlgn="auto" latinLnBrk="0" hangingPunct="1">
-                            <a:lnSpc>
-                              <a:spcPts val="1000"/>
-                            </a:lnSpc>
-                            <a:spcBef>
-                              <a:spcPts val="0"/>
-                            </a:spcBef>
-                            <a:spcAft>
-                              <a:spcPts val="0"/>
-                            </a:spcAft>
-                            <a:buClrTx/>
-                            <a:buSzTx/>
-                            <a:buFontTx/>
-                            <a:buNone/>
-                            <a:tabLst/>
-                            <a:defRPr/>
-                          </a:pPr>
-                          <a:r>
-                            <a:rPr lang="en-US" sz="3200" dirty="0"/>
-                            <a:t>.</a:t>
-                          </a:r>
-                        </a:p>
-                        <a:p>
-                          <a:pPr marL="0" marR="0" lvl="0" indent="0" algn="ctr" defTabSz="914400" rtl="0" eaLnBrk="1" fontAlgn="auto" latinLnBrk="0" hangingPunct="1">
-                            <a:lnSpc>
-                              <a:spcPts val="1000"/>
-                            </a:lnSpc>
-                            <a:spcBef>
-                              <a:spcPts val="0"/>
-                            </a:spcBef>
-                            <a:spcAft>
-                              <a:spcPts val="0"/>
-                            </a:spcAft>
-                            <a:buClrTx/>
-                            <a:buSzTx/>
-                            <a:buFontTx/>
-                            <a:buNone/>
-                            <a:tabLst/>
-                            <a:defRPr/>
-                          </a:pPr>
-                          <a:r>
-                            <a:rPr lang="en-US" sz="3200" dirty="0"/>
-                            <a:t>.</a:t>
-                          </a:r>
-                        </a:p>
-                      </a:txBody>
-                      <a:tcPr anchor="ctr"/>
-                    </a:tc>
-                    <a:tc>
-                      <a:txBody>
-                        <a:bodyPr/>
-                        <a:lstStyle/>
-                        <a:p>
-                          <a:pPr algn="ctr"/>
-                          <a:endParaRPr lang="en-US" dirty="0"/>
-                        </a:p>
-                      </a:txBody>
-                      <a:tcPr anchor="ctr"/>
-                    </a:tc>
-                    <a:tc>
-                      <a:txBody>
-                        <a:bodyPr/>
-                        <a:lstStyle/>
-                        <a:p>
-                          <a:pPr algn="ctr"/>
-                          <a:endParaRPr lang="en-US"/>
-                        </a:p>
-                      </a:txBody>
-                      <a:tcPr anchor="ctr"/>
-                    </a:tc>
-                    <a:tc>
-                      <a:txBody>
-                        <a:bodyPr/>
-                        <a:lstStyle/>
-                        <a:p>
-                          <a:pPr algn="ctr"/>
-                          <a:endParaRPr lang="en-US" dirty="0"/>
-                        </a:p>
-                      </a:txBody>
-                      <a:tcPr anchor="ctr"/>
-                    </a:tc>
-                    <a:tc>
-                      <a:txBody>
-                        <a:bodyPr/>
-                        <a:lstStyle/>
-                        <a:p>
-                          <a:pPr algn="ctr"/>
-                          <a:endParaRPr lang="en-US" dirty="0"/>
-                        </a:p>
-                      </a:txBody>
-                      <a:tcPr anchor="ctr"/>
-                    </a:tc>
-                    <a:extLst>
-                      <a:ext uri="{0D108BD9-81ED-4DB2-BD59-A6C34878D82A}">
-                        <a16:rowId xmlns:a16="http://schemas.microsoft.com/office/drawing/2014/main" val="3982625856"/>
-                      </a:ext>
-                    </a:extLst>
-                  </a:tr>
-                </a:tbl>
-              </a:graphicData>
-            </a:graphic>
-          </p:graphicFrame>
-        </mc:Choice>
-        <mc:Fallback xmlns="">
-          <p:graphicFrame>
-            <p:nvGraphicFramePr>
-              <p:cNvPr id="5" name="Table 4">
-                <a:extLst>
-                  <a:ext uri="{FF2B5EF4-FFF2-40B4-BE49-F238E27FC236}">
-                    <a16:creationId xmlns:a16="http://schemas.microsoft.com/office/drawing/2014/main" id="{F34D206A-D85D-D9E4-6AC2-0921A44C6307}"/>
-                  </a:ext>
-                </a:extLst>
-              </p:cNvPr>
-              <p:cNvGraphicFramePr>
-                <a:graphicFrameLocks noGrp="1"/>
-              </p:cNvGraphicFramePr>
-              <p:nvPr>
-                <p:extLst>
-                  <p:ext uri="{D42A27DB-BD31-4B8C-83A1-F6EECF244321}">
-                    <p14:modId xmlns:p14="http://schemas.microsoft.com/office/powerpoint/2010/main" val="210461856"/>
-                  </p:ext>
-                </p:extLst>
-              </p:nvPr>
-            </p:nvGraphicFramePr>
-            <p:xfrm>
-              <a:off x="1499368" y="1583490"/>
-              <a:ext cx="8128000" cy="3654994"/>
-            </p:xfrm>
-            <a:graphic>
-              <a:graphicData uri="http://schemas.openxmlformats.org/drawingml/2006/table">
-                <a:tbl>
-                  <a:tblPr firstRow="1" bandRow="1">
-                    <a:tableStyleId>{5C22544A-7EE6-4342-B048-85BDC9FD1C3A}</a:tableStyleId>
-                  </a:tblPr>
-                  <a:tblGrid>
-                    <a:gridCol w="1625600">
-                      <a:extLst>
-                        <a:ext uri="{9D8B030D-6E8A-4147-A177-3AD203B41FA5}">
-                          <a16:colId xmlns:a16="http://schemas.microsoft.com/office/drawing/2014/main" val="2075231717"/>
-                        </a:ext>
-                      </a:extLst>
-                    </a:gridCol>
-                    <a:gridCol w="1625600">
-                      <a:extLst>
-                        <a:ext uri="{9D8B030D-6E8A-4147-A177-3AD203B41FA5}">
-                          <a16:colId xmlns:a16="http://schemas.microsoft.com/office/drawing/2014/main" val="3983029180"/>
-                        </a:ext>
-                      </a:extLst>
-                    </a:gridCol>
-                    <a:gridCol w="1625600">
-                      <a:extLst>
-                        <a:ext uri="{9D8B030D-6E8A-4147-A177-3AD203B41FA5}">
-                          <a16:colId xmlns:a16="http://schemas.microsoft.com/office/drawing/2014/main" val="1758694013"/>
-                        </a:ext>
-                      </a:extLst>
-                    </a:gridCol>
-                    <a:gridCol w="1625600">
-                      <a:extLst>
-                        <a:ext uri="{9D8B030D-6E8A-4147-A177-3AD203B41FA5}">
-                          <a16:colId xmlns:a16="http://schemas.microsoft.com/office/drawing/2014/main" val="4159486076"/>
-                        </a:ext>
-                      </a:extLst>
-                    </a:gridCol>
-                    <a:gridCol w="1625600">
-                      <a:extLst>
-                        <a:ext uri="{9D8B030D-6E8A-4147-A177-3AD203B41FA5}">
-                          <a16:colId xmlns:a16="http://schemas.microsoft.com/office/drawing/2014/main" val="2621157299"/>
-                        </a:ext>
-                      </a:extLst>
-                    </a:gridCol>
-                  </a:tblGrid>
-                  <a:tr h="1059042">
-                    <a:tc>
-                      <a:txBody>
-                        <a:bodyPr/>
-                        <a:lstStyle/>
-                        <a:p>
-                          <a:endParaRPr lang="en-US"/>
-                        </a:p>
-                      </a:txBody>
-                      <a:tcPr>
-                        <a:blipFill>
-                          <a:blip r:embed="rId2"/>
-                          <a:stretch>
-                            <a:fillRect l="-375" t="-2299" r="-401498" b="-264368"/>
-                          </a:stretch>
-                        </a:blipFill>
-                      </a:tcPr>
-                    </a:tc>
-                    <a:tc>
-                      <a:txBody>
-                        <a:bodyPr/>
-                        <a:lstStyle/>
-                        <a:p>
-                          <a:endParaRPr lang="en-US"/>
-                        </a:p>
-                      </a:txBody>
-                      <a:tcPr>
-                        <a:blipFill>
-                          <a:blip r:embed="rId2"/>
-                          <a:stretch>
-                            <a:fillRect l="-100375" t="-2299" r="-301498" b="-264368"/>
-                          </a:stretch>
-                        </a:blipFill>
-                      </a:tcPr>
-                    </a:tc>
-                    <a:tc>
-                      <a:txBody>
-                        <a:bodyPr/>
-                        <a:lstStyle/>
-                        <a:p>
-                          <a:endParaRPr lang="en-US"/>
-                        </a:p>
-                      </a:txBody>
-                      <a:tcPr>
-                        <a:blipFill>
-                          <a:blip r:embed="rId2"/>
-                          <a:stretch>
-                            <a:fillRect l="-200375" t="-2299" r="-201498" b="-264368"/>
-                          </a:stretch>
-                        </a:blipFill>
-                      </a:tcPr>
-                    </a:tc>
-                    <a:tc>
-                      <a:txBody>
-                        <a:bodyPr/>
-                        <a:lstStyle/>
-                        <a:p>
-                          <a:endParaRPr lang="en-US"/>
-                        </a:p>
-                      </a:txBody>
-                      <a:tcPr>
-                        <a:blipFill>
-                          <a:blip r:embed="rId2"/>
-                          <a:stretch>
-                            <a:fillRect l="-300375" t="-2299" r="-101498" b="-264368"/>
-                          </a:stretch>
-                        </a:blipFill>
-                      </a:tcPr>
-                    </a:tc>
-                    <a:tc>
-                      <a:txBody>
-                        <a:bodyPr/>
-                        <a:lstStyle/>
-                        <a:p>
-                          <a:endParaRPr lang="en-US"/>
-                        </a:p>
-                      </a:txBody>
-                      <a:tcPr>
-                        <a:blipFill>
-                          <a:blip r:embed="rId2"/>
-                          <a:stretch>
-                            <a:fillRect l="-400375" t="-2299" r="-1498" b="-264368"/>
-                          </a:stretch>
-                        </a:blipFill>
-                      </a:tcPr>
-                    </a:tc>
-                    <a:extLst>
-                      <a:ext uri="{0D108BD9-81ED-4DB2-BD59-A6C34878D82A}">
-                        <a16:rowId xmlns:a16="http://schemas.microsoft.com/office/drawing/2014/main" val="4245311786"/>
-                      </a:ext>
-                    </a:extLst>
-                  </a:tr>
-                  <a:tr h="1019219">
-                    <a:tc>
-                      <a:txBody>
-                        <a:bodyPr/>
-                        <a:lstStyle/>
-                        <a:p>
-                          <a:pPr algn="ctr"/>
-                          <a:endParaRPr lang="en-US" dirty="0"/>
-                        </a:p>
-                      </a:txBody>
-                      <a:tcPr anchor="ctr"/>
-                    </a:tc>
-                    <a:tc>
-                      <a:txBody>
-                        <a:bodyPr/>
-                        <a:lstStyle/>
-                        <a:p>
-                          <a:pPr algn="ctr"/>
-                          <a:r>
-                            <a:rPr lang="en-US" dirty="0"/>
-                            <a:t>1</a:t>
-                          </a:r>
-                        </a:p>
-                      </a:txBody>
-                      <a:tcPr anchor="ctr"/>
-                    </a:tc>
-                    <a:tc>
-                      <a:txBody>
-                        <a:bodyPr/>
-                        <a:lstStyle/>
-                        <a:p>
-                          <a:pPr algn="ctr"/>
-                          <a:r>
-                            <a:rPr lang="en-US" dirty="0"/>
-                            <a:t>+0.4</a:t>
-                          </a:r>
-                        </a:p>
-                      </a:txBody>
-                      <a:tcPr anchor="ctr"/>
-                    </a:tc>
-                    <a:tc>
-                      <a:txBody>
-                        <a:bodyPr/>
-                        <a:lstStyle/>
-                        <a:p>
-                          <a:pPr algn="ctr"/>
-                          <a:r>
-                            <a:rPr lang="en-US" dirty="0"/>
-                            <a:t>0.634</a:t>
-                          </a:r>
-                        </a:p>
-                      </a:txBody>
-                      <a:tcPr anchor="ctr"/>
-                    </a:tc>
-                    <a:tc>
-                      <a:txBody>
-                        <a:bodyPr/>
-                        <a:lstStyle/>
-                        <a:p>
-                          <a:pPr algn="ctr"/>
-                          <a:endParaRPr lang="en-US" dirty="0"/>
-                        </a:p>
-                      </a:txBody>
-                      <a:tcPr anchor="ctr"/>
-                    </a:tc>
-                    <a:extLst>
-                      <a:ext uri="{0D108BD9-81ED-4DB2-BD59-A6C34878D82A}">
-                        <a16:rowId xmlns:a16="http://schemas.microsoft.com/office/drawing/2014/main" val="49936605"/>
-                      </a:ext>
-                    </a:extLst>
-                  </a:tr>
-                  <a:tr h="1023457">
-                    <a:tc>
-                      <a:txBody>
-                        <a:bodyPr/>
-                        <a:lstStyle/>
-                        <a:p>
-                          <a:pPr algn="ctr"/>
-                          <a:endParaRPr lang="en-US" dirty="0"/>
-                        </a:p>
-                      </a:txBody>
-                      <a:tcPr anchor="ctr"/>
-                    </a:tc>
-                    <a:tc>
-                      <a:txBody>
-                        <a:bodyPr/>
-                        <a:lstStyle/>
-                        <a:p>
-                          <a:pPr algn="ctr"/>
-                          <a:r>
-                            <a:rPr lang="en-US" dirty="0"/>
-                            <a:t>0</a:t>
-                          </a:r>
-                        </a:p>
-                      </a:txBody>
-                      <a:tcPr anchor="ctr"/>
-                    </a:tc>
-                    <a:tc>
-                      <a:txBody>
-                        <a:bodyPr/>
-                        <a:lstStyle/>
-                        <a:p>
-                          <a:pPr algn="ctr"/>
-                          <a:r>
-                            <a:rPr lang="en-US" dirty="0"/>
-                            <a:t>-0.4</a:t>
-                          </a:r>
-                        </a:p>
-                      </a:txBody>
-                      <a:tcPr anchor="ctr"/>
-                    </a:tc>
-                    <a:tc>
-                      <a:txBody>
-                        <a:bodyPr/>
-                        <a:lstStyle/>
-                        <a:p>
-                          <a:pPr algn="ctr"/>
-                          <a:r>
-                            <a:rPr lang="en-US" dirty="0"/>
-                            <a:t>-0.021</a:t>
-                          </a:r>
-                        </a:p>
-                      </a:txBody>
-                      <a:tcPr anchor="ctr"/>
-                    </a:tc>
-                    <a:tc>
-                      <a:txBody>
-                        <a:bodyPr/>
-                        <a:lstStyle/>
-                        <a:p>
-                          <a:pPr algn="ctr"/>
-                          <a:endParaRPr lang="en-US" dirty="0"/>
-                        </a:p>
-                      </a:txBody>
-                      <a:tcPr anchor="ctr"/>
-                    </a:tc>
-                    <a:extLst>
-                      <a:ext uri="{0D108BD9-81ED-4DB2-BD59-A6C34878D82A}">
-                        <a16:rowId xmlns:a16="http://schemas.microsoft.com/office/drawing/2014/main" val="1095918322"/>
-                      </a:ext>
-                    </a:extLst>
-                  </a:tr>
-                  <a:tr h="553276">
-                    <a:tc>
-                      <a:txBody>
-                        <a:bodyPr/>
-                        <a:lstStyle/>
-                        <a:p>
-                          <a:pPr marL="0" marR="0" lvl="0" indent="0" algn="ctr" defTabSz="914400" rtl="0" eaLnBrk="1" fontAlgn="auto" latinLnBrk="0" hangingPunct="1">
-                            <a:lnSpc>
-                              <a:spcPts val="1000"/>
-                            </a:lnSpc>
-                            <a:spcBef>
-                              <a:spcPts val="0"/>
-                            </a:spcBef>
-                            <a:spcAft>
-                              <a:spcPts val="0"/>
-                            </a:spcAft>
-                            <a:buClrTx/>
-                            <a:buSzTx/>
-                            <a:buFontTx/>
-                            <a:buNone/>
-                            <a:tabLst/>
-                            <a:defRPr/>
-                          </a:pPr>
-                          <a:r>
-                            <a:rPr lang="en-US" sz="3200" dirty="0"/>
-                            <a:t>.</a:t>
-                          </a:r>
-                        </a:p>
-                        <a:p>
-                          <a:pPr marL="0" marR="0" lvl="0" indent="0" algn="ctr" defTabSz="914400" rtl="0" eaLnBrk="1" fontAlgn="auto" latinLnBrk="0" hangingPunct="1">
-                            <a:lnSpc>
-                              <a:spcPts val="1000"/>
-                            </a:lnSpc>
-                            <a:spcBef>
-                              <a:spcPts val="0"/>
-                            </a:spcBef>
-                            <a:spcAft>
-                              <a:spcPts val="0"/>
-                            </a:spcAft>
-                            <a:buClrTx/>
-                            <a:buSzTx/>
-                            <a:buFontTx/>
-                            <a:buNone/>
-                            <a:tabLst/>
-                            <a:defRPr/>
-                          </a:pPr>
-                          <a:r>
-                            <a:rPr lang="en-US" sz="3200" dirty="0"/>
-                            <a:t>.</a:t>
-                          </a:r>
-                        </a:p>
-                        <a:p>
-                          <a:pPr marL="0" marR="0" lvl="0" indent="0" algn="ctr" defTabSz="914400" rtl="0" eaLnBrk="1" fontAlgn="auto" latinLnBrk="0" hangingPunct="1">
-                            <a:lnSpc>
-                              <a:spcPts val="1000"/>
-                            </a:lnSpc>
-                            <a:spcBef>
-                              <a:spcPts val="0"/>
-                            </a:spcBef>
-                            <a:spcAft>
-                              <a:spcPts val="0"/>
-                            </a:spcAft>
-                            <a:buClrTx/>
-                            <a:buSzTx/>
-                            <a:buFontTx/>
-                            <a:buNone/>
-                            <a:tabLst/>
-                            <a:defRPr/>
-                          </a:pPr>
-                          <a:r>
-                            <a:rPr lang="en-US" sz="3200" dirty="0"/>
-                            <a:t>.</a:t>
-                          </a:r>
-                        </a:p>
-                      </a:txBody>
-                      <a:tcPr anchor="ctr"/>
-                    </a:tc>
-                    <a:tc>
-                      <a:txBody>
-                        <a:bodyPr/>
-                        <a:lstStyle/>
-                        <a:p>
-                          <a:pPr algn="ctr"/>
-                          <a:endParaRPr lang="en-US" dirty="0"/>
-                        </a:p>
-                      </a:txBody>
-                      <a:tcPr anchor="ctr"/>
-                    </a:tc>
-                    <a:tc>
-                      <a:txBody>
-                        <a:bodyPr/>
-                        <a:lstStyle/>
-                        <a:p>
-                          <a:pPr algn="ctr"/>
-                          <a:endParaRPr lang="en-US"/>
-                        </a:p>
-                      </a:txBody>
-                      <a:tcPr anchor="ctr"/>
-                    </a:tc>
-                    <a:tc>
-                      <a:txBody>
-                        <a:bodyPr/>
-                        <a:lstStyle/>
-                        <a:p>
-                          <a:pPr algn="ctr"/>
-                          <a:endParaRPr lang="en-US" dirty="0"/>
-                        </a:p>
-                      </a:txBody>
-                      <a:tcPr anchor="ctr"/>
-                    </a:tc>
-                    <a:tc>
-                      <a:txBody>
-                        <a:bodyPr/>
-                        <a:lstStyle/>
-                        <a:p>
-                          <a:pPr algn="ctr"/>
-                          <a:endParaRPr lang="en-US" dirty="0"/>
-                        </a:p>
-                      </a:txBody>
-                      <a:tcPr anchor="ctr"/>
-                    </a:tc>
-                    <a:extLst>
-                      <a:ext uri="{0D108BD9-81ED-4DB2-BD59-A6C34878D82A}">
-                        <a16:rowId xmlns:a16="http://schemas.microsoft.com/office/drawing/2014/main" val="3982625856"/>
-                      </a:ext>
-                    </a:extLst>
-                  </a:tr>
-                </a:tbl>
-              </a:graphicData>
-            </a:graphic>
-          </p:graphicFrame>
-        </mc:Fallback>
-      </mc:AlternateContent>
-      <p:sp>
-        <p:nvSpPr>
-          <p:cNvPr id="4" name="Title 3">
-            <a:extLst>
-              <a:ext uri="{FF2B5EF4-FFF2-40B4-BE49-F238E27FC236}">
-                <a16:creationId xmlns:a16="http://schemas.microsoft.com/office/drawing/2014/main" id="{E8B1472F-3577-7AE5-F4B8-4165F794895E}"/>
-              </a:ext>
-            </a:extLst>
-          </p:cNvPr>
-          <p:cNvSpPr>
-            <a:spLocks noGrp="1"/>
-          </p:cNvSpPr>
-          <p:nvPr>
-            <p:ph type="title"/>
-          </p:nvPr>
-        </p:nvSpPr>
-        <p:spPr>
-          <a:xfrm>
-            <a:off x="499872" y="200533"/>
-            <a:ext cx="10515600" cy="1325563"/>
-          </a:xfrm>
-        </p:spPr>
-        <p:txBody>
-          <a:bodyPr/>
-          <a:lstStyle/>
-          <a:p>
-            <a:r>
-              <a:rPr lang="en-US" dirty="0"/>
-              <a:t>Machine Learning</a:t>
-            </a:r>
-          </a:p>
-        </p:txBody>
-      </p:sp>
-      <p:grpSp>
-        <p:nvGrpSpPr>
-          <p:cNvPr id="2" name="Group 1">
-            <a:extLst>
-              <a:ext uri="{FF2B5EF4-FFF2-40B4-BE49-F238E27FC236}">
-                <a16:creationId xmlns:a16="http://schemas.microsoft.com/office/drawing/2014/main" id="{CD398B2A-DE1E-5E55-ABD5-3976D602898C}"/>
-              </a:ext>
-            </a:extLst>
-          </p:cNvPr>
-          <p:cNvGrpSpPr/>
-          <p:nvPr/>
-        </p:nvGrpSpPr>
-        <p:grpSpPr>
-          <a:xfrm>
-            <a:off x="1718883" y="3823326"/>
-            <a:ext cx="1082520" cy="725400"/>
-            <a:chOff x="1059264" y="3751776"/>
-            <a:chExt cx="1082520" cy="725400"/>
-          </a:xfrm>
-        </p:grpSpPr>
-        <mc:AlternateContent xmlns:mc="http://schemas.openxmlformats.org/markup-compatibility/2006" xmlns:p14="http://schemas.microsoft.com/office/powerpoint/2010/main">
-          <mc:Choice Requires="p14">
-            <p:contentPart p14:bwMode="auto" r:id="rId3">
-              <p14:nvContentPartPr>
-                <p14:cNvPr id="42" name="Ink 41">
-                  <a:extLst>
-                    <a:ext uri="{FF2B5EF4-FFF2-40B4-BE49-F238E27FC236}">
-                      <a16:creationId xmlns:a16="http://schemas.microsoft.com/office/drawing/2014/main" id="{AC928A4E-42FA-B1B3-BAA5-26EAA72672C0}"/>
-                    </a:ext>
-                  </a:extLst>
-                </p14:cNvPr>
-                <p14:cNvContentPartPr/>
-                <p14:nvPr/>
-              </p14:nvContentPartPr>
-              <p14:xfrm>
-                <a:off x="1449864" y="3751776"/>
-                <a:ext cx="77760" cy="725400"/>
-              </p14:xfrm>
-            </p:contentPart>
-          </mc:Choice>
-          <mc:Fallback xmlns="">
-            <p:pic>
-              <p:nvPicPr>
-                <p:cNvPr id="42" name="Ink 41">
-                  <a:extLst>
-                    <a:ext uri="{FF2B5EF4-FFF2-40B4-BE49-F238E27FC236}">
-                      <a16:creationId xmlns:a16="http://schemas.microsoft.com/office/drawing/2014/main" id="{46EB35FE-E34A-750C-3CB1-D411CF5A7660}"/>
-                    </a:ext>
-                  </a:extLst>
-                </p:cNvPr>
-                <p:cNvPicPr/>
-                <p:nvPr/>
-              </p:nvPicPr>
-              <p:blipFill>
-                <a:blip r:embed="rId4"/>
-                <a:stretch>
-                  <a:fillRect/>
-                </a:stretch>
-              </p:blipFill>
-              <p:spPr>
-                <a:xfrm>
-                  <a:off x="1440864" y="3742776"/>
-                  <a:ext cx="95400" cy="743040"/>
-                </a:xfrm>
-                <a:prstGeom prst="rect">
-                  <a:avLst/>
-                </a:prstGeom>
-              </p:spPr>
-            </p:pic>
-          </mc:Fallback>
-        </mc:AlternateContent>
-        <mc:AlternateContent xmlns:mc="http://schemas.openxmlformats.org/markup-compatibility/2006" xmlns:p14="http://schemas.microsoft.com/office/powerpoint/2010/main">
-          <mc:Choice Requires="p14">
-            <p:contentPart p14:bwMode="auto" r:id="rId5">
-              <p14:nvContentPartPr>
-                <p14:cNvPr id="43" name="Ink 42">
-                  <a:extLst>
-                    <a:ext uri="{FF2B5EF4-FFF2-40B4-BE49-F238E27FC236}">
-                      <a16:creationId xmlns:a16="http://schemas.microsoft.com/office/drawing/2014/main" id="{13A2B999-E26D-03FD-7C8F-E3539F0E8B79}"/>
-                    </a:ext>
-                  </a:extLst>
-                </p14:cNvPr>
-                <p14:cNvContentPartPr/>
-                <p14:nvPr/>
-              </p14:nvContentPartPr>
-              <p14:xfrm>
-                <a:off x="1779264" y="3775176"/>
-                <a:ext cx="31320" cy="700200"/>
-              </p14:xfrm>
-            </p:contentPart>
-          </mc:Choice>
-          <mc:Fallback xmlns="">
-            <p:pic>
-              <p:nvPicPr>
-                <p:cNvPr id="43" name="Ink 42">
-                  <a:extLst>
-                    <a:ext uri="{FF2B5EF4-FFF2-40B4-BE49-F238E27FC236}">
-                      <a16:creationId xmlns:a16="http://schemas.microsoft.com/office/drawing/2014/main" id="{67B82477-3724-F624-CA6F-37E6E8CC35E2}"/>
-                    </a:ext>
-                  </a:extLst>
-                </p:cNvPr>
-                <p:cNvPicPr/>
-                <p:nvPr/>
-              </p:nvPicPr>
-              <p:blipFill>
-                <a:blip r:embed="rId6"/>
-                <a:stretch>
-                  <a:fillRect/>
-                </a:stretch>
-              </p:blipFill>
-              <p:spPr>
-                <a:xfrm>
-                  <a:off x="1770264" y="3766176"/>
-                  <a:ext cx="48960" cy="717840"/>
-                </a:xfrm>
-                <a:prstGeom prst="rect">
-                  <a:avLst/>
-                </a:prstGeom>
-              </p:spPr>
-            </p:pic>
-          </mc:Fallback>
-        </mc:AlternateContent>
-        <mc:AlternateContent xmlns:mc="http://schemas.openxmlformats.org/markup-compatibility/2006" xmlns:p14="http://schemas.microsoft.com/office/powerpoint/2010/main">
-          <mc:Choice Requires="p14">
-            <p:contentPart p14:bwMode="auto" r:id="rId7">
-              <p14:nvContentPartPr>
-                <p14:cNvPr id="44" name="Ink 43">
-                  <a:extLst>
-                    <a:ext uri="{FF2B5EF4-FFF2-40B4-BE49-F238E27FC236}">
-                      <a16:creationId xmlns:a16="http://schemas.microsoft.com/office/drawing/2014/main" id="{0DFE752A-A3D9-09AC-E68F-5EEC563D4729}"/>
-                    </a:ext>
-                  </a:extLst>
-                </p14:cNvPr>
-                <p14:cNvContentPartPr/>
-                <p14:nvPr/>
-              </p14:nvContentPartPr>
-              <p14:xfrm>
-                <a:off x="1192824" y="4032936"/>
-                <a:ext cx="800640" cy="27720"/>
-              </p14:xfrm>
-            </p:contentPart>
-          </mc:Choice>
-          <mc:Fallback xmlns="">
-            <p:pic>
-              <p:nvPicPr>
-                <p:cNvPr id="44" name="Ink 43">
-                  <a:extLst>
-                    <a:ext uri="{FF2B5EF4-FFF2-40B4-BE49-F238E27FC236}">
-                      <a16:creationId xmlns:a16="http://schemas.microsoft.com/office/drawing/2014/main" id="{0D593035-0D53-7399-4C2D-CACD27A72481}"/>
-                    </a:ext>
-                  </a:extLst>
-                </p:cNvPr>
-                <p:cNvPicPr/>
-                <p:nvPr/>
-              </p:nvPicPr>
-              <p:blipFill>
-                <a:blip r:embed="rId8"/>
-                <a:stretch>
-                  <a:fillRect/>
-                </a:stretch>
-              </p:blipFill>
-              <p:spPr>
-                <a:xfrm>
-                  <a:off x="1183824" y="4023818"/>
-                  <a:ext cx="818280" cy="45592"/>
-                </a:xfrm>
-                <a:prstGeom prst="rect">
-                  <a:avLst/>
-                </a:prstGeom>
-              </p:spPr>
-            </p:pic>
-          </mc:Fallback>
-        </mc:AlternateContent>
-        <mc:AlternateContent xmlns:mc="http://schemas.openxmlformats.org/markup-compatibility/2006" xmlns:p14="http://schemas.microsoft.com/office/powerpoint/2010/main">
-          <mc:Choice Requires="p14">
-            <p:contentPart p14:bwMode="auto" r:id="rId9">
-              <p14:nvContentPartPr>
-                <p14:cNvPr id="45" name="Ink 44">
-                  <a:extLst>
-                    <a:ext uri="{FF2B5EF4-FFF2-40B4-BE49-F238E27FC236}">
-                      <a16:creationId xmlns:a16="http://schemas.microsoft.com/office/drawing/2014/main" id="{61497949-94BA-AA08-BF70-D493B520B93F}"/>
-                    </a:ext>
-                  </a:extLst>
-                </p14:cNvPr>
-                <p14:cNvContentPartPr/>
-                <p14:nvPr/>
-              </p14:nvContentPartPr>
-              <p14:xfrm>
-                <a:off x="1059264" y="4226616"/>
-                <a:ext cx="1082520" cy="80640"/>
-              </p14:xfrm>
-            </p:contentPart>
-          </mc:Choice>
-          <mc:Fallback xmlns="">
-            <p:pic>
-              <p:nvPicPr>
-                <p:cNvPr id="45" name="Ink 44">
-                  <a:extLst>
-                    <a:ext uri="{FF2B5EF4-FFF2-40B4-BE49-F238E27FC236}">
-                      <a16:creationId xmlns:a16="http://schemas.microsoft.com/office/drawing/2014/main" id="{40BD2996-C378-09FE-BB6C-4EAB7C81D880}"/>
-                    </a:ext>
-                  </a:extLst>
-                </p:cNvPr>
-                <p:cNvPicPr/>
-                <p:nvPr/>
-              </p:nvPicPr>
-              <p:blipFill>
-                <a:blip r:embed="rId10"/>
-                <a:stretch>
-                  <a:fillRect/>
-                </a:stretch>
-              </p:blipFill>
-              <p:spPr>
-                <a:xfrm>
-                  <a:off x="1050264" y="4217616"/>
-                  <a:ext cx="1100160" cy="98280"/>
-                </a:xfrm>
-                <a:prstGeom prst="rect">
-                  <a:avLst/>
-                </a:prstGeom>
-              </p:spPr>
-            </p:pic>
-          </mc:Fallback>
-        </mc:AlternateContent>
-        <mc:AlternateContent xmlns:mc="http://schemas.openxmlformats.org/markup-compatibility/2006" xmlns:p14="http://schemas.microsoft.com/office/powerpoint/2010/main">
-          <mc:Choice Requires="p14">
-            <p:contentPart p14:bwMode="auto" r:id="rId11">
-              <p14:nvContentPartPr>
-                <p14:cNvPr id="47" name="Ink 46">
-                  <a:extLst>
-                    <a:ext uri="{FF2B5EF4-FFF2-40B4-BE49-F238E27FC236}">
-                      <a16:creationId xmlns:a16="http://schemas.microsoft.com/office/drawing/2014/main" id="{C351696E-F7CC-665D-2BF5-50EE11030E78}"/>
-                    </a:ext>
-                  </a:extLst>
-                </p14:cNvPr>
-                <p14:cNvContentPartPr/>
-                <p14:nvPr/>
-              </p14:nvContentPartPr>
-              <p14:xfrm>
-                <a:off x="1193904" y="3844656"/>
-                <a:ext cx="148680" cy="131400"/>
-              </p14:xfrm>
-            </p:contentPart>
-          </mc:Choice>
-          <mc:Fallback xmlns="">
-            <p:pic>
-              <p:nvPicPr>
-                <p:cNvPr id="47" name="Ink 46">
-                  <a:extLst>
-                    <a:ext uri="{FF2B5EF4-FFF2-40B4-BE49-F238E27FC236}">
-                      <a16:creationId xmlns:a16="http://schemas.microsoft.com/office/drawing/2014/main" id="{023DFBEE-7331-DD2D-2986-D41C74E91C66}"/>
-                    </a:ext>
-                  </a:extLst>
-                </p:cNvPr>
-                <p:cNvPicPr/>
-                <p:nvPr/>
-              </p:nvPicPr>
-              <p:blipFill>
-                <a:blip r:embed="rId12"/>
-                <a:stretch>
-                  <a:fillRect/>
-                </a:stretch>
-              </p:blipFill>
-              <p:spPr>
-                <a:xfrm>
-                  <a:off x="1184926" y="3835656"/>
-                  <a:ext cx="166277" cy="149040"/>
-                </a:xfrm>
-                <a:prstGeom prst="rect">
-                  <a:avLst/>
-                </a:prstGeom>
-              </p:spPr>
-            </p:pic>
-          </mc:Fallback>
-        </mc:AlternateContent>
-        <mc:AlternateContent xmlns:mc="http://schemas.openxmlformats.org/markup-compatibility/2006" xmlns:p14="http://schemas.microsoft.com/office/powerpoint/2010/main">
-          <mc:Choice Requires="p14">
-            <p:contentPart p14:bwMode="auto" r:id="rId13">
-              <p14:nvContentPartPr>
-                <p14:cNvPr id="48" name="Ink 47">
-                  <a:extLst>
-                    <a:ext uri="{FF2B5EF4-FFF2-40B4-BE49-F238E27FC236}">
-                      <a16:creationId xmlns:a16="http://schemas.microsoft.com/office/drawing/2014/main" id="{1F3AF3CE-993F-1F0C-2987-DC65172DBBEC}"/>
-                    </a:ext>
-                  </a:extLst>
-                </p14:cNvPr>
-                <p14:cNvContentPartPr/>
-                <p14:nvPr/>
-              </p14:nvContentPartPr>
-              <p14:xfrm>
-                <a:off x="1187784" y="3848256"/>
-                <a:ext cx="152640" cy="156600"/>
-              </p14:xfrm>
-            </p:contentPart>
-          </mc:Choice>
-          <mc:Fallback xmlns="">
-            <p:pic>
-              <p:nvPicPr>
-                <p:cNvPr id="48" name="Ink 47">
-                  <a:extLst>
-                    <a:ext uri="{FF2B5EF4-FFF2-40B4-BE49-F238E27FC236}">
-                      <a16:creationId xmlns:a16="http://schemas.microsoft.com/office/drawing/2014/main" id="{81FB4DFA-BE43-3750-3A09-008F69435065}"/>
-                    </a:ext>
-                  </a:extLst>
-                </p:cNvPr>
-                <p:cNvPicPr/>
-                <p:nvPr/>
-              </p:nvPicPr>
-              <p:blipFill>
-                <a:blip r:embed="rId14"/>
-                <a:stretch>
-                  <a:fillRect/>
-                </a:stretch>
-              </p:blipFill>
-              <p:spPr>
-                <a:xfrm>
-                  <a:off x="1178763" y="3839256"/>
-                  <a:ext cx="170322" cy="174240"/>
-                </a:xfrm>
-                <a:prstGeom prst="rect">
-                  <a:avLst/>
-                </a:prstGeom>
-              </p:spPr>
-            </p:pic>
-          </mc:Fallback>
-        </mc:AlternateContent>
-        <mc:AlternateContent xmlns:mc="http://schemas.openxmlformats.org/markup-compatibility/2006" xmlns:p14="http://schemas.microsoft.com/office/powerpoint/2010/main">
-          <mc:Choice Requires="p14">
-            <p:contentPart p14:bwMode="auto" r:id="rId15">
-              <p14:nvContentPartPr>
-                <p14:cNvPr id="50" name="Ink 49">
-                  <a:extLst>
-                    <a:ext uri="{FF2B5EF4-FFF2-40B4-BE49-F238E27FC236}">
-                      <a16:creationId xmlns:a16="http://schemas.microsoft.com/office/drawing/2014/main" id="{28CE5A16-A3FB-96AD-9241-C378F37BFE93}"/>
-                    </a:ext>
-                  </a:extLst>
-                </p14:cNvPr>
-                <p14:cNvContentPartPr/>
-                <p14:nvPr/>
-              </p14:nvContentPartPr>
-              <p14:xfrm>
-                <a:off x="1491984" y="3896856"/>
-                <a:ext cx="136440" cy="88560"/>
-              </p14:xfrm>
-            </p:contentPart>
-          </mc:Choice>
-          <mc:Fallback xmlns="">
-            <p:pic>
-              <p:nvPicPr>
-                <p:cNvPr id="50" name="Ink 49">
-                  <a:extLst>
-                    <a:ext uri="{FF2B5EF4-FFF2-40B4-BE49-F238E27FC236}">
-                      <a16:creationId xmlns:a16="http://schemas.microsoft.com/office/drawing/2014/main" id="{3C94208B-CF98-F010-29EA-FF14243AEB83}"/>
-                    </a:ext>
-                  </a:extLst>
-                </p:cNvPr>
-                <p:cNvPicPr/>
-                <p:nvPr/>
-              </p:nvPicPr>
-              <p:blipFill>
-                <a:blip r:embed="rId16"/>
-                <a:stretch>
-                  <a:fillRect/>
-                </a:stretch>
-              </p:blipFill>
-              <p:spPr>
-                <a:xfrm>
-                  <a:off x="1482984" y="3887892"/>
-                  <a:ext cx="154080" cy="106129"/>
-                </a:xfrm>
-                <a:prstGeom prst="rect">
-                  <a:avLst/>
-                </a:prstGeom>
-              </p:spPr>
-            </p:pic>
-          </mc:Fallback>
-        </mc:AlternateContent>
-        <mc:AlternateContent xmlns:mc="http://schemas.openxmlformats.org/markup-compatibility/2006" xmlns:p14="http://schemas.microsoft.com/office/powerpoint/2010/main">
-          <mc:Choice Requires="p14">
-            <p:contentPart p14:bwMode="auto" r:id="rId17">
-              <p14:nvContentPartPr>
-                <p14:cNvPr id="52" name="Ink 51">
-                  <a:extLst>
-                    <a:ext uri="{FF2B5EF4-FFF2-40B4-BE49-F238E27FC236}">
-                      <a16:creationId xmlns:a16="http://schemas.microsoft.com/office/drawing/2014/main" id="{F7BD5EC7-AC6D-9605-1DF6-8F03DC3508C3}"/>
-                    </a:ext>
-                  </a:extLst>
-                </p14:cNvPr>
-                <p14:cNvContentPartPr/>
-                <p14:nvPr/>
-              </p14:nvContentPartPr>
-              <p14:xfrm>
-                <a:off x="1830744" y="3892176"/>
-                <a:ext cx="161640" cy="45000"/>
-              </p14:xfrm>
-            </p:contentPart>
-          </mc:Choice>
-          <mc:Fallback xmlns="">
-            <p:pic>
-              <p:nvPicPr>
-                <p:cNvPr id="52" name="Ink 51">
-                  <a:extLst>
-                    <a:ext uri="{FF2B5EF4-FFF2-40B4-BE49-F238E27FC236}">
-                      <a16:creationId xmlns:a16="http://schemas.microsoft.com/office/drawing/2014/main" id="{4328750C-69BD-5E5A-CD64-AE50C2E42504}"/>
-                    </a:ext>
-                  </a:extLst>
-                </p:cNvPr>
-                <p:cNvPicPr/>
-                <p:nvPr/>
-              </p:nvPicPr>
-              <p:blipFill>
-                <a:blip r:embed="rId18"/>
-                <a:stretch>
-                  <a:fillRect/>
-                </a:stretch>
-              </p:blipFill>
-              <p:spPr>
-                <a:xfrm>
-                  <a:off x="1821744" y="3883103"/>
-                  <a:ext cx="179280" cy="62782"/>
-                </a:xfrm>
-                <a:prstGeom prst="rect">
-                  <a:avLst/>
-                </a:prstGeom>
-              </p:spPr>
-            </p:pic>
-          </mc:Fallback>
-        </mc:AlternateContent>
-        <mc:AlternateContent xmlns:mc="http://schemas.openxmlformats.org/markup-compatibility/2006" xmlns:p14="http://schemas.microsoft.com/office/powerpoint/2010/main">
-          <mc:Choice Requires="p14">
-            <p:contentPart p14:bwMode="auto" r:id="rId19">
-              <p14:nvContentPartPr>
-                <p14:cNvPr id="53" name="Ink 52">
-                  <a:extLst>
-                    <a:ext uri="{FF2B5EF4-FFF2-40B4-BE49-F238E27FC236}">
-                      <a16:creationId xmlns:a16="http://schemas.microsoft.com/office/drawing/2014/main" id="{A626447E-D9C7-2CB0-F5FC-4FE9B535313A}"/>
-                    </a:ext>
-                  </a:extLst>
-                </p14:cNvPr>
-                <p14:cNvContentPartPr/>
-                <p14:nvPr/>
-              </p14:nvContentPartPr>
-              <p14:xfrm>
-                <a:off x="1862784" y="3803616"/>
-                <a:ext cx="201600" cy="158400"/>
-              </p14:xfrm>
-            </p:contentPart>
-          </mc:Choice>
-          <mc:Fallback xmlns="">
-            <p:pic>
-              <p:nvPicPr>
-                <p:cNvPr id="53" name="Ink 52">
-                  <a:extLst>
-                    <a:ext uri="{FF2B5EF4-FFF2-40B4-BE49-F238E27FC236}">
-                      <a16:creationId xmlns:a16="http://schemas.microsoft.com/office/drawing/2014/main" id="{4C905B8A-F707-69CF-A85C-C6BF9229B502}"/>
-                    </a:ext>
-                  </a:extLst>
-                </p:cNvPr>
-                <p:cNvPicPr/>
-                <p:nvPr/>
-              </p:nvPicPr>
-              <p:blipFill>
-                <a:blip r:embed="rId20"/>
-                <a:stretch>
-                  <a:fillRect/>
-                </a:stretch>
-              </p:blipFill>
-              <p:spPr>
-                <a:xfrm>
-                  <a:off x="1853784" y="3794616"/>
-                  <a:ext cx="219240" cy="176040"/>
-                </a:xfrm>
-                <a:prstGeom prst="rect">
-                  <a:avLst/>
-                </a:prstGeom>
-              </p:spPr>
-            </p:pic>
-          </mc:Fallback>
-        </mc:AlternateContent>
-        <mc:AlternateContent xmlns:mc="http://schemas.openxmlformats.org/markup-compatibility/2006" xmlns:p14="http://schemas.microsoft.com/office/powerpoint/2010/main">
-          <mc:Choice Requires="p14">
-            <p:contentPart p14:bwMode="auto" r:id="rId21">
-              <p14:nvContentPartPr>
-                <p14:cNvPr id="54" name="Ink 53">
-                  <a:extLst>
-                    <a:ext uri="{FF2B5EF4-FFF2-40B4-BE49-F238E27FC236}">
-                      <a16:creationId xmlns:a16="http://schemas.microsoft.com/office/drawing/2014/main" id="{36789D3A-0202-D71F-3834-5D170ED6757D}"/>
-                    </a:ext>
-                  </a:extLst>
-                </p14:cNvPr>
-                <p14:cNvContentPartPr/>
-                <p14:nvPr/>
-              </p14:nvContentPartPr>
-              <p14:xfrm>
-                <a:off x="1525104" y="4126536"/>
-                <a:ext cx="97560" cy="82080"/>
-              </p14:xfrm>
-            </p:contentPart>
-          </mc:Choice>
-          <mc:Fallback xmlns="">
-            <p:pic>
-              <p:nvPicPr>
-                <p:cNvPr id="54" name="Ink 53">
-                  <a:extLst>
-                    <a:ext uri="{FF2B5EF4-FFF2-40B4-BE49-F238E27FC236}">
-                      <a16:creationId xmlns:a16="http://schemas.microsoft.com/office/drawing/2014/main" id="{AAF36103-0F2D-9CAD-16AD-ABBEFA4DA72B}"/>
-                    </a:ext>
-                  </a:extLst>
-                </p:cNvPr>
-                <p:cNvPicPr/>
-                <p:nvPr/>
-              </p:nvPicPr>
-              <p:blipFill>
-                <a:blip r:embed="rId22"/>
-                <a:stretch>
-                  <a:fillRect/>
-                </a:stretch>
-              </p:blipFill>
-              <p:spPr>
-                <a:xfrm>
-                  <a:off x="1516104" y="4117536"/>
-                  <a:ext cx="115200" cy="99720"/>
-                </a:xfrm>
-                <a:prstGeom prst="rect">
-                  <a:avLst/>
-                </a:prstGeom>
-              </p:spPr>
-            </p:pic>
-          </mc:Fallback>
-        </mc:AlternateContent>
-      </p:grpSp>
-      <p:grpSp>
-        <p:nvGrpSpPr>
-          <p:cNvPr id="3" name="Group 2">
-            <a:extLst>
-              <a:ext uri="{FF2B5EF4-FFF2-40B4-BE49-F238E27FC236}">
-                <a16:creationId xmlns:a16="http://schemas.microsoft.com/office/drawing/2014/main" id="{02C09140-612A-AB7C-285A-634F7B8C35FC}"/>
-              </a:ext>
-            </a:extLst>
-          </p:cNvPr>
-          <p:cNvGrpSpPr/>
-          <p:nvPr/>
-        </p:nvGrpSpPr>
-        <p:grpSpPr>
-          <a:xfrm>
-            <a:off x="1647243" y="2744718"/>
-            <a:ext cx="1441800" cy="787680"/>
-            <a:chOff x="1023624" y="2645856"/>
-            <a:chExt cx="1441800" cy="787680"/>
-          </a:xfrm>
-        </p:grpSpPr>
-        <mc:AlternateContent xmlns:mc="http://schemas.openxmlformats.org/markup-compatibility/2006" xmlns:p14="http://schemas.microsoft.com/office/powerpoint/2010/main">
-          <mc:Choice Requires="p14">
-            <p:contentPart p14:bwMode="auto" r:id="rId23">
-              <p14:nvContentPartPr>
-                <p14:cNvPr id="177" name="Ink 176">
-                  <a:extLst>
-                    <a:ext uri="{FF2B5EF4-FFF2-40B4-BE49-F238E27FC236}">
-                      <a16:creationId xmlns:a16="http://schemas.microsoft.com/office/drawing/2014/main" id="{076BCA85-3B9D-02DE-93D4-0053159C7A47}"/>
-                    </a:ext>
-                  </a:extLst>
-                </p14:cNvPr>
-                <p14:cNvContentPartPr/>
-                <p14:nvPr/>
-              </p14:nvContentPartPr>
-              <p14:xfrm>
-                <a:off x="1358784" y="2677896"/>
-                <a:ext cx="111600" cy="716760"/>
-              </p14:xfrm>
-            </p:contentPart>
-          </mc:Choice>
-          <mc:Fallback xmlns="">
-            <p:pic>
-              <p:nvPicPr>
-                <p:cNvPr id="177" name="Ink 176">
-                  <a:extLst>
-                    <a:ext uri="{FF2B5EF4-FFF2-40B4-BE49-F238E27FC236}">
-                      <a16:creationId xmlns:a16="http://schemas.microsoft.com/office/drawing/2014/main" id="{FFB68281-506D-F66A-B10E-F3382BA83E12}"/>
-                    </a:ext>
-                  </a:extLst>
-                </p:cNvPr>
-                <p:cNvPicPr/>
-                <p:nvPr/>
-              </p:nvPicPr>
-              <p:blipFill>
-                <a:blip r:embed="rId24"/>
-                <a:stretch>
-                  <a:fillRect/>
-                </a:stretch>
-              </p:blipFill>
-              <p:spPr>
-                <a:xfrm>
-                  <a:off x="1349784" y="2668896"/>
-                  <a:ext cx="129240" cy="734400"/>
-                </a:xfrm>
-                <a:prstGeom prst="rect">
-                  <a:avLst/>
-                </a:prstGeom>
-              </p:spPr>
-            </p:pic>
-          </mc:Fallback>
-        </mc:AlternateContent>
-        <mc:AlternateContent xmlns:mc="http://schemas.openxmlformats.org/markup-compatibility/2006" xmlns:p14="http://schemas.microsoft.com/office/powerpoint/2010/main">
-          <mc:Choice Requires="p14">
-            <p:contentPart p14:bwMode="auto" r:id="rId25">
-              <p14:nvContentPartPr>
-                <p14:cNvPr id="178" name="Ink 177">
-                  <a:extLst>
-                    <a:ext uri="{FF2B5EF4-FFF2-40B4-BE49-F238E27FC236}">
-                      <a16:creationId xmlns:a16="http://schemas.microsoft.com/office/drawing/2014/main" id="{9FCA2A8B-B4F5-7525-2750-4AAD1F9C4D15}"/>
-                    </a:ext>
-                  </a:extLst>
-                </p14:cNvPr>
-                <p14:cNvContentPartPr/>
-                <p14:nvPr/>
-              </p14:nvContentPartPr>
-              <p14:xfrm>
-                <a:off x="1788984" y="2645856"/>
-                <a:ext cx="31320" cy="787680"/>
-              </p14:xfrm>
-            </p:contentPart>
-          </mc:Choice>
-          <mc:Fallback xmlns="">
-            <p:pic>
-              <p:nvPicPr>
-                <p:cNvPr id="178" name="Ink 177">
-                  <a:extLst>
-                    <a:ext uri="{FF2B5EF4-FFF2-40B4-BE49-F238E27FC236}">
-                      <a16:creationId xmlns:a16="http://schemas.microsoft.com/office/drawing/2014/main" id="{8CF54184-7AD2-C6A4-4B8B-B68DAAA2B43F}"/>
-                    </a:ext>
-                  </a:extLst>
-                </p:cNvPr>
-                <p:cNvPicPr/>
-                <p:nvPr/>
-              </p:nvPicPr>
-              <p:blipFill>
-                <a:blip r:embed="rId26"/>
-                <a:stretch>
-                  <a:fillRect/>
-                </a:stretch>
-              </p:blipFill>
-              <p:spPr>
-                <a:xfrm>
-                  <a:off x="1779879" y="2636856"/>
-                  <a:ext cx="49165" cy="805320"/>
-                </a:xfrm>
-                <a:prstGeom prst="rect">
-                  <a:avLst/>
-                </a:prstGeom>
-              </p:spPr>
-            </p:pic>
-          </mc:Fallback>
-        </mc:AlternateContent>
-        <mc:AlternateContent xmlns:mc="http://schemas.openxmlformats.org/markup-compatibility/2006" xmlns:p14="http://schemas.microsoft.com/office/powerpoint/2010/main">
-          <mc:Choice Requires="p14">
-            <p:contentPart p14:bwMode="auto" r:id="rId27">
-              <p14:nvContentPartPr>
-                <p14:cNvPr id="179" name="Ink 178">
-                  <a:extLst>
-                    <a:ext uri="{FF2B5EF4-FFF2-40B4-BE49-F238E27FC236}">
-                      <a16:creationId xmlns:a16="http://schemas.microsoft.com/office/drawing/2014/main" id="{20E51079-BFE2-7E01-35EA-8809B532D4B0}"/>
-                    </a:ext>
-                  </a:extLst>
-                </p14:cNvPr>
-                <p14:cNvContentPartPr/>
-                <p14:nvPr/>
-              </p14:nvContentPartPr>
-              <p14:xfrm>
-                <a:off x="1095264" y="2909016"/>
-                <a:ext cx="1172520" cy="20160"/>
-              </p14:xfrm>
-            </p:contentPart>
-          </mc:Choice>
-          <mc:Fallback xmlns="">
-            <p:pic>
-              <p:nvPicPr>
-                <p:cNvPr id="179" name="Ink 178">
-                  <a:extLst>
-                    <a:ext uri="{FF2B5EF4-FFF2-40B4-BE49-F238E27FC236}">
-                      <a16:creationId xmlns:a16="http://schemas.microsoft.com/office/drawing/2014/main" id="{0512F32E-0C3F-F415-66D3-3224EF39915A}"/>
-                    </a:ext>
-                  </a:extLst>
-                </p:cNvPr>
-                <p:cNvPicPr/>
-                <p:nvPr/>
-              </p:nvPicPr>
-              <p:blipFill>
-                <a:blip r:embed="rId28"/>
-                <a:stretch>
-                  <a:fillRect/>
-                </a:stretch>
-              </p:blipFill>
-              <p:spPr>
-                <a:xfrm>
-                  <a:off x="1086264" y="2900016"/>
-                  <a:ext cx="1190160" cy="37800"/>
-                </a:xfrm>
-                <a:prstGeom prst="rect">
-                  <a:avLst/>
-                </a:prstGeom>
-              </p:spPr>
-            </p:pic>
-          </mc:Fallback>
-        </mc:AlternateContent>
-        <mc:AlternateContent xmlns:mc="http://schemas.openxmlformats.org/markup-compatibility/2006" xmlns:p14="http://schemas.microsoft.com/office/powerpoint/2010/main">
-          <mc:Choice Requires="p14">
-            <p:contentPart p14:bwMode="auto" r:id="rId29">
-              <p14:nvContentPartPr>
-                <p14:cNvPr id="180" name="Ink 179">
-                  <a:extLst>
-                    <a:ext uri="{FF2B5EF4-FFF2-40B4-BE49-F238E27FC236}">
-                      <a16:creationId xmlns:a16="http://schemas.microsoft.com/office/drawing/2014/main" id="{E571D768-83C9-B3AB-4693-01EBE1C1C389}"/>
-                    </a:ext>
-                  </a:extLst>
-                </p14:cNvPr>
-                <p14:cNvContentPartPr/>
-                <p14:nvPr/>
-              </p14:nvContentPartPr>
-              <p14:xfrm>
-                <a:off x="1023624" y="3171096"/>
-                <a:ext cx="1441800" cy="46080"/>
-              </p14:xfrm>
-            </p:contentPart>
-          </mc:Choice>
-          <mc:Fallback xmlns="">
-            <p:pic>
-              <p:nvPicPr>
-                <p:cNvPr id="180" name="Ink 179">
-                  <a:extLst>
-                    <a:ext uri="{FF2B5EF4-FFF2-40B4-BE49-F238E27FC236}">
-                      <a16:creationId xmlns:a16="http://schemas.microsoft.com/office/drawing/2014/main" id="{C70A4D3C-C8C8-9BFD-846C-904499802355}"/>
-                    </a:ext>
-                  </a:extLst>
-                </p:cNvPr>
-                <p:cNvPicPr/>
-                <p:nvPr/>
-              </p:nvPicPr>
-              <p:blipFill>
-                <a:blip r:embed="rId30"/>
-                <a:stretch>
-                  <a:fillRect/>
-                </a:stretch>
-              </p:blipFill>
-              <p:spPr>
-                <a:xfrm>
-                  <a:off x="1014626" y="3162096"/>
-                  <a:ext cx="1459436" cy="63720"/>
-                </a:xfrm>
-                <a:prstGeom prst="rect">
-                  <a:avLst/>
-                </a:prstGeom>
-              </p:spPr>
-            </p:pic>
-          </mc:Fallback>
-        </mc:AlternateContent>
-        <mc:AlternateContent xmlns:mc="http://schemas.openxmlformats.org/markup-compatibility/2006" xmlns:p14="http://schemas.microsoft.com/office/powerpoint/2010/main">
-          <mc:Choice Requires="p14">
-            <p:contentPart p14:bwMode="auto" r:id="rId31">
-              <p14:nvContentPartPr>
-                <p14:cNvPr id="181" name="Ink 180">
-                  <a:extLst>
-                    <a:ext uri="{FF2B5EF4-FFF2-40B4-BE49-F238E27FC236}">
-                      <a16:creationId xmlns:a16="http://schemas.microsoft.com/office/drawing/2014/main" id="{3E706E79-728D-066D-91E4-559A3280FD23}"/>
-                    </a:ext>
-                  </a:extLst>
-                </p14:cNvPr>
-                <p14:cNvContentPartPr/>
-                <p14:nvPr/>
-              </p14:nvContentPartPr>
-              <p14:xfrm>
-                <a:off x="1183104" y="2692656"/>
-                <a:ext cx="147240" cy="186480"/>
-              </p14:xfrm>
-            </p:contentPart>
-          </mc:Choice>
-          <mc:Fallback xmlns="">
-            <p:pic>
-              <p:nvPicPr>
-                <p:cNvPr id="181" name="Ink 180">
-                  <a:extLst>
-                    <a:ext uri="{FF2B5EF4-FFF2-40B4-BE49-F238E27FC236}">
-                      <a16:creationId xmlns:a16="http://schemas.microsoft.com/office/drawing/2014/main" id="{ABA85023-FB7D-E19C-5492-88BA43ADC709}"/>
-                    </a:ext>
-                  </a:extLst>
-                </p:cNvPr>
-                <p:cNvPicPr/>
-                <p:nvPr/>
-              </p:nvPicPr>
-              <p:blipFill>
-                <a:blip r:embed="rId32"/>
-                <a:stretch>
-                  <a:fillRect/>
-                </a:stretch>
-              </p:blipFill>
-              <p:spPr>
-                <a:xfrm>
-                  <a:off x="1174104" y="2683673"/>
-                  <a:ext cx="164880" cy="204086"/>
-                </a:xfrm>
-                <a:prstGeom prst="rect">
-                  <a:avLst/>
-                </a:prstGeom>
-              </p:spPr>
-            </p:pic>
-          </mc:Fallback>
-        </mc:AlternateContent>
-        <mc:AlternateContent xmlns:mc="http://schemas.openxmlformats.org/markup-compatibility/2006" xmlns:p14="http://schemas.microsoft.com/office/powerpoint/2010/main">
-          <mc:Choice Requires="p14">
-            <p:contentPart p14:bwMode="auto" r:id="rId33">
-              <p14:nvContentPartPr>
-                <p14:cNvPr id="182" name="Ink 181">
-                  <a:extLst>
-                    <a:ext uri="{FF2B5EF4-FFF2-40B4-BE49-F238E27FC236}">
-                      <a16:creationId xmlns:a16="http://schemas.microsoft.com/office/drawing/2014/main" id="{DE9A1D1F-C072-A0F1-5A45-EEA371ED3C58}"/>
-                    </a:ext>
-                  </a:extLst>
-                </p14:cNvPr>
-                <p14:cNvContentPartPr/>
-                <p14:nvPr/>
-              </p14:nvContentPartPr>
-              <p14:xfrm>
-                <a:off x="1217304" y="2716776"/>
-                <a:ext cx="144720" cy="102960"/>
-              </p14:xfrm>
-            </p:contentPart>
-          </mc:Choice>
-          <mc:Fallback xmlns="">
-            <p:pic>
-              <p:nvPicPr>
-                <p:cNvPr id="182" name="Ink 181">
-                  <a:extLst>
-                    <a:ext uri="{FF2B5EF4-FFF2-40B4-BE49-F238E27FC236}">
-                      <a16:creationId xmlns:a16="http://schemas.microsoft.com/office/drawing/2014/main" id="{AC3980DA-E4B7-6B6F-EB45-8288319F5375}"/>
-                    </a:ext>
-                  </a:extLst>
-                </p:cNvPr>
-                <p:cNvPicPr/>
-                <p:nvPr/>
-              </p:nvPicPr>
-              <p:blipFill>
-                <a:blip r:embed="rId34"/>
-                <a:stretch>
-                  <a:fillRect/>
-                </a:stretch>
-              </p:blipFill>
-              <p:spPr>
-                <a:xfrm>
-                  <a:off x="1208304" y="2707776"/>
-                  <a:ext cx="162360" cy="120600"/>
-                </a:xfrm>
-                <a:prstGeom prst="rect">
-                  <a:avLst/>
-                </a:prstGeom>
-              </p:spPr>
-            </p:pic>
-          </mc:Fallback>
-        </mc:AlternateContent>
-        <mc:AlternateContent xmlns:mc="http://schemas.openxmlformats.org/markup-compatibility/2006" xmlns:p14="http://schemas.microsoft.com/office/powerpoint/2010/main">
-          <mc:Choice Requires="p14">
-            <p:contentPart p14:bwMode="auto" r:id="rId35">
-              <p14:nvContentPartPr>
-                <p14:cNvPr id="184" name="Ink 183">
-                  <a:extLst>
-                    <a:ext uri="{FF2B5EF4-FFF2-40B4-BE49-F238E27FC236}">
-                      <a16:creationId xmlns:a16="http://schemas.microsoft.com/office/drawing/2014/main" id="{E273075C-9EED-9E22-E59C-AE285212B675}"/>
-                    </a:ext>
-                  </a:extLst>
-                </p14:cNvPr>
-                <p14:cNvContentPartPr/>
-                <p14:nvPr/>
-              </p14:nvContentPartPr>
-              <p14:xfrm>
-                <a:off x="1507824" y="2736936"/>
-                <a:ext cx="177840" cy="107280"/>
-              </p14:xfrm>
-            </p:contentPart>
-          </mc:Choice>
-          <mc:Fallback xmlns="">
-            <p:pic>
-              <p:nvPicPr>
-                <p:cNvPr id="184" name="Ink 183">
-                  <a:extLst>
-                    <a:ext uri="{FF2B5EF4-FFF2-40B4-BE49-F238E27FC236}">
-                      <a16:creationId xmlns:a16="http://schemas.microsoft.com/office/drawing/2014/main" id="{2BC01B0E-C3AC-4AF1-67C9-D3A3A8383991}"/>
-                    </a:ext>
-                  </a:extLst>
-                </p:cNvPr>
-                <p:cNvPicPr/>
-                <p:nvPr/>
-              </p:nvPicPr>
-              <p:blipFill>
-                <a:blip r:embed="rId36"/>
-                <a:stretch>
-                  <a:fillRect/>
-                </a:stretch>
-              </p:blipFill>
-              <p:spPr>
-                <a:xfrm>
-                  <a:off x="1498824" y="2727966"/>
-                  <a:ext cx="195480" cy="124861"/>
-                </a:xfrm>
-                <a:prstGeom prst="rect">
-                  <a:avLst/>
-                </a:prstGeom>
-              </p:spPr>
-            </p:pic>
-          </mc:Fallback>
-        </mc:AlternateContent>
-        <mc:AlternateContent xmlns:mc="http://schemas.openxmlformats.org/markup-compatibility/2006" xmlns:p14="http://schemas.microsoft.com/office/powerpoint/2010/main">
-          <mc:Choice Requires="p14">
-            <p:contentPart p14:bwMode="auto" r:id="rId37">
-              <p14:nvContentPartPr>
-                <p14:cNvPr id="185" name="Ink 184">
-                  <a:extLst>
-                    <a:ext uri="{FF2B5EF4-FFF2-40B4-BE49-F238E27FC236}">
-                      <a16:creationId xmlns:a16="http://schemas.microsoft.com/office/drawing/2014/main" id="{4146EAB1-409F-69C7-85DE-60E5A7A6B57A}"/>
-                    </a:ext>
-                  </a:extLst>
-                </p14:cNvPr>
-                <p14:cNvContentPartPr/>
-                <p14:nvPr/>
-              </p14:nvContentPartPr>
-              <p14:xfrm>
-                <a:off x="1515384" y="2663496"/>
-                <a:ext cx="179280" cy="182160"/>
-              </p14:xfrm>
-            </p:contentPart>
-          </mc:Choice>
-          <mc:Fallback xmlns="">
-            <p:pic>
-              <p:nvPicPr>
-                <p:cNvPr id="185" name="Ink 184">
-                  <a:extLst>
-                    <a:ext uri="{FF2B5EF4-FFF2-40B4-BE49-F238E27FC236}">
-                      <a16:creationId xmlns:a16="http://schemas.microsoft.com/office/drawing/2014/main" id="{18451AB9-83AF-F45C-7CDB-EDF0DF3EC023}"/>
-                    </a:ext>
-                  </a:extLst>
-                </p:cNvPr>
-                <p:cNvPicPr/>
-                <p:nvPr/>
-              </p:nvPicPr>
-              <p:blipFill>
-                <a:blip r:embed="rId38"/>
-                <a:stretch>
-                  <a:fillRect/>
-                </a:stretch>
-              </p:blipFill>
-              <p:spPr>
-                <a:xfrm>
-                  <a:off x="1506384" y="2654514"/>
-                  <a:ext cx="196920" cy="199765"/>
-                </a:xfrm>
-                <a:prstGeom prst="rect">
-                  <a:avLst/>
-                </a:prstGeom>
-              </p:spPr>
-            </p:pic>
-          </mc:Fallback>
-        </mc:AlternateContent>
-        <mc:AlternateContent xmlns:mc="http://schemas.openxmlformats.org/markup-compatibility/2006" xmlns:p14="http://schemas.microsoft.com/office/powerpoint/2010/main">
-          <mc:Choice Requires="p14">
-            <p:contentPart p14:bwMode="auto" r:id="rId39">
-              <p14:nvContentPartPr>
-                <p14:cNvPr id="187" name="Ink 186">
-                  <a:extLst>
-                    <a:ext uri="{FF2B5EF4-FFF2-40B4-BE49-F238E27FC236}">
-                      <a16:creationId xmlns:a16="http://schemas.microsoft.com/office/drawing/2014/main" id="{4EC10E6D-8358-7AC4-061F-75B4CC3B739B}"/>
-                    </a:ext>
-                  </a:extLst>
-                </p14:cNvPr>
-                <p14:cNvContentPartPr/>
-                <p14:nvPr/>
-              </p14:nvContentPartPr>
-              <p14:xfrm>
-                <a:off x="1491264" y="3033216"/>
-                <a:ext cx="95400" cy="94680"/>
-              </p14:xfrm>
-            </p:contentPart>
-          </mc:Choice>
-          <mc:Fallback xmlns="">
-            <p:pic>
-              <p:nvPicPr>
-                <p:cNvPr id="187" name="Ink 186">
-                  <a:extLst>
-                    <a:ext uri="{FF2B5EF4-FFF2-40B4-BE49-F238E27FC236}">
-                      <a16:creationId xmlns:a16="http://schemas.microsoft.com/office/drawing/2014/main" id="{5090C569-5230-AD5B-A153-A29B76CA4348}"/>
-                    </a:ext>
-                  </a:extLst>
-                </p:cNvPr>
-                <p:cNvPicPr/>
-                <p:nvPr/>
-              </p:nvPicPr>
-              <p:blipFill>
-                <a:blip r:embed="rId40"/>
-                <a:stretch>
-                  <a:fillRect/>
-                </a:stretch>
-              </p:blipFill>
-              <p:spPr>
-                <a:xfrm>
-                  <a:off x="1482264" y="3024250"/>
-                  <a:ext cx="113040" cy="112253"/>
-                </a:xfrm>
-                <a:prstGeom prst="rect">
-                  <a:avLst/>
-                </a:prstGeom>
-              </p:spPr>
-            </p:pic>
-          </mc:Fallback>
-        </mc:AlternateContent>
-        <mc:AlternateContent xmlns:mc="http://schemas.openxmlformats.org/markup-compatibility/2006" xmlns:p14="http://schemas.microsoft.com/office/powerpoint/2010/main">
-          <mc:Choice Requires="p14">
-            <p:contentPart p14:bwMode="auto" r:id="rId41">
-              <p14:nvContentPartPr>
-                <p14:cNvPr id="188" name="Ink 187">
-                  <a:extLst>
-                    <a:ext uri="{FF2B5EF4-FFF2-40B4-BE49-F238E27FC236}">
-                      <a16:creationId xmlns:a16="http://schemas.microsoft.com/office/drawing/2014/main" id="{6CE766DC-8120-C319-3E7D-0E9D976F338C}"/>
-                    </a:ext>
-                  </a:extLst>
-                </p14:cNvPr>
-                <p14:cNvContentPartPr/>
-                <p14:nvPr/>
-              </p14:nvContentPartPr>
-              <p14:xfrm>
-                <a:off x="1434744" y="3328056"/>
-                <a:ext cx="193680" cy="91080"/>
-              </p14:xfrm>
-            </p:contentPart>
-          </mc:Choice>
-          <mc:Fallback xmlns="">
-            <p:pic>
-              <p:nvPicPr>
-                <p:cNvPr id="188" name="Ink 187">
-                  <a:extLst>
-                    <a:ext uri="{FF2B5EF4-FFF2-40B4-BE49-F238E27FC236}">
-                      <a16:creationId xmlns:a16="http://schemas.microsoft.com/office/drawing/2014/main" id="{546BCB01-6AEF-4290-EF61-D804F8AD9270}"/>
-                    </a:ext>
-                  </a:extLst>
-                </p:cNvPr>
-                <p:cNvPicPr/>
-                <p:nvPr/>
-              </p:nvPicPr>
-              <p:blipFill>
-                <a:blip r:embed="rId42"/>
-                <a:stretch>
-                  <a:fillRect/>
-                </a:stretch>
-              </p:blipFill>
-              <p:spPr>
-                <a:xfrm>
-                  <a:off x="1425744" y="3319056"/>
-                  <a:ext cx="211320" cy="108720"/>
-                </a:xfrm>
-                <a:prstGeom prst="rect">
-                  <a:avLst/>
-                </a:prstGeom>
-              </p:spPr>
-            </p:pic>
-          </mc:Fallback>
-        </mc:AlternateContent>
-      </p:grpSp>
-      <p:sp>
-        <p:nvSpPr>
-          <p:cNvPr id="16" name="TextBox 15">
-            <a:extLst>
-              <a:ext uri="{FF2B5EF4-FFF2-40B4-BE49-F238E27FC236}">
-                <a16:creationId xmlns:a16="http://schemas.microsoft.com/office/drawing/2014/main" id="{2673C6AF-C7EE-4E60-F341-8156298644A4}"/>
-              </a:ext>
-            </a:extLst>
-          </p:cNvPr>
-          <p:cNvSpPr txBox="1"/>
-          <p:nvPr/>
-        </p:nvSpPr>
-        <p:spPr>
-          <a:xfrm>
-            <a:off x="3352911" y="5652485"/>
-            <a:ext cx="1227479" cy="307777"/>
-          </a:xfrm>
-          <a:prstGeom prst="rect">
-            <a:avLst/>
-          </a:prstGeom>
-        </p:spPr>
-        <p:style>
-          <a:lnRef idx="3">
-            <a:schemeClr val="lt1"/>
-          </a:lnRef>
-          <a:fillRef idx="1">
-            <a:schemeClr val="accent2"/>
-          </a:fillRef>
-          <a:effectRef idx="1">
-            <a:schemeClr val="accent2"/>
-          </a:effectRef>
-          <a:fontRef idx="minor">
-            <a:schemeClr val="lt1"/>
-          </a:fontRef>
-        </p:style>
-        <p:txBody>
-          <a:bodyPr wrap="square">
-            <a:spAutoFit/>
-          </a:bodyPr>
-          <a:lstStyle/>
-          <a:p>
-            <a:pPr algn="ctr"/>
-            <a:r>
-              <a:rPr lang="en-US" sz="1400" dirty="0"/>
-              <a:t>optimal play</a:t>
-            </a:r>
-          </a:p>
-        </p:txBody>
-      </p:sp>
-      <mc:AlternateContent xmlns:mc="http://schemas.openxmlformats.org/markup-compatibility/2006" xmlns:a14="http://schemas.microsoft.com/office/drawing/2010/main">
-        <mc:Choice Requires="a14">
-          <p:sp>
-            <p:nvSpPr>
-              <p:cNvPr id="13" name="TextBox 12">
-                <a:extLst>
-                  <a:ext uri="{FF2B5EF4-FFF2-40B4-BE49-F238E27FC236}">
-                    <a16:creationId xmlns:a16="http://schemas.microsoft.com/office/drawing/2014/main" id="{59170D23-8E90-5184-0AD4-E073B2FBD850}"/>
-                  </a:ext>
-                </a:extLst>
-              </p:cNvPr>
-              <p:cNvSpPr txBox="1"/>
-              <p:nvPr/>
-            </p:nvSpPr>
-            <p:spPr>
-              <a:xfrm>
-                <a:off x="1499329" y="5544763"/>
-                <a:ext cx="1589714" cy="523220"/>
-              </a:xfrm>
-              <a:prstGeom prst="rect">
-                <a:avLst/>
-              </a:prstGeom>
-              <a:noFill/>
-            </p:spPr>
-            <p:txBody>
-              <a:bodyPr wrap="square">
-                <a:spAutoFit/>
-              </a:bodyPr>
-              <a:lstStyle/>
-              <a:p>
-                <a:pPr algn="ctr"/>
-                <a:r>
-                  <a:rPr lang="en-US" sz="1400" b="0" dirty="0"/>
-                  <a:t>Playout policy</a:t>
-                </a:r>
-                <a:br>
-                  <a:rPr lang="en-US" sz="1400" b="0" dirty="0"/>
-                </a:br>
-                <a14:m>
-                  <m:oMath xmlns:m="http://schemas.openxmlformats.org/officeDocument/2006/math">
-                    <m:sSub>
-                      <m:sSubPr>
-                        <m:ctrlPr>
-                          <a:rPr lang="en-US" sz="1400" b="0" i="1" smtClean="0">
-                            <a:latin typeface="Cambria Math" panose="02040503050406030204" pitchFamily="18" charset="0"/>
-                          </a:rPr>
-                        </m:ctrlPr>
-                      </m:sSubPr>
-                      <m:e>
-                        <m:r>
-                          <a:rPr lang="en-US" sz="1400" b="0" i="1" smtClean="0">
-                            <a:latin typeface="Cambria Math" panose="02040503050406030204" pitchFamily="18" charset="0"/>
-                          </a:rPr>
-                          <m:t>𝜋</m:t>
-                        </m:r>
-                      </m:e>
-                      <m:sub>
-                        <m:r>
-                          <a:rPr lang="en-US" sz="1400" b="0" i="1" smtClean="0">
-                            <a:latin typeface="Cambria Math" panose="02040503050406030204" pitchFamily="18" charset="0"/>
-                          </a:rPr>
-                          <m:t>𝑥</m:t>
-                        </m:r>
-                      </m:sub>
-                    </m:sSub>
-                    <m:r>
-                      <a:rPr lang="en-US" sz="1400" b="0" i="1" smtClean="0">
-                        <a:latin typeface="Cambria Math" panose="02040503050406030204" pitchFamily="18" charset="0"/>
-                      </a:rPr>
-                      <m:t>,</m:t>
-                    </m:r>
-                    <m:sSub>
-                      <m:sSubPr>
-                        <m:ctrlPr>
-                          <a:rPr lang="en-US" sz="1400" b="0" i="1" smtClean="0">
-                            <a:latin typeface="Cambria Math" panose="02040503050406030204" pitchFamily="18" charset="0"/>
-                          </a:rPr>
-                        </m:ctrlPr>
-                      </m:sSubPr>
-                      <m:e>
-                        <m:r>
-                          <a:rPr lang="en-US" sz="1400" b="0" i="1" smtClean="0">
-                            <a:latin typeface="Cambria Math" panose="02040503050406030204" pitchFamily="18" charset="0"/>
-                          </a:rPr>
-                          <m:t>𝜋</m:t>
-                        </m:r>
-                      </m:e>
-                      <m:sub>
-                        <m:r>
-                          <a:rPr lang="en-US" sz="1400" b="0" i="1" smtClean="0">
-                            <a:latin typeface="Cambria Math" panose="02040503050406030204" pitchFamily="18" charset="0"/>
-                          </a:rPr>
-                          <m:t>𝑜</m:t>
-                        </m:r>
-                      </m:sub>
-                    </m:sSub>
-                  </m:oMath>
-                </a14:m>
-                <a:r>
-                  <a:rPr lang="en-US" sz="1400" dirty="0"/>
-                  <a:t> </a:t>
-                </a:r>
-              </a:p>
-            </p:txBody>
-          </p:sp>
-        </mc:Choice>
-        <mc:Fallback xmlns="">
-          <p:sp>
-            <p:nvSpPr>
-              <p:cNvPr id="13" name="TextBox 12">
-                <a:extLst>
-                  <a:ext uri="{FF2B5EF4-FFF2-40B4-BE49-F238E27FC236}">
-                    <a16:creationId xmlns:a16="http://schemas.microsoft.com/office/drawing/2014/main" id="{59170D23-8E90-5184-0AD4-E073B2FBD850}"/>
-                  </a:ext>
-                </a:extLst>
-              </p:cNvPr>
-              <p:cNvSpPr txBox="1">
-                <a:spLocks noRot="1" noChangeAspect="1" noMove="1" noResize="1" noEditPoints="1" noAdjustHandles="1" noChangeArrowheads="1" noChangeShapeType="1" noTextEdit="1"/>
-              </p:cNvSpPr>
-              <p:nvPr/>
-            </p:nvSpPr>
-            <p:spPr>
-              <a:xfrm>
-                <a:off x="1499329" y="5544763"/>
-                <a:ext cx="1589714" cy="523220"/>
-              </a:xfrm>
-              <a:prstGeom prst="rect">
-                <a:avLst/>
-              </a:prstGeom>
-              <a:blipFill>
-                <a:blip r:embed="rId43"/>
-                <a:stretch>
-                  <a:fillRect t="-2353"/>
-                </a:stretch>
-              </a:blipFill>
-            </p:spPr>
-            <p:txBody>
-              <a:bodyPr/>
-              <a:lstStyle/>
-              <a:p>
-                <a:r>
-                  <a:rPr lang="en-US">
-                    <a:noFill/>
-                  </a:rPr>
-                  <a:t> </a:t>
-                </a:r>
-              </a:p>
-            </p:txBody>
-          </p:sp>
-        </mc:Fallback>
-      </mc:AlternateContent>
-      <p:sp>
-        <p:nvSpPr>
-          <p:cNvPr id="14" name="TextBox 13">
-            <a:extLst>
-              <a:ext uri="{FF2B5EF4-FFF2-40B4-BE49-F238E27FC236}">
-                <a16:creationId xmlns:a16="http://schemas.microsoft.com/office/drawing/2014/main" id="{7D115F6D-BAE0-7D3E-A819-1CF3F5F96D1B}"/>
-              </a:ext>
-            </a:extLst>
-          </p:cNvPr>
-          <p:cNvSpPr txBox="1"/>
-          <p:nvPr/>
-        </p:nvSpPr>
-        <p:spPr>
-          <a:xfrm>
-            <a:off x="4999962" y="5652485"/>
-            <a:ext cx="1227479" cy="307777"/>
-          </a:xfrm>
-          <a:prstGeom prst="rect">
-            <a:avLst/>
-          </a:prstGeom>
-        </p:spPr>
-        <p:style>
-          <a:lnRef idx="3">
-            <a:schemeClr val="lt1"/>
-          </a:lnRef>
-          <a:fillRef idx="1">
-            <a:schemeClr val="accent2"/>
-          </a:fillRef>
-          <a:effectRef idx="1">
-            <a:schemeClr val="accent2"/>
-          </a:effectRef>
-          <a:fontRef idx="minor">
-            <a:schemeClr val="lt1"/>
-          </a:fontRef>
-        </p:style>
-        <p:txBody>
-          <a:bodyPr wrap="square">
-            <a:spAutoFit/>
-          </a:bodyPr>
-          <a:lstStyle/>
-          <a:p>
-            <a:pPr algn="ctr"/>
-            <a:r>
-              <a:rPr lang="en-US" sz="1400" dirty="0"/>
-              <a:t>none</a:t>
-            </a:r>
-          </a:p>
-        </p:txBody>
-      </p:sp>
-      <p:sp>
-        <p:nvSpPr>
-          <p:cNvPr id="15" name="TextBox 14">
-            <a:extLst>
-              <a:ext uri="{FF2B5EF4-FFF2-40B4-BE49-F238E27FC236}">
-                <a16:creationId xmlns:a16="http://schemas.microsoft.com/office/drawing/2014/main" id="{C3A06CB4-54C5-7711-39ED-BF44F589A040}"/>
-              </a:ext>
-            </a:extLst>
-          </p:cNvPr>
-          <p:cNvSpPr txBox="1"/>
-          <p:nvPr/>
-        </p:nvSpPr>
-        <p:spPr>
-          <a:xfrm>
-            <a:off x="6612047" y="5544763"/>
-            <a:ext cx="1227479" cy="523220"/>
-          </a:xfrm>
-          <a:prstGeom prst="rect">
-            <a:avLst/>
-          </a:prstGeom>
-        </p:spPr>
-        <p:style>
-          <a:lnRef idx="3">
-            <a:schemeClr val="lt1"/>
-          </a:lnRef>
-          <a:fillRef idx="1">
-            <a:schemeClr val="accent2"/>
-          </a:fillRef>
-          <a:effectRef idx="1">
-            <a:schemeClr val="accent2"/>
-          </a:effectRef>
-          <a:fontRef idx="minor">
-            <a:schemeClr val="lt1"/>
-          </a:fontRef>
-        </p:style>
-        <p:txBody>
-          <a:bodyPr wrap="square">
-            <a:spAutoFit/>
-          </a:bodyPr>
-          <a:lstStyle/>
-          <a:p>
-            <a:pPr algn="ctr"/>
-            <a:r>
-              <a:rPr lang="en-US" sz="1400" dirty="0"/>
-              <a:t>Random or other</a:t>
-            </a:r>
-          </a:p>
-        </p:txBody>
-      </p:sp>
-      <mc:AlternateContent xmlns:mc="http://schemas.openxmlformats.org/markup-compatibility/2006" xmlns:a14="http://schemas.microsoft.com/office/drawing/2010/main">
-        <mc:Choice Requires="a14">
-          <p:sp>
-            <p:nvSpPr>
-              <p:cNvPr id="6" name="TextBox 5">
-                <a:extLst>
-                  <a:ext uri="{FF2B5EF4-FFF2-40B4-BE49-F238E27FC236}">
-                    <a16:creationId xmlns:a16="http://schemas.microsoft.com/office/drawing/2014/main" id="{1EB3EB39-579A-D803-7312-1ADEF9DD2A4F}"/>
-                  </a:ext>
-                </a:extLst>
-              </p:cNvPr>
-              <p:cNvSpPr txBox="1"/>
-              <p:nvPr/>
-            </p:nvSpPr>
-            <p:spPr>
-              <a:xfrm>
-                <a:off x="6191865" y="618669"/>
-                <a:ext cx="3435503" cy="495328"/>
-              </a:xfrm>
-              <a:prstGeom prst="rect">
-                <a:avLst/>
-              </a:prstGeom>
-            </p:spPr>
-            <p:style>
-              <a:lnRef idx="3">
-                <a:schemeClr val="lt1"/>
-              </a:lnRef>
-              <a:fillRef idx="1">
-                <a:schemeClr val="accent3"/>
-              </a:fillRef>
-              <a:effectRef idx="1">
-                <a:schemeClr val="accent3"/>
-              </a:effectRef>
-              <a:fontRef idx="minor">
-                <a:schemeClr val="lt1"/>
-              </a:fontRef>
-            </p:style>
-            <p:txBody>
-              <a:bodyPr wrap="square" rtlCol="0">
-                <a:spAutoFit/>
-              </a:bodyPr>
-              <a:lstStyle/>
-              <a:p>
-                <a:pPr/>
-                <a14:m>
-                  <m:oMathPara xmlns:m="http://schemas.openxmlformats.org/officeDocument/2006/math">
-                    <m:oMathParaPr>
-                      <m:jc m:val="left"/>
-                    </m:oMathParaPr>
-                    <m:oMath xmlns:m="http://schemas.openxmlformats.org/officeDocument/2006/math">
-                      <m:r>
-                        <a:rPr lang="en-US" sz="2400" b="0" i="1" smtClean="0">
-                          <a:latin typeface="Cambria Math" panose="02040503050406030204" pitchFamily="18" charset="0"/>
-                        </a:rPr>
-                        <m:t>𝑣𝑎𝑙𝑢𝑒</m:t>
-                      </m:r>
-                      <m:d>
-                        <m:dPr>
-                          <m:ctrlPr>
-                            <a:rPr lang="en-US" sz="2400" b="0" i="1" smtClean="0">
-                              <a:latin typeface="Cambria Math" panose="02040503050406030204" pitchFamily="18" charset="0"/>
-                            </a:rPr>
-                          </m:ctrlPr>
-                        </m:dPr>
-                        <m:e>
-                          <m:r>
-                            <a:rPr lang="en-US" sz="2400" b="0" i="1" smtClean="0">
-                              <a:latin typeface="Cambria Math" panose="02040503050406030204" pitchFamily="18" charset="0"/>
-                            </a:rPr>
-                            <m:t>𝑠</m:t>
-                          </m:r>
-                        </m:e>
-                      </m:d>
-                      <m:r>
-                        <a:rPr lang="en-US" sz="2400" b="0" i="1" smtClean="0">
-                          <a:latin typeface="Cambria Math" panose="02040503050406030204" pitchFamily="18" charset="0"/>
-                        </a:rPr>
-                        <m:t>≈</m:t>
-                      </m:r>
-                      <m:sSub>
-                        <m:sSubPr>
-                          <m:ctrlPr>
-                            <a:rPr lang="en-US" sz="2400" b="0" i="1" smtClean="0">
-                              <a:latin typeface="Cambria Math" panose="02040503050406030204" pitchFamily="18" charset="0"/>
-                            </a:rPr>
-                          </m:ctrlPr>
-                        </m:sSubPr>
-                        <m:e>
-                          <m:r>
-                            <a:rPr lang="en-US" sz="2400" b="0" i="1" smtClean="0">
-                              <a:latin typeface="Cambria Math" panose="02040503050406030204" pitchFamily="18" charset="0"/>
-                            </a:rPr>
-                            <m:t>𝐸</m:t>
-                          </m:r>
-                        </m:e>
-                        <m:sub>
-                          <m:sSub>
-                            <m:sSubPr>
-                              <m:ctrlPr>
-                                <a:rPr lang="en-US" sz="2400" b="0" i="1" smtClean="0">
-                                  <a:latin typeface="Cambria Math" panose="02040503050406030204" pitchFamily="18" charset="0"/>
-                                </a:rPr>
-                              </m:ctrlPr>
-                            </m:sSubPr>
-                            <m:e>
-                              <m:r>
-                                <a:rPr lang="en-US" sz="2400" b="0" i="1" smtClean="0">
-                                  <a:latin typeface="Cambria Math" panose="02040503050406030204" pitchFamily="18" charset="0"/>
-                                </a:rPr>
-                                <m:t>𝜋</m:t>
-                              </m:r>
-                            </m:e>
-                            <m:sub>
-                              <m:r>
-                                <a:rPr lang="en-US" sz="2400" b="0" i="1" smtClean="0">
-                                  <a:latin typeface="Cambria Math" panose="02040503050406030204" pitchFamily="18" charset="0"/>
-                                </a:rPr>
-                                <m:t>𝑥</m:t>
-                              </m:r>
-                            </m:sub>
-                          </m:sSub>
-                          <m:r>
-                            <a:rPr lang="en-US" sz="2400" b="0" i="1" smtClean="0">
-                              <a:latin typeface="Cambria Math" panose="02040503050406030204" pitchFamily="18" charset="0"/>
-                            </a:rPr>
-                            <m:t>,</m:t>
-                          </m:r>
-                          <m:sSub>
-                            <m:sSubPr>
-                              <m:ctrlPr>
-                                <a:rPr lang="en-US" sz="2400" b="0" i="1" smtClean="0">
-                                  <a:latin typeface="Cambria Math" panose="02040503050406030204" pitchFamily="18" charset="0"/>
-                                </a:rPr>
-                              </m:ctrlPr>
-                            </m:sSubPr>
-                            <m:e>
-                              <m:r>
-                                <a:rPr lang="en-US" sz="2400" b="0" i="1" smtClean="0">
-                                  <a:latin typeface="Cambria Math" panose="02040503050406030204" pitchFamily="18" charset="0"/>
-                                </a:rPr>
-                                <m:t>𝜋</m:t>
-                              </m:r>
-                            </m:e>
-                            <m:sub>
-                              <m:r>
-                                <a:rPr lang="en-US" sz="2400" b="0" i="1" smtClean="0">
-                                  <a:latin typeface="Cambria Math" panose="02040503050406030204" pitchFamily="18" charset="0"/>
-                                </a:rPr>
-                                <m:t>𝑜</m:t>
-                              </m:r>
-                            </m:sub>
-                          </m:sSub>
-                        </m:sub>
-                      </m:sSub>
-                      <m:r>
-                        <a:rPr lang="en-US" sz="2400" b="0" i="1" smtClean="0">
-                          <a:latin typeface="Cambria Math" panose="02040503050406030204" pitchFamily="18" charset="0"/>
-                        </a:rPr>
-                        <m:t>[</m:t>
-                      </m:r>
-                      <m:r>
-                        <a:rPr lang="en-US" sz="2400" b="0" i="1" smtClean="0">
-                          <a:latin typeface="Cambria Math" panose="02040503050406030204" pitchFamily="18" charset="0"/>
-                        </a:rPr>
-                        <m:t>𝑈</m:t>
-                      </m:r>
-                      <m:r>
-                        <a:rPr lang="en-US" sz="2400" b="0" i="1" smtClean="0">
-                          <a:latin typeface="Cambria Math" panose="02040503050406030204" pitchFamily="18" charset="0"/>
-                        </a:rPr>
-                        <m:t>(</m:t>
-                      </m:r>
-                      <m:r>
-                        <a:rPr lang="en-US" sz="2400" b="0" i="1" smtClean="0">
-                          <a:latin typeface="Cambria Math" panose="02040503050406030204" pitchFamily="18" charset="0"/>
-                        </a:rPr>
-                        <m:t>𝑠</m:t>
-                      </m:r>
-                      <m:r>
-                        <a:rPr lang="en-US" sz="2400" b="0" i="1" smtClean="0">
-                          <a:latin typeface="Cambria Math" panose="02040503050406030204" pitchFamily="18" charset="0"/>
-                        </a:rPr>
-                        <m:t>)]</m:t>
-                      </m:r>
-                    </m:oMath>
-                  </m:oMathPara>
-                </a14:m>
-                <a:endParaRPr lang="en-US" sz="2800" dirty="0"/>
-              </a:p>
-            </p:txBody>
-          </p:sp>
-        </mc:Choice>
-        <mc:Fallback xmlns="">
-          <p:sp>
-            <p:nvSpPr>
-              <p:cNvPr id="6" name="TextBox 5">
-                <a:extLst>
-                  <a:ext uri="{FF2B5EF4-FFF2-40B4-BE49-F238E27FC236}">
-                    <a16:creationId xmlns:a16="http://schemas.microsoft.com/office/drawing/2014/main" id="{1EB3EB39-579A-D803-7312-1ADEF9DD2A4F}"/>
-                  </a:ext>
-                </a:extLst>
-              </p:cNvPr>
-              <p:cNvSpPr txBox="1">
-                <a:spLocks noRot="1" noChangeAspect="1" noMove="1" noResize="1" noEditPoints="1" noAdjustHandles="1" noChangeArrowheads="1" noChangeShapeType="1" noTextEdit="1"/>
-              </p:cNvSpPr>
-              <p:nvPr/>
-            </p:nvSpPr>
-            <p:spPr>
-              <a:xfrm>
-                <a:off x="6191865" y="618669"/>
-                <a:ext cx="3435503" cy="495328"/>
-              </a:xfrm>
-              <a:prstGeom prst="rect">
-                <a:avLst/>
-              </a:prstGeom>
-              <a:blipFill>
-                <a:blip r:embed="rId44"/>
-                <a:stretch>
-                  <a:fillRect l="-353" b="-6977"/>
-                </a:stretch>
-              </a:blipFill>
-            </p:spPr>
-            <p:txBody>
-              <a:bodyPr/>
-              <a:lstStyle/>
-              <a:p>
-                <a:r>
-                  <a:rPr lang="en-US">
-                    <a:noFill/>
-                  </a:rPr>
-                  <a:t> </a:t>
-                </a:r>
-              </a:p>
-            </p:txBody>
-          </p:sp>
-        </mc:Fallback>
-      </mc:AlternateContent>
-      <p:sp>
-        <p:nvSpPr>
-          <p:cNvPr id="58" name="TextBox 57">
-            <a:extLst>
-              <a:ext uri="{FF2B5EF4-FFF2-40B4-BE49-F238E27FC236}">
-                <a16:creationId xmlns:a16="http://schemas.microsoft.com/office/drawing/2014/main" id="{1BA1B069-734F-EF52-AE02-FB7F1F2EA994}"/>
-              </a:ext>
-            </a:extLst>
-          </p:cNvPr>
-          <p:cNvSpPr txBox="1"/>
-          <p:nvPr/>
-        </p:nvSpPr>
-        <p:spPr>
-          <a:xfrm>
-            <a:off x="1499329" y="6220374"/>
-            <a:ext cx="1589714" cy="307777"/>
-          </a:xfrm>
-          <a:prstGeom prst="rect">
-            <a:avLst/>
-          </a:prstGeom>
-          <a:noFill/>
-        </p:spPr>
-        <p:txBody>
-          <a:bodyPr wrap="square">
-            <a:spAutoFit/>
-          </a:bodyPr>
-          <a:lstStyle/>
-          <a:p>
-            <a:pPr algn="ctr"/>
-            <a:r>
-              <a:rPr lang="en-US" sz="1400" b="0" dirty="0"/>
-              <a:t>Method</a:t>
-            </a:r>
-            <a:endParaRPr lang="en-US" sz="1400" dirty="0"/>
-          </a:p>
-        </p:txBody>
-      </p:sp>
-      <p:sp>
-        <p:nvSpPr>
-          <p:cNvPr id="59" name="TextBox 58">
-            <a:extLst>
-              <a:ext uri="{FF2B5EF4-FFF2-40B4-BE49-F238E27FC236}">
-                <a16:creationId xmlns:a16="http://schemas.microsoft.com/office/drawing/2014/main" id="{1329CBC8-D97A-8826-F664-36DF95E49FF5}"/>
-              </a:ext>
-            </a:extLst>
-          </p:cNvPr>
-          <p:cNvSpPr txBox="1"/>
-          <p:nvPr/>
-        </p:nvSpPr>
-        <p:spPr>
-          <a:xfrm>
-            <a:off x="3352911" y="6220374"/>
-            <a:ext cx="1227479" cy="307777"/>
-          </a:xfrm>
-          <a:prstGeom prst="rect">
-            <a:avLst/>
-          </a:prstGeom>
-        </p:spPr>
-        <p:style>
-          <a:lnRef idx="3">
-            <a:schemeClr val="lt1"/>
-          </a:lnRef>
-          <a:fillRef idx="1">
-            <a:schemeClr val="accent2"/>
-          </a:fillRef>
-          <a:effectRef idx="1">
-            <a:schemeClr val="accent2"/>
-          </a:effectRef>
-          <a:fontRef idx="minor">
-            <a:schemeClr val="lt1"/>
-          </a:fontRef>
-        </p:style>
-        <p:txBody>
-          <a:bodyPr wrap="square">
-            <a:spAutoFit/>
-          </a:bodyPr>
-          <a:lstStyle/>
-          <a:p>
-            <a:pPr algn="ctr"/>
-            <a:r>
-              <a:rPr lang="en-US" sz="1400" dirty="0"/>
-              <a:t>Tree search</a:t>
-            </a:r>
-          </a:p>
-        </p:txBody>
-      </p:sp>
-      <p:sp>
-        <p:nvSpPr>
-          <p:cNvPr id="60" name="TextBox 59">
-            <a:extLst>
-              <a:ext uri="{FF2B5EF4-FFF2-40B4-BE49-F238E27FC236}">
-                <a16:creationId xmlns:a16="http://schemas.microsoft.com/office/drawing/2014/main" id="{96B9AA37-6F81-E156-16D7-F99F06B0A96C}"/>
-              </a:ext>
-            </a:extLst>
-          </p:cNvPr>
-          <p:cNvSpPr txBox="1"/>
-          <p:nvPr/>
-        </p:nvSpPr>
-        <p:spPr>
-          <a:xfrm>
-            <a:off x="4999962" y="6112652"/>
-            <a:ext cx="1227479" cy="523220"/>
-          </a:xfrm>
-          <a:prstGeom prst="rect">
-            <a:avLst/>
-          </a:prstGeom>
-        </p:spPr>
-        <p:style>
-          <a:lnRef idx="3">
-            <a:schemeClr val="lt1"/>
-          </a:lnRef>
-          <a:fillRef idx="1">
-            <a:schemeClr val="accent2"/>
-          </a:fillRef>
-          <a:effectRef idx="1">
-            <a:schemeClr val="accent2"/>
-          </a:effectRef>
-          <a:fontRef idx="minor">
-            <a:schemeClr val="lt1"/>
-          </a:fontRef>
-        </p:style>
-        <p:txBody>
-          <a:bodyPr wrap="square">
-            <a:spAutoFit/>
-          </a:bodyPr>
-          <a:lstStyle/>
-          <a:p>
-            <a:pPr algn="ctr"/>
-            <a:r>
-              <a:rPr lang="en-US" sz="1400" dirty="0"/>
-              <a:t>Code + cutoff search</a:t>
-            </a:r>
-          </a:p>
-        </p:txBody>
-      </p:sp>
-      <p:sp>
-        <p:nvSpPr>
-          <p:cNvPr id="61" name="TextBox 60">
-            <a:extLst>
-              <a:ext uri="{FF2B5EF4-FFF2-40B4-BE49-F238E27FC236}">
-                <a16:creationId xmlns:a16="http://schemas.microsoft.com/office/drawing/2014/main" id="{0379FB2A-FD8C-BD8F-B5B8-FA92D4862C24}"/>
-              </a:ext>
-            </a:extLst>
-          </p:cNvPr>
-          <p:cNvSpPr txBox="1"/>
-          <p:nvPr/>
-        </p:nvSpPr>
-        <p:spPr>
-          <a:xfrm>
-            <a:off x="6612046" y="6220374"/>
-            <a:ext cx="1227479" cy="307777"/>
-          </a:xfrm>
-          <a:prstGeom prst="rect">
-            <a:avLst/>
-          </a:prstGeom>
-        </p:spPr>
-        <p:style>
-          <a:lnRef idx="3">
-            <a:schemeClr val="lt1"/>
-          </a:lnRef>
-          <a:fillRef idx="1">
-            <a:schemeClr val="accent2"/>
-          </a:fillRef>
-          <a:effectRef idx="1">
-            <a:schemeClr val="accent2"/>
-          </a:effectRef>
-          <a:fontRef idx="minor">
-            <a:schemeClr val="lt1"/>
-          </a:fontRef>
-        </p:style>
-        <p:txBody>
-          <a:bodyPr wrap="square">
-            <a:spAutoFit/>
-          </a:bodyPr>
-          <a:lstStyle/>
-          <a:p>
-            <a:pPr algn="ctr"/>
-            <a:r>
-              <a:rPr lang="en-US" sz="1400" dirty="0"/>
-              <a:t>Simulation</a:t>
-            </a:r>
-          </a:p>
-        </p:txBody>
-      </p:sp>
-    </p:spTree>
-    <p:extLst>
-      <p:ext uri="{BB962C8B-B14F-4D97-AF65-F5344CB8AC3E}">
-        <p14:creationId xmlns:p14="http://schemas.microsoft.com/office/powerpoint/2010/main" val="41191163"/>
-      </p:ext>
-    </p:extLst>
-  </p:cSld>
-  <p:clrMapOvr>
-    <a:masterClrMapping/>
-  </p:clrMapOvr>
-</p:sld>
-</file>
-
-<file path=ppt/slides/slide12.xml><?xml version="1.0" encoding="utf-8"?>
 <p:sld xmlns:a="http://schemas.openxmlformats.org/drawingml/2006/main" xmlns:r="http://schemas.openxmlformats.org/officeDocument/2006/relationships" xmlns:p="http://schemas.openxmlformats.org/presentationml/2006/main">
   <p:cSld>
     <p:spTree>
@@ -18770,6 +14954,7 @@
           </a:bodyPr>
           <a:lstStyle/>
           <a:p>
+            <a:pPr algn="ctr"/>
             <a:r>
               <a:rPr lang="en-US" sz="1400" dirty="0"/>
               <a:t>optimal play</a:t>
@@ -19040,8 +15225,8 @@
         </p:nvSpPr>
         <p:spPr>
           <a:xfrm>
-            <a:off x="8224132" y="5544763"/>
-            <a:ext cx="1227479" cy="523220"/>
+            <a:off x="8047047" y="5544763"/>
+            <a:ext cx="1589714" cy="523220"/>
           </a:xfrm>
           <a:prstGeom prst="rect">
             <a:avLst/>
@@ -19070,7 +15255,7 @@
             <a:pPr algn="ctr"/>
             <a:r>
               <a:rPr lang="en-US" sz="1400" dirty="0"/>
-              <a:t>For training data</a:t>
+              <a:t>Used for simulating or training data</a:t>
             </a:r>
           </a:p>
         </p:txBody>
@@ -19273,8 +15458,8 @@
         </p:nvSpPr>
         <p:spPr>
           <a:xfrm>
-            <a:off x="8225272" y="6141926"/>
-            <a:ext cx="1227479" cy="523220"/>
+            <a:off x="8047047" y="6134247"/>
+            <a:ext cx="1589714" cy="523220"/>
           </a:xfrm>
           <a:prstGeom prst="rect">
             <a:avLst/>
@@ -19303,491 +15488,11 @@
             <a:pPr algn="ctr"/>
             <a:r>
               <a:rPr lang="en-US" sz="1400" dirty="0"/>
-              <a:t>Machine learning</a:t>
+              <a:t>Function approximation</a:t>
             </a:r>
           </a:p>
         </p:txBody>
       </p:sp>
-      <p:grpSp>
-        <p:nvGrpSpPr>
-          <p:cNvPr id="153" name="Group 152">
-            <a:extLst>
-              <a:ext uri="{FF2B5EF4-FFF2-40B4-BE49-F238E27FC236}">
-                <a16:creationId xmlns:a16="http://schemas.microsoft.com/office/drawing/2014/main" id="{467244E6-6631-A82C-4380-5EC78808AEF5}"/>
-              </a:ext>
-            </a:extLst>
-          </p:cNvPr>
-          <p:cNvGrpSpPr/>
-          <p:nvPr/>
-        </p:nvGrpSpPr>
-        <p:grpSpPr>
-          <a:xfrm>
-            <a:off x="9890888" y="2976822"/>
-            <a:ext cx="1352784" cy="276959"/>
-            <a:chOff x="8512059" y="1125673"/>
-            <a:chExt cx="1795320" cy="367560"/>
-          </a:xfrm>
-        </p:grpSpPr>
-        <mc:AlternateContent xmlns:mc="http://schemas.openxmlformats.org/markup-compatibility/2006" xmlns:p14="http://schemas.microsoft.com/office/powerpoint/2010/main">
-          <mc:Choice Requires="p14">
-            <p:contentPart p14:bwMode="auto" r:id="rId44">
-              <p14:nvContentPartPr>
-                <p14:cNvPr id="154" name="Ink 153">
-                  <a:extLst>
-                    <a:ext uri="{FF2B5EF4-FFF2-40B4-BE49-F238E27FC236}">
-                      <a16:creationId xmlns:a16="http://schemas.microsoft.com/office/drawing/2014/main" id="{FB474E08-5216-DA0C-FEE0-2CFADFE6ACE0}"/>
-                    </a:ext>
-                  </a:extLst>
-                </p14:cNvPr>
-                <p14:cNvContentPartPr/>
-                <p14:nvPr/>
-              </p14:nvContentPartPr>
-              <p14:xfrm>
-                <a:off x="8598459" y="1125673"/>
-                <a:ext cx="56160" cy="302400"/>
-              </p14:xfrm>
-            </p:contentPart>
-          </mc:Choice>
-          <mc:Fallback xmlns="">
-            <p:pic>
-              <p:nvPicPr>
-                <p:cNvPr id="137" name="Ink 136">
-                  <a:extLst>
-                    <a:ext uri="{FF2B5EF4-FFF2-40B4-BE49-F238E27FC236}">
-                      <a16:creationId xmlns:a16="http://schemas.microsoft.com/office/drawing/2014/main" id="{CEBFD206-DDF7-323B-3E43-2D61DD027C15}"/>
-                    </a:ext>
-                  </a:extLst>
-                </p:cNvPr>
-                <p:cNvPicPr/>
-                <p:nvPr/>
-              </p:nvPicPr>
-              <p:blipFill>
-                <a:blip r:embed="rId193"/>
-                <a:stretch>
-                  <a:fillRect/>
-                </a:stretch>
-              </p:blipFill>
-              <p:spPr>
-                <a:xfrm>
-                  <a:off x="8574662" y="1101787"/>
-                  <a:ext cx="103277" cy="349695"/>
-                </a:xfrm>
-                <a:prstGeom prst="rect">
-                  <a:avLst/>
-                </a:prstGeom>
-              </p:spPr>
-            </p:pic>
-          </mc:Fallback>
-        </mc:AlternateContent>
-        <mc:AlternateContent xmlns:mc="http://schemas.openxmlformats.org/markup-compatibility/2006" xmlns:p14="http://schemas.microsoft.com/office/powerpoint/2010/main">
-          <mc:Choice Requires="p14">
-            <p:contentPart p14:bwMode="auto" r:id="rId194">
-              <p14:nvContentPartPr>
-                <p14:cNvPr id="155" name="Ink 154">
-                  <a:extLst>
-                    <a:ext uri="{FF2B5EF4-FFF2-40B4-BE49-F238E27FC236}">
-                      <a16:creationId xmlns:a16="http://schemas.microsoft.com/office/drawing/2014/main" id="{54CE7880-4B8D-040F-05E0-9C000C91E2CD}"/>
-                    </a:ext>
-                  </a:extLst>
-                </p14:cNvPr>
-                <p14:cNvContentPartPr/>
-                <p14:nvPr/>
-              </p14:nvContentPartPr>
-              <p14:xfrm>
-                <a:off x="8512059" y="1251313"/>
-                <a:ext cx="148320" cy="36360"/>
-              </p14:xfrm>
-            </p:contentPart>
-          </mc:Choice>
-          <mc:Fallback xmlns="">
-            <p:pic>
-              <p:nvPicPr>
-                <p:cNvPr id="138" name="Ink 137">
-                  <a:extLst>
-                    <a:ext uri="{FF2B5EF4-FFF2-40B4-BE49-F238E27FC236}">
-                      <a16:creationId xmlns:a16="http://schemas.microsoft.com/office/drawing/2014/main" id="{2C783990-35B5-D447-D43C-867D26735157}"/>
-                    </a:ext>
-                  </a:extLst>
-                </p:cNvPr>
-                <p:cNvPicPr/>
-                <p:nvPr/>
-              </p:nvPicPr>
-              <p:blipFill>
-                <a:blip r:embed="rId195"/>
-                <a:stretch>
-                  <a:fillRect/>
-                </a:stretch>
-              </p:blipFill>
-              <p:spPr>
-                <a:xfrm>
-                  <a:off x="8488213" y="1227392"/>
-                  <a:ext cx="195534" cy="83724"/>
-                </a:xfrm>
-                <a:prstGeom prst="rect">
-                  <a:avLst/>
-                </a:prstGeom>
-              </p:spPr>
-            </p:pic>
-          </mc:Fallback>
-        </mc:AlternateContent>
-        <mc:AlternateContent xmlns:mc="http://schemas.openxmlformats.org/markup-compatibility/2006" xmlns:p14="http://schemas.microsoft.com/office/powerpoint/2010/main">
-          <mc:Choice Requires="p14">
-            <p:contentPart p14:bwMode="auto" r:id="rId196">
-              <p14:nvContentPartPr>
-                <p14:cNvPr id="156" name="Ink 155">
-                  <a:extLst>
-                    <a:ext uri="{FF2B5EF4-FFF2-40B4-BE49-F238E27FC236}">
-                      <a16:creationId xmlns:a16="http://schemas.microsoft.com/office/drawing/2014/main" id="{F0E69B1F-BBF1-6D37-0170-578F632BE67A}"/>
-                    </a:ext>
-                  </a:extLst>
-                </p14:cNvPr>
-                <p14:cNvContentPartPr/>
-                <p14:nvPr/>
-              </p14:nvContentPartPr>
-              <p14:xfrm>
-                <a:off x="8692059" y="1264633"/>
-                <a:ext cx="80280" cy="164160"/>
-              </p14:xfrm>
-            </p:contentPart>
-          </mc:Choice>
-          <mc:Fallback xmlns="">
-            <p:pic>
-              <p:nvPicPr>
-                <p:cNvPr id="139" name="Ink 138">
-                  <a:extLst>
-                    <a:ext uri="{FF2B5EF4-FFF2-40B4-BE49-F238E27FC236}">
-                      <a16:creationId xmlns:a16="http://schemas.microsoft.com/office/drawing/2014/main" id="{EF4554EF-6D54-01E0-AF68-05923DC129C5}"/>
-                    </a:ext>
-                  </a:extLst>
-                </p:cNvPr>
-                <p:cNvPicPr/>
-                <p:nvPr/>
-              </p:nvPicPr>
-              <p:blipFill>
-                <a:blip r:embed="rId197"/>
-                <a:stretch>
-                  <a:fillRect/>
-                </a:stretch>
-              </p:blipFill>
-              <p:spPr>
-                <a:xfrm>
-                  <a:off x="8668166" y="1240773"/>
-                  <a:ext cx="127588" cy="211404"/>
-                </a:xfrm>
-                <a:prstGeom prst="rect">
-                  <a:avLst/>
-                </a:prstGeom>
-              </p:spPr>
-            </p:pic>
-          </mc:Fallback>
-        </mc:AlternateContent>
-        <mc:AlternateContent xmlns:mc="http://schemas.openxmlformats.org/markup-compatibility/2006" xmlns:p14="http://schemas.microsoft.com/office/powerpoint/2010/main">
-          <mc:Choice Requires="p14">
-            <p:contentPart p14:bwMode="auto" r:id="rId198">
-              <p14:nvContentPartPr>
-                <p14:cNvPr id="157" name="Ink 156">
-                  <a:extLst>
-                    <a:ext uri="{FF2B5EF4-FFF2-40B4-BE49-F238E27FC236}">
-                      <a16:creationId xmlns:a16="http://schemas.microsoft.com/office/drawing/2014/main" id="{36F1C8C9-3BF4-9690-F9BE-DD39FC348AE1}"/>
-                    </a:ext>
-                  </a:extLst>
-                </p14:cNvPr>
-                <p14:cNvContentPartPr/>
-                <p14:nvPr/>
-              </p14:nvContentPartPr>
-              <p14:xfrm>
-                <a:off x="8852259" y="1228633"/>
-                <a:ext cx="403200" cy="217080"/>
-              </p14:xfrm>
-            </p:contentPart>
-          </mc:Choice>
-          <mc:Fallback xmlns="">
-            <p:pic>
-              <p:nvPicPr>
-                <p:cNvPr id="140" name="Ink 139">
-                  <a:extLst>
-                    <a:ext uri="{FF2B5EF4-FFF2-40B4-BE49-F238E27FC236}">
-                      <a16:creationId xmlns:a16="http://schemas.microsoft.com/office/drawing/2014/main" id="{780B00DA-F270-0BCA-DCAC-C7D62DAA3E62}"/>
-                    </a:ext>
-                  </a:extLst>
-                </p:cNvPr>
-                <p:cNvPicPr/>
-                <p:nvPr/>
-              </p:nvPicPr>
-              <p:blipFill>
-                <a:blip r:embed="rId199"/>
-                <a:stretch>
-                  <a:fillRect/>
-                </a:stretch>
-              </p:blipFill>
-              <p:spPr>
-                <a:xfrm>
-                  <a:off x="8828344" y="1204778"/>
-                  <a:ext cx="450551" cy="264313"/>
-                </a:xfrm>
-                <a:prstGeom prst="rect">
-                  <a:avLst/>
-                </a:prstGeom>
-              </p:spPr>
-            </p:pic>
-          </mc:Fallback>
-        </mc:AlternateContent>
-        <mc:AlternateContent xmlns:mc="http://schemas.openxmlformats.org/markup-compatibility/2006" xmlns:p14="http://schemas.microsoft.com/office/powerpoint/2010/main">
-          <mc:Choice Requires="p14">
-            <p:contentPart p14:bwMode="auto" r:id="rId200">
-              <p14:nvContentPartPr>
-                <p14:cNvPr id="158" name="Ink 157">
-                  <a:extLst>
-                    <a:ext uri="{FF2B5EF4-FFF2-40B4-BE49-F238E27FC236}">
-                      <a16:creationId xmlns:a16="http://schemas.microsoft.com/office/drawing/2014/main" id="{5E68257B-C8ED-1EAA-5D40-847B53E0F25B}"/>
-                    </a:ext>
-                  </a:extLst>
-                </p14:cNvPr>
-                <p14:cNvContentPartPr/>
-                <p14:nvPr/>
-              </p14:nvContentPartPr>
-              <p14:xfrm>
-                <a:off x="9184179" y="1153393"/>
-                <a:ext cx="51120" cy="105840"/>
-              </p14:xfrm>
-            </p:contentPart>
-          </mc:Choice>
-          <mc:Fallback xmlns="">
-            <p:pic>
-              <p:nvPicPr>
-                <p:cNvPr id="141" name="Ink 140">
-                  <a:extLst>
-                    <a:ext uri="{FF2B5EF4-FFF2-40B4-BE49-F238E27FC236}">
-                      <a16:creationId xmlns:a16="http://schemas.microsoft.com/office/drawing/2014/main" id="{475345BB-EFAC-B5CB-5FA5-92EEDAE607DA}"/>
-                    </a:ext>
-                  </a:extLst>
-                </p:cNvPr>
-                <p:cNvPicPr/>
-                <p:nvPr/>
-              </p:nvPicPr>
-              <p:blipFill>
-                <a:blip r:embed="rId201"/>
-                <a:stretch>
-                  <a:fillRect/>
-                </a:stretch>
-              </p:blipFill>
-              <p:spPr>
-                <a:xfrm>
-                  <a:off x="9160291" y="1129555"/>
-                  <a:ext cx="98418" cy="153039"/>
-                </a:xfrm>
-                <a:prstGeom prst="rect">
-                  <a:avLst/>
-                </a:prstGeom>
-              </p:spPr>
-            </p:pic>
-          </mc:Fallback>
-        </mc:AlternateContent>
-        <mc:AlternateContent xmlns:mc="http://schemas.openxmlformats.org/markup-compatibility/2006" xmlns:p14="http://schemas.microsoft.com/office/powerpoint/2010/main">
-          <mc:Choice Requires="p14">
-            <p:contentPart p14:bwMode="auto" r:id="rId202">
-              <p14:nvContentPartPr>
-                <p14:cNvPr id="159" name="Ink 158">
-                  <a:extLst>
-                    <a:ext uri="{FF2B5EF4-FFF2-40B4-BE49-F238E27FC236}">
-                      <a16:creationId xmlns:a16="http://schemas.microsoft.com/office/drawing/2014/main" id="{D6E42F83-A49F-E07E-72F2-7739A9EE5BD8}"/>
-                    </a:ext>
-                  </a:extLst>
-                </p14:cNvPr>
-                <p14:cNvContentPartPr/>
-                <p14:nvPr/>
-              </p14:nvContentPartPr>
-              <p14:xfrm>
-                <a:off x="9277779" y="1358953"/>
-                <a:ext cx="227160" cy="129600"/>
-              </p14:xfrm>
-            </p:contentPart>
-          </mc:Choice>
-          <mc:Fallback xmlns="">
-            <p:pic>
-              <p:nvPicPr>
-                <p:cNvPr id="142" name="Ink 141">
-                  <a:extLst>
-                    <a:ext uri="{FF2B5EF4-FFF2-40B4-BE49-F238E27FC236}">
-                      <a16:creationId xmlns:a16="http://schemas.microsoft.com/office/drawing/2014/main" id="{D0066B54-1411-FFE8-659C-7DA7A0769CCA}"/>
-                    </a:ext>
-                  </a:extLst>
-                </p:cNvPr>
-                <p:cNvPicPr/>
-                <p:nvPr/>
-              </p:nvPicPr>
-              <p:blipFill>
-                <a:blip r:embed="rId203"/>
-                <a:stretch>
-                  <a:fillRect/>
-                </a:stretch>
-              </p:blipFill>
-              <p:spPr>
-                <a:xfrm>
-                  <a:off x="9253918" y="1335129"/>
-                  <a:ext cx="274405" cy="176771"/>
-                </a:xfrm>
-                <a:prstGeom prst="rect">
-                  <a:avLst/>
-                </a:prstGeom>
-              </p:spPr>
-            </p:pic>
-          </mc:Fallback>
-        </mc:AlternateContent>
-        <mc:AlternateContent xmlns:mc="http://schemas.openxmlformats.org/markup-compatibility/2006" xmlns:p14="http://schemas.microsoft.com/office/powerpoint/2010/main">
-          <mc:Choice Requires="p14">
-            <p:contentPart p14:bwMode="auto" r:id="rId204">
-              <p14:nvContentPartPr>
-                <p14:cNvPr id="160" name="Ink 159">
-                  <a:extLst>
-                    <a:ext uri="{FF2B5EF4-FFF2-40B4-BE49-F238E27FC236}">
-                      <a16:creationId xmlns:a16="http://schemas.microsoft.com/office/drawing/2014/main" id="{953B35E0-380B-2B69-C25B-FCB16684B03A}"/>
-                    </a:ext>
-                  </a:extLst>
-                </p14:cNvPr>
-                <p14:cNvContentPartPr/>
-                <p14:nvPr/>
-              </p14:nvContentPartPr>
-              <p14:xfrm>
-                <a:off x="9790059" y="1224673"/>
-                <a:ext cx="45000" cy="268560"/>
-              </p14:xfrm>
-            </p:contentPart>
-          </mc:Choice>
-          <mc:Fallback xmlns="">
-            <p:pic>
-              <p:nvPicPr>
-                <p:cNvPr id="143" name="Ink 142">
-                  <a:extLst>
-                    <a:ext uri="{FF2B5EF4-FFF2-40B4-BE49-F238E27FC236}">
-                      <a16:creationId xmlns:a16="http://schemas.microsoft.com/office/drawing/2014/main" id="{9EF0FAE3-5367-7C93-EE61-AD85B2E3E602}"/>
-                    </a:ext>
-                  </a:extLst>
-                </p:cNvPr>
-                <p:cNvPicPr/>
-                <p:nvPr/>
-              </p:nvPicPr>
-              <p:blipFill>
-                <a:blip r:embed="rId205"/>
-                <a:stretch>
-                  <a:fillRect/>
-                </a:stretch>
-              </p:blipFill>
-              <p:spPr>
-                <a:xfrm>
-                  <a:off x="9766123" y="1200780"/>
-                  <a:ext cx="92394" cy="315869"/>
-                </a:xfrm>
-                <a:prstGeom prst="rect">
-                  <a:avLst/>
-                </a:prstGeom>
-              </p:spPr>
-            </p:pic>
-          </mc:Fallback>
-        </mc:AlternateContent>
-        <mc:AlternateContent xmlns:mc="http://schemas.openxmlformats.org/markup-compatibility/2006" xmlns:p14="http://schemas.microsoft.com/office/powerpoint/2010/main">
-          <mc:Choice Requires="p14">
-            <p:contentPart p14:bwMode="auto" r:id="rId206">
-              <p14:nvContentPartPr>
-                <p14:cNvPr id="161" name="Ink 160">
-                  <a:extLst>
-                    <a:ext uri="{FF2B5EF4-FFF2-40B4-BE49-F238E27FC236}">
-                      <a16:creationId xmlns:a16="http://schemas.microsoft.com/office/drawing/2014/main" id="{F82B8CB5-0E46-6984-625B-C284F45109FB}"/>
-                    </a:ext>
-                  </a:extLst>
-                </p14:cNvPr>
-                <p14:cNvContentPartPr/>
-                <p14:nvPr/>
-              </p14:nvContentPartPr>
-              <p14:xfrm>
-                <a:off x="9805179" y="1208473"/>
-                <a:ext cx="217440" cy="227880"/>
-              </p14:xfrm>
-            </p:contentPart>
-          </mc:Choice>
-          <mc:Fallback xmlns="">
-            <p:pic>
-              <p:nvPicPr>
-                <p:cNvPr id="144" name="Ink 143">
-                  <a:extLst>
-                    <a:ext uri="{FF2B5EF4-FFF2-40B4-BE49-F238E27FC236}">
-                      <a16:creationId xmlns:a16="http://schemas.microsoft.com/office/drawing/2014/main" id="{776F2ED2-02A8-CCCB-3D3B-C04FC3BD34A7}"/>
-                    </a:ext>
-                  </a:extLst>
-                </p:cNvPr>
-                <p:cNvPicPr/>
-                <p:nvPr/>
-              </p:nvPicPr>
-              <p:blipFill>
-                <a:blip r:embed="rId207"/>
-                <a:stretch>
-                  <a:fillRect/>
-                </a:stretch>
-              </p:blipFill>
-              <p:spPr>
-                <a:xfrm>
-                  <a:off x="9781284" y="1184586"/>
-                  <a:ext cx="264751" cy="275176"/>
-                </a:xfrm>
-                <a:prstGeom prst="rect">
-                  <a:avLst/>
-                </a:prstGeom>
-              </p:spPr>
-            </p:pic>
-          </mc:Fallback>
-        </mc:AlternateContent>
-        <mc:AlternateContent xmlns:mc="http://schemas.openxmlformats.org/markup-compatibility/2006" xmlns:p14="http://schemas.microsoft.com/office/powerpoint/2010/main">
-          <mc:Choice Requires="p14">
-            <p:contentPart p14:bwMode="auto" r:id="rId208">
-              <p14:nvContentPartPr>
-                <p14:cNvPr id="162" name="Ink 161">
-                  <a:extLst>
-                    <a:ext uri="{FF2B5EF4-FFF2-40B4-BE49-F238E27FC236}">
-                      <a16:creationId xmlns:a16="http://schemas.microsoft.com/office/drawing/2014/main" id="{C67D96CF-8EA4-20E5-E317-58F125AC1EAE}"/>
-                    </a:ext>
-                  </a:extLst>
-                </p14:cNvPr>
-                <p14:cNvContentPartPr/>
-                <p14:nvPr/>
-              </p14:nvContentPartPr>
-              <p14:xfrm>
-                <a:off x="10082739" y="1215313"/>
-                <a:ext cx="224640" cy="243360"/>
-              </p14:xfrm>
-            </p:contentPart>
-          </mc:Choice>
-          <mc:Fallback xmlns="">
-            <p:pic>
-              <p:nvPicPr>
-                <p:cNvPr id="145" name="Ink 144">
-                  <a:extLst>
-                    <a:ext uri="{FF2B5EF4-FFF2-40B4-BE49-F238E27FC236}">
-                      <a16:creationId xmlns:a16="http://schemas.microsoft.com/office/drawing/2014/main" id="{9B85FB86-3B8E-BABA-76BC-BF469FC6A55B}"/>
-                    </a:ext>
-                  </a:extLst>
-                </p:cNvPr>
-                <p:cNvPicPr/>
-                <p:nvPr/>
-              </p:nvPicPr>
-              <p:blipFill>
-                <a:blip r:embed="rId209"/>
-                <a:stretch>
-                  <a:fillRect/>
-                </a:stretch>
-              </p:blipFill>
-              <p:spPr>
-                <a:xfrm>
-                  <a:off x="10058892" y="1191454"/>
-                  <a:ext cx="271857" cy="290600"/>
-                </a:xfrm>
-                <a:prstGeom prst="rect">
-                  <a:avLst/>
-                </a:prstGeom>
-              </p:spPr>
-            </p:pic>
-          </mc:Fallback>
-        </mc:AlternateContent>
-      </p:grpSp>
       <p:sp>
         <p:nvSpPr>
           <p:cNvPr id="174" name="TextBox 173">
@@ -19908,8 +15613,8 @@
           </a:p>
         </p:txBody>
       </p:sp>
-      <mc:AlternateContent xmlns:mc="http://schemas.openxmlformats.org/markup-compatibility/2006">
-        <mc:Choice xmlns:a14="http://schemas.microsoft.com/office/drawing/2010/main" Requires="a14">
+      <mc:AlternateContent xmlns:mc="http://schemas.openxmlformats.org/markup-compatibility/2006" xmlns:a14="http://schemas.microsoft.com/office/drawing/2010/main">
+        <mc:Choice Requires="a14">
           <p:sp>
             <p:nvSpPr>
               <p:cNvPr id="7" name="TextBox 6">
@@ -20101,7 +15806,7 @@
             </p:txBody>
           </p:sp>
         </mc:Choice>
-        <mc:Fallback>
+        <mc:Fallback xmlns="">
           <p:sp>
             <p:nvSpPr>
               <p:cNvPr id="7" name="TextBox 6">
@@ -20190,7 +15895,7 @@
                                           </p:stCondLst>
                                         </p:cTn>
                                         <p:tgtEl>
-                                          <p:spTgt spid="17"/>
+                                          <p:spTgt spid="174"/>
                                         </p:tgtEl>
                                         <p:attrNameLst>
                                           <p:attrName>style.visibility</p:attrName>
@@ -20217,105 +15922,6 @@
                                           </p:stCondLst>
                                         </p:cTn>
                                         <p:tgtEl>
-                                          <p:spTgt spid="152"/>
-                                        </p:tgtEl>
-                                        <p:attrNameLst>
-                                          <p:attrName>style.visibility</p:attrName>
-                                        </p:attrNameLst>
-                                      </p:cBhvr>
-                                      <p:to>
-                                        <p:strVal val="visible"/>
-                                      </p:to>
-                                    </p:set>
-                                  </p:childTnLst>
-                                </p:cTn>
-                              </p:par>
-                              <p:par>
-                                <p:cTn id="9" presetID="1" presetClass="entr" presetSubtype="0" fill="hold" nodeType="withEffect">
-                                  <p:stCondLst>
-                                    <p:cond delay="0"/>
-                                  </p:stCondLst>
-                                  <p:childTnLst>
-                                    <p:set>
-                                      <p:cBhvr>
-                                        <p:cTn id="10" dur="1" fill="hold">
-                                          <p:stCondLst>
-                                            <p:cond delay="0"/>
-                                          </p:stCondLst>
-                                        </p:cTn>
-                                        <p:tgtEl>
-                                          <p:spTgt spid="153"/>
-                                        </p:tgtEl>
-                                        <p:attrNameLst>
-                                          <p:attrName>style.visibility</p:attrName>
-                                        </p:attrNameLst>
-                                      </p:cBhvr>
-                                      <p:to>
-                                        <p:strVal val="visible"/>
-                                      </p:to>
-                                    </p:set>
-                                  </p:childTnLst>
-                                </p:cTn>
-                              </p:par>
-                            </p:childTnLst>
-                          </p:cTn>
-                        </p:par>
-                      </p:childTnLst>
-                    </p:cTn>
-                  </p:par>
-                  <p:par>
-                    <p:cTn id="11" fill="hold">
-                      <p:stCondLst>
-                        <p:cond delay="indefinite"/>
-                      </p:stCondLst>
-                      <p:childTnLst>
-                        <p:par>
-                          <p:cTn id="12" fill="hold">
-                            <p:stCondLst>
-                              <p:cond delay="0"/>
-                            </p:stCondLst>
-                            <p:childTnLst>
-                              <p:par>
-                                <p:cTn id="13" presetID="1" presetClass="entr" presetSubtype="0" fill="hold" grpId="0" nodeType="clickEffect">
-                                  <p:stCondLst>
-                                    <p:cond delay="0"/>
-                                  </p:stCondLst>
-                                  <p:childTnLst>
-                                    <p:set>
-                                      <p:cBhvr>
-                                        <p:cTn id="14" dur="1" fill="hold">
-                                          <p:stCondLst>
-                                            <p:cond delay="0"/>
-                                          </p:stCondLst>
-                                        </p:cTn>
-                                        <p:tgtEl>
-                                          <p:spTgt spid="174"/>
-                                        </p:tgtEl>
-                                        <p:attrNameLst>
-                                          <p:attrName>style.visibility</p:attrName>
-                                        </p:attrNameLst>
-                                      </p:cBhvr>
-                                      <p:to>
-                                        <p:strVal val="visible"/>
-                                      </p:to>
-                                    </p:set>
-                                  </p:childTnLst>
-                                </p:cTn>
-                              </p:par>
-                              <p:par>
-                                <p:cTn id="15" presetID="1" presetClass="entr" presetSubtype="0" fill="hold" grpId="0" nodeType="withEffect">
-                                  <p:stCondLst>
-                                    <p:cond delay="0"/>
-                                  </p:stCondLst>
-                                  <p:childTnLst>
-                                    <p:set>
-                                      <p:cBhvr>
-                                        <p:cTn id="16" dur="1" fill="hold">
-                                          <p:stCondLst>
-                                            <p:cond delay="0"/>
-                                          </p:stCondLst>
-                                        </p:cTn>
-                                        <p:tgtEl>
                                           <p:spTgt spid="176"/>
                                         </p:tgtEl>
                                         <p:attrNameLst>
@@ -20336,26 +15942,98 @@
                     </p:cTn>
                   </p:par>
                   <p:par>
-                    <p:cTn id="17" fill="hold">
+                    <p:cTn id="9" fill="hold">
                       <p:stCondLst>
                         <p:cond delay="indefinite"/>
                       </p:stCondLst>
                       <p:childTnLst>
                         <p:par>
-                          <p:cTn id="18" fill="hold">
+                          <p:cTn id="10" fill="hold">
                             <p:stCondLst>
                               <p:cond delay="0"/>
                             </p:stCondLst>
                             <p:childTnLst>
                               <p:par>
-                                <p:cTn id="19" presetID="1" presetClass="entr" presetSubtype="0" fill="hold" grpId="0" nodeType="clickEffect">
+                                <p:cTn id="11" presetID="1" presetClass="entr" presetSubtype="0" fill="hold" grpId="0" nodeType="clickEffect">
                                   <p:stCondLst>
                                     <p:cond delay="0"/>
                                   </p:stCondLst>
                                   <p:childTnLst>
                                     <p:set>
                                       <p:cBhvr>
-                                        <p:cTn id="20" dur="1" fill="hold">
+                                        <p:cTn id="12" dur="1" fill="hold">
+                                          <p:stCondLst>
+                                            <p:cond delay="0"/>
+                                          </p:stCondLst>
+                                        </p:cTn>
+                                        <p:tgtEl>
+                                          <p:spTgt spid="17"/>
+                                        </p:tgtEl>
+                                        <p:attrNameLst>
+                                          <p:attrName>style.visibility</p:attrName>
+                                        </p:attrNameLst>
+                                      </p:cBhvr>
+                                      <p:to>
+                                        <p:strVal val="visible"/>
+                                      </p:to>
+                                    </p:set>
+                                  </p:childTnLst>
+                                </p:cTn>
+                              </p:par>
+                              <p:par>
+                                <p:cTn id="13" presetID="1" presetClass="entr" presetSubtype="0" fill="hold" grpId="0" nodeType="withEffect">
+                                  <p:stCondLst>
+                                    <p:cond delay="0"/>
+                                  </p:stCondLst>
+                                  <p:childTnLst>
+                                    <p:set>
+                                      <p:cBhvr>
+                                        <p:cTn id="14" dur="1" fill="hold">
+                                          <p:stCondLst>
+                                            <p:cond delay="0"/>
+                                          </p:stCondLst>
+                                        </p:cTn>
+                                        <p:tgtEl>
+                                          <p:spTgt spid="152"/>
+                                        </p:tgtEl>
+                                        <p:attrNameLst>
+                                          <p:attrName>style.visibility</p:attrName>
+                                        </p:attrNameLst>
+                                      </p:cBhvr>
+                                      <p:to>
+                                        <p:strVal val="visible"/>
+                                      </p:to>
+                                    </p:set>
+                                  </p:childTnLst>
+                                </p:cTn>
+                              </p:par>
+                            </p:childTnLst>
+                          </p:cTn>
+                        </p:par>
+                      </p:childTnLst>
+                    </p:cTn>
+                  </p:par>
+                  <p:par>
+                    <p:cTn id="15" fill="hold">
+                      <p:stCondLst>
+                        <p:cond delay="indefinite"/>
+                      </p:stCondLst>
+                      <p:childTnLst>
+                        <p:par>
+                          <p:cTn id="16" fill="hold">
+                            <p:stCondLst>
+                              <p:cond delay="0"/>
+                            </p:stCondLst>
+                            <p:childTnLst>
+                              <p:par>
+                                <p:cTn id="17" presetID="1" presetClass="entr" presetSubtype="0" fill="hold" grpId="0" nodeType="clickEffect">
+                                  <p:stCondLst>
+                                    <p:cond delay="0"/>
+                                  </p:stCondLst>
+                                  <p:childTnLst>
+                                    <p:set>
+                                      <p:cBhvr>
+                                        <p:cTn id="18" dur="1" fill="hold">
                                           <p:stCondLst>
                                             <p:cond delay="0"/>
                                           </p:stCondLst>
@@ -20412,7 +16090,7 @@
 </p:sld>
 </file>
 
-<file path=ppt/slides/slide13.xml><?xml version="1.0" encoding="utf-8"?>
+<file path=ppt/slides/slide12.xml><?xml version="1.0" encoding="utf-8"?>
 <p:sld xmlns:a="http://schemas.openxmlformats.org/drawingml/2006/main" xmlns:r="http://schemas.openxmlformats.org/officeDocument/2006/relationships" xmlns:p="http://schemas.openxmlformats.org/presentationml/2006/main">
   <p:cSld>
     <p:spTree>
@@ -20552,8 +16230,13 @@
             </a:pPr>
             <a:r>
               <a:rPr lang="en-US" dirty="0"/>
-              <a:t>We will talk about other RL methods later.</a:t>
+              <a:t>You can take a </a:t>
             </a:r>
+            <a:r>
+              <a:rPr lang="en-US"/>
+              <a:t>RL course.</a:t>
+            </a:r>
+            <a:endParaRPr lang="en-US" dirty="0"/>
           </a:p>
         </p:txBody>
       </p:sp>
@@ -21233,10 +16916,10 @@
             <p:nvPr/>
           </p:nvPicPr>
           <p:blipFill>
-            <a:blip r:embed="rId2">
+            <a:blip>
               <a:extLst>
                 <a:ext uri="{96DAC541-7B7A-43D3-8B79-37D633B846F1}">
-                  <asvg:svgBlip xmlns:asvg="http://schemas.microsoft.com/office/drawing/2016/SVG/main" r:embed="rId3"/>
+                  <asvg:svgBlip xmlns:asvg="http://schemas.microsoft.com/office/drawing/2016/SVG/main" r:embed="rId2"/>
                 </a:ext>
               </a:extLst>
             </a:blip>
@@ -25166,8 +20849,8 @@
           </a:p>
         </p:txBody>
       </p:sp>
-      <mc:AlternateContent xmlns:mc="http://schemas.openxmlformats.org/markup-compatibility/2006" xmlns:a14="http://schemas.microsoft.com/office/drawing/2010/main">
-        <mc:Choice Requires="a14">
+      <mc:AlternateContent xmlns:mc="http://schemas.openxmlformats.org/markup-compatibility/2006">
+        <mc:Choice xmlns:a14="http://schemas.microsoft.com/office/drawing/2010/main" Requires="a14">
           <p:sp>
             <p:nvSpPr>
               <p:cNvPr id="13" name="Content Placeholder 12">
@@ -25262,8 +20945,9 @@
                           <m:r>
                             <a:rPr lang="en-US" b="0" i="1" smtClean="0">
                               <a:latin typeface="Cambria Math" panose="02040503050406030204" pitchFamily="18" charset="0"/>
+                              <a:ea typeface="Cambria Math" panose="02040503050406030204" pitchFamily="18" charset="0"/>
                             </a:rPr>
-                            <m:t>𝑎𝑐𝑡𝑖𝑜𝑛𝑠</m:t>
+                            <m:t>𝒜</m:t>
                           </m:r>
                           <m:r>
                             <a:rPr lang="en-US" b="0" i="1" smtClean="0">
@@ -25649,7 +21333,7 @@
             </p:txBody>
           </p:sp>
         </mc:Choice>
-        <mc:Fallback xmlns="">
+        <mc:Fallback>
           <p:sp>
             <p:nvSpPr>
               <p:cNvPr id="13" name="Content Placeholder 12">
@@ -28709,8 +24393,8 @@
           </a:p>
         </p:txBody>
       </p:sp>
-      <mc:AlternateContent xmlns:mc="http://schemas.openxmlformats.org/markup-compatibility/2006">
-        <mc:Choice xmlns:a14="http://schemas.microsoft.com/office/drawing/2010/main" Requires="a14">
+      <mc:AlternateContent xmlns:mc="http://schemas.openxmlformats.org/markup-compatibility/2006" xmlns:a14="http://schemas.microsoft.com/office/drawing/2010/main">
+        <mc:Choice Requires="a14">
           <p:sp>
             <p:nvSpPr>
               <p:cNvPr id="6" name="TextBox 5">
@@ -28902,7 +24586,7 @@
             </p:txBody>
           </p:sp>
         </mc:Choice>
-        <mc:Fallback>
+        <mc:Fallback xmlns="">
           <p:sp>
             <p:nvSpPr>
               <p:cNvPr id="6" name="TextBox 5">
@@ -33879,8 +29563,8 @@
           </a:p>
         </p:txBody>
       </p:sp>
-      <mc:AlternateContent xmlns:mc="http://schemas.openxmlformats.org/markup-compatibility/2006">
-        <mc:Choice xmlns:a14="http://schemas.microsoft.com/office/drawing/2010/main" Requires="a14">
+      <mc:AlternateContent xmlns:mc="http://schemas.openxmlformats.org/markup-compatibility/2006" xmlns:a14="http://schemas.microsoft.com/office/drawing/2010/main">
+        <mc:Choice Requires="a14">
           <p:sp>
             <p:nvSpPr>
               <p:cNvPr id="8" name="TextBox 7">
@@ -34072,7 +29756,7 @@
             </p:txBody>
           </p:sp>
         </mc:Choice>
-        <mc:Fallback>
+        <mc:Fallback xmlns="">
           <p:sp>
             <p:nvSpPr>
               <p:cNvPr id="8" name="TextBox 7">

--- a/slides/discussion/19_ML_intro_discussion.pptx
+++ b/slides/discussion/19_ML_intro_discussion.pptx
@@ -16230,13 +16230,8 @@
             </a:pPr>
             <a:r>
               <a:rPr lang="en-US" dirty="0"/>
-              <a:t>You can take a </a:t>
+              <a:t>You can learn more by taking an RL course.</a:t>
             </a:r>
-            <a:r>
-              <a:rPr lang="en-US"/>
-              <a:t>RL course.</a:t>
-            </a:r>
-            <a:endParaRPr lang="en-US" dirty="0"/>
           </a:p>
         </p:txBody>
       </p:sp>
@@ -20849,8 +20844,8 @@
           </a:p>
         </p:txBody>
       </p:sp>
-      <mc:AlternateContent xmlns:mc="http://schemas.openxmlformats.org/markup-compatibility/2006">
-        <mc:Choice xmlns:a14="http://schemas.microsoft.com/office/drawing/2010/main" Requires="a14">
+      <mc:AlternateContent xmlns:mc="http://schemas.openxmlformats.org/markup-compatibility/2006" xmlns:a14="http://schemas.microsoft.com/office/drawing/2010/main">
+        <mc:Choice Requires="a14">
           <p:sp>
             <p:nvSpPr>
               <p:cNvPr id="13" name="Content Placeholder 12">
@@ -21333,7 +21328,7 @@
             </p:txBody>
           </p:sp>
         </mc:Choice>
-        <mc:Fallback>
+        <mc:Fallback xmlns="">
           <p:sp>
             <p:nvSpPr>
               <p:cNvPr id="13" name="Content Placeholder 12">

--- a/slides/discussion/19_ML_intro_discussion.pptx
+++ b/slides/discussion/19_ML_intro_discussion.pptx
@@ -194,22 +194,25 @@
           <inkml:channel name="X" type="integer" min="-2.14748E9" max="2.14748E9" units="cm"/>
           <inkml:channel name="Y" type="integer" min="-2.14748E9" max="2.14748E9" units="cm"/>
           <inkml:channel name="F" type="integer" max="32767" units="dev"/>
+          <inkml:channel name="OA" type="integer" max="360" units="deg"/>
+          <inkml:channel name="OE" type="integer" max="90" units="deg"/>
         </inkml:traceFormat>
         <inkml:channelProperties>
           <inkml:channelProperty channel="X" name="resolution" value="1000" units="1/cm"/>
           <inkml:channelProperty channel="Y" name="resolution" value="1000" units="1/cm"/>
           <inkml:channelProperty channel="F" name="resolution" value="0" units="1/dev"/>
+          <inkml:channelProperty channel="OA" name="resolution" value="1000" units="1/deg"/>
+          <inkml:channelProperty channel="OE" name="resolution" value="1000" units="1/deg"/>
         </inkml:channelProperties>
       </inkml:inkSource>
-      <inkml:timestamp xml:id="ts0" timeString="2025-05-02T14:07:37.161"/>
+      <inkml:timestamp xml:id="ts0" timeString="2025-04-28T15:57:04.984"/>
     </inkml:context>
     <inkml:brush xml:id="br0">
-      <inkml:brushProperty name="width" value="0.1" units="cm"/>
-      <inkml:brushProperty name="height" value="0.1" units="cm"/>
-      <inkml:brushProperty name="color" value="#E71224"/>
+      <inkml:brushProperty name="width" value="0.05" units="cm"/>
+      <inkml:brushProperty name="height" value="0.05" units="cm"/>
     </inkml:brush>
   </inkml:definitions>
-  <inkml:trace contextRef="#ctx0" brushRef="#br0">18 17 5857,'1'-2'325,"-1"1"0,0 1 1,0-1-1,1 0 0,-1 0 0,1 0 0,-1 0 0,1 1 0,0-2 0,-1 2 0,1-1 0,-1 0 1,1 1-1,0-1 0,-1 0 0,2 1 0,-2-1 0,2 0 0,-1 1-112,-1 0 0,0 0-1,1 0 1,-1 0 0,1 0-1,-1-1 1,0 1-1,1 0 1,0 0 0,-1 0-1,0 0 1,0 0 0,1 0-1,-1 1 1,0-1 0,1 0-1,0 0 1,-1 0 0,0 0-1,0 0 1,2 0 0,-2 1-30,1-1 0,0 1 1,-1-1-1,1 1 0,-1 0 1,1-1-1,0 1 0,-1 0 1,1-1-1,0 1 0,-1 0 1,1 1-1,4 12 853,0 0 0,-1 0 0,3 22 0,-3-17-550,19 150 1430,-22-140-1808,-1 0 0,-2 0 1,-12 55-1,2-41-1018,-32 66 0,20-57 156</inkml:trace>
+  <inkml:trace contextRef="#ctx0" brushRef="#br0">12 506 4828 0 0,'-1'-1'452'0'0,"0"1"0"0"0,1 0 0 0 0,-1-1 0 0 0,0 1 0 0 0,1-1 0 0 0,-1 1 0 0 0,0-1 0 0 0,1 1-1 0 0,-1-1 1 0 0,1 1 0 0 0,-1-1 0 0 0,1 0 0 0 0,-1 1 0 0 0,1-1 0 0 0,-1 0 0 0 0,1 1 0 0 0,0-1-1 0 0,-1 0 1 0 0,1 0 0 0 0,0 1 0 0 0,0-1 0 0 0,0 0 0 0 0,-1-1 0 0 0,11-14 3047 0 0,32-13-4545 0 0,-30 23 2018 0 0,73-48-611 0 0,44-36-697 0 0,-98 66-1283 0 0,-1-2-1 0 0,-1-1 0 0 0,-1-1 0 0 0,36-49 1 0 0,-33 27-1675 0 0,-30 48 3174 0 0,0 0 1 0 0,-1 0-1 0 0,1 0 0 0 0,0 0 0 0 0,0 0 1 0 0,-1 0-1 0 0,1-1 0 0 0,-1 1 0 0 0,0 0 0 0 0,0 0 1 0 0,0 0-1 0 0,0 0 0 0 0,0-1 0 0 0,0 1 1 0 0,0 0-1 0 0,-1 0 0 0 0,1 0 0 0 0,-1 0 0 0 0,1 0 1 0 0,-1 0-1 0 0,-1-3 0 0 0,0 4-77 0 0,1-1-1 0 0,-1 1 1 0 0,1 0 0 0 0,-1 0-1 0 0,1-1 1 0 0,-1 1-1 0 0,0 0 1 0 0,0 0-1 0 0,1 1 1 0 0,-1-1 0 0 0,-3-1-1 0 0</inkml:trace>
 </inkml:ink>
 </file>
 
@@ -222,22 +225,25 @@
           <inkml:channel name="X" type="integer" min="-2.14748E9" max="2.14748E9" units="cm"/>
           <inkml:channel name="Y" type="integer" min="-2.14748E9" max="2.14748E9" units="cm"/>
           <inkml:channel name="F" type="integer" max="32767" units="dev"/>
+          <inkml:channel name="OA" type="integer" max="360" units="deg"/>
+          <inkml:channel name="OE" type="integer" max="90" units="deg"/>
         </inkml:traceFormat>
         <inkml:channelProperties>
           <inkml:channelProperty channel="X" name="resolution" value="1000" units="1/cm"/>
           <inkml:channelProperty channel="Y" name="resolution" value="1000" units="1/cm"/>
           <inkml:channelProperty channel="F" name="resolution" value="0" units="1/dev"/>
+          <inkml:channelProperty channel="OA" name="resolution" value="1000" units="1/deg"/>
+          <inkml:channelProperty channel="OE" name="resolution" value="1000" units="1/deg"/>
         </inkml:channelProperties>
       </inkml:inkSource>
-      <inkml:timestamp xml:id="ts0" timeString="2025-05-02T14:07:37.162"/>
+      <inkml:timestamp xml:id="ts0" timeString="2025-04-28T15:57:06.036"/>
     </inkml:context>
     <inkml:brush xml:id="br0">
-      <inkml:brushProperty name="width" value="0.1" units="cm"/>
-      <inkml:brushProperty name="height" value="0.1" units="cm"/>
-      <inkml:brushProperty name="color" value="#E71224"/>
+      <inkml:brushProperty name="width" value="0.05" units="cm"/>
+      <inkml:brushProperty name="height" value="0.05" units="cm"/>
     </inkml:brush>
   </inkml:definitions>
-  <inkml:trace contextRef="#ctx0" brushRef="#br0">7 2 1448,'-5'-2'5412,"5"2"-5265,-1 7 2736,6 15-867,-4-17-1219,51 219 5561,-10-36-5632,-41-182-712,8 24 66,-8-27-81,0-1 0,0 0 0,0 0 0,0 0 0,1 0 0,-1 0 0,1 0 0,-1 0 0,1-1 0,2 3 0,-4-4-21,0 0 1,0 1 0,0-1 0,0 0 0,0 0 0,0 0-1,1 0 1,-1 0 0,0 0 0,0 0 0,0 0 0,0 0 0,1 0-1,-1 0 1,0 0 0,0 0 0,0 0 0,0 0 0,0 0-1,0 0 1,0 0 0,1 0 0,-1 0 0,0 0 0,0 0-1,0 0 1,1 0 0,-1 0 0,0 0 0,0 0 0,0 0 0,0 0-1,0 0 1,0 0 0,0 0 0,0 0 0,1 0 0,-1 0-1,0 0 1,0 0 0,0 0 0,0-1 0,0 1 0,0 0-1,0 0 1,0 0 0,0 0 0,0 0 0,0 0 0,0 0 0,0-1-1,2-5-971,-2 5 759,2-29-6539,-2 26 6086,-2-21-2442</inkml:trace>
+  <inkml:trace contextRef="#ctx0" brushRef="#br0">1 107 1068 0 0,'2'3'945'0'0,"0"0"-1"0"0,0-1 1 0 0,0 1 0 0 0,1-1-1 0 0,-1 1 1 0 0,1-1 0 0 0,-1 0-1 0 0,1 0 1 0 0,3 2-1 0 0,50 27 2218 0 0,-43-25-2934 0 0,1-1-1 0 0,-1-1 1 0 0,29 6 0 0 0,-36-9 35 0 0,0 0-1 0 0,0-1 1 0 0,1 0 0 0 0,-1 0 0 0 0,0 0 0 0 0,7-2 0 0 0,-10 2-187 0 0,-1-1 0 0 0,1 1-1 0 0,-1-1 1 0 0,0 0 0 0 0,1 0 0 0 0,-1 0 0 0 0,1 0 0 0 0,-1 0 0 0 0,0 0-1 0 0,0-1 1 0 0,0 1 0 0 0,0-1 0 0 0,0 1 0 0 0,0-1 0 0 0,0 0 0 0 0,0 0 0 0 0,-1 0-1 0 0,1 0 1 0 0,-1 0 0 0 0,2-3 0 0 0,-2 2-52 0 0,0 0-1 0 0,-1 0 1 0 0,1 0 0 0 0,-1 0 0 0 0,1 0-1 0 0,-1 0 1 0 0,0 0 0 0 0,0 0 0 0 0,-1-1-1 0 0,1 1 1 0 0,-1 0 0 0 0,1 0 0 0 0,-1 0-1 0 0,0 0 1 0 0,0 0 0 0 0,0 1 0 0 0,-1-1-1 0 0,-1-3 1 0 0,1 3-71 0 0,-4-11 432 0 0,-2 0 1 0 0,0 1 0 0 0,-13-18-1 0 0,-5 10-3309 0 0,25 20 2754 0 0,0 1 0 0 0,1 0 0 0 0,-1 0 0 0 0,0 0 0 0 0,0-1 0 0 0,0 1 0 0 0,0 0 0 0 0,1 0 0 0 0,-1 0 0 0 0,0 0 0 0 0,0 1 0 0 0,0-1 0 0 0,0 0 0 0 0,1 0 0 0 0,-1 0 0 0 0,0 1 0 0 0,0-1 0 0 0,0 0 0 0 0,1 1 0 0 0,-1-1 0 0 0,0 1 0 0 0,0-1 0 0 0,1 1 0 0 0,-1-1 0 0 0,0 1 0 0 0,1-1 0 0 0,-1 1 0 0 0,0 1 0 0 0,-24 34-2403 0 0,-53 119-1688 0 0,51-92 1711 0 0</inkml:trace>
 </inkml:ink>
 </file>
 
@@ -250,218 +256,25 @@
           <inkml:channel name="X" type="integer" min="-2.14748E9" max="2.14748E9" units="cm"/>
           <inkml:channel name="Y" type="integer" min="-2.14748E9" max="2.14748E9" units="cm"/>
           <inkml:channel name="F" type="integer" max="32767" units="dev"/>
+          <inkml:channel name="OA" type="integer" max="360" units="deg"/>
+          <inkml:channel name="OE" type="integer" max="90" units="deg"/>
         </inkml:traceFormat>
         <inkml:channelProperties>
           <inkml:channelProperty channel="X" name="resolution" value="1000" units="1/cm"/>
           <inkml:channelProperty channel="Y" name="resolution" value="1000" units="1/cm"/>
           <inkml:channelProperty channel="F" name="resolution" value="0" units="1/dev"/>
+          <inkml:channelProperty channel="OA" name="resolution" value="1000" units="1/deg"/>
+          <inkml:channelProperty channel="OE" name="resolution" value="1000" units="1/deg"/>
         </inkml:channelProperties>
       </inkml:inkSource>
-      <inkml:timestamp xml:id="ts0" timeString="2025-05-02T14:07:37.163"/>
+      <inkml:timestamp xml:id="ts0" timeString="2025-04-28T15:57:07.076"/>
     </inkml:context>
     <inkml:brush xml:id="br0">
-      <inkml:brushProperty name="width" value="0.1" units="cm"/>
-      <inkml:brushProperty name="height" value="0.1" units="cm"/>
-      <inkml:brushProperty name="color" value="#E71224"/>
+      <inkml:brushProperty name="width" value="0.05" units="cm"/>
+      <inkml:brushProperty name="height" value="0.05" units="cm"/>
     </inkml:brush>
   </inkml:definitions>
-  <inkml:trace contextRef="#ctx0" brushRef="#br0">8 72 4033,'-1'-4'925,"-1"0"1,1 0-1,0 0 1,0 0 0,-1-6-1,2 9-772,0 0-1,0 1 1,0-2 0,0 2-1,1-1 1,-1 0-1,0 0 1,0 1 0,0-1-1,1 0 1,-1 1 0,1-1-1,-1 0 1,1 0-1,-1 1 1,0-1 0,1 0-1,0 1 1,-1-1 0,1 1-1,0-1 1,0 1-1,0 0 1,-1-1 0,1 1-1,-1-1 1,2 1 0,-2 0-1,2 0 1,-2-1-1,1 1 1,0-1 0,0 1-1,0 0 1,2 0 0,-2 0-38,1 0 1,0 0 0,0 0-1,-1 1 1,1-1-1,0 1 1,0-1 0,-1 1-1,1-1 1,0 1 0,-1-1-1,1 1 1,0 0 0,0 0-1,-1 0 1,0 0 0,0 0-1,1 0 1,-1 0 0,0 0-1,0 0 1,1 0-1,-2 1 1,2-1 0,-1 2-1,5 5 162,-2 0 0,0 0-1,4 11 1,-5-11-166,2 1 2,19 42 225,-22-46-327,1 0 0,1-1-1,-1 0 1,1 0 0,-1 1-1,1-2 1,1 1 0,4 4-1,-7-7-6,-1 0-1,1 0 1,0-1-1,-1 1 1,1 0-1,0-1 1,0 2-1,0-2 1,0 0-1,0 1 1,0-1-1,0 0 1,0 0-1,0 0 0,0 0 1,0 0-1,0 0 1,0 0-1,0 0 1,0-1-1,0 1 1,0-1-1,0 0 1,0 1-1,-1-1 1,1 0-1,0 0 1,0 1-1,-1-1 1,1 0-1,-1 0 1,2-2-1,3-2 16,-1 1-1,0-2 1,0 2 0,0-2-1,-1 1 1,0-1 0,3-6-1,0-1 27,-1 1 0,-1-1 0,0 1 0,-1-1 0,-1-1 0,0 1 0,0-23 0,-4 22 238,1 14-267,0 0 1,0 0-1,0 0 0,0-1 1,0 1-1,0 0 0,0 0 1,0 0-1,0 0 0,0 0 0,0-1 1,0 1-1,0 0 0,-1 0 1,1 0-1,0 0 0,0 0 1,0-1-1,0 1 0,-1 0 0,1 0 1,0 0-1,0 0 0,0 0 1,0 0-1,0 0 0,-1 0 1,1-1-1,0 1 0,0 0 1,-1 0-1,-3 5 546,1 2-305,0 0-1,1 1 0,0-1 1,1 1-1,-1 10 1,0 43 367,2-53-534,2 27 113,1 0 0,9 37 0,-6-47-262,2 0-1,0-1 1,21 38 0,-26-55-160,1-1 0,1 1 1,-1-1-1,1 0 0,0 0 1,1 0-1,10 7 0,-12-10-207,0-1-1,0 1 1,0-1 0,0 0-1,0 0 1,7 2 0,-7-3-313,0 0 0,0 0 0,1-1 0,-1 1 0,0-1 1,0 0-1,0 0 0,5 0 0,14-3-2943</inkml:trace>
-</inkml:ink>
-</file>
-
-<file path=ppt/ink/ink103.xml><?xml version="1.0" encoding="utf-8"?>
-<inkml:ink xmlns:inkml="http://www.w3.org/2003/InkML">
-  <inkml:definitions>
-    <inkml:context xml:id="ctx0">
-      <inkml:inkSource xml:id="inkSrc0">
-        <inkml:traceFormat>
-          <inkml:channel name="X" type="integer" min="-2.14748E9" max="2.14748E9" units="cm"/>
-          <inkml:channel name="Y" type="integer" min="-2.14748E9" max="2.14748E9" units="cm"/>
-          <inkml:channel name="F" type="integer" max="32767" units="dev"/>
-        </inkml:traceFormat>
-        <inkml:channelProperties>
-          <inkml:channelProperty channel="X" name="resolution" value="1000" units="1/cm"/>
-          <inkml:channelProperty channel="Y" name="resolution" value="1000" units="1/cm"/>
-          <inkml:channelProperty channel="F" name="resolution" value="0" units="1/dev"/>
-        </inkml:channelProperties>
-      </inkml:inkSource>
-      <inkml:timestamp xml:id="ts0" timeString="2025-05-02T14:07:37.164"/>
-    </inkml:context>
-    <inkml:brush xml:id="br0">
-      <inkml:brushProperty name="width" value="0.1" units="cm"/>
-      <inkml:brushProperty name="height" value="0.1" units="cm"/>
-      <inkml:brushProperty name="color" value="#E71224"/>
-    </inkml:brush>
-  </inkml:definitions>
-  <inkml:trace contextRef="#ctx0" brushRef="#br0">53 166 8250,'-2'1'331,"0"0"-1,0 0 1,1 0 0,-1 1 0,1-1 0,-1 0-1,1 0 1,-1 0 0,1 1 0,0 0 0,0-1-1,0 0 1,0 1 0,0-1 0,0 1 0,0 0-1,1 0 1,-1-1 0,1 1 0,-1 0 0,1 0-1,0-1 1,0 1 0,0 0 0,0 2 0,0 2-27,1-1 0,0 0 1,0 0-1,0 0 0,1 0 1,-1 0-1,6 9 0,-6-12-261,1 1 0,1 0 0,-1 0 0,0-1 0,1 1 0,-1 0 0,2-1 0,-2 0 0,1 0 0,0 0 0,1 0 0,-1 0 0,0 0 0,1-1 0,0 1 0,-1-1 0,1 0-1,-1 0 1,1 0 0,0 0 0,0-1 0,0 1 0,0-1 0,7 0 0,-5 0-35,0-1-1,0 1 1,0-1-1,0 0 1,0-1-1,0 0 1,-1 1-1,0-1 1,1-1-1,-1 1 1,0 0-1,0-2 1,0 2-1,0-1 1,0-1-1,3-3 1,-2 1 13,-1 0-1,1 0 1,-1-1 0,0 0-1,-1 1 1,0-2-1,-1 2 1,0-2 0,4-10-1,-5 8 10,1 0 0,-2-1 0,0 0 0,0 0 0,-2 1 0,-1-15 0,2 20-16,-2 0 0,1 0 0,-1 0 0,0 1 0,0-1 0,0 0-1,-1 0 1,1 0 0,-1 1 0,-1 0 0,1 0 0,-1 0 0,-6-5 0,7 6-6,-1 0 0,1 1 0,-1 0 0,0-1 1,0 1-1,0 0 0,-1 1 0,1-1 0,-1 0 0,1 1 0,0 0 1,-1 0-1,0 1 0,1-1 0,-1 1 0,0-1 0,-8 2 1,6-1-43,1 1 1,0 1 0,-1-1 0,1 1-1,-1 0 1,1 0 0,0 0 0,0 1-1,0 0 1,1 0 0,-1 1 0,-8 6-1,7-5-64,0 1-1,1 0 0,0 0 1,1 0-1,-1 0 0,1 1 1,0-1-1,-6 15 0,10-19-111,0 1 0,0 0 0,0-1 0,1 2 0,0-2 0,-1 1 0,1 0 0,0 0 0,0 0 0,0-1 0,1 4-1,0-3-266,0-1-1,0 0 0,0 1 1,0-1-1,1 0 0,-1 0 1,1 0-1,-1 0 0,1 1 0,0-2 1,0 1-1,0 0 0,3 2 1,25 12-2741</inkml:trace>
-</inkml:ink>
-</file>
-
-<file path=ppt/ink/ink104.xml><?xml version="1.0" encoding="utf-8"?>
-<inkml:ink xmlns:inkml="http://www.w3.org/2003/InkML">
-  <inkml:definitions>
-    <inkml:context xml:id="ctx0">
-      <inkml:inkSource xml:id="inkSrc0">
-        <inkml:traceFormat>
-          <inkml:channel name="X" type="integer" min="-2.14748E9" max="2.14748E9" units="cm"/>
-          <inkml:channel name="Y" type="integer" min="-2.14748E9" max="2.14748E9" units="cm"/>
-          <inkml:channel name="F" type="integer" max="32767" units="dev"/>
-        </inkml:traceFormat>
-        <inkml:channelProperties>
-          <inkml:channelProperty channel="X" name="resolution" value="1000" units="1/cm"/>
-          <inkml:channelProperty channel="Y" name="resolution" value="1000" units="1/cm"/>
-          <inkml:channelProperty channel="F" name="resolution" value="0" units="1/dev"/>
-        </inkml:channelProperties>
-      </inkml:inkSource>
-      <inkml:timestamp xml:id="ts0" timeString="2025-05-02T14:07:37.165"/>
-    </inkml:context>
-    <inkml:brush xml:id="br0">
-      <inkml:brushProperty name="width" value="0.1" units="cm"/>
-      <inkml:brushProperty name="height" value="0.1" units="cm"/>
-      <inkml:brushProperty name="color" value="#E71224"/>
-    </inkml:brush>
-  </inkml:definitions>
-  <inkml:trace contextRef="#ctx0" brushRef="#br0">19 43 8410,'-4'12'2567,"0"-1"0,-3 22 0,5-24-2055,1 2 0,1-2-1,0 1 1,0 0 0,1 0 0,5 16 0,-6-25-493,1 1 1,-1-1-1,0 1 1,1-1-1,0 0 1,0 1-1,-1-1 1,2 1-1,-2-1 1,2 0-1,-2 0 1,1 0-1,1 0 1,-1 0-1,2 2 1,-2-3-17,1 0 1,-1 1-1,0-1 1,1 0 0,-1 0-1,0 1 1,0-1-1,0 0 1,0 0 0,0 0-1,1 0 1,-1 0-1,0 0 1,1-1 0,-1 1-1,0 0 1,0 0-1,1-1 1,-2 1 0,2-1-1,-1 1 1,2-2-1,6-3-23,0 0 1,-1 0-1,0-1 0,0 0 0,9-9 0,32-36-439,-47 48 421,20-21-470,-3-1-1,21-33 1,-46 68 1007,1 0 0,0 1 0,1 0 0,0-1 0,-1 13 0,4-19-466,0 0 0,1 1 0,-1-1 0,1 1 0,0-1 0,1 0 0,-1 1 0,1-1 0,0 1 1,0-1-1,1 0 0,0 0 0,0 0 0,0 0 0,0 0 0,4 4 0,-4-6-88,-1-1-1,1 1 1,0 0-1,0-1 1,-1 0 0,1 1-1,0-1 1,1 0-1,-1 0 1,0 0-1,0 0 1,1 0 0,-1-1-1,0 1 1,1 0-1,-1-1 1,1 0-1,-1 1 1,5-1-1,-2 0-459,-2-1 0,2 1 0,-1-1 0,0 1 0,0-1 0,0 0 0,0-1 0,0 1 0,0-1 0,0 1 0,3-3 0,16-12-2305</inkml:trace>
-</inkml:ink>
-</file>
-
-<file path=ppt/ink/ink105.xml><?xml version="1.0" encoding="utf-8"?>
-<inkml:ink xmlns:inkml="http://www.w3.org/2003/InkML">
-  <inkml:definitions>
-    <inkml:context xml:id="ctx0">
-      <inkml:inkSource xml:id="inkSrc0">
-        <inkml:traceFormat>
-          <inkml:channel name="X" type="integer" min="-2.14748E9" max="2.14748E9" units="cm"/>
-          <inkml:channel name="Y" type="integer" min="-2.14748E9" max="2.14748E9" units="cm"/>
-          <inkml:channel name="F" type="integer" max="32767" units="dev"/>
-        </inkml:traceFormat>
-        <inkml:channelProperties>
-          <inkml:channelProperty channel="X" name="resolution" value="1000" units="1/cm"/>
-          <inkml:channelProperty channel="Y" name="resolution" value="1000" units="1/cm"/>
-          <inkml:channelProperty channel="F" name="resolution" value="0" units="1/dev"/>
-        </inkml:channelProperties>
-      </inkml:inkSource>
-      <inkml:timestamp xml:id="ts0" timeString="2025-05-02T14:07:37.166"/>
-    </inkml:context>
-    <inkml:brush xml:id="br0">
-      <inkml:brushProperty name="width" value="0.1" units="cm"/>
-      <inkml:brushProperty name="height" value="0.1" units="cm"/>
-      <inkml:brushProperty name="color" value="#E71224"/>
-    </inkml:brush>
-  </inkml:definitions>
-  <inkml:trace contextRef="#ctx0" brushRef="#br0">18 30 8010,'-15'-29'9129,"15"29"-8891,-2 5 1946,1 11-1053,5 25 588,12 50 0,20 40-998,8-1-390,-34-108-798,0 0-1,2-1 0,25 34 1,-53-83-2318,10 19 2433,-33-46-904,34 48 1243,-1 0 1,0 1-1,-1-1 1,0 1-1,-12-7 1,19 12 19,-2 0 47,1 0 0,-1 0 1,1 0-1,-1 0 0,1 1 1,-1-1-1,0 0 0,0 0 1,1 1-1,-1-1 0,-2 1 1,28-1 689,0-1 0,33-6 0,53-13-619,-91 17-124,0-2 1,0 0-1,27-12 1,-40 15-61,0 0 0,-1 0 0,0 0 0,10-8 0,-14 10 40,1-1 1,-1 1-1,0 0 0,0 0 1,0 0-1,0 0 1,0-1-1,0 1 0,0-1 1,-1 1-1,1-1 1,0 1-1,-1-1 1,0 1-1,1-1 0,-1 1 1,0-1-1,0 0 1,0 1-1,0 0 0,-1-4 1,1 4 17,0 0 0,-1 0 0,0 0 0,1 0 1,-1 1-1,1-1 0,-1 0 0,0 0 0,0 0 0,0 0 1,1 1-1,-2-1 0,2 1 0,-1-1 0,0 0 0,0 1 1,-1 0-1,2-1 0,-2 1 0,1-1 0,0 1 0,0-1 0,-2 1 1,0-1 63,0 1 0,0 0 1,-1 0-1,1 0 0,1 0 0,-1 0 1,-1 0-1,-1 1 0,4-1-58,0 0 0,1 0-1,-1 0 1,1 0 0,0 0-1,-1 0 1,0 0 0,1 0-1,0 0 1,-1 0 0,1 0-1,-1-1 1,1 1 0,0 0-1,-1 0 1,0 0 0,1-1-1,0 1 1,0 0 0,-1 0-1,1-1 1,0 1 0,0 0-1,-1-1 1,1 1 0,-1 0-1,1-1 1,0 0 0,0 1-1,-1-1 1,0 0 0,1 1 0,0-1 0,-1 1 0,1-1 0,-1 1-1,0-1 1,1 1 0,-1-1 0,0 1 0,1-1 0,-1 1-1,0 0 1,0 0 0,1-1 0,-1 1 0,0-1 0,-1 1-1,0 0 17,1 0 0,-1 0 0,0 0 0,0 1 0,0 0 0,0-1 0,1 0-1,-1 1 1,0 0 0,1-1 0,-1 1 0,1 0 0,-1 0 0,0-1 0,1 2 0,-1-1-1,0 1 1,-5 4 90,1-1 0,-5 8 0,9-11-83,-4 4 72,1 0 0,0 1 0,1-1 1,0 1-1,0 0 0,1 0 0,-1 0 1,2 0-1,-2 9 0,3-13-55,1 1-1,-1-1 1,1 0 0,0 0-1,1 1 1,-1-1 0,1 1-1,0-1 1,-1 0 0,2 0-1,-1 0 1,0 1 0,1-1-1,0-1 1,0 2 0,0-2-1,0 1 1,0 0 0,1-1-1,-1 1 1,1 0 0,6 3-1,-2-2-11,1 1-1,0-1 1,0 0-1,1-1 1,0 0-1,-1 0 1,1-1-1,0 1 1,1-2-1,17 3 0,-13-3-135,0 0-1,0-1 0,0-1 0,-1 0 0,1-1 1,25-5-1,-1-4-839,-2-4 263</inkml:trace>
-</inkml:ink>
-</file>
-
-<file path=ppt/ink/ink106.xml><?xml version="1.0" encoding="utf-8"?>
-<inkml:ink xmlns:inkml="http://www.w3.org/2003/InkML">
-  <inkml:definitions>
-    <inkml:context xml:id="ctx0">
-      <inkml:inkSource xml:id="inkSrc0">
-        <inkml:traceFormat>
-          <inkml:channel name="X" type="integer" min="-2.14748E9" max="2.14748E9" units="cm"/>
-          <inkml:channel name="Y" type="integer" min="-2.14748E9" max="2.14748E9" units="cm"/>
-          <inkml:channel name="F" type="integer" max="32767" units="dev"/>
-        </inkml:traceFormat>
-        <inkml:channelProperties>
-          <inkml:channelProperty channel="X" name="resolution" value="1000" units="1/cm"/>
-          <inkml:channelProperty channel="Y" name="resolution" value="1000" units="1/cm"/>
-          <inkml:channelProperty channel="F" name="resolution" value="0" units="1/dev"/>
-        </inkml:channelProperties>
-      </inkml:inkSource>
-      <inkml:timestamp xml:id="ts0" timeString="2025-05-02T14:07:37.167"/>
-    </inkml:context>
-    <inkml:brush xml:id="br0">
-      <inkml:brushProperty name="width" value="0.1" units="cm"/>
-      <inkml:brushProperty name="height" value="0.1" units="cm"/>
-      <inkml:brushProperty name="color" value="#E71224"/>
-    </inkml:brush>
-  </inkml:definitions>
-  <inkml:trace contextRef="#ctx0" brushRef="#br0">249 7 4601,'-2'-1'270,"0"0"0,0 0 0,0 1 0,0-1 0,0 0 0,0 1 0,1-1 0,-1 1-1,-1 0 1,1 0 0,0 0 0,0-1 0,0 1 0,0 1 0,0-1 0,0 0 0,0 0 0,0 1 0,0-1 0,0 0 0,0 1 0,0 0 0,0-1 0,0 1 0,0 0-1,-3 2 1,-3 2 688,1 1-1,-2 0 0,2 0 1,-8 9-1,8-8-848,-10 10 565,0 1 1,2 1-1,0 0 1,2 0-1,-17 33 0,24-39-543,0 0-1,2 0 0,-1 0 1,2 0-1,0 1 0,1-1 1,1 1-1,0-1 0,1 1 0,3 20 1,-2-27-149,1 0 1,1 0 0,-1 0-1,2 0 1,-1-1-1,1 1 1,-1 0 0,2-2-1,0 2 1,-1-1-1,2 0 1,0-1 0,8 8-1,-9-10-161,-1 0 0,0-1 0,0 1 0,1-1 0,-1 0 1,1 0-1,0 1 0,0-2 0,0 1 0,0-1 0,0 0 0,0 0 0,1 0 0,-1-1 0,0 1 0,1-1 0,-1 0 0,0 0 0,1-1 0,-1 1 0,0-2 0,10-1 0,-11 2-309,1-1-1,0 0 0,0 0 1,-1 0-1,1-1 0,-1 1 1,0-1-1,0 0 0,0 0 1,-1 0-1,1 0 0,-1 0 1,5-7-1,-7 8 300,0 1 0,0-1-1,0 1 1,-1-2 0,2 2 0,-2-1 0,0 1-1,1-1 1,-1 0 0,1 0 0,-1 0 0,0 1 0,0-1-1,0 0 1,-1 0 0,1 1 0,-1-2 0,0-1-1,0 3 236,-1-2-1,1 2 0,0-1 0,0 0 0,-1 1 0,1-1 0,-1 0 0,0 1 1,0-1-1,1 0 0,-5-1 0,5 3 129,0-1 1,0 1-1,0-1 1,0 1-1,0-1 1,0 1-1,0-1 0,-1 1 1,2-1-1,-2 1 1,1 0-1,0 0 0,0 0 1,0 0-1,0 0 1,-1 0-1,0 0 1,1 0 33,1 0 1,-2 0 0,2 1 0,-1 0 0,0-1 0,1 0-1,-1 1 1,1-1 0,-2 0 0,2 1 0,0-1 0,-1 1 0,0-1-1,1 1 1,-1-1 0,1 1 0,0 0 0,-1 0 0,-1 2 249,1-1 0,0 2 0,0-2 0,0 1 0,1 0 0,0 0 0,-1-1 0,1 2 0,1 4 0,-1-6-408,0 1 0,0-1-1,1 0 1,-1 0 0,1 1 0,0-1 0,0 0-1,0 0 1,0 0 0,0 0 0,1 0 0,-1 0 0,1 0-1,-1 0 1,1-1 0,0 1 0,0 0 0,0-1-1,0 0 1,1 1 0,-2-1 0,2 1 0,0-1-1,-2 0 1,2-1 0,-1 1 0,1 0 0,0-1 0,-1 1-1,4 0 1,3-1-48,0 1-1,-1-1 1,0-1-1,0 1 1,1-1-1,-1-1 0,1 1 1,-2-1-1,1 0 1,13-5-1,-7 2-15,-1-1 0,0-1 0,-1 0-1,1 0 1,12-10 0,-21 14 12,0 0-1,-1 0 1,0 0 0,0-1-1,1 1 1,-2-1 0,1 1 0,-1-1-1,1 0 1,2-8 0,-5 9 8,1 0-1,0 0 1,-1 0 0,1-1 0,-1 1-1,0 0 1,-1 0 0,1 0 0,0-1-1,-1 1 1,0 0 0,0 0 0,0 0-1,-4-6 1,3 5 23,-1 0 0,0 0 0,-1 0 0,1 0 0,-1 0 0,0 1 0,0-1 0,0 1 0,-1 0 0,0 0 0,1 1 0,-1-1 0,0 1 0,0 0 0,0 0 0,-1 0 0,1 0 0,-1 1 0,0 0 0,1 0 0,-1 0 0,0 1 0,1-1 0,-1 1 0,0 0 0,0 0 0,1 1 0,-1 0 0,0-1 0,1 1 0,0 1 0,-1-1 0,1 1 0,-1 0-1,1 0 1,-7 4 0,4-1 67,1 0-1,0 1 0,0 0 0,1-1 0,0 1 0,0 1 0,1 0 0,0 0 0,1 0 0,-1 0 0,1 0 0,-3 10 1,5-14-68,1 2 1,0-1 0,0 0-1,0 0 1,1 1 0,-1-1-1,1 0 1,1 1 0,-1-1 0,3 8-1,-2-9-27,0 0-1,0 0 1,1 0-1,0 0 1,0-1-1,0 1 1,0 0 0,0-1-1,1 1 1,-1-1-1,1 1 1,0-1-1,0 0 1,0 0-1,6 3 1,-2-2-13,0 0 0,0 0 1,1-1-1,0 0 0,0 0 1,-1 0-1,2-1 0,-1 0 1,-1-1-1,2 0 0,10 0 1,-7-1-21,1 0 1,0-1 0,-1 0 0,0 0-1,0-1 1,19-7 0,-27 9 27,0-1 0,0 0 1,0 0-1,-1 0 0,1 0 0,-1-1 1,0 1-1,0-1 0,0 0 0,0 0 1,0 1-1,0-2 0,1-3 0,-3 5 7,1 0-1,-1-1 0,0 1 0,0 0 1,0-1-1,0 0 0,-1 1 1,0-1-1,0 1 0,0-1 1,0 0-1,0 1 0,0-1 1,0 0-1,-1 1 0,0 0 0,1-1 1,-2 0-1,-1-3 0,3 6-1,0 0 0,0-1 0,0 1-1,0 0 1,0-1 0,0 1 0,0 0 0,0 0-1,-1-1 1,1 1 0,0 0 0,-1 0-1,1 0 1,0-1 0,0 1 0,0 0 0,-1 0-1,1 0 1,0-1 0,-1 1 0,1 0 0,0 0-1,0 0 1,-1 0 0,1 0 0,0 0-1,-1 0 1,1-1 0,-1 1 0,1 0 0,0 0-1,0 0 1,-1 0 0,1 0 0,-1 0-1,1 0 1,0 0 0,-1 1 0,1-1 0,0 0-1,0 0 1,-1 0 0,1 0 0,-1 0-1,1 0 1,0 0 0,0 1 0,-1-1 0,0 1-1,0-1 1,0 1-1,1 0 1,-1-1 0,1 1-1,-1 1 1,0-2-1,1 1 1,-1 0 0,1 0-1,-1 0 1,1 0-1,0 2 1,-1-2-1,1 0 0,0 0-1,0 1 1,0-1 0,1 0 0,-1 1 0,0-1-1,0 0 1,1 0 0,0 0 0,-1 0 0,0 1-1,1-1 1,0 0 0,0 0 0,-1 0 0,2 0-1,0 2 1,0-2 0,0 1 0,0-1 1,0 0-1,0 1 0,1-1 0,-1 0 0,1-1 0,0 1 0,-2 0 1,5 0-1,-1 0-15,0 0 1,0 0-1,0-1 0,0 1 1,1-1-1,-1 0 1,0-1-1,0 1 0,0-1 1,9-2-1,-10 2-30,-1 0 0,1-1 0,-1 1 0,0-1 0,-1 0 0,2 1 0,-2-1 0,1-1 0,0 1 0,-1 0 0,1 0 1,-1-1-1,3-3 0,-2 1-7,0 1 1,-1-1 0,0 0 0,0 0 0,0 1-1,-1-1 1,2-9 0,-2 2-4,-1 0 0,0 0 0,-1 0 0,-1 0 0,0 0 0,-5-15 0,4 20 34,1 1 13,0 0 1,0-1-1,-1 1 0,1 1 1,-8-10-1,7 12 114,4 8 47,5 8 106,49 64 179,-47-64-417,-1 1 1,0 1-1,7 27 1,-11-31-60,-2-3-29,6 16 1,-6-23-30,-1 0 0,1 1 0,0-1 0,-1 1 0,1-1 0,0 0 0,0 0 0,0 0 0,0 1 0,0-1 1,0 0-1,1 0 0,-1 0 0,0 0 0,0-1 0,1 1 0,1 1 0,-1-1-94,-1-1 1,0 0-1,1 0 0,-2 0 0,1 0 0,1 0 1,-1 0-1,0 0 0,1 0 0,-1 0 0,0 0 1,0 0-1,1 0 0,-1-1 0,0 1 1,0 0-1,0-1 0,0 0 0,0 1 0,1-2 1,2 0-627,-1 0 1,0 0-1,0-1 1,0 1 0,3-5-1,11-16-1967</inkml:trace>
-</inkml:ink>
-</file>
-
-<file path=ppt/ink/ink107.xml><?xml version="1.0" encoding="utf-8"?>
-<inkml:ink xmlns:inkml="http://www.w3.org/2003/InkML">
-  <inkml:definitions>
-    <inkml:context xml:id="ctx0">
-      <inkml:inkSource xml:id="inkSrc0">
-        <inkml:traceFormat>
-          <inkml:channel name="X" type="integer" min="-2.14748E9" max="2.14748E9" units="cm"/>
-          <inkml:channel name="Y" type="integer" min="-2.14748E9" max="2.14748E9" units="cm"/>
-          <inkml:channel name="F" type="integer" max="32767" units="dev"/>
-        </inkml:traceFormat>
-        <inkml:channelProperties>
-          <inkml:channelProperty channel="X" name="resolution" value="1000" units="1/cm"/>
-          <inkml:channelProperty channel="Y" name="resolution" value="1000" units="1/cm"/>
-          <inkml:channelProperty channel="F" name="resolution" value="0" units="1/dev"/>
-        </inkml:channelProperties>
-      </inkml:inkSource>
-      <inkml:timestamp xml:id="ts0" timeString="2025-05-02T14:07:37.168"/>
-    </inkml:context>
-    <inkml:brush xml:id="br0">
-      <inkml:brushProperty name="width" value="0.1" units="cm"/>
-      <inkml:brushProperty name="height" value="0.1" units="cm"/>
-      <inkml:brushProperty name="color" value="#E71224"/>
-    </inkml:brush>
-  </inkml:definitions>
-  <inkml:trace contextRef="#ctx0" brushRef="#br0">42 1 12987,'-1'1'325,"-1"0"0,0 0 1,0 0-1,1 0 0,-1 0 1,0 0-1,1 1 0,-1-1 1,1 0-1,0 1 0,-1-1 1,1 0-1,0 1 0,0 0 1,0 0-1,0-1 0,0 1 1,0 2-1,-2 5 349,1 0 0,-1 14 0,1-17-318,-1 33 539,0 0 0,7 66 0,0-75-765,1 1 0,2-1 1,22 56-1,-25-77-121,1 0-1,0-1 1,0 1 0,1-1-1,0 0 1,1 0 0,0-1-1,1 1 1,11 8 0,-14-12-8,0-1 1,0 0 0,0 0-1,0 0 1,0 0 0,1-1-1,0 0 1,0 0 0,0 0-1,0-1 1,0 0 0,0 0 0,1 0-1,-2 0 1,2-1 0,-1 0-1,0 0 1,10-1 0,-13 1-21,1-1 0,-1 0 1,0 0-1,0 0 0,0 0 1,0 0-1,-1-1 0,1 1 1,0 0-1,0-1 1,-1 0-1,1 0 0,-1 0 1,0 0-1,0 0 0,0 0 1,0 0-1,0 0 0,2-5 1,0 0-78,-1 0 0,0 0 1,0 0-1,-1 0 0,0-1 0,1-7 1,-3 12 70,0-1 1,1 1 0,-1 0-1,-1 0 1,1 0 0,0-1-1,-1 1 1,-1-3 0,2 5 23,-1 0 1,1 0 0,-1 1 0,1-1-1,0 0 1,-1 0 0,0 0 0,1 1-1,-1-1 1,0 0 0,1 1 0,-1-1-1,1 1 1,-1-1 0,0 1 0,0-1-1,0 0 1,1 1 0,-2-1 0,2 1-1,-1 0 1,0 0 0,0-1 0,0 1-1,0 0 1,0 0 0,0 0-1,0 0 1,0 0 0,0 0 0,0 0-1,0 0 1,0 0 0,-2 0 0,1 1 7,0-1 1,0 1 0,0 0 0,1 0-1,-1 0 1,0 0 0,0 0-1,1 0 1,-1 0 0,0 1-1,1-1 1,-1 1 0,1-1 0,0 0-1,0 1 1,0 0 0,-1-1-1,2 1 1,-1-1 0,0 1-1,0 0 1,1 0 0,-1 3 0,-1 0 34,1 1 0,0 0 0,1 0 0,0 0 0,0 0 1,0 7-1,1-9-31,0 0 1,0 0 0,1 0-1,-1 0 1,1 0 0,0 0-1,0 0 1,0-1 0,1 1-1,4 4 1,-5-6-9,-1-1 0,1 1 0,0 0-1,0-1 1,-1 0 0,1 0 0,1 1 0,-1-1 0,0 0 0,0 0 0,1 0 0,-1 0 0,0-1 0,1 1-1,-1-1 1,1 1 0,-1-1 0,1 0 0,-1 0 0,1 1 0,5-2 0,-5 1 1,1-1 0,0 1 0,0-1 0,0 0 0,-1 0 0,1 0 0,-1-1 0,1 0 1,-1 1-1,0-1 0,1 0 0,-1 0 0,0 0 0,0 0 0,0-1 0,-1 1 0,1 0 0,-1-1 0,3-3 0,-2 2 10,-1 0 1,1-1-1,0 0 0,-2 1 0,1-1 0,0 0 0,-1 0 1,-1 0-1,1 0 0,0 0 0,-1-10 0,-1 10-2,0 0 1,1-1-1,-1 1 0,-1 0 0,0 0 1,1 1-1,-2-1 0,0 0 0,1 0 1,-1 1-1,-6-7 0,6 8-11,1 0-1,-1 1 1,0-1 0,1 1-1,-2 0 1,1 0 0,-1 0-1,1 0 1,-1 0 0,1 1-1,-1-1 1,1 1 0,-1 0-1,0 0 1,0 0 0,0 1-1,0-1 1,-6 0 0,8 1-42,-1 0 1,1 0-1,0 0 1,-1 1-1,2-1 0,-2 0 1,1 1-1,0-1 1,0 1-1,0-1 1,-1 1-1,1 0 1,0 0-1,1 0 1,-5 2-1,5-2-91,0 0 0,0 0-1,-1 0 1,2 1 0,-1-1-1,0 0 1,0 0 0,1 1-1,-1-1 1,0 1 0,1-1-1,0 0 1,-1 0 0,1 1-1,-1 0 1,1-1 0,0 0-1,0 1 1,0-1 0,1 0 0,0 3-1,8 21-1322</inkml:trace>
-</inkml:ink>
-</file>
-
-<file path=ppt/ink/ink108.xml><?xml version="1.0" encoding="utf-8"?>
-<inkml:ink xmlns:inkml="http://www.w3.org/2003/InkML">
-  <inkml:definitions>
-    <inkml:context xml:id="ctx0">
-      <inkml:inkSource xml:id="inkSrc0">
-        <inkml:traceFormat>
-          <inkml:channel name="X" type="integer" min="-2.14748E9" max="2.14748E9" units="cm"/>
-          <inkml:channel name="Y" type="integer" min="-2.14748E9" max="2.14748E9" units="cm"/>
-          <inkml:channel name="F" type="integer" max="32767" units="dev"/>
-        </inkml:traceFormat>
-        <inkml:channelProperties>
-          <inkml:channelProperty channel="X" name="resolution" value="1000" units="1/cm"/>
-          <inkml:channelProperty channel="Y" name="resolution" value="1000" units="1/cm"/>
-          <inkml:channelProperty channel="F" name="resolution" value="0" units="1/dev"/>
-        </inkml:channelProperties>
-      </inkml:inkSource>
-      <inkml:timestamp xml:id="ts0" timeString="2025-05-02T14:07:37.169"/>
-    </inkml:context>
-    <inkml:brush xml:id="br0">
-      <inkml:brushProperty name="width" value="0.1" units="cm"/>
-      <inkml:brushProperty name="height" value="0.1" units="cm"/>
-      <inkml:brushProperty name="color" value="#E71224"/>
-    </inkml:brush>
-  </inkml:definitions>
-  <inkml:trace contextRef="#ctx0" brushRef="#br0">238 27 4657,'-1'-1'310,"1"-1"0,-2 0 0,1 1 0,1-1 0,-2 1 0,1-1 0,0 1 0,0 0 0,-1 0 0,0-1 0,1 1 0,-1 0 0,1 0-1,-1 0 1,0 0 0,0 0 0,0 1 0,0-1 0,0 0 0,1 1 0,-1-1 0,0 1 0,-5-1 0,3 1 30,0 0 0,-1 1-1,1-1 1,-1 1 0,1-1-1,0 1 1,0 0 0,-1 0-1,1 1 1,-5 2 0,-15 6 645,-27 16 0,43-22-860,1 1 0,0 0 0,0 0-1,1 1 1,-1-1 0,1 1 0,-6 8-1,11-12-113,-1-1-1,2 1 1,-2 0-1,2-1 1,-1 1-1,1-1 0,-1 2 1,0-2-1,1 1 1,-1 0-1,1 0 1,0-1-1,0 1 1,0 0-1,0 0 0,0 0 1,1-1-1,0 4 1,0-3-11,0 1 0,1-1 1,-1 1-1,1-1 0,0 0 0,0 0 1,0 0-1,-1 0 0,2 0 0,0 0 0,4 3 1,13 7-5,1-2 0,2 1 0,28 8 0,-30-11 20,2 1-1,-3 1 1,36 19-1,-53-26 27,0-1 0,0 0-1,0 1 1,0-1 0,-1 0-1,1 1 1,-1 0 0,1 0-1,-1 0 1,0 0 0,0 0-1,-1 0 1,1 0 0,-1 1-1,0-1 1,0 0 0,0 1-1,-1-1 1,1 0 0,0 1-1,-1-1 1,0 1 0,-1-1-1,0 1 1,1-1 0,-1 0-1,0 1 1,0-1 0,0 0-1,-1 1 1,1-1 0,-4 3-1,-1 4 41,-2-1-1,1 1 0,-2-1 0,1 0 1,-1-1-1,0 0 0,-1 0 1,0-1-1,-1 0 0,0 0 0,0-2 1,-1 1-1,0 0 0,0-1 0,-1-1 1,-13 3-1,21-6-38,0 0 0,0 0 0,0-1 0,-1 0 0,1 0 0,-10-1 0,14 1-38,-1 0 0,0 0 0,0 0 0,1-1 0,-1 1 0,0-1 0,1 1 0,-1-1 0,1 0 0,-1 1 0,1-1 0,-1 0 0,1 0 0,0 0 0,-1 0 0,1 0 0,0 0 0,0 0 0,-1 0 0,2-1 0,-1 1 0,-1-3 0,1 3-33,1-1 0,-1 1 0,1 0 0,0 0 0,0-1 0,0 1 0,0-1 0,0 1 0,0 0 0,1 0 1,-1 0-1,1-1 0,-1 1 0,1 0 0,0-1 0,-1 1 0,1 0 0,-1 0 0,2 0 0,-2 0 0,2 0 0,-1-2 0,6-2-409,-1-1-1,13-7 1,-12 7 17,3-1-77,20-15-4865,49-27 0,-43 32 3161</inkml:trace>
-</inkml:ink>
-</file>
-
-<file path=ppt/ink/ink109.xml><?xml version="1.0" encoding="utf-8"?>
-<inkml:ink xmlns:inkml="http://www.w3.org/2003/InkML">
-  <inkml:definitions>
-    <inkml:context xml:id="ctx0">
-      <inkml:inkSource xml:id="inkSrc0">
-        <inkml:traceFormat>
-          <inkml:channel name="X" type="integer" min="-2.14748E9" max="2.14748E9" units="cm"/>
-          <inkml:channel name="Y" type="integer" min="-2.14748E9" max="2.14748E9" units="cm"/>
-          <inkml:channel name="F" type="integer" max="32767" units="dev"/>
-        </inkml:traceFormat>
-        <inkml:channelProperties>
-          <inkml:channelProperty channel="X" name="resolution" value="1000" units="1/cm"/>
-          <inkml:channelProperty channel="Y" name="resolution" value="1000" units="1/cm"/>
-          <inkml:channelProperty channel="F" name="resolution" value="0" units="1/dev"/>
-        </inkml:channelProperties>
-      </inkml:inkSource>
-      <inkml:timestamp xml:id="ts0" timeString="2025-05-02T14:07:37.170"/>
-    </inkml:context>
-    <inkml:brush xml:id="br0">
-      <inkml:brushProperty name="width" value="0.1" units="cm"/>
-      <inkml:brushProperty name="height" value="0.1" units="cm"/>
-      <inkml:brushProperty name="color" value="#E71224"/>
-    </inkml:brush>
-  </inkml:definitions>
-  <inkml:trace contextRef="#ctx0" brushRef="#br0">1 1 7114,'3'14'1792,"-2"7"2041,2 2-801,-2 7-1191,2 2-385,1-2-592,2-4-200,6-5-312,2-5-127,2-9-169,-3-1-32,-1-6-305,-4-4-271,-5-5-944,1-3-1297,-5-6 1473</inkml:trace>
+  <inkml:trace contextRef="#ctx0" brushRef="#br0">222 18 1944 0 0,'0'0'7832'0'0,"-23"7"-8593"0"0,19 1 991 0 0,1 0 1 0 0,0 0-1 0 0,0 1 1 0 0,1 0-1 0 0,0-1 1 0 0,1 1 0 0 0,0 0-1 0 0,0 0 1 0 0,1 0-1 0 0,0 0 1 0 0,1 0-1 0 0,-1-1 1 0 0,2 1-1 0 0,-1 0 1 0 0,5 12-1 0 0,-5-17-153 0 0,1 1 0 0 0,-1-1-1 0 0,1 0 1 0 0,-1 0 0 0 0,1 0 0 0 0,1-1-1 0 0,-1 1 1 0 0,0 0 0 0 0,1-1-1 0 0,0 0 1 0 0,0 1 0 0 0,0-1-1 0 0,0 0 1 0 0,0 0 0 0 0,1-1 0 0 0,-1 1-1 0 0,1-1 1 0 0,0 0 0 0 0,0 0-1 0 0,0 0 1 0 0,0 0 0 0 0,0-1 0 0 0,0 1-1 0 0,0-1 1 0 0,0 0 0 0 0,1 0-1 0 0,-1-1 1 0 0,0 1 0 0 0,1-1 0 0 0,-1 0-1 0 0,0 0 1 0 0,1-1 0 0 0,7-1-1 0 0,6-1 96 0 0,-1-2 0 0 0,0 0 0 0 0,0-1 0 0 0,0-1 0 0 0,0-1 0 0 0,19-12 0 0 0,-29 16-130 0 0,-1 1 1 0 0,0-2 0 0 0,0 1 0 0 0,0-1 0 0 0,0 0 0 0 0,-1 0-1 0 0,1-1 1 0 0,-2 0 0 0 0,1 1 0 0 0,0-2 0 0 0,-1 1 0 0 0,0 0-1 0 0,-1-1 1 0 0,0 0 0 0 0,0 0 0 0 0,0 0 0 0 0,2-11 0 0 0,-4 15-76 0 0,-1 1 1 0 0,1-1 0 0 0,-1 0-1 0 0,0 1 1 0 0,0-1-1 0 0,0 0 1 0 0,0 1 0 0 0,-1-1-1 0 0,1 0 1 0 0,-1 1 0 0 0,0-1-1 0 0,0 0 1 0 0,0 1 0 0 0,0-1-1 0 0,0 1 1 0 0,0 0 0 0 0,0-1-1 0 0,-1 1 1 0 0,0 0 0 0 0,-2-3-1 0 0,1 2-168 0 0,0 1 0 0 0,-1-1-1 0 0,1 1 1 0 0,-1 0 0 0 0,1 0-1 0 0,-1 0 1 0 0,0 0 0 0 0,0 1 0 0 0,0 0-1 0 0,0 0 1 0 0,-8-2 0 0 0,-2 2-422 0 0,1 0 1 0 0,-1 1 0 0 0,1 0-1 0 0,-1 1 1 0 0,1 0-1 0 0,-1 1 1 0 0,-14 5 0 0 0,-35 17-729 0 0,-159 85-1961 0 0,162-77 1491 0 0</inkml:trace>
 </inkml:ink>
 </file>
 
@@ -496,301 +309,6 @@
 </inkml:ink>
 </file>
 
-<file path=ppt/ink/ink110.xml><?xml version="1.0" encoding="utf-8"?>
-<inkml:ink xmlns:inkml="http://www.w3.org/2003/InkML">
-  <inkml:definitions>
-    <inkml:context xml:id="ctx0">
-      <inkml:inkSource xml:id="inkSrc0">
-        <inkml:traceFormat>
-          <inkml:channel name="X" type="integer" min="-2.14748E9" max="2.14748E9" units="cm"/>
-          <inkml:channel name="Y" type="integer" min="-2.14748E9" max="2.14748E9" units="cm"/>
-          <inkml:channel name="F" type="integer" max="32767" units="dev"/>
-        </inkml:traceFormat>
-        <inkml:channelProperties>
-          <inkml:channelProperty channel="X" name="resolution" value="1000" units="1/cm"/>
-          <inkml:channelProperty channel="Y" name="resolution" value="1000" units="1/cm"/>
-          <inkml:channelProperty channel="F" name="resolution" value="0" units="1/dev"/>
-        </inkml:channelProperties>
-      </inkml:inkSource>
-      <inkml:timestamp xml:id="ts0" timeString="2025-05-02T14:07:37.171"/>
-    </inkml:context>
-    <inkml:brush xml:id="br0">
-      <inkml:brushProperty name="width" value="0.1" units="cm"/>
-      <inkml:brushProperty name="height" value="0.1" units="cm"/>
-      <inkml:brushProperty name="color" value="#E71224"/>
-    </inkml:brush>
-  </inkml:definitions>
-  <inkml:trace contextRef="#ctx0" brushRef="#br0">17 5 16075,'-9'-4'1409,"4"4"351,3 3-448,3 3-727,2 2-297,4 2-192,2 1-56,1 1-376,1 2-393,2 1-1535,2 2-3609,3 2 2744</inkml:trace>
-</inkml:ink>
-</file>
-
-<file path=ppt/ink/ink111.xml><?xml version="1.0" encoding="utf-8"?>
-<inkml:ink xmlns:inkml="http://www.w3.org/2003/InkML">
-  <inkml:definitions>
-    <inkml:context xml:id="ctx0">
-      <inkml:inkSource xml:id="inkSrc0">
-        <inkml:traceFormat>
-          <inkml:channel name="X" type="integer" min="-2.14748E9" max="2.14748E9" units="cm"/>
-          <inkml:channel name="Y" type="integer" min="-2.14748E9" max="2.14748E9" units="cm"/>
-          <inkml:channel name="F" type="integer" max="32767" units="dev"/>
-        </inkml:traceFormat>
-        <inkml:channelProperties>
-          <inkml:channelProperty channel="X" name="resolution" value="1000" units="1/cm"/>
-          <inkml:channelProperty channel="Y" name="resolution" value="1000" units="1/cm"/>
-          <inkml:channelProperty channel="F" name="resolution" value="0" units="1/dev"/>
-        </inkml:channelProperties>
-      </inkml:inkSource>
-      <inkml:timestamp xml:id="ts0" timeString="2025-05-02T14:07:37.172"/>
-    </inkml:context>
-    <inkml:brush xml:id="br0">
-      <inkml:brushProperty name="width" value="0.1" units="cm"/>
-      <inkml:brushProperty name="height" value="0.1" units="cm"/>
-      <inkml:brushProperty name="color" value="#E71224"/>
-    </inkml:brush>
-  </inkml:definitions>
-  <inkml:trace contextRef="#ctx0" brushRef="#br0">11 29 11995,'-3'18'3848,"-3"19"0,4 46-838,2-81-2967,4 34 593,-4-34-605,1 0 0,0 1 0,-1-1 0,1 0 0,0 1 0,0-1 0,0 0 0,0 0 0,1 0 0,0 0 0,-1 0-1,4 3 1,-4-4-26,0-1-1,-1 1 1,1-1-1,0 0 0,0 1 1,0-1-1,0 0 0,0 1 1,0-1-1,0 0 1,0 0-1,0 1 0,0-1 1,0 0-1,0 0 0,0 0 1,0 0-1,0 0 1,0 0-1,0 0 0,0-1 1,0 1-1,0 0 0,0 0 1,0-1-1,0 1 1,0 0-1,1-1 0,3-1 4,-2-1-1,1 0 0,0 1 0,5-6 0,-8 7-4,18-17-82,-1-1 1,-1-1 0,18-29-1,-19 27-215,0 1-1,31-31 0,-46 50 297,16-11-73,-16 12 77,-1 1 1,0 0-1,1 0 1,-1 0-1,0 0 1,0 0 0,0 0-1,0-1 1,1 1-1,-1 0 1,1 0-1,-1 0 1,0 0-1,0 0 1,0 0-1,1 0 1,-1 0-1,0 0 1,0 0 0,0 0-1,1 0 1,-1 0-1,1 0 1,-1 0-1,0 0 1,0 1 21,1-1 0,-1 1 0,0-1 0,1 0 0,-1 1 0,0-1 0,0 0 0,0 1 0,0-1 0,0 1 0,0-1 0,0 0 0,0 1 0,0-1 0,0 1 1,0-1-1,0 0 0,0 2 0,-10 42 1188,-3 25-246,12-61-914,1-1 0,0 1 0,0 0 0,1-1 0,0 1 0,5 14 0,-6-20-147,1-1 0,0 1 0,0 0 0,0-1 1,0 1-1,-1-1 0,2 1 0,-1-1 1,0 1-1,1-1 0,-1 0 0,1 1 0,-1-1 1,1 0-1,0 0 0,-1 0 0,1 0 0,0-1 1,0 1-1,0 0 0,0 0 0,-1 0 1,1-1-1,0 0 0,1 1 0,1-1 0,13 1-822</inkml:trace>
-</inkml:ink>
-</file>
-
-<file path=ppt/ink/ink112.xml><?xml version="1.0" encoding="utf-8"?>
-<inkml:ink xmlns:inkml="http://www.w3.org/2003/InkML">
-  <inkml:definitions>
-    <inkml:context xml:id="ctx0">
-      <inkml:inkSource xml:id="inkSrc0">
-        <inkml:traceFormat>
-          <inkml:channel name="X" type="integer" min="-2.14748E9" max="2.14748E9" units="cm"/>
-          <inkml:channel name="Y" type="integer" min="-2.14748E9" max="2.14748E9" units="cm"/>
-          <inkml:channel name="F" type="integer" max="32767" units="dev"/>
-        </inkml:traceFormat>
-        <inkml:channelProperties>
-          <inkml:channelProperty channel="X" name="resolution" value="1000" units="1/cm"/>
-          <inkml:channelProperty channel="Y" name="resolution" value="1000" units="1/cm"/>
-          <inkml:channelProperty channel="F" name="resolution" value="0" units="1/dev"/>
-        </inkml:channelProperties>
-      </inkml:inkSource>
-      <inkml:timestamp xml:id="ts0" timeString="2025-05-02T14:07:37.173"/>
-    </inkml:context>
-    <inkml:brush xml:id="br0">
-      <inkml:brushProperty name="width" value="0.1" units="cm"/>
-      <inkml:brushProperty name="height" value="0.1" units="cm"/>
-      <inkml:brushProperty name="color" value="#E71224"/>
-    </inkml:brush>
-  </inkml:definitions>
-  <inkml:trace contextRef="#ctx0" brushRef="#br0">0 114 1888,'106'-112'12203,"-105"112"-12100,-1 0-1,0-1 0,0 1 0,1 0 0,-1 0 0,0 0 1,0 0-1,0 0 0,0 0 0,0 0 0,1 0 1,-1 0-1,0 0 0,0 0 0,1 0 0,-1 0 0,0 0 1,0 0-1,0 0 0,0 0 0,0 0 0,1 0 0,-1 0 1,1 1-1,1 6 1984,-3 19-813,1-16-555,0-5-653,0 3 248,0 0 0,0-1-1,1 1 1,4 14 0,-5-21-399,1 1 1,-1-1-1,1 0 1,0 0-1,-1 1 1,2-1-1,-2 1 1,1-1-1,0 0 1,0 1-1,1-1 1,-1 0-1,0 0 1,0 0 0,1-1-1,0 1 1,-1 0-1,0 0 1,1 0-1,-1 0 1,1-1-1,-1 1 1,1-1-1,0 0 1,0 1-1,-1-1 1,1 0-1,0 0 1,0 1-1,-1-1 1,5-1-1,4 1-966</inkml:trace>
-</inkml:ink>
-</file>
-
-<file path=ppt/ink/ink113.xml><?xml version="1.0" encoding="utf-8"?>
-<inkml:ink xmlns:inkml="http://www.w3.org/2003/InkML">
-  <inkml:definitions>
-    <inkml:context xml:id="ctx0">
-      <inkml:inkSource xml:id="inkSrc0">
-        <inkml:traceFormat>
-          <inkml:channel name="X" type="integer" min="-2.14748E9" max="2.14748E9" units="cm"/>
-          <inkml:channel name="Y" type="integer" min="-2.14748E9" max="2.14748E9" units="cm"/>
-          <inkml:channel name="F" type="integer" max="32767" units="dev"/>
-        </inkml:traceFormat>
-        <inkml:channelProperties>
-          <inkml:channelProperty channel="X" name="resolution" value="1000" units="1/cm"/>
-          <inkml:channelProperty channel="Y" name="resolution" value="1000" units="1/cm"/>
-          <inkml:channelProperty channel="F" name="resolution" value="0" units="1/dev"/>
-        </inkml:channelProperties>
-      </inkml:inkSource>
-      <inkml:timestamp xml:id="ts0" timeString="2025-05-02T14:07:37.174"/>
-    </inkml:context>
-    <inkml:brush xml:id="br0">
-      <inkml:brushProperty name="width" value="0.1" units="cm"/>
-      <inkml:brushProperty name="height" value="0.1" units="cm"/>
-      <inkml:brushProperty name="color" value="#E71224"/>
-    </inkml:brush>
-  </inkml:definitions>
-  <inkml:trace contextRef="#ctx0" brushRef="#br0">1 42 18548,'3'-4'1528,"4"1"601,-1-1-633,3-1-248,-2-1-624,0 0-143,-2 1-289,0 1-64,-4 1-288,2 1-256,2 11-4313</inkml:trace>
-</inkml:ink>
-</file>
-
-<file path=ppt/ink/ink114.xml><?xml version="1.0" encoding="utf-8"?>
-<inkml:ink xmlns:inkml="http://www.w3.org/2003/InkML">
-  <inkml:definitions>
-    <inkml:context xml:id="ctx0">
-      <inkml:inkSource xml:id="inkSrc0">
-        <inkml:traceFormat>
-          <inkml:channel name="X" type="integer" min="-2.14748E9" max="2.14748E9" units="cm"/>
-          <inkml:channel name="Y" type="integer" min="-2.14748E9" max="2.14748E9" units="cm"/>
-          <inkml:channel name="F" type="integer" max="32767" units="dev"/>
-        </inkml:traceFormat>
-        <inkml:channelProperties>
-          <inkml:channelProperty channel="X" name="resolution" value="1000" units="1/cm"/>
-          <inkml:channelProperty channel="Y" name="resolution" value="1000" units="1/cm"/>
-          <inkml:channelProperty channel="F" name="resolution" value="0" units="1/dev"/>
-        </inkml:channelProperties>
-      </inkml:inkSource>
-      <inkml:timestamp xml:id="ts0" timeString="2025-05-02T14:07:37.175"/>
-    </inkml:context>
-    <inkml:brush xml:id="br0">
-      <inkml:brushProperty name="width" value="0.1" units="cm"/>
-      <inkml:brushProperty name="height" value="0.1" units="cm"/>
-      <inkml:brushProperty name="color" value="#E71224"/>
-    </inkml:brush>
-  </inkml:definitions>
-  <inkml:trace contextRef="#ctx0" brushRef="#br0">10 150 1656,'-10'-1'5611,"11"1"-5156,1-2 1,-2 1-1,1 0 1,0 0-1,0 0 1,0 0-1,0 0 0,0 0 1,0 0-1,0-2 1,1-1 294,9-8-79,1 0 0,0 1-1,1 1 1,24-17 0,-18 14-452,-9 7-202,23-17-598,-8 11-2542,-7 7 1308</inkml:trace>
-</inkml:ink>
-</file>
-
-<file path=ppt/ink/ink115.xml><?xml version="1.0" encoding="utf-8"?>
-<inkml:ink xmlns:inkml="http://www.w3.org/2003/InkML">
-  <inkml:definitions>
-    <inkml:context xml:id="ctx0">
-      <inkml:inkSource xml:id="inkSrc0">
-        <inkml:traceFormat>
-          <inkml:channel name="X" type="integer" min="-2.14748E9" max="2.14748E9" units="cm"/>
-          <inkml:channel name="Y" type="integer" min="-2.14748E9" max="2.14748E9" units="cm"/>
-          <inkml:channel name="F" type="integer" max="32767" units="dev"/>
-          <inkml:channel name="OA" type="integer" max="360" units="deg"/>
-          <inkml:channel name="OE" type="integer" max="90" units="deg"/>
-        </inkml:traceFormat>
-        <inkml:channelProperties>
-          <inkml:channelProperty channel="X" name="resolution" value="1000" units="1/cm"/>
-          <inkml:channelProperty channel="Y" name="resolution" value="1000" units="1/cm"/>
-          <inkml:channelProperty channel="F" name="resolution" value="0" units="1/dev"/>
-          <inkml:channelProperty channel="OA" name="resolution" value="1000" units="1/deg"/>
-          <inkml:channelProperty channel="OE" name="resolution" value="1000" units="1/deg"/>
-        </inkml:channelProperties>
-      </inkml:inkSource>
-      <inkml:timestamp xml:id="ts0" timeString="2025-04-28T15:52:00.507"/>
-    </inkml:context>
-    <inkml:brush xml:id="br0">
-      <inkml:brushProperty name="width" value="0.05" units="cm"/>
-      <inkml:brushProperty name="height" value="0.05" units="cm"/>
-    </inkml:brush>
-  </inkml:definitions>
-  <inkml:trace contextRef="#ctx0" brushRef="#br0">70 139 576 0 0,'-31'-38'7195'0'0,"27"32"-6769"0"0,1-1 0 0 0,0-1 1 0 0,0 1-1 0 0,1 0 1 0 0,0-1-1 0 0,0 1 0 0 0,-1-12 1 0 0,-3-12 5039 0 0,-5 61-2753 0 0,17 144 683 0 0,29 87-2744 0 0,-20-161-291 0 0,17 102-251 0 0,21 183 941 0 0,-27-140-892 0 0,-4-61 72 0 0,-2-13-2444 0 0,-15-56-6730 0 0,-5-112 8679 0 0,1 8-462 0 0,-1 0 1 0 0,0 0-1 0 0,0 0 1 0 0,-1 0 0 0 0,-1 0-1 0 0,0 0 1 0 0,0 0-1 0 0,-1 0 1 0 0,-1-1 0 0 0,-5 14-1 0 0,8-23 558 0 0,1 0 0 0 0,-1 0 0 0 0,1-1 0 0 0,-1 1 0 0 0,0 0 0 0 0,1-1 0 0 0,-1 1 0 0 0,0-1 0 0 0,0 1 0 0 0,1 0 0 0 0,-1-1 0 0 0,0 0 0 0 0,0 1 0 0 0,0-1-1 0 0,0 1 1 0 0,1-1 0 0 0,-1 0 0 0 0,-2 1 0 0 0</inkml:trace>
-</inkml:ink>
-</file>
-
-<file path=ppt/ink/ink116.xml><?xml version="1.0" encoding="utf-8"?>
-<inkml:ink xmlns:inkml="http://www.w3.org/2003/InkML">
-  <inkml:definitions>
-    <inkml:context xml:id="ctx0">
-      <inkml:inkSource xml:id="inkSrc0">
-        <inkml:traceFormat>
-          <inkml:channel name="X" type="integer" min="-2.14748E9" max="2.14748E9" units="cm"/>
-          <inkml:channel name="Y" type="integer" min="-2.14748E9" max="2.14748E9" units="cm"/>
-          <inkml:channel name="F" type="integer" max="32767" units="dev"/>
-          <inkml:channel name="OA" type="integer" max="360" units="deg"/>
-          <inkml:channel name="OE" type="integer" max="90" units="deg"/>
-        </inkml:traceFormat>
-        <inkml:channelProperties>
-          <inkml:channelProperty channel="X" name="resolution" value="1000" units="1/cm"/>
-          <inkml:channelProperty channel="Y" name="resolution" value="1000" units="1/cm"/>
-          <inkml:channelProperty channel="F" name="resolution" value="0" units="1/dev"/>
-          <inkml:channelProperty channel="OA" name="resolution" value="1000" units="1/deg"/>
-          <inkml:channelProperty channel="OE" name="resolution" value="1000" units="1/deg"/>
-        </inkml:channelProperties>
-      </inkml:inkSource>
-      <inkml:timestamp xml:id="ts0" timeString="2025-04-28T15:52:01.139"/>
-    </inkml:context>
-    <inkml:brush xml:id="br0">
-      <inkml:brushProperty name="width" value="0.05" units="cm"/>
-      <inkml:brushProperty name="height" value="0.05" units="cm"/>
-    </inkml:brush>
-  </inkml:definitions>
-  <inkml:trace contextRef="#ctx0" brushRef="#br0">13 0 6941 0 0,'0'0'2109'0'0,"-13"20"7165"0"0,21 324-5756 0 0,-1-68-3160 0 0,-8-93 639 0 0,1 332 972 0 0,22-258-1882 0 0,24-4-3319 0 0,-42-206-4023 0 0,-6-12 3445 0 0,2-34 3726 0 0,0-1 0 0 0,0 1 0 0 0,0-1 0 0 0,0 1 0 0 0,0-1 0 0 0,0 1 0 0 0,0-1 0 0 0,0 1 0 0 0,0-1 1 0 0,0 1-1 0 0,0-1 0 0 0,0 1 0 0 0,0-1 0 0 0,-1 1 0 0 0,1-1 0 0 0,0 1 0 0 0,0-1 0 0 0,-1 0 0 0 0,1 1 0 0 0,0-1 0 0 0,0 1 0 0 0,-1-1 1 0 0,1 0-1 0 0,-1 1 0 0 0,1-1 0 0 0,0 0 0 0 0,-1 0 0 0 0,1 1 0 0 0,-1-1 0 0 0,1 0 0 0 0,0 0 0 0 0,-1 1 0 0 0,1-1 0 0 0,-1 0 1 0 0,1 0-1 0 0,-1 0 0 0 0,1 0 0 0 0,-1 0 0 0 0,1 0 0 0 0,-1 0 0 0 0,1 0 0 0 0,-1 0 0 0 0,0 0 0 0 0,-26-12-4451 0 0</inkml:trace>
-</inkml:ink>
-</file>
-
-<file path=ppt/ink/ink117.xml><?xml version="1.0" encoding="utf-8"?>
-<inkml:ink xmlns:inkml="http://www.w3.org/2003/InkML">
-  <inkml:definitions>
-    <inkml:context xml:id="ctx0">
-      <inkml:inkSource xml:id="inkSrc0">
-        <inkml:traceFormat>
-          <inkml:channel name="X" type="integer" min="-2.14748E9" max="2.14748E9" units="cm"/>
-          <inkml:channel name="Y" type="integer" min="-2.14748E9" max="2.14748E9" units="cm"/>
-          <inkml:channel name="F" type="integer" max="32767" units="dev"/>
-          <inkml:channel name="OA" type="integer" max="360" units="deg"/>
-          <inkml:channel name="OE" type="integer" max="90" units="deg"/>
-        </inkml:traceFormat>
-        <inkml:channelProperties>
-          <inkml:channelProperty channel="X" name="resolution" value="1000" units="1/cm"/>
-          <inkml:channelProperty channel="Y" name="resolution" value="1000" units="1/cm"/>
-          <inkml:channelProperty channel="F" name="resolution" value="0" units="1/dev"/>
-          <inkml:channelProperty channel="OA" name="resolution" value="1000" units="1/deg"/>
-          <inkml:channelProperty channel="OE" name="resolution" value="1000" units="1/deg"/>
-        </inkml:channelProperties>
-      </inkml:inkSource>
-      <inkml:timestamp xml:id="ts0" timeString="2025-04-28T15:52:01.828"/>
-    </inkml:context>
-    <inkml:brush xml:id="br0">
-      <inkml:brushProperty name="width" value="0.05" units="cm"/>
-      <inkml:brushProperty name="height" value="0.05" units="cm"/>
-    </inkml:brush>
-  </inkml:definitions>
-  <inkml:trace contextRef="#ctx0" brushRef="#br0">0 76 6377 0 0,'2'-12'6243'0'0,"3"-13"-1663"0"0,-1 21-4352 0 0,1 1 0 0 0,-1 1 1 0 0,1-1-1 0 0,-1 1 0 0 0,1-1 0 0 0,0 1 0 0 0,0 1 0 0 0,0-1 0 0 0,0 1 0 0 0,0 0 0 0 0,8-1 0 0 0,58-3 341 0 0,349 7 2653 0 0,191-9-1679 0 0,-440 5-1162 0 0,323 35 0 0 0,-300-13 16 0 0,-149-16-375 0 0,34 3-1141 0 0,-33-4-3316 0 0,-42-3 1676 0 0,12 4-4734 0 0,-29-11 3872 0 0,-19-2-676 0 0</inkml:trace>
-</inkml:ink>
-</file>
-
-<file path=ppt/ink/ink118.xml><?xml version="1.0" encoding="utf-8"?>
-<inkml:ink xmlns:inkml="http://www.w3.org/2003/InkML">
-  <inkml:definitions>
-    <inkml:context xml:id="ctx0">
-      <inkml:inkSource xml:id="inkSrc0">
-        <inkml:traceFormat>
-          <inkml:channel name="X" type="integer" min="-2.14748E9" max="2.14748E9" units="cm"/>
-          <inkml:channel name="Y" type="integer" min="-2.14748E9" max="2.14748E9" units="cm"/>
-          <inkml:channel name="F" type="integer" max="32767" units="dev"/>
-          <inkml:channel name="OA" type="integer" max="360" units="deg"/>
-          <inkml:channel name="OE" type="integer" max="90" units="deg"/>
-        </inkml:traceFormat>
-        <inkml:channelProperties>
-          <inkml:channelProperty channel="X" name="resolution" value="1000" units="1/cm"/>
-          <inkml:channelProperty channel="Y" name="resolution" value="1000" units="1/cm"/>
-          <inkml:channelProperty channel="F" name="resolution" value="0" units="1/dev"/>
-          <inkml:channelProperty channel="OA" name="resolution" value="1000" units="1/deg"/>
-          <inkml:channelProperty channel="OE" name="resolution" value="1000" units="1/deg"/>
-        </inkml:channelProperties>
-      </inkml:inkSource>
-      <inkml:timestamp xml:id="ts0" timeString="2025-04-28T15:52:02.568"/>
-    </inkml:context>
-    <inkml:brush xml:id="br0">
-      <inkml:brushProperty name="width" value="0.05" units="cm"/>
-      <inkml:brushProperty name="height" value="0.05" units="cm"/>
-    </inkml:brush>
-  </inkml:definitions>
-  <inkml:trace contextRef="#ctx0" brushRef="#br0">1 94 6257 0 0,'1'-4'666'0'0,"1"0"0"0"0,0 1 1 0 0,0-1-1 0 0,1 0 0 0 0,-1 1 1 0 0,1 0-1 0 0,-1-1 0 0 0,1 1 1 0 0,0 0-1 0 0,0 1 1 0 0,1-1-1 0 0,-1 0 0 0 0,1 1 1 0 0,-1 0-1 0 0,5-2 0 0 0,4-2 68 0 0,1 0-1 0 0,0 1 0 0 0,0 1 0 0 0,22-5 0 0 0,-4 4-568 0 0,57-3 0 0 0,-20 9 524 0 0,79 8 251 0 0,233 8 501 0 0,43 0-592 0 0,-73 0-755 0 0,-171-14 21 0 0,199 5 180 0 0,-126 6-1094 0 0,-116 2-1471 0 0,170 50-9592 0 0,-214-33 8500 0 0,-50-11-954 0 0</inkml:trace>
-</inkml:ink>
-</file>
-
-<file path=ppt/ink/ink119.xml><?xml version="1.0" encoding="utf-8"?>
-<inkml:ink xmlns:inkml="http://www.w3.org/2003/InkML">
-  <inkml:definitions>
-    <inkml:context xml:id="ctx0">
-      <inkml:inkSource xml:id="inkSrc0">
-        <inkml:traceFormat>
-          <inkml:channel name="X" type="integer" min="-2.14748E9" max="2.14748E9" units="cm"/>
-          <inkml:channel name="Y" type="integer" min="-2.14748E9" max="2.14748E9" units="cm"/>
-          <inkml:channel name="F" type="integer" max="32767" units="dev"/>
-          <inkml:channel name="OA" type="integer" max="360" units="deg"/>
-          <inkml:channel name="OE" type="integer" max="90" units="deg"/>
-        </inkml:traceFormat>
-        <inkml:channelProperties>
-          <inkml:channelProperty channel="X" name="resolution" value="1000" units="1/cm"/>
-          <inkml:channelProperty channel="Y" name="resolution" value="1000" units="1/cm"/>
-          <inkml:channelProperty channel="F" name="resolution" value="0" units="1/dev"/>
-          <inkml:channelProperty channel="OA" name="resolution" value="1000" units="1/deg"/>
-          <inkml:channelProperty channel="OE" name="resolution" value="1000" units="1/deg"/>
-        </inkml:channelProperties>
-      </inkml:inkSource>
-      <inkml:timestamp xml:id="ts0" timeString="2025-04-28T15:53:04.040"/>
-    </inkml:context>
-    <inkml:brush xml:id="br0">
-      <inkml:brushProperty name="width" value="0.05" units="cm"/>
-      <inkml:brushProperty name="height" value="0.05" units="cm"/>
-    </inkml:brush>
-  </inkml:definitions>
-  <inkml:trace contextRef="#ctx0" brushRef="#br0">0 1 2224 0 0,'0'0'5377'0'0,"27"23"-2074"0"0,-11-8-2856 0 0,0 1 1 0 0,-1 1 0 0 0,0 0 0 0 0,18 29 0 0 0,-15-19-1529 0 0,37 40 1 0 0,-42-55 171 0 0,0 0 0 0 0,1 0 0 0 0,17 10-1 0 0,-10-7 409 0 0,-6-4-158 0 0,0 0-1 0 0,1-1 0 0 0,29 13 0 0 0,-10-15-817 0 0</inkml:trace>
-</inkml:ink>
-</file>
-
 <file path=ppt/ink/ink12.xml><?xml version="1.0" encoding="utf-8"?>
 <inkml:ink xmlns:inkml="http://www.w3.org/2003/InkML">
   <inkml:definitions>
@@ -822,316 +340,6 @@
 </inkml:ink>
 </file>
 
-<file path=ppt/ink/ink120.xml><?xml version="1.0" encoding="utf-8"?>
-<inkml:ink xmlns:inkml="http://www.w3.org/2003/InkML">
-  <inkml:definitions>
-    <inkml:context xml:id="ctx0">
-      <inkml:inkSource xml:id="inkSrc0">
-        <inkml:traceFormat>
-          <inkml:channel name="X" type="integer" min="-2.14748E9" max="2.14748E9" units="cm"/>
-          <inkml:channel name="Y" type="integer" min="-2.14748E9" max="2.14748E9" units="cm"/>
-          <inkml:channel name="F" type="integer" max="32767" units="dev"/>
-          <inkml:channel name="OA" type="integer" max="360" units="deg"/>
-          <inkml:channel name="OE" type="integer" max="90" units="deg"/>
-        </inkml:traceFormat>
-        <inkml:channelProperties>
-          <inkml:channelProperty channel="X" name="resolution" value="1000" units="1/cm"/>
-          <inkml:channelProperty channel="Y" name="resolution" value="1000" units="1/cm"/>
-          <inkml:channelProperty channel="F" name="resolution" value="0" units="1/dev"/>
-          <inkml:channelProperty channel="OA" name="resolution" value="1000" units="1/deg"/>
-          <inkml:channelProperty channel="OE" name="resolution" value="1000" units="1/deg"/>
-        </inkml:channelProperties>
-      </inkml:inkSource>
-      <inkml:timestamp xml:id="ts0" timeString="2025-04-28T15:53:04.369"/>
-    </inkml:context>
-    <inkml:brush xml:id="br0">
-      <inkml:brushProperty name="width" value="0.05" units="cm"/>
-      <inkml:brushProperty name="height" value="0.05" units="cm"/>
-    </inkml:brush>
-  </inkml:definitions>
-  <inkml:trace contextRef="#ctx0" brushRef="#br0">1 435 1624 0 0,'14'-48'10253'0'0,"-11"40"-9815"0"0,0 1 0 0 0,1 0 0 0 0,0 0 0 0 0,1 1 0 0 0,-1-1 0 0 0,1 1 0 0 0,8-8 0 0 0,-1 2-224 0 0,121-119-972 0 0,-24 43-5838 0 0,-89 75 5989 0 0,-4 3-106 0 0,-1-1 0 0 0,0 0 0 0 0,16-17 0 0 0,-15 8-1341 0 0</inkml:trace>
-</inkml:ink>
-</file>
-
-<file path=ppt/ink/ink121.xml><?xml version="1.0" encoding="utf-8"?>
-<inkml:ink xmlns:inkml="http://www.w3.org/2003/InkML">
-  <inkml:definitions>
-    <inkml:context xml:id="ctx0">
-      <inkml:inkSource xml:id="inkSrc0">
-        <inkml:traceFormat>
-          <inkml:channel name="X" type="integer" min="-2.14748E9" max="2.14748E9" units="cm"/>
-          <inkml:channel name="Y" type="integer" min="-2.14748E9" max="2.14748E9" units="cm"/>
-          <inkml:channel name="F" type="integer" max="32767" units="dev"/>
-          <inkml:channel name="OA" type="integer" max="360" units="deg"/>
-          <inkml:channel name="OE" type="integer" max="90" units="deg"/>
-        </inkml:traceFormat>
-        <inkml:channelProperties>
-          <inkml:channelProperty channel="X" name="resolution" value="1000" units="1/cm"/>
-          <inkml:channelProperty channel="Y" name="resolution" value="1000" units="1/cm"/>
-          <inkml:channelProperty channel="F" name="resolution" value="0" units="1/dev"/>
-          <inkml:channelProperty channel="OA" name="resolution" value="1000" units="1/deg"/>
-          <inkml:channelProperty channel="OE" name="resolution" value="1000" units="1/deg"/>
-        </inkml:channelProperties>
-      </inkml:inkSource>
-      <inkml:timestamp xml:id="ts0" timeString="2025-04-28T15:53:05.262"/>
-    </inkml:context>
-    <inkml:brush xml:id="br0">
-      <inkml:brushProperty name="width" value="0.05" units="cm"/>
-      <inkml:brushProperty name="height" value="0.05" units="cm"/>
-    </inkml:brush>
-  </inkml:definitions>
-  <inkml:trace contextRef="#ctx0" brushRef="#br0">132 188 2572 0 0,'0'0'5075'0'0,"16"34"-548"0"0,-12-32-4457 0 0,-1 1 0 0 0,1 0 0 0 0,0-1 0 0 0,0 0 0 0 0,0 0 0 0 0,0 0 0 0 0,1 0 1 0 0,-1-1-1 0 0,0 0 0 0 0,1 0 0 0 0,-1 0 0 0 0,1 0 0 0 0,-1-1 0 0 0,1 1 0 0 0,-1-1 0 0 0,1 0 1 0 0,-1-1-1 0 0,10-1 0 0 0,-6 1 47 0 0,0-2 0 0 0,1 1 0 0 0,-1-1 0 0 0,0 0 0 0 0,0 0 0 0 0,-1-1 0 0 0,1 0 0 0 0,-1-1 0 0 0,0 0 0 0 0,8-6 0 0 0,-11 7 23 0 0,0 1 1 0 0,0-1-1 0 0,0 0 1 0 0,0 0-1 0 0,-1-1 1 0 0,0 1 0 0 0,0-1-1 0 0,0 1 1 0 0,0-1-1 0 0,-1 0 1 0 0,1 0-1 0 0,-1 0 1 0 0,-1-1-1 0 0,1 1 1 0 0,0-8 0 0 0,-1 9 34 0 0,-1 0 1 0 0,-1 0 0 0 0,1 0 0 0 0,-1 0-1 0 0,0 0 1 0 0,0 0 0 0 0,0 0-1 0 0,0 0 1 0 0,-1 0 0 0 0,1 0 0 0 0,-1 1-1 0 0,0-1 1 0 0,0 0 0 0 0,0 1 0 0 0,-1 0-1 0 0,1-1 1 0 0,-1 1 0 0 0,0 0 0 0 0,0 0-1 0 0,0 1 1 0 0,0-1 0 0 0,-1 1 0 0 0,-3-3-1 0 0,1 1-182 0 0,0 0-1 0 0,0 0 1 0 0,0 1-1 0 0,0 0 1 0 0,-1 1-1 0 0,0-1 1 0 0,1 1-1 0 0,-1 0 1 0 0,0 1-1 0 0,0-1 1 0 0,0 1-1 0 0,0 1 1 0 0,0-1-1 0 0,0 1 1 0 0,-12 2-1 0 0,12-1-490 0 0,0 1 0 0 0,-1 0 0 0 0,1 1 0 0 0,0-1 0 0 0,1 1 0 0 0,-1 1-1 0 0,0-1 1 0 0,1 1 0 0 0,0 1 0 0 0,0-1 0 0 0,0 1 0 0 0,0 0 0 0 0,1 0 0 0 0,-1 0-1 0 0,1 1 1 0 0,1 0 0 0 0,-5 6 0 0 0,-73 119-5489 0 0,67-95 2529 0 0</inkml:trace>
-</inkml:ink>
-</file>
-
-<file path=ppt/ink/ink122.xml><?xml version="1.0" encoding="utf-8"?>
-<inkml:ink xmlns:inkml="http://www.w3.org/2003/InkML">
-  <inkml:definitions>
-    <inkml:context xml:id="ctx0">
-      <inkml:inkSource xml:id="inkSrc0">
-        <inkml:traceFormat>
-          <inkml:channel name="X" type="integer" min="-2.14748E9" max="2.14748E9" units="cm"/>
-          <inkml:channel name="Y" type="integer" min="-2.14748E9" max="2.14748E9" units="cm"/>
-          <inkml:channel name="F" type="integer" max="32767" units="dev"/>
-          <inkml:channel name="OA" type="integer" max="360" units="deg"/>
-          <inkml:channel name="OE" type="integer" max="90" units="deg"/>
-        </inkml:traceFormat>
-        <inkml:channelProperties>
-          <inkml:channelProperty channel="X" name="resolution" value="1000" units="1/cm"/>
-          <inkml:channelProperty channel="Y" name="resolution" value="1000" units="1/cm"/>
-          <inkml:channelProperty channel="F" name="resolution" value="0" units="1/dev"/>
-          <inkml:channelProperty channel="OA" name="resolution" value="1000" units="1/deg"/>
-          <inkml:channelProperty channel="OE" name="resolution" value="1000" units="1/deg"/>
-        </inkml:channelProperties>
-      </inkml:inkSource>
-      <inkml:timestamp xml:id="ts0" timeString="2025-04-28T15:53:06.070"/>
-    </inkml:context>
-    <inkml:brush xml:id="br0">
-      <inkml:brushProperty name="width" value="0.05" units="cm"/>
-      <inkml:brushProperty name="height" value="0.05" units="cm"/>
-    </inkml:brush>
-  </inkml:definitions>
-  <inkml:trace contextRef="#ctx0" brushRef="#br0">0 1 3224 0 0,'0'0'7536'0'0,"21"17"-4189"0"0,2-6-3159 0 0,1-2 0 0 0,0 0 1 0 0,0-1-1 0 0,1-2 0 0 0,0 0 1 0 0,35 2-1 0 0,5 3-3393 0 0,88 26-4034 0 0,-149-36 4986 0 0</inkml:trace>
-</inkml:ink>
-</file>
-
-<file path=ppt/ink/ink123.xml><?xml version="1.0" encoding="utf-8"?>
-<inkml:ink xmlns:inkml="http://www.w3.org/2003/InkML">
-  <inkml:definitions>
-    <inkml:context xml:id="ctx0">
-      <inkml:inkSource xml:id="inkSrc0">
-        <inkml:traceFormat>
-          <inkml:channel name="X" type="integer" min="-2.14748E9" max="2.14748E9" units="cm"/>
-          <inkml:channel name="Y" type="integer" min="-2.14748E9" max="2.14748E9" units="cm"/>
-          <inkml:channel name="F" type="integer" max="32767" units="dev"/>
-          <inkml:channel name="OA" type="integer" max="360" units="deg"/>
-          <inkml:channel name="OE" type="integer" max="90" units="deg"/>
-        </inkml:traceFormat>
-        <inkml:channelProperties>
-          <inkml:channelProperty channel="X" name="resolution" value="1000" units="1/cm"/>
-          <inkml:channelProperty channel="Y" name="resolution" value="1000" units="1/cm"/>
-          <inkml:channelProperty channel="F" name="resolution" value="0" units="1/dev"/>
-          <inkml:channelProperty channel="OA" name="resolution" value="1000" units="1/deg"/>
-          <inkml:channelProperty channel="OE" name="resolution" value="1000" units="1/deg"/>
-        </inkml:channelProperties>
-      </inkml:inkSource>
-      <inkml:timestamp xml:id="ts0" timeString="2025-04-28T15:53:06.276"/>
-    </inkml:context>
-    <inkml:brush xml:id="br0">
-      <inkml:brushProperty name="width" value="0.05" units="cm"/>
-      <inkml:brushProperty name="height" value="0.05" units="cm"/>
-    </inkml:brush>
-  </inkml:definitions>
-  <inkml:trace contextRef="#ctx0" brushRef="#br0">0 439 7345 0 0,'6'-19'2272'0'0,"8"4"360"0"0,1-1-340 0 0,2 2-395 0 0,0-1-461 0 0,1-2-188 0 0,2 2-284 0 0,4-3-184 0 0,3-2-308 0 0,12-5-868 0 0,0 2-568 0 0,1-1-1220 0 0,-11 6-765 0 0,115-69-2099 0 0,-77 22 2560 0 0,-24 17-2093 0 0</inkml:trace>
-</inkml:ink>
-</file>
-
-<file path=ppt/ink/ink124.xml><?xml version="1.0" encoding="utf-8"?>
-<inkml:ink xmlns:inkml="http://www.w3.org/2003/InkML">
-  <inkml:definitions>
-    <inkml:context xml:id="ctx0">
-      <inkml:inkSource xml:id="inkSrc0">
-        <inkml:traceFormat>
-          <inkml:channel name="X" type="integer" min="-2.14748E9" max="2.14748E9" units="cm"/>
-          <inkml:channel name="Y" type="integer" min="-2.14748E9" max="2.14748E9" units="cm"/>
-          <inkml:channel name="F" type="integer" max="32767" units="dev"/>
-          <inkml:channel name="OA" type="integer" max="360" units="deg"/>
-          <inkml:channel name="OE" type="integer" max="90" units="deg"/>
-        </inkml:traceFormat>
-        <inkml:channelProperties>
-          <inkml:channelProperty channel="X" name="resolution" value="1000" units="1/cm"/>
-          <inkml:channelProperty channel="Y" name="resolution" value="1000" units="1/cm"/>
-          <inkml:channelProperty channel="F" name="resolution" value="0" units="1/dev"/>
-          <inkml:channelProperty channel="OA" name="resolution" value="1000" units="1/deg"/>
-          <inkml:channelProperty channel="OE" name="resolution" value="1000" units="1/deg"/>
-        </inkml:channelProperties>
-      </inkml:inkSource>
-      <inkml:timestamp xml:id="ts0" timeString="2025-04-28T15:53:07.106"/>
-    </inkml:context>
-    <inkml:brush xml:id="br0">
-      <inkml:brushProperty name="width" value="0.05" units="cm"/>
-      <inkml:brushProperty name="height" value="0.05" units="cm"/>
-    </inkml:brush>
-  </inkml:definitions>
-  <inkml:trace contextRef="#ctx0" brushRef="#br0">116 0 1500 0 0,'0'0'4338'0'0,"-14"9"-1481"0"0,9-2-2511 0 0,1 1 1 0 0,0 1-1 0 0,0-1 0 0 0,1 1 1 0 0,0-1-1 0 0,0 1 1 0 0,1 0-1 0 0,0 0 0 0 0,0 0 1 0 0,1 12-1 0 0,0-15-323 0 0,1-1 0 0 0,0 1 0 0 0,1 0 0 0 0,-1-1 0 0 0,1 1 0 0 0,0-1 0 0 0,1 0 0 0 0,-1 1 0 0 0,1-1 0 0 0,0 0 0 0 0,0 0 0 0 0,1 0 0 0 0,0 0 0 0 0,0 0 0 0 0,0-1 0 0 0,0 1 0 0 0,1-1 0 0 0,4 5 0 0 0,-6-8 31 0 0,0 1-1 0 0,0-1 1 0 0,0 0 0 0 0,1 0 0 0 0,-1 0 0 0 0,0 0 0 0 0,1-1-1 0 0,-1 1 1 0 0,0-1 0 0 0,1 1 0 0 0,-1-1 0 0 0,1 0 0 0 0,-1 0-1 0 0,1 0 1 0 0,-1 0 0 0 0,0 0 0 0 0,1-1 0 0 0,-1 1-1 0 0,1-1 1 0 0,-1 1 0 0 0,0-1 0 0 0,1 0 0 0 0,-1 0 0 0 0,0 0-1 0 0,0 0 1 0 0,0-1 0 0 0,0 1 0 0 0,3-3 0 0 0,4-2 183 0 0,0 0 1 0 0,-1-1 0 0 0,0 0-1 0 0,14-16 1 0 0,-18 19-64 0 0,-1 0 0 0 0,1 0 0 0 0,-1 0 1 0 0,0 0-1 0 0,0 0 0 0 0,-1-1 0 0 0,1 1 0 0 0,-1-1 0 0 0,0 0 1 0 0,0 0-1 0 0,0 1 0 0 0,-1-1 0 0 0,0-1 0 0 0,0 1 1 0 0,0 0-1 0 0,0 0 0 0 0,-1 0 0 0 0,0-7 0 0 0,-1 11-251 0 0,1 0-1 0 0,-1-1 0 0 0,1 1 0 0 0,-1 0 0 0 0,0 0 1 0 0,1 0-1 0 0,-1 0 0 0 0,0 0 0 0 0,0 0 0 0 0,0 0 0 0 0,0 0 1 0 0,0 0-1 0 0,0 0 0 0 0,0 1 0 0 0,0-1 0 0 0,0 0 1 0 0,0 1-1 0 0,0-1 0 0 0,0 1 0 0 0,-1-1 0 0 0,1 1 0 0 0,0-1 1 0 0,0 1-1 0 0,0 0 0 0 0,-1 0 0 0 0,1 0 0 0 0,0-1 1 0 0,-1 1-1 0 0,1 0 0 0 0,-2 1 0 0 0,-35 4-3066 0 0,10 12 961 0 0,-100 82-3153 0 0,85-63 2139 0 0</inkml:trace>
-</inkml:ink>
-</file>
-
-<file path=ppt/ink/ink125.xml><?xml version="1.0" encoding="utf-8"?>
-<inkml:ink xmlns:inkml="http://www.w3.org/2003/InkML">
-  <inkml:definitions>
-    <inkml:context xml:id="ctx0">
-      <inkml:inkSource xml:id="inkSrc0">
-        <inkml:traceFormat>
-          <inkml:channel name="X" type="integer" min="-2.14748E9" max="2.14748E9" units="cm"/>
-          <inkml:channel name="Y" type="integer" min="-2.14748E9" max="2.14748E9" units="cm"/>
-          <inkml:channel name="F" type="integer" max="32767" units="dev"/>
-          <inkml:channel name="OA" type="integer" max="360" units="deg"/>
-          <inkml:channel name="OE" type="integer" max="90" units="deg"/>
-        </inkml:traceFormat>
-        <inkml:channelProperties>
-          <inkml:channelProperty channel="X" name="resolution" value="1000" units="1/cm"/>
-          <inkml:channelProperty channel="Y" name="resolution" value="1000" units="1/cm"/>
-          <inkml:channelProperty channel="F" name="resolution" value="0" units="1/dev"/>
-          <inkml:channelProperty channel="OA" name="resolution" value="1000" units="1/deg"/>
-          <inkml:channelProperty channel="OE" name="resolution" value="1000" units="1/deg"/>
-        </inkml:channelProperties>
-      </inkml:inkSource>
-      <inkml:timestamp xml:id="ts0" timeString="2025-04-28T15:56:57.504"/>
-    </inkml:context>
-    <inkml:brush xml:id="br0">
-      <inkml:brushProperty name="width" value="0.05" units="cm"/>
-      <inkml:brushProperty name="height" value="0.05" units="cm"/>
-    </inkml:brush>
-  </inkml:definitions>
-  <inkml:trace contextRef="#ctx0" brushRef="#br0">310 3 1188 0 0,'0'0'4331'0'0,"-10"-3"910"0"0,-13 203-1894 0 0,-62 243 0 0 0,33-180-1825 0 0,-26 368 0 0 0,48-408-594 0 0,4-51 110 0 0,24-159-962 0 0,-1 15-1680 0 0,3-11-2351 0 0,16-43-4974 0 0,-15 25 8718 0 0,6-35-1985 0 0,-5-7-721 0 0</inkml:trace>
-</inkml:ink>
-</file>
-
-<file path=ppt/ink/ink126.xml><?xml version="1.0" encoding="utf-8"?>
-<inkml:ink xmlns:inkml="http://www.w3.org/2003/InkML">
-  <inkml:definitions>
-    <inkml:context xml:id="ctx0">
-      <inkml:inkSource xml:id="inkSrc0">
-        <inkml:traceFormat>
-          <inkml:channel name="X" type="integer" min="-2.14748E9" max="2.14748E9" units="cm"/>
-          <inkml:channel name="Y" type="integer" min="-2.14748E9" max="2.14748E9" units="cm"/>
-          <inkml:channel name="F" type="integer" max="32767" units="dev"/>
-          <inkml:channel name="OA" type="integer" max="360" units="deg"/>
-          <inkml:channel name="OE" type="integer" max="90" units="deg"/>
-        </inkml:traceFormat>
-        <inkml:channelProperties>
-          <inkml:channelProperty channel="X" name="resolution" value="1000" units="1/cm"/>
-          <inkml:channelProperty channel="Y" name="resolution" value="1000" units="1/cm"/>
-          <inkml:channelProperty channel="F" name="resolution" value="0" units="1/dev"/>
-          <inkml:channelProperty channel="OA" name="resolution" value="1000" units="1/deg"/>
-          <inkml:channelProperty channel="OE" name="resolution" value="1000" units="1/deg"/>
-        </inkml:channelProperties>
-      </inkml:inkSource>
-      <inkml:timestamp xml:id="ts0" timeString="2025-04-28T15:56:58.158"/>
-    </inkml:context>
-    <inkml:brush xml:id="br0">
-      <inkml:brushProperty name="width" value="0.05" units="cm"/>
-      <inkml:brushProperty name="height" value="0.05" units="cm"/>
-    </inkml:brush>
-  </inkml:definitions>
-  <inkml:trace contextRef="#ctx0" brushRef="#br0">63 0 5288 0 0,'0'0'8935'0'0,"5"32"-7500"0"0,13 997 1931 0 0,-62-205-1467 0 0,42-708-1759 0 0,0-3-354 0 0,-2-40-3627 0 0,2-90-2897 0 0,-7-8 4663 0 0,2 5 649 0 0,-8-34-2615 0 0</inkml:trace>
-</inkml:ink>
-</file>
-
-<file path=ppt/ink/ink127.xml><?xml version="1.0" encoding="utf-8"?>
-<inkml:ink xmlns:inkml="http://www.w3.org/2003/InkML">
-  <inkml:definitions>
-    <inkml:context xml:id="ctx0">
-      <inkml:inkSource xml:id="inkSrc0">
-        <inkml:traceFormat>
-          <inkml:channel name="X" type="integer" min="-2.14748E9" max="2.14748E9" units="cm"/>
-          <inkml:channel name="Y" type="integer" min="-2.14748E9" max="2.14748E9" units="cm"/>
-          <inkml:channel name="F" type="integer" max="32767" units="dev"/>
-          <inkml:channel name="OA" type="integer" max="360" units="deg"/>
-          <inkml:channel name="OE" type="integer" max="90" units="deg"/>
-        </inkml:traceFormat>
-        <inkml:channelProperties>
-          <inkml:channelProperty channel="X" name="resolution" value="1000" units="1/cm"/>
-          <inkml:channelProperty channel="Y" name="resolution" value="1000" units="1/cm"/>
-          <inkml:channelProperty channel="F" name="resolution" value="0" units="1/dev"/>
-          <inkml:channelProperty channel="OA" name="resolution" value="1000" units="1/deg"/>
-          <inkml:channelProperty channel="OE" name="resolution" value="1000" units="1/deg"/>
-        </inkml:channelProperties>
-      </inkml:inkSource>
-      <inkml:timestamp xml:id="ts0" timeString="2025-04-28T15:56:58.956"/>
-    </inkml:context>
-    <inkml:brush xml:id="br0">
-      <inkml:brushProperty name="width" value="0.05" units="cm"/>
-      <inkml:brushProperty name="height" value="0.05" units="cm"/>
-    </inkml:brush>
-  </inkml:definitions>
-  <inkml:trace contextRef="#ctx0" brushRef="#br0">1 1 2008 0 0,'13'10'10286'0'0,"16"-3"-7367"0"0,37 1-3606 0 0,-54-7 2070 0 0,255 9 1353 0 0,-68-4-2284 0 0,959-8 775 0 0,-929 0-745 0 0,49-5 495 0 0,622-15 725 0 0,-862 24-2085 0 0,12 3-4869 0 0,-37 3-8 0 0,-9 7 3428 0 0,-5-14 1085 0 0,1 0 618 0 0,-1 0 0 0 0,1 0 0 0 0,-1-1 0 0 0,0 1 0 0 0,1 0 0 0 0,-1 0 0 0 0,0-1 0 0 0,0 1 0 0 0,1-1 0 0 0,-1 1 1 0 0,0-1-1 0 0,0 1 0 0 0,0-1 0 0 0,0 1 0 0 0,0-1 0 0 0,0 0 0 0 0,0 1 0 0 0,0-1 0 0 0,0 0 0 0 0,0 0 0 0 0,0 0 0 0 0,1 0 1 0 0,-3 0-1 0 0,-42 4-4060 0 0</inkml:trace>
-</inkml:ink>
-</file>
-
-<file path=ppt/ink/ink128.xml><?xml version="1.0" encoding="utf-8"?>
-<inkml:ink xmlns:inkml="http://www.w3.org/2003/InkML">
-  <inkml:definitions>
-    <inkml:context xml:id="ctx0">
-      <inkml:inkSource xml:id="inkSrc0">
-        <inkml:traceFormat>
-          <inkml:channel name="X" type="integer" min="-2.14748E9" max="2.14748E9" units="cm"/>
-          <inkml:channel name="Y" type="integer" min="-2.14748E9" max="2.14748E9" units="cm"/>
-          <inkml:channel name="F" type="integer" max="32767" units="dev"/>
-          <inkml:channel name="OA" type="integer" max="360" units="deg"/>
-          <inkml:channel name="OE" type="integer" max="90" units="deg"/>
-        </inkml:traceFormat>
-        <inkml:channelProperties>
-          <inkml:channelProperty channel="X" name="resolution" value="1000" units="1/cm"/>
-          <inkml:channelProperty channel="Y" name="resolution" value="1000" units="1/cm"/>
-          <inkml:channelProperty channel="F" name="resolution" value="0" units="1/dev"/>
-          <inkml:channelProperty channel="OA" name="resolution" value="1000" units="1/deg"/>
-          <inkml:channelProperty channel="OE" name="resolution" value="1000" units="1/deg"/>
-        </inkml:channelProperties>
-      </inkml:inkSource>
-      <inkml:timestamp xml:id="ts0" timeString="2025-04-28T15:56:59.732"/>
-    </inkml:context>
-    <inkml:brush xml:id="br0">
-      <inkml:brushProperty name="width" value="0.05" units="cm"/>
-      <inkml:brushProperty name="height" value="0.05" units="cm"/>
-    </inkml:brush>
-  </inkml:definitions>
-  <inkml:trace contextRef="#ctx0" brushRef="#br0">2 127 6009 0 0,'0'0'5791'0'0,"0"0"-5600"0"0,0-1-1 0 0,0 1 1 0 0,0 0 0 0 0,-1-1 0 0 0,1 1-1 0 0,0 0 1 0 0,0-1 0 0 0,0 1 0 0 0,0-1-1 0 0,-1 1 1 0 0,1-1 0 0 0,0 1 0 0 0,0 0-1 0 0,0-1 1 0 0,0 1 0 0 0,0-1 0 0 0,0 1-1 0 0,0-1 1 0 0,0 1 0 0 0,1 0 0 0 0,-1-1-1 0 0,0 1 1 0 0,0-1 0 0 0,0 1 0 0 0,0 0-1 0 0,0-1 1 0 0,1 0 0 0 0,72-9 986 0 0,122-4-1 0 0,-6 3-1114 0 0,902-36 1949 0 0,-1065 47-1991 0 0,130-5 162 0 0,110 3 141 0 0,619 8 974 0 0,-630-11-633 0 0,502-7-285 0 0,-688 7-5475 0 0,-28 0-6496 0 0,-72 0 6576 0 0</inkml:trace>
-</inkml:ink>
-</file>
-
-<file path=ppt/ink/ink129.xml><?xml version="1.0" encoding="utf-8"?>
-<inkml:ink xmlns:inkml="http://www.w3.org/2003/InkML">
-  <inkml:definitions>
-    <inkml:context xml:id="ctx0">
-      <inkml:inkSource xml:id="inkSrc0">
-        <inkml:traceFormat>
-          <inkml:channel name="X" type="integer" min="-2.14748E9" max="2.14748E9" units="cm"/>
-          <inkml:channel name="Y" type="integer" min="-2.14748E9" max="2.14748E9" units="cm"/>
-          <inkml:channel name="F" type="integer" max="32767" units="dev"/>
-          <inkml:channel name="OA" type="integer" max="360" units="deg"/>
-          <inkml:channel name="OE" type="integer" max="90" units="deg"/>
-        </inkml:traceFormat>
-        <inkml:channelProperties>
-          <inkml:channelProperty channel="X" name="resolution" value="1000" units="1/cm"/>
-          <inkml:channelProperty channel="Y" name="resolution" value="1000" units="1/cm"/>
-          <inkml:channelProperty channel="F" name="resolution" value="0" units="1/dev"/>
-          <inkml:channelProperty channel="OA" name="resolution" value="1000" units="1/deg"/>
-          <inkml:channelProperty channel="OE" name="resolution" value="1000" units="1/deg"/>
-        </inkml:channelProperties>
-      </inkml:inkSource>
-      <inkml:timestamp xml:id="ts0" timeString="2025-04-28T15:57:00.512"/>
-    </inkml:context>
-    <inkml:brush xml:id="br0">
-      <inkml:brushProperty name="width" value="0.05" units="cm"/>
-      <inkml:brushProperty name="height" value="0.05" units="cm"/>
-    </inkml:brush>
-  </inkml:definitions>
-  <inkml:trace contextRef="#ctx0" brushRef="#br0">5 15 3052 0 0,'-1'-2'3305'0'0,"-2"-11"6632"0"0,31 30-9815 0 0,0 2-1 0 0,-1 0 1 0 0,-1 1-1 0 0,44 46 1 0 0,24 41-175 0 0,-40-34 95 0 0,-35-44-343 0 0,28 59-8383 0 0,-35-55 7575 0 0,-12-31 953 0 0,1 1 0 0 0,0-1 1 0 0,-1 0-1 0 0,0 1 0 0 0,1-1 1 0 0,-1 0-1 0 0,0 1 1 0 0,0-1-1 0 0,0 0 0 0 0,0 1 1 0 0,-2 3-1 0 0,-10 9-2045 0 0</inkml:trace>
-</inkml:ink>
-</file>
-
 <file path=ppt/ink/ink13.xml><?xml version="1.0" encoding="utf-8"?>
 <inkml:ink xmlns:inkml="http://www.w3.org/2003/InkML">
   <inkml:definitions>
@@ -1160,161 +368,6 @@
     </inkml:brush>
   </inkml:definitions>
   <inkml:trace contextRef="#ctx0" brushRef="#br0">0 76 6377 0 0,'2'-12'6243'0'0,"3"-13"-1663"0"0,-1 21-4352 0 0,1 1 0 0 0,-1 1 1 0 0,1-1-1 0 0,-1 1 0 0 0,1-1 0 0 0,0 1 0 0 0,0 1 0 0 0,0-1 0 0 0,0 1 0 0 0,0 0 0 0 0,8-1 0 0 0,58-3 341 0 0,349 7 2653 0 0,191-9-1679 0 0,-440 5-1162 0 0,323 35 0 0 0,-300-13 16 0 0,-149-16-375 0 0,34 3-1141 0 0,-33-4-3316 0 0,-42-3 1676 0 0,12 4-4734 0 0,-29-11 3872 0 0,-19-2-676 0 0</inkml:trace>
-</inkml:ink>
-</file>
-
-<file path=ppt/ink/ink130.xml><?xml version="1.0" encoding="utf-8"?>
-<inkml:ink xmlns:inkml="http://www.w3.org/2003/InkML">
-  <inkml:definitions>
-    <inkml:context xml:id="ctx0">
-      <inkml:inkSource xml:id="inkSrc0">
-        <inkml:traceFormat>
-          <inkml:channel name="X" type="integer" min="-2.14748E9" max="2.14748E9" units="cm"/>
-          <inkml:channel name="Y" type="integer" min="-2.14748E9" max="2.14748E9" units="cm"/>
-          <inkml:channel name="F" type="integer" max="32767" units="dev"/>
-          <inkml:channel name="OA" type="integer" max="360" units="deg"/>
-          <inkml:channel name="OE" type="integer" max="90" units="deg"/>
-        </inkml:traceFormat>
-        <inkml:channelProperties>
-          <inkml:channelProperty channel="X" name="resolution" value="1000" units="1/cm"/>
-          <inkml:channelProperty channel="Y" name="resolution" value="1000" units="1/cm"/>
-          <inkml:channelProperty channel="F" name="resolution" value="0" units="1/dev"/>
-          <inkml:channelProperty channel="OA" name="resolution" value="1000" units="1/deg"/>
-          <inkml:channelProperty channel="OE" name="resolution" value="1000" units="1/deg"/>
-        </inkml:channelProperties>
-      </inkml:inkSource>
-      <inkml:timestamp xml:id="ts0" timeString="2025-04-28T15:57:00.761"/>
-    </inkml:context>
-    <inkml:brush xml:id="br0">
-      <inkml:brushProperty name="width" value="0.05" units="cm"/>
-      <inkml:brushProperty name="height" value="0.05" units="cm"/>
-    </inkml:brush>
-  </inkml:definitions>
-  <inkml:trace contextRef="#ctx0" brushRef="#br0">1 286 6717 0 0,'0'0'6684'0'0,"20"-31"-1042"0"0,35-8-4094 0 0,3 3-3933 0 0,-4 3-2418 0 0,17-8 716 0 0,-48 28 2905 0 0,-1-1-1 0 0,35-27 1 0 0,-16 4-1859 0 0</inkml:trace>
-</inkml:ink>
-</file>
-
-<file path=ppt/ink/ink131.xml><?xml version="1.0" encoding="utf-8"?>
-<inkml:ink xmlns:inkml="http://www.w3.org/2003/InkML">
-  <inkml:definitions>
-    <inkml:context xml:id="ctx0">
-      <inkml:inkSource xml:id="inkSrc0">
-        <inkml:traceFormat>
-          <inkml:channel name="X" type="integer" min="-2.14748E9" max="2.14748E9" units="cm"/>
-          <inkml:channel name="Y" type="integer" min="-2.14748E9" max="2.14748E9" units="cm"/>
-          <inkml:channel name="F" type="integer" max="32767" units="dev"/>
-          <inkml:channel name="OA" type="integer" max="360" units="deg"/>
-          <inkml:channel name="OE" type="integer" max="90" units="deg"/>
-        </inkml:traceFormat>
-        <inkml:channelProperties>
-          <inkml:channelProperty channel="X" name="resolution" value="1000" units="1/cm"/>
-          <inkml:channelProperty channel="Y" name="resolution" value="1000" units="1/cm"/>
-          <inkml:channelProperty channel="F" name="resolution" value="0" units="1/dev"/>
-          <inkml:channelProperty channel="OA" name="resolution" value="1000" units="1/deg"/>
-          <inkml:channelProperty channel="OE" name="resolution" value="1000" units="1/deg"/>
-        </inkml:channelProperties>
-      </inkml:inkSource>
-      <inkml:timestamp xml:id="ts0" timeString="2025-04-28T15:57:04.687"/>
-    </inkml:context>
-    <inkml:brush xml:id="br0">
-      <inkml:brushProperty name="width" value="0.05" units="cm"/>
-      <inkml:brushProperty name="height" value="0.05" units="cm"/>
-    </inkml:brush>
-  </inkml:definitions>
-  <inkml:trace contextRef="#ctx0" brushRef="#br0">1 3 1728 0 0,'0'0'8632'0'0,"19"-3"-7426"0"0,-5 6-972 0 0,1 0 0 0 0,-1 1-1 0 0,0 0 1 0 0,-1 1-1 0 0,1 1 1 0 0,-1 0 0 0 0,18 12-1 0 0,84 66 1519 0 0,-82-57-3083 0 0,62 38 0 0 0,-77-55-94 0 0,-1 1 0 0 0,0 0 0 0 0,16 15-1 0 0,-19-15 174 0 0,-10-7-1592 0 0</inkml:trace>
-</inkml:ink>
-</file>
-
-<file path=ppt/ink/ink132.xml><?xml version="1.0" encoding="utf-8"?>
-<inkml:ink xmlns:inkml="http://www.w3.org/2003/InkML">
-  <inkml:definitions>
-    <inkml:context xml:id="ctx0">
-      <inkml:inkSource xml:id="inkSrc0">
-        <inkml:traceFormat>
-          <inkml:channel name="X" type="integer" min="-2.14748E9" max="2.14748E9" units="cm"/>
-          <inkml:channel name="Y" type="integer" min="-2.14748E9" max="2.14748E9" units="cm"/>
-          <inkml:channel name="F" type="integer" max="32767" units="dev"/>
-          <inkml:channel name="OA" type="integer" max="360" units="deg"/>
-          <inkml:channel name="OE" type="integer" max="90" units="deg"/>
-        </inkml:traceFormat>
-        <inkml:channelProperties>
-          <inkml:channelProperty channel="X" name="resolution" value="1000" units="1/cm"/>
-          <inkml:channelProperty channel="Y" name="resolution" value="1000" units="1/cm"/>
-          <inkml:channelProperty channel="F" name="resolution" value="0" units="1/dev"/>
-          <inkml:channelProperty channel="OA" name="resolution" value="1000" units="1/deg"/>
-          <inkml:channelProperty channel="OE" name="resolution" value="1000" units="1/deg"/>
-        </inkml:channelProperties>
-      </inkml:inkSource>
-      <inkml:timestamp xml:id="ts0" timeString="2025-04-28T15:57:04.984"/>
-    </inkml:context>
-    <inkml:brush xml:id="br0">
-      <inkml:brushProperty name="width" value="0.05" units="cm"/>
-      <inkml:brushProperty name="height" value="0.05" units="cm"/>
-    </inkml:brush>
-  </inkml:definitions>
-  <inkml:trace contextRef="#ctx0" brushRef="#br0">12 506 4828 0 0,'-1'-1'452'0'0,"0"1"0"0"0,1 0 0 0 0,-1-1 0 0 0,0 1 0 0 0,1-1 0 0 0,-1 1 0 0 0,0-1 0 0 0,1 1-1 0 0,-1-1 1 0 0,1 1 0 0 0,-1-1 0 0 0,1 0 0 0 0,-1 1 0 0 0,1-1 0 0 0,-1 0 0 0 0,1 1 0 0 0,0-1-1 0 0,-1 0 1 0 0,1 0 0 0 0,0 1 0 0 0,0-1 0 0 0,0 0 0 0 0,-1-1 0 0 0,11-14 3047 0 0,32-13-4545 0 0,-30 23 2018 0 0,73-48-611 0 0,44-36-697 0 0,-98 66-1283 0 0,-1-2-1 0 0,-1-1 0 0 0,-1-1 0 0 0,36-49 1 0 0,-33 27-1675 0 0,-30 48 3174 0 0,0 0 1 0 0,-1 0-1 0 0,1 0 0 0 0,0 0 0 0 0,0 0 1 0 0,-1 0-1 0 0,1-1 0 0 0,-1 1 0 0 0,0 0 0 0 0,0 0 1 0 0,0 0-1 0 0,0 0 0 0 0,0-1 0 0 0,0 1 1 0 0,0 0-1 0 0,-1 0 0 0 0,1 0 0 0 0,-1 0 0 0 0,1 0 1 0 0,-1 0-1 0 0,-1-3 0 0 0,0 4-77 0 0,1-1-1 0 0,-1 1 1 0 0,1 0 0 0 0,-1 0-1 0 0,1-1 1 0 0,-1 1-1 0 0,0 0 1 0 0,0 0-1 0 0,1 1 1 0 0,-1-1 0 0 0,-3-1-1 0 0</inkml:trace>
-</inkml:ink>
-</file>
-
-<file path=ppt/ink/ink133.xml><?xml version="1.0" encoding="utf-8"?>
-<inkml:ink xmlns:inkml="http://www.w3.org/2003/InkML">
-  <inkml:definitions>
-    <inkml:context xml:id="ctx0">
-      <inkml:inkSource xml:id="inkSrc0">
-        <inkml:traceFormat>
-          <inkml:channel name="X" type="integer" min="-2.14748E9" max="2.14748E9" units="cm"/>
-          <inkml:channel name="Y" type="integer" min="-2.14748E9" max="2.14748E9" units="cm"/>
-          <inkml:channel name="F" type="integer" max="32767" units="dev"/>
-          <inkml:channel name="OA" type="integer" max="360" units="deg"/>
-          <inkml:channel name="OE" type="integer" max="90" units="deg"/>
-        </inkml:traceFormat>
-        <inkml:channelProperties>
-          <inkml:channelProperty channel="X" name="resolution" value="1000" units="1/cm"/>
-          <inkml:channelProperty channel="Y" name="resolution" value="1000" units="1/cm"/>
-          <inkml:channelProperty channel="F" name="resolution" value="0" units="1/dev"/>
-          <inkml:channelProperty channel="OA" name="resolution" value="1000" units="1/deg"/>
-          <inkml:channelProperty channel="OE" name="resolution" value="1000" units="1/deg"/>
-        </inkml:channelProperties>
-      </inkml:inkSource>
-      <inkml:timestamp xml:id="ts0" timeString="2025-04-28T15:57:06.036"/>
-    </inkml:context>
-    <inkml:brush xml:id="br0">
-      <inkml:brushProperty name="width" value="0.05" units="cm"/>
-      <inkml:brushProperty name="height" value="0.05" units="cm"/>
-    </inkml:brush>
-  </inkml:definitions>
-  <inkml:trace contextRef="#ctx0" brushRef="#br0">1 107 1068 0 0,'2'3'945'0'0,"0"0"-1"0"0,0-1 1 0 0,0 1 0 0 0,1-1-1 0 0,-1 1 1 0 0,1-1 0 0 0,-1 0-1 0 0,1 0 1 0 0,3 2-1 0 0,50 27 2218 0 0,-43-25-2934 0 0,1-1-1 0 0,-1-1 1 0 0,29 6 0 0 0,-36-9 35 0 0,0 0-1 0 0,0-1 1 0 0,1 0 0 0 0,-1 0 0 0 0,0 0 0 0 0,7-2 0 0 0,-10 2-187 0 0,-1-1 0 0 0,1 1-1 0 0,-1-1 1 0 0,0 0 0 0 0,1 0 0 0 0,-1 0 0 0 0,1 0 0 0 0,-1 0 0 0 0,0 0-1 0 0,0-1 1 0 0,0 1 0 0 0,0-1 0 0 0,0 1 0 0 0,0-1 0 0 0,0 0 0 0 0,0 0 0 0 0,-1 0-1 0 0,1 0 1 0 0,-1 0 0 0 0,2-3 0 0 0,-2 2-52 0 0,0 0-1 0 0,-1 0 1 0 0,1 0 0 0 0,-1 0 0 0 0,1 0-1 0 0,-1 0 1 0 0,0 0 0 0 0,0 0 0 0 0,-1-1-1 0 0,1 1 1 0 0,-1 0 0 0 0,1 0 0 0 0,-1 0-1 0 0,0 0 1 0 0,0 0 0 0 0,0 1 0 0 0,-1-1-1 0 0,-1-3 1 0 0,1 3-71 0 0,-4-11 432 0 0,-2 0 1 0 0,0 1 0 0 0,-13-18-1 0 0,-5 10-3309 0 0,25 20 2754 0 0,0 1 0 0 0,1 0 0 0 0,-1 0 0 0 0,0 0 0 0 0,0-1 0 0 0,0 1 0 0 0,0 0 0 0 0,1 0 0 0 0,-1 0 0 0 0,0 0 0 0 0,0 1 0 0 0,0-1 0 0 0,0 0 0 0 0,1 0 0 0 0,-1 0 0 0 0,0 1 0 0 0,0-1 0 0 0,0 0 0 0 0,1 1 0 0 0,-1-1 0 0 0,0 1 0 0 0,0-1 0 0 0,1 1 0 0 0,-1-1 0 0 0,0 1 0 0 0,1-1 0 0 0,-1 1 0 0 0,0 1 0 0 0,-24 34-2403 0 0,-53 119-1688 0 0,51-92 1711 0 0</inkml:trace>
-</inkml:ink>
-</file>
-
-<file path=ppt/ink/ink134.xml><?xml version="1.0" encoding="utf-8"?>
-<inkml:ink xmlns:inkml="http://www.w3.org/2003/InkML">
-  <inkml:definitions>
-    <inkml:context xml:id="ctx0">
-      <inkml:inkSource xml:id="inkSrc0">
-        <inkml:traceFormat>
-          <inkml:channel name="X" type="integer" min="-2.14748E9" max="2.14748E9" units="cm"/>
-          <inkml:channel name="Y" type="integer" min="-2.14748E9" max="2.14748E9" units="cm"/>
-          <inkml:channel name="F" type="integer" max="32767" units="dev"/>
-          <inkml:channel name="OA" type="integer" max="360" units="deg"/>
-          <inkml:channel name="OE" type="integer" max="90" units="deg"/>
-        </inkml:traceFormat>
-        <inkml:channelProperties>
-          <inkml:channelProperty channel="X" name="resolution" value="1000" units="1/cm"/>
-          <inkml:channelProperty channel="Y" name="resolution" value="1000" units="1/cm"/>
-          <inkml:channelProperty channel="F" name="resolution" value="0" units="1/dev"/>
-          <inkml:channelProperty channel="OA" name="resolution" value="1000" units="1/deg"/>
-          <inkml:channelProperty channel="OE" name="resolution" value="1000" units="1/deg"/>
-        </inkml:channelProperties>
-      </inkml:inkSource>
-      <inkml:timestamp xml:id="ts0" timeString="2025-04-28T15:57:07.076"/>
-    </inkml:context>
-    <inkml:brush xml:id="br0">
-      <inkml:brushProperty name="width" value="0.05" units="cm"/>
-      <inkml:brushProperty name="height" value="0.05" units="cm"/>
-    </inkml:brush>
-  </inkml:definitions>
-  <inkml:trace contextRef="#ctx0" brushRef="#br0">222 18 1944 0 0,'0'0'7832'0'0,"-23"7"-8593"0"0,19 1 991 0 0,1 0 1 0 0,0 0-1 0 0,0 1 1 0 0,1 0-1 0 0,0-1 1 0 0,1 1 0 0 0,0 0-1 0 0,0 0 1 0 0,1 0-1 0 0,0 0 1 0 0,1 0-1 0 0,-1-1 1 0 0,2 1-1 0 0,-1 0 1 0 0,5 12-1 0 0,-5-17-153 0 0,1 1 0 0 0,-1-1-1 0 0,1 0 1 0 0,-1 0 0 0 0,1 0 0 0 0,1-1-1 0 0,-1 1 1 0 0,0 0 0 0 0,1-1-1 0 0,0 0 1 0 0,0 1 0 0 0,0-1-1 0 0,0 0 1 0 0,0 0 0 0 0,1-1 0 0 0,-1 1-1 0 0,1-1 1 0 0,0 0 0 0 0,0 0-1 0 0,0 0 1 0 0,0 0 0 0 0,0-1 0 0 0,0 1-1 0 0,0-1 1 0 0,0 0 0 0 0,1 0-1 0 0,-1-1 1 0 0,0 1 0 0 0,1-1 0 0 0,-1 0-1 0 0,0 0 1 0 0,1-1 0 0 0,7-1-1 0 0,6-1 96 0 0,-1-2 0 0 0,0 0 0 0 0,0-1 0 0 0,0-1 0 0 0,0-1 0 0 0,19-12 0 0 0,-29 16-130 0 0,-1 1 1 0 0,0-2 0 0 0,0 1 0 0 0,0-1 0 0 0,0 0 0 0 0,-1 0-1 0 0,1-1 1 0 0,-2 0 0 0 0,1 1 0 0 0,0-2 0 0 0,-1 1 0 0 0,0 0-1 0 0,-1-1 1 0 0,0 0 0 0 0,0 0 0 0 0,0 0 0 0 0,2-11 0 0 0,-4 15-76 0 0,-1 1 1 0 0,1-1 0 0 0,-1 0-1 0 0,0 1 1 0 0,0-1-1 0 0,0 0 1 0 0,0 1 0 0 0,-1-1-1 0 0,1 0 1 0 0,-1 1 0 0 0,0-1-1 0 0,0 0 1 0 0,0 1 0 0 0,0-1-1 0 0,0 1 1 0 0,0 0 0 0 0,0-1-1 0 0,-1 1 1 0 0,0 0 0 0 0,-2-3-1 0 0,1 2-168 0 0,0 1 0 0 0,-1-1-1 0 0,1 1 1 0 0,-1 0 0 0 0,1 0-1 0 0,-1 0 1 0 0,0 0 0 0 0,0 1 0 0 0,0 0-1 0 0,0 0 1 0 0,-8-2 0 0 0,-2 2-422 0 0,1 0 1 0 0,-1 1 0 0 0,1 0-1 0 0,-1 1 1 0 0,1 0-1 0 0,-1 1 1 0 0,-14 5 0 0 0,-35 17-729 0 0,-159 85-1961 0 0,162-77 1491 0 0</inkml:trace>
 </inkml:ink>
 </file>
 
@@ -3647,22 +2700,25 @@
           <inkml:channel name="X" type="integer" min="-2.14748E9" max="2.14748E9" units="cm"/>
           <inkml:channel name="Y" type="integer" min="-2.14748E9" max="2.14748E9" units="cm"/>
           <inkml:channel name="F" type="integer" max="32767" units="dev"/>
+          <inkml:channel name="OA" type="integer" max="360" units="deg"/>
+          <inkml:channel name="OE" type="integer" max="90" units="deg"/>
         </inkml:traceFormat>
         <inkml:channelProperties>
           <inkml:channelProperty channel="X" name="resolution" value="1000" units="1/cm"/>
           <inkml:channelProperty channel="Y" name="resolution" value="1000" units="1/cm"/>
           <inkml:channelProperty channel="F" name="resolution" value="0" units="1/dev"/>
+          <inkml:channelProperty channel="OA" name="resolution" value="1000" units="1/deg"/>
+          <inkml:channelProperty channel="OE" name="resolution" value="1000" units="1/deg"/>
         </inkml:channelProperties>
       </inkml:inkSource>
-      <inkml:timestamp xml:id="ts0" timeString="2025-05-02T14:07:37.141"/>
+      <inkml:timestamp xml:id="ts0" timeString="2025-04-28T15:52:00.507"/>
     </inkml:context>
     <inkml:brush xml:id="br0">
-      <inkml:brushProperty name="width" value="0.1" units="cm"/>
-      <inkml:brushProperty name="height" value="0.1" units="cm"/>
-      <inkml:brushProperty name="color" value="#E71224"/>
+      <inkml:brushProperty name="width" value="0.05" units="cm"/>
+      <inkml:brushProperty name="height" value="0.05" units="cm"/>
     </inkml:brush>
   </inkml:definitions>
-  <inkml:trace contextRef="#ctx0" brushRef="#br0">5 154 1464,'-4'-6'7295,"3"5"-6734,3-7 3673,-1 6-3776,1-1 0,0 1 1,0-1-1,4-2 0,2-3 19,3-3 271,-1-1 0,2 2 0,0 0 0,15-10 0,-26 19-713,-1 1 0,1 0 0,0-1 1,0 1-1,-1 0 0,1 0 0,0-1 1,0 1-1,0 0 0,-1 0 0,2 0 1,-2 0-1,1 0 0,0 0 0,0 0 1,-1 0-1,1 0 0,0 0 0,1 0 1,17 7 128,-4-1-100,27 0 52,-31-5 12,0 0-1,17 4 1,-23-4-175,2 1 0,-1-1 0,0 0 0,0-1 0,0 1 0,1-1 0,-2 0 0,2-1 0,-1 1 0,0-1 0,0-1 0,1 1 0,-2 0 0,2-1 0,-2 0 0,1 0 0,-1 0 0,1-1 0,-1 0 0,0 1 0,0-1 0,0-1 0,-1 1 0,1-1 0,-1 0 0,1 0 0,3-5 0,-7 7-476,0 1 1,0 0 0,0-1 0,-1 1 0,1-1 0,0 1-1,-1 0 1,0-1 0,0 0 0,1-2 0,-2-5-2342</inkml:trace>
+  <inkml:trace contextRef="#ctx0" brushRef="#br0">70 139 576 0 0,'-31'-38'7195'0'0,"27"32"-6769"0"0,1-1 0 0 0,0-1 1 0 0,0 1-1 0 0,1 0 1 0 0,0-1-1 0 0,0 1 0 0 0,-1-12 1 0 0,-3-12 5039 0 0,-5 61-2753 0 0,17 144 683 0 0,29 87-2744 0 0,-20-161-291 0 0,17 102-251 0 0,21 183 941 0 0,-27-140-892 0 0,-4-61 72 0 0,-2-13-2444 0 0,-15-56-6730 0 0,-5-112 8679 0 0,1 8-462 0 0,-1 0 1 0 0,0 0-1 0 0,0 0 1 0 0,-1 0 0 0 0,-1 0-1 0 0,0 0 1 0 0,0 0-1 0 0,-1 0 1 0 0,-1-1 0 0 0,-5 14-1 0 0,8-23 558 0 0,1 0 0 0 0,-1 0 0 0 0,1-1 0 0 0,-1 1 0 0 0,0 0 0 0 0,1-1 0 0 0,-1 1 0 0 0,0-1 0 0 0,0 1 0 0 0,1 0 0 0 0,-1-1 0 0 0,0 0 0 0 0,0 1 0 0 0,0-1-1 0 0,0 1 1 0 0,1-1 0 0 0,-1 0 0 0 0,-2 1 0 0 0</inkml:trace>
 </inkml:ink>
 </file>
 
@@ -3675,22 +2731,25 @@
           <inkml:channel name="X" type="integer" min="-2.14748E9" max="2.14748E9" units="cm"/>
           <inkml:channel name="Y" type="integer" min="-2.14748E9" max="2.14748E9" units="cm"/>
           <inkml:channel name="F" type="integer" max="32767" units="dev"/>
+          <inkml:channel name="OA" type="integer" max="360" units="deg"/>
+          <inkml:channel name="OE" type="integer" max="90" units="deg"/>
         </inkml:traceFormat>
         <inkml:channelProperties>
           <inkml:channelProperty channel="X" name="resolution" value="1000" units="1/cm"/>
           <inkml:channelProperty channel="Y" name="resolution" value="1000" units="1/cm"/>
           <inkml:channelProperty channel="F" name="resolution" value="0" units="1/dev"/>
+          <inkml:channelProperty channel="OA" name="resolution" value="1000" units="1/deg"/>
+          <inkml:channelProperty channel="OE" name="resolution" value="1000" units="1/deg"/>
         </inkml:channelProperties>
       </inkml:inkSource>
-      <inkml:timestamp xml:id="ts0" timeString="2025-05-02T14:07:37.145"/>
+      <inkml:timestamp xml:id="ts0" timeString="2025-04-28T15:52:01.139"/>
     </inkml:context>
     <inkml:brush xml:id="br0">
-      <inkml:brushProperty name="width" value="0.1" units="cm"/>
-      <inkml:brushProperty name="height" value="0.1" units="cm"/>
-      <inkml:brushProperty name="color" value="#E71224"/>
+      <inkml:brushProperty name="width" value="0.05" units="cm"/>
+      <inkml:brushProperty name="height" value="0.05" units="cm"/>
     </inkml:brush>
   </inkml:definitions>
-  <inkml:trace contextRef="#ctx0" brushRef="#br0">4 61 1152,'-4'-7'6779,"4"6"-6422,5-8 2885,15-7-1796,-13 10-71,-5 5-1254,1-2 165,1 0-1,0 0 1,0 0 0,6-3 0,-9 6-240,-1 0 0,1-1-1,-1 1 1,2 0 0,-2 0 0,1-1-1,0 1 1,0 0 0,0 0-1,-1 0 1,1 0 0,0-1 0,0 1-1,0 0 1,0 0 0,-1 0-1,2 1 1,-2-1 0,1 0-1,0 0 1,0 0 0,-1 0 0,1 1-1,0-1 1,0 0 0,-1 1-1,1-1 1,0 0 0,-1 1 0,1-1-1,0 1 1,-1-1 0,1 0-1,0 2 1,2 1 38,-1-1-1,0 0 1,1 1 0,-1-1-1,1 0 1,0 0-1,0 0 1,0 0 0,0-1-1,1 1 1,-1 0 0,1-1-1,-1 0 1,1 0-1,-1 0 1,1 0 0,0-1-1,0 1 1,6 0-1,25 0 410,0-2 0,69-9 0,-97 9-782,-1-1 0,1 1 0,-1-2 0,0 1 0,12-6 0,-17 8 186,17-7-732</inkml:trace>
+  <inkml:trace contextRef="#ctx0" brushRef="#br0">13 0 6941 0 0,'0'0'2109'0'0,"-13"20"7165"0"0,21 324-5756 0 0,-1-68-3160 0 0,-8-93 639 0 0,1 332 972 0 0,22-258-1882 0 0,24-4-3319 0 0,-42-206-4023 0 0,-6-12 3445 0 0,2-34 3726 0 0,0-1 0 0 0,0 1 0 0 0,0-1 0 0 0,0 1 0 0 0,0-1 0 0 0,0 1 0 0 0,0-1 0 0 0,0 1 0 0 0,0-1 1 0 0,0 1-1 0 0,0-1 0 0 0,0 1 0 0 0,0-1 0 0 0,-1 1 0 0 0,1-1 0 0 0,0 1 0 0 0,0-1 0 0 0,-1 0 0 0 0,1 1 0 0 0,0-1 0 0 0,0 1 0 0 0,-1-1 1 0 0,1 0-1 0 0,-1 1 0 0 0,1-1 0 0 0,0 0 0 0 0,-1 0 0 0 0,1 1 0 0 0,-1-1 0 0 0,1 0 0 0 0,0 0 0 0 0,-1 1 0 0 0,1-1 0 0 0,-1 0 1 0 0,1 0-1 0 0,-1 0 0 0 0,1 0 0 0 0,-1 0 0 0 0,1 0 0 0 0,-1 0 0 0 0,1 0 0 0 0,-1 0 0 0 0,0 0 0 0 0,-26-12-4451 0 0</inkml:trace>
 </inkml:ink>
 </file>
 
@@ -3703,22 +2762,25 @@
           <inkml:channel name="X" type="integer" min="-2.14748E9" max="2.14748E9" units="cm"/>
           <inkml:channel name="Y" type="integer" min="-2.14748E9" max="2.14748E9" units="cm"/>
           <inkml:channel name="F" type="integer" max="32767" units="dev"/>
+          <inkml:channel name="OA" type="integer" max="360" units="deg"/>
+          <inkml:channel name="OE" type="integer" max="90" units="deg"/>
         </inkml:traceFormat>
         <inkml:channelProperties>
           <inkml:channelProperty channel="X" name="resolution" value="1000" units="1/cm"/>
           <inkml:channelProperty channel="Y" name="resolution" value="1000" units="1/cm"/>
           <inkml:channelProperty channel="F" name="resolution" value="0" units="1/dev"/>
+          <inkml:channelProperty channel="OA" name="resolution" value="1000" units="1/deg"/>
+          <inkml:channelProperty channel="OE" name="resolution" value="1000" units="1/deg"/>
         </inkml:channelProperties>
       </inkml:inkSource>
-      <inkml:timestamp xml:id="ts0" timeString="2025-05-02T14:07:37.146"/>
+      <inkml:timestamp xml:id="ts0" timeString="2025-04-28T15:52:01.828"/>
     </inkml:context>
     <inkml:brush xml:id="br0">
-      <inkml:brushProperty name="width" value="0.1" units="cm"/>
-      <inkml:brushProperty name="height" value="0.1" units="cm"/>
-      <inkml:brushProperty name="color" value="#E71224"/>
+      <inkml:brushProperty name="width" value="0.05" units="cm"/>
+      <inkml:brushProperty name="height" value="0.05" units="cm"/>
     </inkml:brush>
   </inkml:definitions>
-  <inkml:trace contextRef="#ctx0" brushRef="#br0">20 65 1872,'2'-32'2171,"1"-1"8260,1 42-7325,-1 1-2425,-1 0-1,-1 0 1,-1 0 0,0 17 0,-10 42 478,5-42-701,0 0-132,-1 9-87,1 1-1,1 37 0,4-73-264,0-1 0,0 1 0,0 1 0,1-1-1,-1 0 1,0-1 0,0 1 0,0 0 0,1 0-1,-1 0 1,1 0 0,-1 0 0,1 0 0,-1 0-1,1-1 1,0 2 0,0-2-202,0 0 0,-1 0 0,0 0 0,1 1 0,0-1 0,-1 0 0,1 0 0,-1 0 0,0 0 0,1 0 0,0 0 0,-1 0 0,1 0 0,0 0 0,-1 0 0,0 0 0,1-1 0,-1 1 0,1 0 0,-1 0 0,1 0 0,-1 0 0,1-1 0,-1 1 0,1 0 0,-1 0 0,0-1 0,1 1 0,0 0 0,-1-1 0,1 0 0,5-4-3254</inkml:trace>
+  <inkml:trace contextRef="#ctx0" brushRef="#br0">0 76 6377 0 0,'2'-12'6243'0'0,"3"-13"-1663"0"0,-1 21-4352 0 0,1 1 0 0 0,-1 1 1 0 0,1-1-1 0 0,-1 1 0 0 0,1-1 0 0 0,0 1 0 0 0,0 1 0 0 0,0-1 0 0 0,0 1 0 0 0,0 0 0 0 0,8-1 0 0 0,58-3 341 0 0,349 7 2653 0 0,191-9-1679 0 0,-440 5-1162 0 0,323 35 0 0 0,-300-13 16 0 0,-149-16-375 0 0,34 3-1141 0 0,-33-4-3316 0 0,-42-3 1676 0 0,12 4-4734 0 0,-29-11 3872 0 0,-19-2-676 0 0</inkml:trace>
 </inkml:ink>
 </file>
 
@@ -3731,22 +2793,25 @@
           <inkml:channel name="X" type="integer" min="-2.14748E9" max="2.14748E9" units="cm"/>
           <inkml:channel name="Y" type="integer" min="-2.14748E9" max="2.14748E9" units="cm"/>
           <inkml:channel name="F" type="integer" max="32767" units="dev"/>
+          <inkml:channel name="OA" type="integer" max="360" units="deg"/>
+          <inkml:channel name="OE" type="integer" max="90" units="deg"/>
         </inkml:traceFormat>
         <inkml:channelProperties>
           <inkml:channelProperty channel="X" name="resolution" value="1000" units="1/cm"/>
           <inkml:channelProperty channel="Y" name="resolution" value="1000" units="1/cm"/>
           <inkml:channelProperty channel="F" name="resolution" value="0" units="1/dev"/>
+          <inkml:channelProperty channel="OA" name="resolution" value="1000" units="1/deg"/>
+          <inkml:channelProperty channel="OE" name="resolution" value="1000" units="1/deg"/>
         </inkml:channelProperties>
       </inkml:inkSource>
-      <inkml:timestamp xml:id="ts0" timeString="2025-05-02T14:07:37.147"/>
+      <inkml:timestamp xml:id="ts0" timeString="2025-04-28T15:52:02.568"/>
     </inkml:context>
     <inkml:brush xml:id="br0">
-      <inkml:brushProperty name="width" value="0.1" units="cm"/>
-      <inkml:brushProperty name="height" value="0.1" units="cm"/>
-      <inkml:brushProperty name="color" value="#E71224"/>
+      <inkml:brushProperty name="width" value="0.05" units="cm"/>
+      <inkml:brushProperty name="height" value="0.05" units="cm"/>
     </inkml:brush>
   </inkml:definitions>
-  <inkml:trace contextRef="#ctx0" brushRef="#br0">1 76 7242,'0'-3'7616,"8"-1"-4119,18-1-2330,-14 2-43,168-41 3153,-149 39-4037,1 0 0,0 2 0,-1 1 0,1 1 0,32 3 0,-51-2-768,1 2 1,0-1-1,-1 2 1,20 5-1,-21-4-664</inkml:trace>
+  <inkml:trace contextRef="#ctx0" brushRef="#br0">1 94 6257 0 0,'1'-4'666'0'0,"1"0"0"0"0,0 1 1 0 0,0-1-1 0 0,1 0 0 0 0,-1 1 1 0 0,1 0-1 0 0,-1-1 0 0 0,1 1 1 0 0,0 0-1 0 0,0 1 1 0 0,1-1-1 0 0,-1 0 0 0 0,1 1 1 0 0,-1 0-1 0 0,5-2 0 0 0,4-2 68 0 0,1 0-1 0 0,0 1 0 0 0,0 1 0 0 0,22-5 0 0 0,-4 4-568 0 0,57-3 0 0 0,-20 9 524 0 0,79 8 251 0 0,233 8 501 0 0,43 0-592 0 0,-73 0-755 0 0,-171-14 21 0 0,199 5 180 0 0,-126 6-1094 0 0,-116 2-1471 0 0,170 50-9592 0 0,-214-33 8500 0 0,-50-11-954 0 0</inkml:trace>
 </inkml:ink>
 </file>
 
@@ -3759,22 +2824,25 @@
           <inkml:channel name="X" type="integer" min="-2.14748E9" max="2.14748E9" units="cm"/>
           <inkml:channel name="Y" type="integer" min="-2.14748E9" max="2.14748E9" units="cm"/>
           <inkml:channel name="F" type="integer" max="32767" units="dev"/>
+          <inkml:channel name="OA" type="integer" max="360" units="deg"/>
+          <inkml:channel name="OE" type="integer" max="90" units="deg"/>
         </inkml:traceFormat>
         <inkml:channelProperties>
           <inkml:channelProperty channel="X" name="resolution" value="1000" units="1/cm"/>
           <inkml:channelProperty channel="Y" name="resolution" value="1000" units="1/cm"/>
           <inkml:channelProperty channel="F" name="resolution" value="0" units="1/dev"/>
+          <inkml:channelProperty channel="OA" name="resolution" value="1000" units="1/deg"/>
+          <inkml:channelProperty channel="OE" name="resolution" value="1000" units="1/deg"/>
         </inkml:channelProperties>
       </inkml:inkSource>
-      <inkml:timestamp xml:id="ts0" timeString="2025-05-02T14:07:37.148"/>
+      <inkml:timestamp xml:id="ts0" timeString="2025-04-28T15:53:04.040"/>
     </inkml:context>
     <inkml:brush xml:id="br0">
-      <inkml:brushProperty name="width" value="0.1" units="cm"/>
-      <inkml:brushProperty name="height" value="0.1" units="cm"/>
-      <inkml:brushProperty name="color" value="#E71224"/>
+      <inkml:brushProperty name="width" value="0.05" units="cm"/>
+      <inkml:brushProperty name="height" value="0.05" units="cm"/>
     </inkml:brush>
   </inkml:definitions>
-  <inkml:trace contextRef="#ctx0" brushRef="#br0">98 33 3785,'-1'0'224,"0"1"0,0-1 0,0 0 0,0 0 0,0 0 0,0 1 0,0-1 0,0 1 0,0-1 0,0 0 0,0 1 0,1-1 0,-1 1 0,0 0 0,0 0 0,0-1 1,1 1-1,-1 0 0,0-1 0,1 1 0,0 0 0,-1-1 0,1 1 0,-1 0 0,1 0 0,-1 0 0,1 0 0,0 0 0,0-1 0,0 1 0,0 1 0,-2 5 1016,2 1-1,-1 13 1,2-14-660,-1 10 499,0 15 145,-1-1-1,-9 49 1,6-64-1131,1 1 52,-12 32 0,15-49-141,-1 1 0,1-1 1,0 0-1,0 1 1,0-1-1,0 1 0,-1 0 1,1-1-1,-1 1 1,1-1-1,0 0 0,0 1 1,-1-1-1,0 1 1,1-1-1,0 0 0,-1 1 1,0-1-1,1 0 1,0 0-1,-1 1 0,1-1 1,-1 0-1,0 0 1,1 0-1,-1 1 0,0-1 1,0 0-1,1 0-5,-1-1 0,0 1-1,1 0 1,-1 0 0,0-1 0,1 1-1,0 0 1,-1-1 0,0 1 0,1-1-1,0 1 1,-1-1 0,1 1 0,0 0-1,0-1 1,-1 1 0,1-1-1,-1 0 1,1 1 0,0-1 0,0 1-1,0-1 1,0 1 0,0-1 0,0 0-1,0 0 1,-4-57-509,4 40 441,-5-30 0,2 33 84,-4-21-1,7 33-10,-1 0 1,1 0 0,0 0 0,1-1 0,-1 1-1,0 0 1,1 0 0,1-4 0,-2 6 3,0 1 1,1-1-1,-1 1 0,0-1 1,1 1-1,-1-1 0,0 0 1,0 1-1,1 0 1,-1-1-1,1 1 0,-1-1 1,1 1-1,-1 0 0,1-1 1,-1 1-1,1 0 0,-1-1 1,1 1-1,-1 0 1,1 0-1,-1 0 0,1-1 1,1 1-1,-2 0 17,1 0-1,0 0 1,0 0-1,0 1 1,-1-1 0,2 0-1,-2 0 1,1 0 0,-1 1-1,2-1 1,-2 0-1,1 1 1,0-1 0,-1 1-1,1-1 1,0 1-1,4 3 184,-1 0 0,0 1 0,5 7-1,-7-10-162,27 37 1243,68 69-1,-85-98-1191,1 1 0,1-1 0,0-1 0,1 0 0,0-1 0,0 0 0,1-1-1,0 0 1,1-1 0,-1-1 0,1 0 0,27 4 0,-44-9-88,1 0 0,-1 0-1,0 0 1,1 0 0,0 0-1,-1 0 1,0 0 0,1 0 0,-1 0-1,0 0 1,1 0 0,-1 0 0,1-1-1,-1 1 1,0 0 0,1 0-1,-1 0 1,1-1 0,-1 1 0,0 0-1,0 0 1,1 0 0,-1-1-1,1 1 1,-1 0 0,0-1 0,0 1-1,0 0 1,1-1 0,-1 1 0,0 0-1,0 0 1,0-1 0,0 0-1,0 1 1,0 0 0,0-1 0,2-18 68,-3 12-58,0-175 31,-2 133-31,-20-82 0,22 126-1222,2 15-735,3 2 794</inkml:trace>
+  <inkml:trace contextRef="#ctx0" brushRef="#br0">0 1 2224 0 0,'0'0'5377'0'0,"27"23"-2074"0"0,-11-8-2856 0 0,0 1 1 0 0,-1 1 0 0 0,0 0 0 0 0,18 29 0 0 0,-15-19-1529 0 0,37 40 1 0 0,-42-55 171 0 0,0 0 0 0 0,1 0 0 0 0,17 10-1 0 0,-10-7 409 0 0,-6-4-158 0 0,0 0-1 0 0,1-1 0 0 0,29 13 0 0 0,-10-15-817 0 0</inkml:trace>
 </inkml:ink>
 </file>
 
@@ -3787,22 +2855,25 @@
           <inkml:channel name="X" type="integer" min="-2.14748E9" max="2.14748E9" units="cm"/>
           <inkml:channel name="Y" type="integer" min="-2.14748E9" max="2.14748E9" units="cm"/>
           <inkml:channel name="F" type="integer" max="32767" units="dev"/>
+          <inkml:channel name="OA" type="integer" max="360" units="deg"/>
+          <inkml:channel name="OE" type="integer" max="90" units="deg"/>
         </inkml:traceFormat>
         <inkml:channelProperties>
           <inkml:channelProperty channel="X" name="resolution" value="1000" units="1/cm"/>
           <inkml:channelProperty channel="Y" name="resolution" value="1000" units="1/cm"/>
           <inkml:channelProperty channel="F" name="resolution" value="0" units="1/dev"/>
+          <inkml:channelProperty channel="OA" name="resolution" value="1000" units="1/deg"/>
+          <inkml:channelProperty channel="OE" name="resolution" value="1000" units="1/deg"/>
         </inkml:channelProperties>
       </inkml:inkSource>
-      <inkml:timestamp xml:id="ts0" timeString="2025-05-02T14:07:37.149"/>
+      <inkml:timestamp xml:id="ts0" timeString="2025-04-28T15:53:04.369"/>
     </inkml:context>
     <inkml:brush xml:id="br0">
-      <inkml:brushProperty name="width" value="0.1" units="cm"/>
-      <inkml:brushProperty name="height" value="0.1" units="cm"/>
-      <inkml:brushProperty name="color" value="#E71224"/>
+      <inkml:brushProperty name="width" value="0.05" units="cm"/>
+      <inkml:brushProperty name="height" value="0.05" units="cm"/>
     </inkml:brush>
   </inkml:definitions>
-  <inkml:trace contextRef="#ctx0" brushRef="#br0">882 26 3113,'1'-1'458,"-1"0"1,0 0 0,0 0 0,0 0 0,0 1-1,0-1 1,0 0 0,0 0 0,0 0-1,0 0 1,-1 0 0,1 1 0,0-1 0,0 0-1,-1 0 1,1 1 0,-1-1 0,1 0-1,-1 0 1,0 0 0,0 0 0,0 0-120,0 0 1,-1 1 0,1-1-1,0 1 1,-1-1 0,1 1-1,0-1 1,0 1 0,-1 0-1,1 0 1,-1-1 0,1 1-1,-3 0 1,-4 0 83,0 1 0,0 0-1,0 0 1,-12 2 0,-35 13-18,0 1 0,2 2 0,-58 28 0,61-23-280,-62 41 1,-39 36 61,138-92-161,0 0 19,-14 12 1,25-19-32,-1 0 1,1 0 0,0 1 0,0-1-1,0 0 1,0 1 0,0-1-1,1 1 1,-1 0 0,1-1-1,-1 6 1,2-7-9,0-1-1,0 1 1,0-1-1,0 1 1,0-1-1,0 1 1,0 0-1,0-1 1,0 0-1,0 1 1,0-1-1,0 1 1,1-1-1,-1 0 1,1 1-1,-1-1 1,0 1-1,0-1 1,1 0 0,-1 1-1,0-1 1,1 0-1,-1 1 1,1-1-1,-1 0 1,1 0-1,-1 1 1,1-1-1,-1 0 1,1 1-1,0-1 1,-1 0-1,0 0 1,1 0-1,1 0 1,19 1 126,-18-1-116,8 0 32,0-1 0,0-1 0,1 0 0,16-5 0,43-16 26,-38 11-45,-9 4-18,0 0 1,1 2-1,0 0 1,0 2 0,1 0-1,42-2 1,-64 6-9,0 0 1,-1 1-1,1-1 0,0 0 0,0 2 1,5 0-1,-9-2-1,1 0 0,0 0 0,-1 0 0,1 1 0,-1-1 0,1 0 0,0 0-1,-1 1 1,1-1 0,0 1 0,-1-1 0,0 0 0,1 1 0,0 0 0,-1-1 0,0 1 0,0-1 0,1 1 0,-1-1 0,0 1 0,0-1 0,0 1 0,1-1 0,-1 1 0,0-1 0,0 1-1,0-1 1,1 1 0,-1 0 0,-1-1 0,1 1 0,0 0 0,0-1 0,0 1 0,0-1 0,-1 1 0,1-1 0,0 1 0,0-1 0,-1 1 0,1-1 0,-1 2 0,-4 3 13,0 1 1,0 0 0,0-1-1,-2 0 1,2 0-1,-2 0 1,0-1 0,-7 5-1,6-4-6,-67 43 92,-85 71 1,125-91-63,-73 65 119,75-61-38,-31 37 0,56-60-88,-1 1 0,2 1 0,0-1 0,1 0 0,0 2 0,1-1 0,1 0 0,-1 1 0,2 0 0,1-1 0,-2 14 0,3-9 12,0 0 0,2 0 0,0 0 0,6 24 0,-5-34-20,0 0 1,0 0-1,1 0 1,-1-1 0,2 1-1,4 6 1,-5-9 1,0 1-1,0-1 1,0 0-1,1 0 1,-1-1 0,1 1-1,0 0 1,0-1-1,0 0 1,8 3 0,-3-2 47,1 0 1,-1-1-1,1 0 0,-1 0 1,1-1-1,0-1 1,0 1-1,15-2 0,6-1 266,44-9 1,141-42 877,-52 11-599,-154 39-589,1 1 1,-1 0-1,1 1 0,-1 0 1,0 1-1,1 0 1,11 1-1,-18-1-264,1 1 1,-2 0-1,2 0 1,-1 1-1,0-1 0,0 0 1,0 1-1,0 0 1,-1 0-1,0 0 0,1 0 1,-1 0-1,1 1 0,-1-1 1,0 1-1,-1 0 1,2-1-1,-2 2 0,3 3 1,10 17-1557</inkml:trace>
+  <inkml:trace contextRef="#ctx0" brushRef="#br0">1 435 1624 0 0,'14'-48'10253'0'0,"-11"40"-9815"0"0,0 1 0 0 0,1 0 0 0 0,0 0 0 0 0,1 1 0 0 0,-1-1 0 0 0,1 1 0 0 0,8-8 0 0 0,-1 2-224 0 0,121-119-972 0 0,-24 43-5838 0 0,-89 75 5989 0 0,-4 3-106 0 0,-1-1 0 0 0,0 0 0 0 0,16-17 0 0 0,-15 8-1341 0 0</inkml:trace>
 </inkml:ink>
 </file>
 
@@ -3815,22 +2886,25 @@
           <inkml:channel name="X" type="integer" min="-2.14748E9" max="2.14748E9" units="cm"/>
           <inkml:channel name="Y" type="integer" min="-2.14748E9" max="2.14748E9" units="cm"/>
           <inkml:channel name="F" type="integer" max="32767" units="dev"/>
+          <inkml:channel name="OA" type="integer" max="360" units="deg"/>
+          <inkml:channel name="OE" type="integer" max="90" units="deg"/>
         </inkml:traceFormat>
         <inkml:channelProperties>
           <inkml:channelProperty channel="X" name="resolution" value="1000" units="1/cm"/>
           <inkml:channelProperty channel="Y" name="resolution" value="1000" units="1/cm"/>
           <inkml:channelProperty channel="F" name="resolution" value="0" units="1/dev"/>
+          <inkml:channelProperty channel="OA" name="resolution" value="1000" units="1/deg"/>
+          <inkml:channelProperty channel="OE" name="resolution" value="1000" units="1/deg"/>
         </inkml:channelProperties>
       </inkml:inkSource>
-      <inkml:timestamp xml:id="ts0" timeString="2025-05-02T14:07:37.150"/>
+      <inkml:timestamp xml:id="ts0" timeString="2025-04-28T15:53:05.262"/>
     </inkml:context>
     <inkml:brush xml:id="br0">
-      <inkml:brushProperty name="width" value="0.1" units="cm"/>
-      <inkml:brushProperty name="height" value="0.1" units="cm"/>
-      <inkml:brushProperty name="color" value="#E71224"/>
+      <inkml:brushProperty name="width" value="0.05" units="cm"/>
+      <inkml:brushProperty name="height" value="0.05" units="cm"/>
     </inkml:brush>
   </inkml:definitions>
-  <inkml:trace contextRef="#ctx0" brushRef="#br0">46 10 7810,'-16'-10'6745,"12"18"-5129,-1 3-335,-1 7-305,2 3-216,-1 5-168,3 0-128,-1 0-208,2-3-88,1-3-272,0-2-320,1-6-1096,2 0-1665,3-8 1289</inkml:trace>
+  <inkml:trace contextRef="#ctx0" brushRef="#br0">132 188 2572 0 0,'0'0'5075'0'0,"16"34"-548"0"0,-12-32-4457 0 0,-1 1 0 0 0,1 0 0 0 0,0-1 0 0 0,0 0 0 0 0,0 0 0 0 0,0 0 0 0 0,1 0 1 0 0,-1-1-1 0 0,0 0 0 0 0,1 0 0 0 0,-1 0 0 0 0,1 0 0 0 0,-1-1 0 0 0,1 1 0 0 0,-1-1 0 0 0,1 0 1 0 0,-1-1-1 0 0,10-1 0 0 0,-6 1 47 0 0,0-2 0 0 0,1 1 0 0 0,-1-1 0 0 0,0 0 0 0 0,0 0 0 0 0,-1-1 0 0 0,1 0 0 0 0,-1-1 0 0 0,0 0 0 0 0,8-6 0 0 0,-11 7 23 0 0,0 1 1 0 0,0-1-1 0 0,0 0 1 0 0,0 0-1 0 0,-1-1 1 0 0,0 1 0 0 0,0-1-1 0 0,0 1 1 0 0,0-1-1 0 0,-1 0 1 0 0,1 0-1 0 0,-1 0 1 0 0,-1-1-1 0 0,1 1 1 0 0,0-8 0 0 0,-1 9 34 0 0,-1 0 1 0 0,-1 0 0 0 0,1 0 0 0 0,-1 0-1 0 0,0 0 1 0 0,0 0 0 0 0,0 0-1 0 0,0 0 1 0 0,-1 0 0 0 0,1 0 0 0 0,-1 1-1 0 0,0-1 1 0 0,0 0 0 0 0,0 1 0 0 0,-1 0-1 0 0,1-1 1 0 0,-1 1 0 0 0,0 0 0 0 0,0 0-1 0 0,0 1 1 0 0,0-1 0 0 0,-1 1 0 0 0,-3-3-1 0 0,1 1-182 0 0,0 0-1 0 0,0 0 1 0 0,0 1-1 0 0,0 0 1 0 0,-1 1-1 0 0,0-1 1 0 0,1 1-1 0 0,-1 0 1 0 0,0 1-1 0 0,0-1 1 0 0,0 1-1 0 0,0 1 1 0 0,0-1-1 0 0,0 1 1 0 0,-12 2-1 0 0,12-1-490 0 0,0 1 0 0 0,-1 0 0 0 0,1 1 0 0 0,0-1 0 0 0,1 1 0 0 0,-1 1-1 0 0,0-1 1 0 0,1 1 0 0 0,0 1 0 0 0,0-1 0 0 0,0 1 0 0 0,0 0 0 0 0,1 0 0 0 0,-1 0-1 0 0,1 1 1 0 0,1 0 0 0 0,-5 6 0 0 0,-73 119-5489 0 0,67-95 2529 0 0</inkml:trace>
 </inkml:ink>
 </file>
 
@@ -3874,22 +2948,25 @@
           <inkml:channel name="X" type="integer" min="-2.14748E9" max="2.14748E9" units="cm"/>
           <inkml:channel name="Y" type="integer" min="-2.14748E9" max="2.14748E9" units="cm"/>
           <inkml:channel name="F" type="integer" max="32767" units="dev"/>
+          <inkml:channel name="OA" type="integer" max="360" units="deg"/>
+          <inkml:channel name="OE" type="integer" max="90" units="deg"/>
         </inkml:traceFormat>
         <inkml:channelProperties>
           <inkml:channelProperty channel="X" name="resolution" value="1000" units="1/cm"/>
           <inkml:channelProperty channel="Y" name="resolution" value="1000" units="1/cm"/>
           <inkml:channelProperty channel="F" name="resolution" value="0" units="1/dev"/>
+          <inkml:channelProperty channel="OA" name="resolution" value="1000" units="1/deg"/>
+          <inkml:channelProperty channel="OE" name="resolution" value="1000" units="1/deg"/>
         </inkml:channelProperties>
       </inkml:inkSource>
-      <inkml:timestamp xml:id="ts0" timeString="2025-05-02T14:07:37.151"/>
+      <inkml:timestamp xml:id="ts0" timeString="2025-04-28T15:53:06.070"/>
     </inkml:context>
     <inkml:brush xml:id="br0">
-      <inkml:brushProperty name="width" value="0.1" units="cm"/>
-      <inkml:brushProperty name="height" value="0.1" units="cm"/>
-      <inkml:brushProperty name="color" value="#E71224"/>
+      <inkml:brushProperty name="width" value="0.05" units="cm"/>
+      <inkml:brushProperty name="height" value="0.05" units="cm"/>
     </inkml:brush>
   </inkml:definitions>
-  <inkml:trace contextRef="#ctx0" brushRef="#br0">0 32 11466,'7'-13'1473,"-6"6"1911,2 1-2255,0 3-281,1 0-192,-1 3-504,2 0-336,3 1-1632,2 3-2505,0 4 1856</inkml:trace>
+  <inkml:trace contextRef="#ctx0" brushRef="#br0">0 1 3224 0 0,'0'0'7536'0'0,"21"17"-4189"0"0,2-6-3159 0 0,1-2 0 0 0,0 0 1 0 0,0-1-1 0 0,1-2 0 0 0,0 0 1 0 0,35 2-1 0 0,5 3-3393 0 0,88 26-4034 0 0,-149-36 4986 0 0</inkml:trace>
 </inkml:ink>
 </file>
 
@@ -3902,22 +2979,25 @@
           <inkml:channel name="X" type="integer" min="-2.14748E9" max="2.14748E9" units="cm"/>
           <inkml:channel name="Y" type="integer" min="-2.14748E9" max="2.14748E9" units="cm"/>
           <inkml:channel name="F" type="integer" max="32767" units="dev"/>
+          <inkml:channel name="OA" type="integer" max="360" units="deg"/>
+          <inkml:channel name="OE" type="integer" max="90" units="deg"/>
         </inkml:traceFormat>
         <inkml:channelProperties>
           <inkml:channelProperty channel="X" name="resolution" value="1000" units="1/cm"/>
           <inkml:channelProperty channel="Y" name="resolution" value="1000" units="1/cm"/>
           <inkml:channelProperty channel="F" name="resolution" value="0" units="1/dev"/>
+          <inkml:channelProperty channel="OA" name="resolution" value="1000" units="1/deg"/>
+          <inkml:channelProperty channel="OE" name="resolution" value="1000" units="1/deg"/>
         </inkml:channelProperties>
       </inkml:inkSource>
-      <inkml:timestamp xml:id="ts0" timeString="2025-05-02T14:07:37.152"/>
+      <inkml:timestamp xml:id="ts0" timeString="2025-04-28T15:53:06.276"/>
     </inkml:context>
     <inkml:brush xml:id="br0">
-      <inkml:brushProperty name="width" value="0.1" units="cm"/>
-      <inkml:brushProperty name="height" value="0.1" units="cm"/>
-      <inkml:brushProperty name="color" value="#E71224"/>
+      <inkml:brushProperty name="width" value="0.05" units="cm"/>
+      <inkml:brushProperty name="height" value="0.05" units="cm"/>
     </inkml:brush>
   </inkml:definitions>
-  <inkml:trace contextRef="#ctx0" brushRef="#br0">8 23 14507,'-8'-1'2761,"8"3"-1721,1 2-248,3 0-112,6-3-184,4-1-128,8-4-144,4-2-64,3-1-95,-2 0-41,-2 2-209,-3 1-263,-6 4-904,-3 0-1040,-7 3 1159</inkml:trace>
+  <inkml:trace contextRef="#ctx0" brushRef="#br0">0 439 7345 0 0,'6'-19'2272'0'0,"8"4"360"0"0,1-1-340 0 0,2 2-395 0 0,0-1-461 0 0,1-2-188 0 0,2 2-284 0 0,4-3-184 0 0,3-2-308 0 0,12-5-868 0 0,0 2-568 0 0,1-1-1220 0 0,-11 6-765 0 0,115-69-2099 0 0,-77 22 2560 0 0,-24 17-2093 0 0</inkml:trace>
 </inkml:ink>
 </file>
 
@@ -3930,22 +3010,25 @@
           <inkml:channel name="X" type="integer" min="-2.14748E9" max="2.14748E9" units="cm"/>
           <inkml:channel name="Y" type="integer" min="-2.14748E9" max="2.14748E9" units="cm"/>
           <inkml:channel name="F" type="integer" max="32767" units="dev"/>
+          <inkml:channel name="OA" type="integer" max="360" units="deg"/>
+          <inkml:channel name="OE" type="integer" max="90" units="deg"/>
         </inkml:traceFormat>
         <inkml:channelProperties>
           <inkml:channelProperty channel="X" name="resolution" value="1000" units="1/cm"/>
           <inkml:channelProperty channel="Y" name="resolution" value="1000" units="1/cm"/>
           <inkml:channelProperty channel="F" name="resolution" value="0" units="1/dev"/>
+          <inkml:channelProperty channel="OA" name="resolution" value="1000" units="1/deg"/>
+          <inkml:channelProperty channel="OE" name="resolution" value="1000" units="1/deg"/>
         </inkml:channelProperties>
       </inkml:inkSource>
-      <inkml:timestamp xml:id="ts0" timeString="2025-05-02T14:07:37.153"/>
+      <inkml:timestamp xml:id="ts0" timeString="2025-04-28T15:53:07.106"/>
     </inkml:context>
     <inkml:brush xml:id="br0">
-      <inkml:brushProperty name="width" value="0.1" units="cm"/>
-      <inkml:brushProperty name="height" value="0.1" units="cm"/>
-      <inkml:brushProperty name="color" value="#E71224"/>
+      <inkml:brushProperty name="width" value="0.05" units="cm"/>
+      <inkml:brushProperty name="height" value="0.05" units="cm"/>
     </inkml:brush>
   </inkml:definitions>
-  <inkml:trace contextRef="#ctx0" brushRef="#br0">1 38 9178,'1'-2'1920,"8"-3"1561,4 2-1176,4-3-305,1 2-640,4 1-319,-1-1-249,-1 3-352,-3-3-168,1 2-352,0 0-288,1 1-969,-2 1-975,-3 4 944</inkml:trace>
+  <inkml:trace contextRef="#ctx0" brushRef="#br0">116 0 1500 0 0,'0'0'4338'0'0,"-14"9"-1481"0"0,9-2-2511 0 0,1 1 1 0 0,0 1-1 0 0,0-1 0 0 0,1 1 1 0 0,0-1-1 0 0,0 1 1 0 0,1 0-1 0 0,0 0 0 0 0,0 0 1 0 0,1 12-1 0 0,0-15-323 0 0,1-1 0 0 0,0 1 0 0 0,1 0 0 0 0,-1-1 0 0 0,1 1 0 0 0,0-1 0 0 0,1 0 0 0 0,-1 1 0 0 0,1-1 0 0 0,0 0 0 0 0,0 0 0 0 0,1 0 0 0 0,0 0 0 0 0,0 0 0 0 0,0-1 0 0 0,0 1 0 0 0,1-1 0 0 0,4 5 0 0 0,-6-8 31 0 0,0 1-1 0 0,0-1 1 0 0,0 0 0 0 0,1 0 0 0 0,-1 0 0 0 0,0 0 0 0 0,1-1-1 0 0,-1 1 1 0 0,0-1 0 0 0,1 1 0 0 0,-1-1 0 0 0,1 0 0 0 0,-1 0-1 0 0,1 0 1 0 0,-1 0 0 0 0,0 0 0 0 0,1-1 0 0 0,-1 1-1 0 0,1-1 1 0 0,-1 1 0 0 0,0-1 0 0 0,1 0 0 0 0,-1 0 0 0 0,0 0-1 0 0,0 0 1 0 0,0-1 0 0 0,0 1 0 0 0,3-3 0 0 0,4-2 183 0 0,0 0 1 0 0,-1-1 0 0 0,0 0-1 0 0,14-16 1 0 0,-18 19-64 0 0,-1 0 0 0 0,1 0 0 0 0,-1 0 1 0 0,0 0-1 0 0,0 0 0 0 0,-1-1 0 0 0,1 1 0 0 0,-1-1 0 0 0,0 0 1 0 0,0 0-1 0 0,0 1 0 0 0,-1-1 0 0 0,0-1 0 0 0,0 1 1 0 0,0 0-1 0 0,0 0 0 0 0,-1 0 0 0 0,0-7 0 0 0,-1 11-251 0 0,1 0-1 0 0,-1-1 0 0 0,1 1 0 0 0,-1 0 0 0 0,0 0 1 0 0,1 0-1 0 0,-1 0 0 0 0,0 0 0 0 0,0 0 0 0 0,0 0 0 0 0,0 0 1 0 0,0 0-1 0 0,0 0 0 0 0,0 1 0 0 0,0-1 0 0 0,0 0 1 0 0,0 1-1 0 0,0-1 0 0 0,0 1 0 0 0,-1-1 0 0 0,1 1 0 0 0,0-1 1 0 0,0 1-1 0 0,0 0 0 0 0,-1 0 0 0 0,1 0 0 0 0,0-1 1 0 0,-1 1-1 0 0,1 0 0 0 0,-2 1 0 0 0,-35 4-3066 0 0,10 12 961 0 0,-100 82-3153 0 0,85-63 2139 0 0</inkml:trace>
 </inkml:ink>
 </file>
 
@@ -3958,22 +3041,25 @@
           <inkml:channel name="X" type="integer" min="-2.14748E9" max="2.14748E9" units="cm"/>
           <inkml:channel name="Y" type="integer" min="-2.14748E9" max="2.14748E9" units="cm"/>
           <inkml:channel name="F" type="integer" max="32767" units="dev"/>
+          <inkml:channel name="OA" type="integer" max="360" units="deg"/>
+          <inkml:channel name="OE" type="integer" max="90" units="deg"/>
         </inkml:traceFormat>
         <inkml:channelProperties>
           <inkml:channelProperty channel="X" name="resolution" value="1000" units="1/cm"/>
           <inkml:channelProperty channel="Y" name="resolution" value="1000" units="1/cm"/>
           <inkml:channelProperty channel="F" name="resolution" value="0" units="1/dev"/>
+          <inkml:channelProperty channel="OA" name="resolution" value="1000" units="1/deg"/>
+          <inkml:channelProperty channel="OE" name="resolution" value="1000" units="1/deg"/>
         </inkml:channelProperties>
       </inkml:inkSource>
-      <inkml:timestamp xml:id="ts0" timeString="2025-05-02T14:07:37.154"/>
+      <inkml:timestamp xml:id="ts0" timeString="2025-04-28T15:56:57.504"/>
     </inkml:context>
     <inkml:brush xml:id="br0">
-      <inkml:brushProperty name="width" value="0.1" units="cm"/>
-      <inkml:brushProperty name="height" value="0.1" units="cm"/>
-      <inkml:brushProperty name="color" value="#E71224"/>
+      <inkml:brushProperty name="width" value="0.05" units="cm"/>
+      <inkml:brushProperty name="height" value="0.05" units="cm"/>
     </inkml:brush>
   </inkml:definitions>
-  <inkml:trace contextRef="#ctx0" brushRef="#br0">53 3 7666,'-8'-3'2136,"3"11"3089,-1 6-2984,-2 10-377,0 6-392,1 8-391,1 2-145,2 1-352,3-3-208,1-6-216,0-4-184,5-9-760,3-3-720,4-8 711</inkml:trace>
+  <inkml:trace contextRef="#ctx0" brushRef="#br0">310 3 1188 0 0,'0'0'4331'0'0,"-10"-3"910"0"0,-13 203-1894 0 0,-62 243 0 0 0,33-180-1825 0 0,-26 368 0 0 0,48-408-594 0 0,4-51 110 0 0,24-159-962 0 0,-1 15-1680 0 0,3-11-2351 0 0,16-43-4974 0 0,-15 25 8718 0 0,6-35-1985 0 0,-5-7-721 0 0</inkml:trace>
 </inkml:ink>
 </file>
 
@@ -3986,22 +3072,25 @@
           <inkml:channel name="X" type="integer" min="-2.14748E9" max="2.14748E9" units="cm"/>
           <inkml:channel name="Y" type="integer" min="-2.14748E9" max="2.14748E9" units="cm"/>
           <inkml:channel name="F" type="integer" max="32767" units="dev"/>
+          <inkml:channel name="OA" type="integer" max="360" units="deg"/>
+          <inkml:channel name="OE" type="integer" max="90" units="deg"/>
         </inkml:traceFormat>
         <inkml:channelProperties>
           <inkml:channelProperty channel="X" name="resolution" value="1000" units="1/cm"/>
           <inkml:channelProperty channel="Y" name="resolution" value="1000" units="1/cm"/>
           <inkml:channelProperty channel="F" name="resolution" value="0" units="1/dev"/>
+          <inkml:channelProperty channel="OA" name="resolution" value="1000" units="1/deg"/>
+          <inkml:channelProperty channel="OE" name="resolution" value="1000" units="1/deg"/>
         </inkml:channelProperties>
       </inkml:inkSource>
-      <inkml:timestamp xml:id="ts0" timeString="2025-05-02T14:07:37.155"/>
+      <inkml:timestamp xml:id="ts0" timeString="2025-04-28T15:56:58.158"/>
     </inkml:context>
     <inkml:brush xml:id="br0">
-      <inkml:brushProperty name="width" value="0.1" units="cm"/>
-      <inkml:brushProperty name="height" value="0.1" units="cm"/>
-      <inkml:brushProperty name="color" value="#E71224"/>
+      <inkml:brushProperty name="width" value="0.05" units="cm"/>
+      <inkml:brushProperty name="height" value="0.05" units="cm"/>
     </inkml:brush>
   </inkml:definitions>
-  <inkml:trace contextRef="#ctx0" brushRef="#br0">61 50 7554,'0'0'106,"0"0"1,-1-1-1,1 1 1,0 0-1,0 0 1,0 0-1,0 0 1,0-1-1,-1 1 1,1 0 0,-1 0-1,1 0 1,0 0-1,0 0 1,0 0-1,-1-1 1,1 1-1,-1 0 1,1 0-1,0 0 1,0 0-1,0 0 1,-1 0 0,1 0-1,0 0 1,0 0-1,-1 0 1,1 0-1,-1 0 1,1 0-1,0 0 1,0 0-1,0 0 1,-1 1 0,1-1-1,-1 0 1,1 0-1,0 0 1,0 0-1,0 0 1,-1 0-1,1 1 1,0-1-1,-1 0 1,1 0-1,0 0 1,0 1 0,0-1-1,0 0 1,0 0-1,0 0 1,-1 1-1,1-1 1,0 0-1,0 0 1,0 0-1,0 1 1,-4 18 3380,3-14-3311,-9 53 1172,3 0 1,2 77 0,7-124-1337,-2-11-11,0 0-1,0 0 1,1 0-1,-1 0 1,0 0-1,0 0 1,0 0-1,1 0 1,-1-1-1,0 1 1,0 0-1,0 0 1,0 0 0,0 0-1,0 0 1,0 0-1,0 0 1,0 0-1,0 0 1,1 0-1,-1 0 1,0 0-1,0 0 1,0-1-1,0 1 1,0 0-1,0 0 1,0 0-1,1 0 1,-1 0-1,0 0 1,0 0-1,0 0 1,0-1-1,0 1 1,0 0 0,0 0-1,0 0 1,0 0-1,0 0 1,5-21-43,-3-9-43,-2 1 0,0-1 0,-3 1 0,-13-58-1,1 47 715,30 62 552,-10-14-1096,33 65 418,-29-61-420,-1 1 0,2-1 0,15 16 0,-14-17-40,1 0 0,0-2 0,1 1 0,0-1-1,15 8 1,-23-14-25,0-1-1,0 0 0,0 0 1,1 0-1,-1-1 0,1 0 1,-1 1-1,8-1 0,-9 0 8,-1-1-1,1 0 0,0-1 1,0 1-1,-1 0 1,0-1-1,1 0 1,0 0-1,-1 0 0,0 0 1,1 0-1,-1 0 1,7-4-1,-5 1 6,0 1 0,-1-1 0,1 0 0,-1 0-1,1-1 1,-1 1 0,-1 0 0,1-1 0,-1 0-1,0 0 1,-1 0 0,1 0 0,-1 0 0,2-8 0,0-2 8,-1 0 1,0-1-1,-1-29 1,-2 28 6,-6-33-1,4 42-35,0 0 1,0 0-1,-1 1 0,-1-1 0,1 0 0,-7-8 0,9 15-25,1 0 0,0 1-1,-1-1 1,0 0 0,1 0 0,-1 0 0,0 1-1,0-1 1,1 0 0,-1 1 0,0-1-1,0 1 1,0-1 0,0 1 0,0 0 0,-2-1-1,2 1-11,1-1-1,-1 1 0,0 1 0,1-1 0,0 0 1,-1 0-1,0 0 0,1 0 0,-1 0 1,0 0-1,1 0 0,-1 1 0,1-1 0,-1 0 1,1 0-1,-1 1 0,1-1 0,-1 0 1,1 0-1,-1 1 0,1-1 0,-1 1 1,0 1-79,-1 0 1,1-1-1,0 1 1,0 0 0,0-1-1,0 2 1,0-1-1,0 0 1,0 0-1,1 0 1,0 0 0,0 0-1,-1 3 1,4 13-758</inkml:trace>
+  <inkml:trace contextRef="#ctx0" brushRef="#br0">63 0 5288 0 0,'0'0'8935'0'0,"5"32"-7500"0"0,13 997 1931 0 0,-62-205-1467 0 0,42-708-1759 0 0,0-3-354 0 0,-2-40-3627 0 0,2-90-2897 0 0,-7-8 4663 0 0,2 5 649 0 0,-8-34-2615 0 0</inkml:trace>
 </inkml:ink>
 </file>
 
@@ -4014,22 +3103,25 @@
           <inkml:channel name="X" type="integer" min="-2.14748E9" max="2.14748E9" units="cm"/>
           <inkml:channel name="Y" type="integer" min="-2.14748E9" max="2.14748E9" units="cm"/>
           <inkml:channel name="F" type="integer" max="32767" units="dev"/>
+          <inkml:channel name="OA" type="integer" max="360" units="deg"/>
+          <inkml:channel name="OE" type="integer" max="90" units="deg"/>
         </inkml:traceFormat>
         <inkml:channelProperties>
           <inkml:channelProperty channel="X" name="resolution" value="1000" units="1/cm"/>
           <inkml:channelProperty channel="Y" name="resolution" value="1000" units="1/cm"/>
           <inkml:channelProperty channel="F" name="resolution" value="0" units="1/dev"/>
+          <inkml:channelProperty channel="OA" name="resolution" value="1000" units="1/deg"/>
+          <inkml:channelProperty channel="OE" name="resolution" value="1000" units="1/deg"/>
         </inkml:channelProperties>
       </inkml:inkSource>
-      <inkml:timestamp xml:id="ts0" timeString="2025-05-02T14:07:37.156"/>
+      <inkml:timestamp xml:id="ts0" timeString="2025-04-28T15:56:58.956"/>
     </inkml:context>
     <inkml:brush xml:id="br0">
-      <inkml:brushProperty name="width" value="0.1" units="cm"/>
-      <inkml:brushProperty name="height" value="0.1" units="cm"/>
-      <inkml:brushProperty name="color" value="#E71224"/>
+      <inkml:brushProperty name="width" value="0.05" units="cm"/>
+      <inkml:brushProperty name="height" value="0.05" units="cm"/>
     </inkml:brush>
   </inkml:definitions>
-  <inkml:trace contextRef="#ctx0" brushRef="#br0">114 2 3873,'-1'0'266,"-1"0"-1,1 0 1,-1-1 0,1 1-1,0 0 1,-1 0 0,0 0 0,1 0-1,-1 0 1,1 1 0,0-1-1,-1 0 1,1 0 0,-1 1 0,1-1-1,0 1 1,-1-1 0,1 1-1,0-1 1,0 1 0,-1 0-1,1-1 1,0 1 0,0 0 0,0 0-1,0 0 1,0 0 0,-1 1-1,-2 2 234,1 0-1,-1 1 0,1-1 1,1 1-1,-4 6 0,-33 84 3000,36-82-3239,-1 0 0,1 1 0,1 0 0,1-1 0,1 18 0,0-27-223,1 0 1,-1 0-1,2 0 0,-2 0 0,2 0 0,-1 0 1,1 0-1,0 0 0,0-1 0,1 1 0,-1 0 1,1-1-1,0 1 0,4 3 0,-4-5-23,-1 0 0,1 0 0,0 0-1,0-1 1,0 1 0,0 0 0,0-1-1,0 0 1,1 0 0,-1 0 0,0 0-1,1 0 1,-1 0 0,1-1 0,-1 0-1,1 1 1,-1-1 0,1 0 0,-1 0-1,7-2 1,-6 1 0,1 0 0,-1 0 0,1-1 0,-2 1 0,2-1 1,-1 0-1,0 0 0,-1 0 0,1 0 0,-1-1 0,1 1 0,-1-1 0,0 0 0,0 0 0,5-6 0,0-2 16,0-1 0,0 0 0,6-15 0,-8 13 4,0 0-1,-1-1 0,-1 0 1,2-17-1,-4 25-18,-2-2 0,0 1 1,0 0-1,0 0 0,-2 0 0,1 1 1,-1-1-1,0 0 0,-5-12 1,6 19 339,-1 4-59,1 9 152,0 17 158,-1 70 611,0 34-494,2-130-812,0 0 0,0 0 0,0-1 0,1 2 0,-1-2 0,1 1 0,0 0-1,0 0 1,0-1 0,0 1 0,1 0 0,-1-1 0,1 1 0,0-1 0,0 1 0,2 2 0,-1-2-578</inkml:trace>
+  <inkml:trace contextRef="#ctx0" brushRef="#br0">1 1 2008 0 0,'13'10'10286'0'0,"16"-3"-7367"0"0,37 1-3606 0 0,-54-7 2070 0 0,255 9 1353 0 0,-68-4-2284 0 0,959-8 775 0 0,-929 0-745 0 0,49-5 495 0 0,622-15 725 0 0,-862 24-2085 0 0,12 3-4869 0 0,-37 3-8 0 0,-9 7 3428 0 0,-5-14 1085 0 0,1 0 618 0 0,-1 0 0 0 0,1 0 0 0 0,-1-1 0 0 0,0 1 0 0 0,1 0 0 0 0,-1 0 0 0 0,0-1 0 0 0,0 1 0 0 0,1-1 0 0 0,-1 1 1 0 0,0-1-1 0 0,0 1 0 0 0,0-1 0 0 0,0 1 0 0 0,0-1 0 0 0,0 0 0 0 0,0 1 0 0 0,0-1 0 0 0,0 0 0 0 0,0 0 0 0 0,0 0 0 0 0,1 0 1 0 0,-3 0-1 0 0,-42 4-4060 0 0</inkml:trace>
 </inkml:ink>
 </file>
 
@@ -4042,22 +3134,25 @@
           <inkml:channel name="X" type="integer" min="-2.14748E9" max="2.14748E9" units="cm"/>
           <inkml:channel name="Y" type="integer" min="-2.14748E9" max="2.14748E9" units="cm"/>
           <inkml:channel name="F" type="integer" max="32767" units="dev"/>
+          <inkml:channel name="OA" type="integer" max="360" units="deg"/>
+          <inkml:channel name="OE" type="integer" max="90" units="deg"/>
         </inkml:traceFormat>
         <inkml:channelProperties>
           <inkml:channelProperty channel="X" name="resolution" value="1000" units="1/cm"/>
           <inkml:channelProperty channel="Y" name="resolution" value="1000" units="1/cm"/>
           <inkml:channelProperty channel="F" name="resolution" value="0" units="1/dev"/>
+          <inkml:channelProperty channel="OA" name="resolution" value="1000" units="1/deg"/>
+          <inkml:channelProperty channel="OE" name="resolution" value="1000" units="1/deg"/>
         </inkml:channelProperties>
       </inkml:inkSource>
-      <inkml:timestamp xml:id="ts0" timeString="2025-05-02T14:07:37.157"/>
+      <inkml:timestamp xml:id="ts0" timeString="2025-04-28T15:56:59.732"/>
     </inkml:context>
     <inkml:brush xml:id="br0">
-      <inkml:brushProperty name="width" value="0.1" units="cm"/>
-      <inkml:brushProperty name="height" value="0.1" units="cm"/>
-      <inkml:brushProperty name="color" value="#E71224"/>
+      <inkml:brushProperty name="width" value="0.05" units="cm"/>
+      <inkml:brushProperty name="height" value="0.05" units="cm"/>
     </inkml:brush>
   </inkml:definitions>
-  <inkml:trace contextRef="#ctx0" brushRef="#br0">80 7 4161,'-1'-1'197,"1"1"1,-1-1-1,0 1 1,1-1-1,-2 1 0,2-1 1,-1 1-1,0 0 1,0-1-1,1 1 1,-2 0-1,2 0 1,-2 0-1,2-1 0,-1 1 1,0 0-1,0 0 1,0 0-1,0 0 1,-2 0-1,2 1 129,0-1 1,0 1-1,0-1 0,0 0 1,0 1-1,0 0 1,0-1-1,0 1 0,0-1 1,0 1-1,0 0 0,1 0 1,-1 0-1,0 0 1,1-1-1,-1 1 0,0 1 1,-3 6 704,0-1 0,1 0 0,0 1 0,-2 13 0,-4 33 941,6-32-1368,-3 11-20,1-4-1000,3-16-3891,2-18 2360</inkml:trace>
+  <inkml:trace contextRef="#ctx0" brushRef="#br0">2 127 6009 0 0,'0'0'5791'0'0,"0"0"-5600"0"0,0-1-1 0 0,0 1 1 0 0,0 0 0 0 0,-1-1 0 0 0,1 1-1 0 0,0 0 1 0 0,0-1 0 0 0,0 1 0 0 0,0-1-1 0 0,-1 1 1 0 0,1-1 0 0 0,0 1 0 0 0,0 0-1 0 0,0-1 1 0 0,0 1 0 0 0,0-1 0 0 0,0 1-1 0 0,0-1 1 0 0,0 1 0 0 0,1 0 0 0 0,-1-1-1 0 0,0 1 1 0 0,0-1 0 0 0,0 1 0 0 0,0 0-1 0 0,0-1 1 0 0,1 0 0 0 0,72-9 986 0 0,122-4-1 0 0,-6 3-1114 0 0,902-36 1949 0 0,-1065 47-1991 0 0,130-5 162 0 0,110 3 141 0 0,619 8 974 0 0,-630-11-633 0 0,502-7-285 0 0,-688 7-5475 0 0,-28 0-6496 0 0,-72 0 6576 0 0</inkml:trace>
 </inkml:ink>
 </file>
 
@@ -4070,22 +3165,25 @@
           <inkml:channel name="X" type="integer" min="-2.14748E9" max="2.14748E9" units="cm"/>
           <inkml:channel name="Y" type="integer" min="-2.14748E9" max="2.14748E9" units="cm"/>
           <inkml:channel name="F" type="integer" max="32767" units="dev"/>
+          <inkml:channel name="OA" type="integer" max="360" units="deg"/>
+          <inkml:channel name="OE" type="integer" max="90" units="deg"/>
         </inkml:traceFormat>
         <inkml:channelProperties>
           <inkml:channelProperty channel="X" name="resolution" value="1000" units="1/cm"/>
           <inkml:channelProperty channel="Y" name="resolution" value="1000" units="1/cm"/>
           <inkml:channelProperty channel="F" name="resolution" value="0" units="1/dev"/>
+          <inkml:channelProperty channel="OA" name="resolution" value="1000" units="1/deg"/>
+          <inkml:channelProperty channel="OE" name="resolution" value="1000" units="1/deg"/>
         </inkml:channelProperties>
       </inkml:inkSource>
-      <inkml:timestamp xml:id="ts0" timeString="2025-05-02T14:07:37.158"/>
+      <inkml:timestamp xml:id="ts0" timeString="2025-04-28T15:57:00.512"/>
     </inkml:context>
     <inkml:brush xml:id="br0">
-      <inkml:brushProperty name="width" value="0.1" units="cm"/>
-      <inkml:brushProperty name="height" value="0.1" units="cm"/>
-      <inkml:brushProperty name="color" value="#E71224"/>
+      <inkml:brushProperty name="width" value="0.05" units="cm"/>
+      <inkml:brushProperty name="height" value="0.05" units="cm"/>
     </inkml:brush>
   </inkml:definitions>
-  <inkml:trace contextRef="#ctx0" brushRef="#br0">0 4 15099,'1'-4'1072,"3"4"417,-2 1-209,-1 2-552,1 2-320,1-1-312,0 0-32,0 1-592,0-1-824,-3 5 656</inkml:trace>
+  <inkml:trace contextRef="#ctx0" brushRef="#br0">5 15 3052 0 0,'-1'-2'3305'0'0,"-2"-11"6632"0"0,31 30-9815 0 0,0 2-1 0 0,-1 0 1 0 0,-1 1-1 0 0,44 46 1 0 0,24 41-175 0 0,-40-34 95 0 0,-35-44-343 0 0,28 59-8383 0 0,-35-55 7575 0 0,-12-31 953 0 0,1 1 0 0 0,0-1 1 0 0,-1 0-1 0 0,0 1 0 0 0,1-1 1 0 0,-1 0-1 0 0,0 1 1 0 0,0-1-1 0 0,0 0 0 0 0,0 1 1 0 0,-2 3-1 0 0,-10 9-2045 0 0</inkml:trace>
 </inkml:ink>
 </file>
 
@@ -4098,22 +3196,25 @@
           <inkml:channel name="X" type="integer" min="-2.14748E9" max="2.14748E9" units="cm"/>
           <inkml:channel name="Y" type="integer" min="-2.14748E9" max="2.14748E9" units="cm"/>
           <inkml:channel name="F" type="integer" max="32767" units="dev"/>
+          <inkml:channel name="OA" type="integer" max="360" units="deg"/>
+          <inkml:channel name="OE" type="integer" max="90" units="deg"/>
         </inkml:traceFormat>
         <inkml:channelProperties>
           <inkml:channelProperty channel="X" name="resolution" value="1000" units="1/cm"/>
           <inkml:channelProperty channel="Y" name="resolution" value="1000" units="1/cm"/>
           <inkml:channelProperty channel="F" name="resolution" value="0" units="1/dev"/>
+          <inkml:channelProperty channel="OA" name="resolution" value="1000" units="1/deg"/>
+          <inkml:channelProperty channel="OE" name="resolution" value="1000" units="1/deg"/>
         </inkml:channelProperties>
       </inkml:inkSource>
-      <inkml:timestamp xml:id="ts0" timeString="2025-05-02T14:07:37.159"/>
+      <inkml:timestamp xml:id="ts0" timeString="2025-04-28T15:57:00.761"/>
     </inkml:context>
     <inkml:brush xml:id="br0">
-      <inkml:brushProperty name="width" value="0.1" units="cm"/>
-      <inkml:brushProperty name="height" value="0.1" units="cm"/>
-      <inkml:brushProperty name="color" value="#E71224"/>
+      <inkml:brushProperty name="width" value="0.05" units="cm"/>
+      <inkml:brushProperty name="height" value="0.05" units="cm"/>
     </inkml:brush>
   </inkml:definitions>
-  <inkml:trace contextRef="#ctx0" brushRef="#br0">181 18 6257,'2'-1'211,"-1"0"-1,0 0 1,0 1-1,0-1 1,0 0 0,0 0-1,0 0 1,1-1-1,-2-3 1792,-9 2 717,7 3-2469,0 0-1,0 0 1,1 0-1,-1 0 0,0 0 1,0 1-1,1-1 0,-1 0 1,0 1-1,1-1 1,-1 1-1,0-1 0,0 1 1,1 0-1,-1-1 0,1 1 1,-1 0-1,1 1 0,-3 0 1,-2 4 254,0-1-1,-9 12 1,14-15-361,-15 17 493,2 2-1,0-1 1,2 1 0,1 1 0,1-1 0,-12 41-1,15-33-447,2 0-1,0 0 1,2 0-1,4 58 1,0-74-284,1-1 1,0 1-1,1-1 1,7 17 0,-7-23-304,0 0 1,0-1 0,0 1 0,1 0 0,0-1-1,1 0 1,-1 0 0,1 0 0,0-1 0,8 7 0,10 2-796</inkml:trace>
+  <inkml:trace contextRef="#ctx0" brushRef="#br0">1 286 6717 0 0,'0'0'6684'0'0,"20"-31"-1042"0"0,35-8-4094 0 0,3 3-3933 0 0,-4 3-2418 0 0,17-8 716 0 0,-48 28 2905 0 0,-1-1-1 0 0,35-27 1 0 0,-16 4-1859 0 0</inkml:trace>
 </inkml:ink>
 </file>
 
@@ -4126,22 +3227,25 @@
           <inkml:channel name="X" type="integer" min="-2.14748E9" max="2.14748E9" units="cm"/>
           <inkml:channel name="Y" type="integer" min="-2.14748E9" max="2.14748E9" units="cm"/>
           <inkml:channel name="F" type="integer" max="32767" units="dev"/>
+          <inkml:channel name="OA" type="integer" max="360" units="deg"/>
+          <inkml:channel name="OE" type="integer" max="90" units="deg"/>
         </inkml:traceFormat>
         <inkml:channelProperties>
           <inkml:channelProperty channel="X" name="resolution" value="1000" units="1/cm"/>
           <inkml:channelProperty channel="Y" name="resolution" value="1000" units="1/cm"/>
           <inkml:channelProperty channel="F" name="resolution" value="0" units="1/dev"/>
+          <inkml:channelProperty channel="OA" name="resolution" value="1000" units="1/deg"/>
+          <inkml:channelProperty channel="OE" name="resolution" value="1000" units="1/deg"/>
         </inkml:channelProperties>
       </inkml:inkSource>
-      <inkml:timestamp xml:id="ts0" timeString="2025-05-02T14:07:37.160"/>
+      <inkml:timestamp xml:id="ts0" timeString="2025-04-28T15:57:04.687"/>
     </inkml:context>
     <inkml:brush xml:id="br0">
-      <inkml:brushProperty name="width" value="0.1" units="cm"/>
-      <inkml:brushProperty name="height" value="0.1" units="cm"/>
-      <inkml:brushProperty name="color" value="#E71224"/>
+      <inkml:brushProperty name="width" value="0.05" units="cm"/>
+      <inkml:brushProperty name="height" value="0.05" units="cm"/>
     </inkml:brush>
   </inkml:definitions>
-  <inkml:trace contextRef="#ctx0" brushRef="#br0">184 2 6425,'-3'-1'519,"-1"1"0,0 0 0,0 0-1,0 1 1,1-1 0,-1 1 0,0-1-1,0 1 1,0 0 0,1 0 0,-1 0-1,1 1 1,-4 1 0,-5 4 294,0 0 0,-13 9-1,11-6-656,5-4 90,0 1-1,-14 13 1,20-17-185,1 0 0,-1 1 0,1-1 0,-1 0 0,1 0 0,0 1 0,0 0 0,0-1 0,1 1 0,-1 4 0,2-6-47,0 1 1,0-1-1,0 0 0,0 1 0,1-1 0,0 0 0,-1 0 0,1 0 0,0 1 0,0-1 0,1 0 0,-1 0 0,0 0 0,0 0 0,1 0 0,0 0 0,-1 0 0,1-1 0,0 1 0,1-1 0,-1 1 0,3 1 0,4 3 76,0-2 0,1 1 0,-1-1 0,14 5 0,73 16 1615,-88-23-1466,-7-2-185,-1 0 0,1 0 1,0 1-1,0-1 0,0 0 0,0 0 0,-1 1 1,1-1-1,0 0 0,0 1 0,-1-1 1,1 0-1,0 1 0,-1 0 0,2 0 0,-2-1-29,0 1 0,0-1 0,0 0 0,0 0 0,0 0-1,0 1 1,0-1 0,0 0 0,0 0 0,0 1 0,0-1 0,0 0-1,0 0 1,0 1 0,0-1 0,-1 0 0,1 0 0,0 0-1,0 1 1,0-1 0,-1 0 0,1 1 0,0-1 0,0 0 0,0 0-1,0 0 1,-1 0 0,0 1 0,-2 1 109,-1 0-1,0 0 1,0 0 0,-5 1-1,4-1-173,-21 9-88,-58 22 454,29-9-3281,46-20 1981</inkml:trace>
+  <inkml:trace contextRef="#ctx0" brushRef="#br0">1 3 1728 0 0,'0'0'8632'0'0,"19"-3"-7426"0"0,-5 6-972 0 0,1 0 0 0 0,-1 1-1 0 0,0 0 1 0 0,-1 1-1 0 0,1 1 1 0 0,-1 0 0 0 0,18 12-1 0 0,84 66 1519 0 0,-82-57-3083 0 0,62 38 0 0 0,-77-55-94 0 0,-1 1 0 0 0,0 0 0 0 0,16 15-1 0 0,-19-15 174 0 0,-10-7-1592 0 0</inkml:trace>
 </inkml:ink>
 </file>
 
@@ -4292,7 +3396,7 @@
           <a:p>
             <a:fld id="{8BB42C94-4EF8-4597-AF3E-41FB0A245854}" type="datetimeFigureOut">
               <a:rPr lang="en-US" smtClean="0"/>
-              <a:t>4/23/2026</a:t>
+              <a:t>4/29/2026</a:t>
             </a:fld>
             <a:endParaRPr lang="en-US"/>
           </a:p>
@@ -4490,7 +3594,7 @@
           <a:p>
             <a:fld id="{8BB42C94-4EF8-4597-AF3E-41FB0A245854}" type="datetimeFigureOut">
               <a:rPr lang="en-US" smtClean="0"/>
-              <a:t>4/23/2026</a:t>
+              <a:t>4/29/2026</a:t>
             </a:fld>
             <a:endParaRPr lang="en-US"/>
           </a:p>
@@ -4698,7 +3802,7 @@
           <a:p>
             <a:fld id="{8BB42C94-4EF8-4597-AF3E-41FB0A245854}" type="datetimeFigureOut">
               <a:rPr lang="en-US" smtClean="0"/>
-              <a:t>4/23/2026</a:t>
+              <a:t>4/29/2026</a:t>
             </a:fld>
             <a:endParaRPr lang="en-US"/>
           </a:p>
@@ -4896,7 +4000,7 @@
           <a:p>
             <a:fld id="{8BB42C94-4EF8-4597-AF3E-41FB0A245854}" type="datetimeFigureOut">
               <a:rPr lang="en-US" smtClean="0"/>
-              <a:t>4/23/2026</a:t>
+              <a:t>4/29/2026</a:t>
             </a:fld>
             <a:endParaRPr lang="en-US"/>
           </a:p>
@@ -5171,7 +4275,7 @@
           <a:p>
             <a:fld id="{8BB42C94-4EF8-4597-AF3E-41FB0A245854}" type="datetimeFigureOut">
               <a:rPr lang="en-US" smtClean="0"/>
-              <a:t>4/23/2026</a:t>
+              <a:t>4/29/2026</a:t>
             </a:fld>
             <a:endParaRPr lang="en-US"/>
           </a:p>
@@ -5436,7 +4540,7 @@
           <a:p>
             <a:fld id="{8BB42C94-4EF8-4597-AF3E-41FB0A245854}" type="datetimeFigureOut">
               <a:rPr lang="en-US" smtClean="0"/>
-              <a:t>4/23/2026</a:t>
+              <a:t>4/29/2026</a:t>
             </a:fld>
             <a:endParaRPr lang="en-US"/>
           </a:p>
@@ -5848,7 +4952,7 @@
           <a:p>
             <a:fld id="{8BB42C94-4EF8-4597-AF3E-41FB0A245854}" type="datetimeFigureOut">
               <a:rPr lang="en-US" smtClean="0"/>
-              <a:t>4/23/2026</a:t>
+              <a:t>4/29/2026</a:t>
             </a:fld>
             <a:endParaRPr lang="en-US"/>
           </a:p>
@@ -5989,7 +5093,7 @@
           <a:p>
             <a:fld id="{8BB42C94-4EF8-4597-AF3E-41FB0A245854}" type="datetimeFigureOut">
               <a:rPr lang="en-US" smtClean="0"/>
-              <a:t>4/23/2026</a:t>
+              <a:t>4/29/2026</a:t>
             </a:fld>
             <a:endParaRPr lang="en-US"/>
           </a:p>
@@ -6102,7 +5206,7 @@
           <a:p>
             <a:fld id="{8BB42C94-4EF8-4597-AF3E-41FB0A245854}" type="datetimeFigureOut">
               <a:rPr lang="en-US" smtClean="0"/>
-              <a:t>4/23/2026</a:t>
+              <a:t>4/29/2026</a:t>
             </a:fld>
             <a:endParaRPr lang="en-US"/>
           </a:p>
@@ -6413,7 +5517,7 @@
           <a:p>
             <a:fld id="{8BB42C94-4EF8-4597-AF3E-41FB0A245854}" type="datetimeFigureOut">
               <a:rPr lang="en-US" smtClean="0"/>
-              <a:t>4/23/2026</a:t>
+              <a:t>4/29/2026</a:t>
             </a:fld>
             <a:endParaRPr lang="en-US"/>
           </a:p>
@@ -6701,7 +5805,7 @@
           <a:p>
             <a:fld id="{8BB42C94-4EF8-4597-AF3E-41FB0A245854}" type="datetimeFigureOut">
               <a:rPr lang="en-US" smtClean="0"/>
-              <a:t>4/23/2026</a:t>
+              <a:t>4/29/2026</a:t>
             </a:fld>
             <a:endParaRPr lang="en-US"/>
           </a:p>
@@ -6942,7 +6046,7 @@
           <a:p>
             <a:fld id="{8BB42C94-4EF8-4597-AF3E-41FB0A245854}" type="datetimeFigureOut">
               <a:rPr lang="en-US" smtClean="0"/>
-              <a:t>4/23/2026</a:t>
+              <a:t>4/29/2026</a:t>
             </a:fld>
             <a:endParaRPr lang="en-US"/>
           </a:p>
@@ -7762,8 +6866,8 @@
           <a:chExt cx="0" cy="0"/>
         </a:xfrm>
       </p:grpSpPr>
-      <mc:AlternateContent xmlns:mc="http://schemas.openxmlformats.org/markup-compatibility/2006" xmlns:a14="http://schemas.microsoft.com/office/drawing/2010/main">
-        <mc:Choice Requires="a14">
+      <mc:AlternateContent xmlns:mc="http://schemas.openxmlformats.org/markup-compatibility/2006">
+        <mc:Choice xmlns:a14="http://schemas.microsoft.com/office/drawing/2010/main" Requires="a14">
           <p:graphicFrame>
             <p:nvGraphicFramePr>
               <p:cNvPr id="5" name="Table 4">
@@ -7779,7 +6883,7 @@
               <p:nvPr>
                 <p:extLst>
                   <p:ext uri="{D42A27DB-BD31-4B8C-83A1-F6EECF244321}">
-                    <p14:modId xmlns:p14="http://schemas.microsoft.com/office/powerpoint/2010/main" val="2914275313"/>
+                    <p14:modId xmlns:p14="http://schemas.microsoft.com/office/powerpoint/2010/main" val="181897599"/>
                   </p:ext>
                 </p:extLst>
               </p:nvPr>
@@ -8033,59 +7137,6 @@
                             <a:latin typeface="Cambria Math" panose="02040503050406030204" pitchFamily="18" charset="0"/>
                           </a:endParaRPr>
                         </a:p>
-                        <a:p>
-                          <a:pPr marL="0" marR="0" lvl="0" indent="0" algn="ctr" defTabSz="914400" rtl="0" eaLnBrk="1" fontAlgn="auto" latinLnBrk="0" hangingPunct="1">
-                            <a:lnSpc>
-                              <a:spcPct val="100000"/>
-                            </a:lnSpc>
-                            <a:spcBef>
-                              <a:spcPts val="0"/>
-                            </a:spcBef>
-                            <a:spcAft>
-                              <a:spcPts val="0"/>
-                            </a:spcAft>
-                            <a:buClrTx/>
-                            <a:buSzTx/>
-                            <a:buFontTx/>
-                            <a:buNone/>
-                            <a:tabLst/>
-                            <a:defRPr/>
-                          </a:pPr>
-                          <a14:m>
-                            <m:oMathPara xmlns:m="http://schemas.openxmlformats.org/officeDocument/2006/math">
-                              <m:oMathParaPr>
-                                <m:jc m:val="centerGroup"/>
-                              </m:oMathParaPr>
-                              <m:oMath xmlns:m="http://schemas.openxmlformats.org/officeDocument/2006/math">
-                                <m:r>
-                                  <a:rPr lang="en-US" sz="1800" b="0" i="1" smtClean="0">
-                                    <a:latin typeface="Cambria Math" panose="02040503050406030204" pitchFamily="18" charset="0"/>
-                                  </a:rPr>
-                                  <m:t>𝑒𝑣𝑎𝑙</m:t>
-                                </m:r>
-                                <m:r>
-                                  <a:rPr lang="en-US" sz="1800" b="0" i="1" smtClean="0">
-                                    <a:latin typeface="Cambria Math" panose="02040503050406030204" pitchFamily="18" charset="0"/>
-                                  </a:rPr>
-                                  <m:t>(</m:t>
-                                </m:r>
-                                <m:r>
-                                  <a:rPr lang="en-US" sz="1800" b="0" i="1" smtClean="0">
-                                    <a:latin typeface="Cambria Math" panose="02040503050406030204" pitchFamily="18" charset="0"/>
-                                  </a:rPr>
-                                  <m:t>𝑠</m:t>
-                                </m:r>
-                                <m:r>
-                                  <a:rPr lang="en-US" sz="1800" b="0" i="1" smtClean="0">
-                                    <a:latin typeface="Cambria Math" panose="02040503050406030204" pitchFamily="18" charset="0"/>
-                                  </a:rPr>
-                                  <m:t>)</m:t>
-                                </m:r>
-                              </m:oMath>
-                            </m:oMathPara>
-                          </a14:m>
-                          <a:endParaRPr lang="en-US" sz="1800" b="0" dirty="0"/>
-                        </a:p>
                       </a:txBody>
                       <a:tcPr/>
                     </a:tc>
@@ -8095,46 +7146,6 @@
                         <a:lstStyle/>
                         <a:p>
                           <a:pPr algn="ctr"/>
-                          <a:r>
-                            <a:rPr lang="en-US" b="0" dirty="0"/>
-                            <a:t>Machine Learning</a:t>
-                          </a:r>
-                        </a:p>
-                        <a:p>
-                          <a:pPr algn="ctr"/>
-                          <a14:m>
-                            <m:oMathPara xmlns:m="http://schemas.openxmlformats.org/officeDocument/2006/math">
-                              <m:oMathParaPr>
-                                <m:jc m:val="centerGroup"/>
-                              </m:oMathParaPr>
-                              <m:oMath xmlns:m="http://schemas.openxmlformats.org/officeDocument/2006/math">
-                                <m:r>
-                                  <a:rPr lang="en-US" b="0" i="1" smtClean="0">
-                                    <a:latin typeface="Cambria Math" panose="02040503050406030204" pitchFamily="18" charset="0"/>
-                                  </a:rPr>
-                                  <m:t>h</m:t>
-                                </m:r>
-                                <m:r>
-                                  <a:rPr lang="en-US" b="0" i="1" smtClean="0">
-                                    <a:latin typeface="Cambria Math" panose="02040503050406030204" pitchFamily="18" charset="0"/>
-                                  </a:rPr>
-                                  <m:t>(</m:t>
-                                </m:r>
-                                <m:r>
-                                  <a:rPr lang="en-US" b="0" i="1" smtClean="0">
-                                    <a:latin typeface="Cambria Math" panose="02040503050406030204" pitchFamily="18" charset="0"/>
-                                  </a:rPr>
-                                  <m:t>𝑠</m:t>
-                                </m:r>
-                                <m:r>
-                                  <a:rPr lang="en-US" b="0" i="1" smtClean="0">
-                                    <a:latin typeface="Cambria Math" panose="02040503050406030204" pitchFamily="18" charset="0"/>
-                                  </a:rPr>
-                                  <m:t>)</m:t>
-                                </m:r>
-                              </m:oMath>
-                            </m:oMathPara>
-                          </a14:m>
                           <a:endParaRPr lang="en-US" b="0" dirty="0"/>
                         </a:p>
                       </a:txBody>
@@ -8414,7 +7425,7 @@
             </a:graphic>
           </p:graphicFrame>
         </mc:Choice>
-        <mc:Fallback xmlns="">
+        <mc:Fallback>
           <p:graphicFrame>
             <p:nvGraphicFramePr>
               <p:cNvPr id="5" name="Table 4">
@@ -8430,7 +7441,7 @@
               <p:nvPr>
                 <p:extLst>
                   <p:ext uri="{D42A27DB-BD31-4B8C-83A1-F6EECF244321}">
-                    <p14:modId xmlns:p14="http://schemas.microsoft.com/office/powerpoint/2010/main" val="2914275313"/>
+                    <p14:modId xmlns:p14="http://schemas.microsoft.com/office/powerpoint/2010/main" val="181897599"/>
                   </p:ext>
                 </p:extLst>
               </p:nvPr>
@@ -8539,34 +7550,44 @@
                         <a:bodyPr/>
                         <a:lstStyle/>
                         <a:p>
-                          <a:endParaRPr lang="en-US"/>
+                          <a:pPr marL="0" marR="0" lvl="0" indent="0" algn="ctr" defTabSz="914400" rtl="0" eaLnBrk="1" fontAlgn="auto" latinLnBrk="0" hangingPunct="1">
+                            <a:lnSpc>
+                              <a:spcPct val="100000"/>
+                            </a:lnSpc>
+                            <a:spcBef>
+                              <a:spcPts val="0"/>
+                            </a:spcBef>
+                            <a:spcAft>
+                              <a:spcPts val="0"/>
+                            </a:spcAft>
+                            <a:buClrTx/>
+                            <a:buSzTx/>
+                            <a:buFontTx/>
+                            <a:buNone/>
+                            <a:tabLst/>
+                            <a:defRPr/>
+                          </a:pPr>
+                          <a:r>
+                            <a:rPr lang="en-US" sz="1800" b="0" dirty="0"/>
+                            <a:t>Monte Carlo simulation</a:t>
+                          </a:r>
+                          <a:endParaRPr lang="en-US" sz="1800" b="0" i="1" dirty="0">
+                            <a:latin typeface="Cambria Math" panose="02040503050406030204" pitchFamily="18" charset="0"/>
+                          </a:endParaRPr>
                         </a:p>
                       </a:txBody>
-                      <a:tcPr>
-                        <a:blipFill>
-                          <a:blip r:embed="rId2"/>
-                          <a:stretch>
-                            <a:fillRect l="-300375" t="-2874" r="-101498" b="-263793"/>
-                          </a:stretch>
-                        </a:blipFill>
-                      </a:tcPr>
+                      <a:tcPr/>
                     </a:tc>
                     <a:tc>
                       <a:txBody>
                         <a:bodyPr/>
                         <a:lstStyle/>
                         <a:p>
-                          <a:endParaRPr lang="en-US"/>
+                          <a:pPr algn="ctr"/>
+                          <a:endParaRPr lang="en-US" b="0" dirty="0"/>
                         </a:p>
                       </a:txBody>
-                      <a:tcPr>
-                        <a:blipFill>
-                          <a:blip r:embed="rId2"/>
-                          <a:stretch>
-                            <a:fillRect l="-400375" t="-2874" r="-1498" b="-263793"/>
-                          </a:stretch>
-                        </a:blipFill>
-                      </a:tcPr>
+                      <a:tcPr/>
                     </a:tc>
                     <a:extLst>
                       <a:ext uri="{0D108BD9-81ED-4DB2-BD59-A6C34878D82A}">
@@ -10236,1722 +9257,6 @@
           </a:p>
         </p:txBody>
       </p:sp>
-      <p:grpSp>
-        <p:nvGrpSpPr>
-          <p:cNvPr id="57" name="Group 56">
-            <a:extLst>
-              <a:ext uri="{FF2B5EF4-FFF2-40B4-BE49-F238E27FC236}">
-                <a16:creationId xmlns:a16="http://schemas.microsoft.com/office/drawing/2014/main" id="{0D702D80-6165-5402-9F21-A31191CA7BEA}"/>
-              </a:ext>
-            </a:extLst>
-          </p:cNvPr>
-          <p:cNvGrpSpPr/>
-          <p:nvPr/>
-        </p:nvGrpSpPr>
-        <p:grpSpPr>
-          <a:xfrm>
-            <a:off x="9684198" y="113777"/>
-            <a:ext cx="1764927" cy="1139278"/>
-            <a:chOff x="9309819" y="3831793"/>
-            <a:chExt cx="2784960" cy="2131560"/>
-          </a:xfrm>
-        </p:grpSpPr>
-        <p:grpSp>
-          <p:nvGrpSpPr>
-            <p:cNvPr id="7" name="Group 6">
-              <a:extLst>
-                <a:ext uri="{FF2B5EF4-FFF2-40B4-BE49-F238E27FC236}">
-                  <a16:creationId xmlns:a16="http://schemas.microsoft.com/office/drawing/2014/main" id="{F1A25130-C13A-5DFF-B557-7A3A4DAD23E1}"/>
-                </a:ext>
-              </a:extLst>
-            </p:cNvPr>
-            <p:cNvGrpSpPr/>
-            <p:nvPr/>
-          </p:nvGrpSpPr>
-          <p:grpSpPr>
-            <a:xfrm>
-              <a:off x="9423219" y="4558633"/>
-              <a:ext cx="1478520" cy="1404720"/>
-              <a:chOff x="9423219" y="4558633"/>
-              <a:chExt cx="1478520" cy="1404720"/>
-            </a:xfrm>
-          </p:grpSpPr>
-          <mc:AlternateContent xmlns:mc="http://schemas.openxmlformats.org/markup-compatibility/2006" xmlns:p14="http://schemas.microsoft.com/office/powerpoint/2010/main">
-            <mc:Choice Requires="p14">
-              <p:contentPart p14:bwMode="auto" r:id="rId44">
-                <p14:nvContentPartPr>
-                  <p14:cNvPr id="8" name="Ink 7">
-                    <a:extLst>
-                      <a:ext uri="{FF2B5EF4-FFF2-40B4-BE49-F238E27FC236}">
-                        <a16:creationId xmlns:a16="http://schemas.microsoft.com/office/drawing/2014/main" id="{B4400463-5AB1-3DEF-B5AE-C84169026D4D}"/>
-                      </a:ext>
-                    </a:extLst>
-                  </p14:cNvPr>
-                  <p14:cNvContentPartPr/>
-                  <p14:nvPr/>
-                </p14:nvContentPartPr>
-                <p14:xfrm>
-                  <a:off x="9423219" y="5189713"/>
-                  <a:ext cx="230400" cy="103680"/>
-                </p14:xfrm>
-              </p:contentPart>
-            </mc:Choice>
-            <mc:Fallback xmlns="">
-              <p:pic>
-                <p:nvPicPr>
-                  <p:cNvPr id="57" name="Ink 56">
-                    <a:extLst>
-                      <a:ext uri="{FF2B5EF4-FFF2-40B4-BE49-F238E27FC236}">
-                        <a16:creationId xmlns:a16="http://schemas.microsoft.com/office/drawing/2014/main" id="{FFD82EE3-E74E-9C00-229A-DBF15AC2B6F3}"/>
-                      </a:ext>
-                    </a:extLst>
-                  </p:cNvPr>
-                  <p:cNvPicPr/>
-                  <p:nvPr/>
-                </p:nvPicPr>
-                <p:blipFill>
-                  <a:blip r:embed="rId70"/>
-                  <a:stretch>
-                    <a:fillRect/>
-                  </a:stretch>
-                </p:blipFill>
-                <p:spPr>
-                  <a:xfrm>
-                    <a:off x="9405219" y="5172073"/>
-                    <a:ext cx="266040" cy="139320"/>
-                  </a:xfrm>
-                  <a:prstGeom prst="rect">
-                    <a:avLst/>
-                  </a:prstGeom>
-                </p:spPr>
-              </p:pic>
-            </mc:Fallback>
-          </mc:AlternateContent>
-          <mc:AlternateContent xmlns:mc="http://schemas.openxmlformats.org/markup-compatibility/2006" xmlns:p14="http://schemas.microsoft.com/office/powerpoint/2010/main">
-            <mc:Choice Requires="p14">
-              <p:contentPart p14:bwMode="auto" r:id="rId71">
-                <p14:nvContentPartPr>
-                  <p14:cNvPr id="9" name="Ink 8">
-                    <a:extLst>
-                      <a:ext uri="{FF2B5EF4-FFF2-40B4-BE49-F238E27FC236}">
-                        <a16:creationId xmlns:a16="http://schemas.microsoft.com/office/drawing/2014/main" id="{D7FA74DC-E89B-1B59-71FC-95DC3E988927}"/>
-                      </a:ext>
-                    </a:extLst>
-                  </p14:cNvPr>
-                  <p14:cNvContentPartPr/>
-                  <p14:nvPr/>
-                </p14:nvContentPartPr>
-                <p14:xfrm>
-                  <a:off x="9463899" y="5347033"/>
-                  <a:ext cx="226440" cy="41400"/>
-                </p14:xfrm>
-              </p:contentPart>
-            </mc:Choice>
-            <mc:Fallback xmlns="">
-              <p:pic>
-                <p:nvPicPr>
-                  <p:cNvPr id="58" name="Ink 57">
-                    <a:extLst>
-                      <a:ext uri="{FF2B5EF4-FFF2-40B4-BE49-F238E27FC236}">
-                        <a16:creationId xmlns:a16="http://schemas.microsoft.com/office/drawing/2014/main" id="{BF28F081-C564-2EBC-74EF-D66B60100372}"/>
-                      </a:ext>
-                    </a:extLst>
-                  </p:cNvPr>
-                  <p:cNvPicPr/>
-                  <p:nvPr/>
-                </p:nvPicPr>
-                <p:blipFill>
-                  <a:blip r:embed="rId72"/>
-                  <a:stretch>
-                    <a:fillRect/>
-                  </a:stretch>
-                </p:blipFill>
-                <p:spPr>
-                  <a:xfrm>
-                    <a:off x="9445899" y="5329033"/>
-                    <a:ext cx="262080" cy="77040"/>
-                  </a:xfrm>
-                  <a:prstGeom prst="rect">
-                    <a:avLst/>
-                  </a:prstGeom>
-                </p:spPr>
-              </p:pic>
-            </mc:Fallback>
-          </mc:AlternateContent>
-          <mc:AlternateContent xmlns:mc="http://schemas.openxmlformats.org/markup-compatibility/2006" xmlns:p14="http://schemas.microsoft.com/office/powerpoint/2010/main">
-            <mc:Choice Requires="p14">
-              <p:contentPart p14:bwMode="auto" r:id="rId73">
-                <p14:nvContentPartPr>
-                  <p14:cNvPr id="10" name="Ink 9">
-                    <a:extLst>
-                      <a:ext uri="{FF2B5EF4-FFF2-40B4-BE49-F238E27FC236}">
-                        <a16:creationId xmlns:a16="http://schemas.microsoft.com/office/drawing/2014/main" id="{DEE5F192-ACDF-4B05-6A83-5408A87E240D}"/>
-                      </a:ext>
-                    </a:extLst>
-                  </p14:cNvPr>
-                  <p14:cNvContentPartPr/>
-                  <p14:nvPr/>
-                </p14:nvContentPartPr>
-                <p14:xfrm>
-                  <a:off x="9997059" y="4988113"/>
-                  <a:ext cx="20520" cy="244800"/>
-                </p14:xfrm>
-              </p:contentPart>
-            </mc:Choice>
-            <mc:Fallback xmlns="">
-              <p:pic>
-                <p:nvPicPr>
-                  <p:cNvPr id="60" name="Ink 59">
-                    <a:extLst>
-                      <a:ext uri="{FF2B5EF4-FFF2-40B4-BE49-F238E27FC236}">
-                        <a16:creationId xmlns:a16="http://schemas.microsoft.com/office/drawing/2014/main" id="{54AA31B8-7340-4926-3A37-4303596A5A5B}"/>
-                      </a:ext>
-                    </a:extLst>
-                  </p:cNvPr>
-                  <p:cNvPicPr/>
-                  <p:nvPr/>
-                </p:nvPicPr>
-                <p:blipFill>
-                  <a:blip r:embed="rId74"/>
-                  <a:stretch>
-                    <a:fillRect/>
-                  </a:stretch>
-                </p:blipFill>
-                <p:spPr>
-                  <a:xfrm>
-                    <a:off x="9979059" y="4970113"/>
-                    <a:ext cx="56160" cy="280440"/>
-                  </a:xfrm>
-                  <a:prstGeom prst="rect">
-                    <a:avLst/>
-                  </a:prstGeom>
-                </p:spPr>
-              </p:pic>
-            </mc:Fallback>
-          </mc:AlternateContent>
-          <mc:AlternateContent xmlns:mc="http://schemas.openxmlformats.org/markup-compatibility/2006" xmlns:p14="http://schemas.microsoft.com/office/powerpoint/2010/main">
-            <mc:Choice Requires="p14">
-              <p:contentPart p14:bwMode="auto" r:id="rId75">
-                <p14:nvContentPartPr>
-                  <p14:cNvPr id="11" name="Ink 10">
-                    <a:extLst>
-                      <a:ext uri="{FF2B5EF4-FFF2-40B4-BE49-F238E27FC236}">
-                        <a16:creationId xmlns:a16="http://schemas.microsoft.com/office/drawing/2014/main" id="{A2AF6BD8-6720-4AEE-B40A-A7D655DF9C72}"/>
-                      </a:ext>
-                    </a:extLst>
-                  </p14:cNvPr>
-                  <p14:cNvContentPartPr/>
-                  <p14:nvPr/>
-                </p14:nvContentPartPr>
-                <p14:xfrm>
-                  <a:off x="9875379" y="5289793"/>
-                  <a:ext cx="311400" cy="51120"/>
-                </p14:xfrm>
-              </p:contentPart>
-            </mc:Choice>
-            <mc:Fallback xmlns="">
-              <p:pic>
-                <p:nvPicPr>
-                  <p:cNvPr id="61" name="Ink 60">
-                    <a:extLst>
-                      <a:ext uri="{FF2B5EF4-FFF2-40B4-BE49-F238E27FC236}">
-                        <a16:creationId xmlns:a16="http://schemas.microsoft.com/office/drawing/2014/main" id="{E18BA47A-E6A7-2724-CB14-45F0966F14F0}"/>
-                      </a:ext>
-                    </a:extLst>
-                  </p:cNvPr>
-                  <p:cNvPicPr/>
-                  <p:nvPr/>
-                </p:nvPicPr>
-                <p:blipFill>
-                  <a:blip r:embed="rId76"/>
-                  <a:stretch>
-                    <a:fillRect/>
-                  </a:stretch>
-                </p:blipFill>
-                <p:spPr>
-                  <a:xfrm>
-                    <a:off x="9857739" y="5272153"/>
-                    <a:ext cx="347040" cy="86760"/>
-                  </a:xfrm>
-                  <a:prstGeom prst="rect">
-                    <a:avLst/>
-                  </a:prstGeom>
-                </p:spPr>
-              </p:pic>
-            </mc:Fallback>
-          </mc:AlternateContent>
-          <mc:AlternateContent xmlns:mc="http://schemas.openxmlformats.org/markup-compatibility/2006" xmlns:p14="http://schemas.microsoft.com/office/powerpoint/2010/main">
-            <mc:Choice Requires="p14">
-              <p:contentPart p14:bwMode="auto" r:id="rId77">
-                <p14:nvContentPartPr>
-                  <p14:cNvPr id="12" name="Ink 11">
-                    <a:extLst>
-                      <a:ext uri="{FF2B5EF4-FFF2-40B4-BE49-F238E27FC236}">
-                        <a16:creationId xmlns:a16="http://schemas.microsoft.com/office/drawing/2014/main" id="{6C4BCE8F-63A7-A966-1363-B7CA57993693}"/>
-                      </a:ext>
-                    </a:extLst>
-                  </p14:cNvPr>
-                  <p14:cNvContentPartPr/>
-                  <p14:nvPr/>
-                </p14:nvContentPartPr>
-                <p14:xfrm>
-                  <a:off x="9884019" y="5461873"/>
-                  <a:ext cx="236520" cy="270720"/>
-                </p14:xfrm>
-              </p:contentPart>
-            </mc:Choice>
-            <mc:Fallback xmlns="">
-              <p:pic>
-                <p:nvPicPr>
-                  <p:cNvPr id="62" name="Ink 61">
-                    <a:extLst>
-                      <a:ext uri="{FF2B5EF4-FFF2-40B4-BE49-F238E27FC236}">
-                        <a16:creationId xmlns:a16="http://schemas.microsoft.com/office/drawing/2014/main" id="{C582BE45-4009-F6F6-7940-22026B575DE0}"/>
-                      </a:ext>
-                    </a:extLst>
-                  </p:cNvPr>
-                  <p:cNvPicPr/>
-                  <p:nvPr/>
-                </p:nvPicPr>
-                <p:blipFill>
-                  <a:blip r:embed="rId78"/>
-                  <a:stretch>
-                    <a:fillRect/>
-                  </a:stretch>
-                </p:blipFill>
-                <p:spPr>
-                  <a:xfrm>
-                    <a:off x="9866019" y="5443873"/>
-                    <a:ext cx="272160" cy="306360"/>
-                  </a:xfrm>
-                  <a:prstGeom prst="rect">
-                    <a:avLst/>
-                  </a:prstGeom>
-                </p:spPr>
-              </p:pic>
-            </mc:Fallback>
-          </mc:AlternateContent>
-          <mc:AlternateContent xmlns:mc="http://schemas.openxmlformats.org/markup-compatibility/2006" xmlns:p14="http://schemas.microsoft.com/office/powerpoint/2010/main">
-            <mc:Choice Requires="p14">
-              <p:contentPart p14:bwMode="auto" r:id="rId79">
-                <p14:nvContentPartPr>
-                  <p14:cNvPr id="18" name="Ink 17">
-                    <a:extLst>
-                      <a:ext uri="{FF2B5EF4-FFF2-40B4-BE49-F238E27FC236}">
-                        <a16:creationId xmlns:a16="http://schemas.microsoft.com/office/drawing/2014/main" id="{1228C5F5-C974-B171-9183-71ABFB4D9867}"/>
-                      </a:ext>
-                    </a:extLst>
-                  </p14:cNvPr>
-                  <p14:cNvContentPartPr/>
-                  <p14:nvPr/>
-                </p14:nvContentPartPr>
-                <p14:xfrm>
-                  <a:off x="10399899" y="4857433"/>
-                  <a:ext cx="501840" cy="744480"/>
-                </p14:xfrm>
-              </p:contentPart>
-            </mc:Choice>
-            <mc:Fallback xmlns="">
-              <p:pic>
-                <p:nvPicPr>
-                  <p:cNvPr id="128" name="Ink 127">
-                    <a:extLst>
-                      <a:ext uri="{FF2B5EF4-FFF2-40B4-BE49-F238E27FC236}">
-                        <a16:creationId xmlns:a16="http://schemas.microsoft.com/office/drawing/2014/main" id="{B357244C-A7E0-F15D-D75E-444042D3C8A1}"/>
-                      </a:ext>
-                    </a:extLst>
-                  </p:cNvPr>
-                  <p:cNvPicPr/>
-                  <p:nvPr/>
-                </p:nvPicPr>
-                <p:blipFill>
-                  <a:blip r:embed="rId80"/>
-                  <a:stretch>
-                    <a:fillRect/>
-                  </a:stretch>
-                </p:blipFill>
-                <p:spPr>
-                  <a:xfrm>
-                    <a:off x="10381899" y="4839793"/>
-                    <a:ext cx="537480" cy="780120"/>
-                  </a:xfrm>
-                  <a:prstGeom prst="rect">
-                    <a:avLst/>
-                  </a:prstGeom>
-                </p:spPr>
-              </p:pic>
-            </mc:Fallback>
-          </mc:AlternateContent>
-          <mc:AlternateContent xmlns:mc="http://schemas.openxmlformats.org/markup-compatibility/2006" xmlns:p14="http://schemas.microsoft.com/office/powerpoint/2010/main">
-            <mc:Choice Requires="p14">
-              <p:contentPart p14:bwMode="auto" r:id="rId81">
-                <p14:nvContentPartPr>
-                  <p14:cNvPr id="19" name="Ink 18">
-                    <a:extLst>
-                      <a:ext uri="{FF2B5EF4-FFF2-40B4-BE49-F238E27FC236}">
-                        <a16:creationId xmlns:a16="http://schemas.microsoft.com/office/drawing/2014/main" id="{96C4A551-6141-BB65-C7E8-A2F59326A55D}"/>
-                      </a:ext>
-                    </a:extLst>
-                  </p14:cNvPr>
-                  <p14:cNvContentPartPr/>
-                  <p14:nvPr/>
-                </p14:nvContentPartPr>
-                <p14:xfrm>
-                  <a:off x="10460739" y="5775073"/>
-                  <a:ext cx="26280" cy="151920"/>
-                </p14:xfrm>
-              </p:contentPart>
-            </mc:Choice>
-            <mc:Fallback xmlns="">
-              <p:pic>
-                <p:nvPicPr>
-                  <p:cNvPr id="130" name="Ink 129">
-                    <a:extLst>
-                      <a:ext uri="{FF2B5EF4-FFF2-40B4-BE49-F238E27FC236}">
-                        <a16:creationId xmlns:a16="http://schemas.microsoft.com/office/drawing/2014/main" id="{951038EA-3F81-3E9B-1AE6-6C58C8EAAFD2}"/>
-                      </a:ext>
-                    </a:extLst>
-                  </p:cNvPr>
-                  <p:cNvPicPr/>
-                  <p:nvPr/>
-                </p:nvPicPr>
-                <p:blipFill>
-                  <a:blip r:embed="rId82"/>
-                  <a:stretch>
-                    <a:fillRect/>
-                  </a:stretch>
-                </p:blipFill>
-                <p:spPr>
-                  <a:xfrm>
-                    <a:off x="10442739" y="5757073"/>
-                    <a:ext cx="61920" cy="187560"/>
-                  </a:xfrm>
-                  <a:prstGeom prst="rect">
-                    <a:avLst/>
-                  </a:prstGeom>
-                </p:spPr>
-              </p:pic>
-            </mc:Fallback>
-          </mc:AlternateContent>
-          <mc:AlternateContent xmlns:mc="http://schemas.openxmlformats.org/markup-compatibility/2006" xmlns:p14="http://schemas.microsoft.com/office/powerpoint/2010/main">
-            <mc:Choice Requires="p14">
-              <p:contentPart p14:bwMode="auto" r:id="rId83">
-                <p14:nvContentPartPr>
-                  <p14:cNvPr id="20" name="Ink 19">
-                    <a:extLst>
-                      <a:ext uri="{FF2B5EF4-FFF2-40B4-BE49-F238E27FC236}">
-                        <a16:creationId xmlns:a16="http://schemas.microsoft.com/office/drawing/2014/main" id="{30104DDB-4E45-BDB8-E255-7B48B06B5359}"/>
-                      </a:ext>
-                    </a:extLst>
-                  </p14:cNvPr>
-                  <p14:cNvContentPartPr/>
-                  <p14:nvPr/>
-                </p14:nvContentPartPr>
-                <p14:xfrm>
-                  <a:off x="10465419" y="5705593"/>
-                  <a:ext cx="30960" cy="21600"/>
-                </p14:xfrm>
-              </p:contentPart>
-            </mc:Choice>
-            <mc:Fallback xmlns="">
-              <p:pic>
-                <p:nvPicPr>
-                  <p:cNvPr id="131" name="Ink 130">
-                    <a:extLst>
-                      <a:ext uri="{FF2B5EF4-FFF2-40B4-BE49-F238E27FC236}">
-                        <a16:creationId xmlns:a16="http://schemas.microsoft.com/office/drawing/2014/main" id="{E7F14F09-A6A1-C243-6C09-810D35F11C18}"/>
-                      </a:ext>
-                    </a:extLst>
-                  </p:cNvPr>
-                  <p:cNvPicPr/>
-                  <p:nvPr/>
-                </p:nvPicPr>
-                <p:blipFill>
-                  <a:blip r:embed="rId84"/>
-                  <a:stretch>
-                    <a:fillRect/>
-                  </a:stretch>
-                </p:blipFill>
-                <p:spPr>
-                  <a:xfrm>
-                    <a:off x="10447419" y="5687593"/>
-                    <a:ext cx="66600" cy="57240"/>
-                  </a:xfrm>
-                  <a:prstGeom prst="rect">
-                    <a:avLst/>
-                  </a:prstGeom>
-                </p:spPr>
-              </p:pic>
-            </mc:Fallback>
-          </mc:AlternateContent>
-          <mc:AlternateContent xmlns:mc="http://schemas.openxmlformats.org/markup-compatibility/2006" xmlns:p14="http://schemas.microsoft.com/office/powerpoint/2010/main">
-            <mc:Choice Requires="p14">
-              <p:contentPart p14:bwMode="auto" r:id="rId85">
-                <p14:nvContentPartPr>
-                  <p14:cNvPr id="21" name="Ink 20">
-                    <a:extLst>
-                      <a:ext uri="{FF2B5EF4-FFF2-40B4-BE49-F238E27FC236}">
-                        <a16:creationId xmlns:a16="http://schemas.microsoft.com/office/drawing/2014/main" id="{9D8E963C-BB5B-F011-D1DD-A1461F583E4A}"/>
-                      </a:ext>
-                    </a:extLst>
-                  </p14:cNvPr>
-                  <p14:cNvContentPartPr/>
-                  <p14:nvPr/>
-                </p14:nvContentPartPr>
-                <p14:xfrm>
-                  <a:off x="10599339" y="5804953"/>
-                  <a:ext cx="122400" cy="22320"/>
-                </p14:xfrm>
-              </p:contentPart>
-            </mc:Choice>
-            <mc:Fallback xmlns="">
-              <p:pic>
-                <p:nvPicPr>
-                  <p:cNvPr id="132" name="Ink 131">
-                    <a:extLst>
-                      <a:ext uri="{FF2B5EF4-FFF2-40B4-BE49-F238E27FC236}">
-                        <a16:creationId xmlns:a16="http://schemas.microsoft.com/office/drawing/2014/main" id="{F82F6B9F-43AC-D135-D073-3B9EB29F1FAD}"/>
-                      </a:ext>
-                    </a:extLst>
-                  </p:cNvPr>
-                  <p:cNvPicPr/>
-                  <p:nvPr/>
-                </p:nvPicPr>
-                <p:blipFill>
-                  <a:blip r:embed="rId86"/>
-                  <a:stretch>
-                    <a:fillRect/>
-                  </a:stretch>
-                </p:blipFill>
-                <p:spPr>
-                  <a:xfrm>
-                    <a:off x="10581339" y="5786953"/>
-                    <a:ext cx="158040" cy="57960"/>
-                  </a:xfrm>
-                  <a:prstGeom prst="rect">
-                    <a:avLst/>
-                  </a:prstGeom>
-                </p:spPr>
-              </p:pic>
-            </mc:Fallback>
-          </mc:AlternateContent>
-          <mc:AlternateContent xmlns:mc="http://schemas.openxmlformats.org/markup-compatibility/2006" xmlns:p14="http://schemas.microsoft.com/office/powerpoint/2010/main">
-            <mc:Choice Requires="p14">
-              <p:contentPart p14:bwMode="auto" r:id="rId87">
-                <p14:nvContentPartPr>
-                  <p14:cNvPr id="22" name="Ink 21">
-                    <a:extLst>
-                      <a:ext uri="{FF2B5EF4-FFF2-40B4-BE49-F238E27FC236}">
-                        <a16:creationId xmlns:a16="http://schemas.microsoft.com/office/drawing/2014/main" id="{D00AC053-9121-A6D3-73DA-4D9E9A8E9CEA}"/>
-                      </a:ext>
-                    </a:extLst>
-                  </p14:cNvPr>
-                  <p14:cNvContentPartPr/>
-                  <p14:nvPr/>
-                </p14:nvContentPartPr>
-                <p14:xfrm>
-                  <a:off x="10593219" y="5866153"/>
-                  <a:ext cx="127800" cy="25560"/>
-                </p14:xfrm>
-              </p:contentPart>
-            </mc:Choice>
-            <mc:Fallback xmlns="">
-              <p:pic>
-                <p:nvPicPr>
-                  <p:cNvPr id="133" name="Ink 132">
-                    <a:extLst>
-                      <a:ext uri="{FF2B5EF4-FFF2-40B4-BE49-F238E27FC236}">
-                        <a16:creationId xmlns:a16="http://schemas.microsoft.com/office/drawing/2014/main" id="{13ED794A-E772-CD62-E5A6-3EFFD1B74F9E}"/>
-                      </a:ext>
-                    </a:extLst>
-                  </p:cNvPr>
-                  <p:cNvPicPr/>
-                  <p:nvPr/>
-                </p:nvPicPr>
-                <p:blipFill>
-                  <a:blip r:embed="rId88"/>
-                  <a:stretch>
-                    <a:fillRect/>
-                  </a:stretch>
-                </p:blipFill>
-                <p:spPr>
-                  <a:xfrm>
-                    <a:off x="10575579" y="5848513"/>
-                    <a:ext cx="163440" cy="61200"/>
-                  </a:xfrm>
-                  <a:prstGeom prst="rect">
-                    <a:avLst/>
-                  </a:prstGeom>
-                </p:spPr>
-              </p:pic>
-            </mc:Fallback>
-          </mc:AlternateContent>
-          <mc:AlternateContent xmlns:mc="http://schemas.openxmlformats.org/markup-compatibility/2006" xmlns:p14="http://schemas.microsoft.com/office/powerpoint/2010/main">
-            <mc:Choice Requires="p14">
-              <p:contentPart p14:bwMode="auto" r:id="rId89">
-                <p14:nvContentPartPr>
-                  <p14:cNvPr id="23" name="Ink 22">
-                    <a:extLst>
-                      <a:ext uri="{FF2B5EF4-FFF2-40B4-BE49-F238E27FC236}">
-                        <a16:creationId xmlns:a16="http://schemas.microsoft.com/office/drawing/2014/main" id="{0F2CD110-A9BC-FA05-74EC-055064CA4940}"/>
-                      </a:ext>
-                    </a:extLst>
-                  </p14:cNvPr>
-                  <p14:cNvContentPartPr/>
-                  <p14:nvPr/>
-                </p14:nvContentPartPr>
-                <p14:xfrm>
-                  <a:off x="10805619" y="5736913"/>
-                  <a:ext cx="30240" cy="226440"/>
-                </p14:xfrm>
-              </p:contentPart>
-            </mc:Choice>
-            <mc:Fallback xmlns="">
-              <p:pic>
-                <p:nvPicPr>
-                  <p:cNvPr id="134" name="Ink 133">
-                    <a:extLst>
-                      <a:ext uri="{FF2B5EF4-FFF2-40B4-BE49-F238E27FC236}">
-                        <a16:creationId xmlns:a16="http://schemas.microsoft.com/office/drawing/2014/main" id="{4D84E384-E672-AA73-1A79-9ECC807AC420}"/>
-                      </a:ext>
-                    </a:extLst>
-                  </p:cNvPr>
-                  <p:cNvPicPr/>
-                  <p:nvPr/>
-                </p:nvPicPr>
-                <p:blipFill>
-                  <a:blip r:embed="rId90"/>
-                  <a:stretch>
-                    <a:fillRect/>
-                  </a:stretch>
-                </p:blipFill>
-                <p:spPr>
-                  <a:xfrm>
-                    <a:off x="10787619" y="5718913"/>
-                    <a:ext cx="65880" cy="262080"/>
-                  </a:xfrm>
-                  <a:prstGeom prst="rect">
-                    <a:avLst/>
-                  </a:prstGeom>
-                </p:spPr>
-              </p:pic>
-            </mc:Fallback>
-          </mc:AlternateContent>
-          <mc:AlternateContent xmlns:mc="http://schemas.openxmlformats.org/markup-compatibility/2006" xmlns:p14="http://schemas.microsoft.com/office/powerpoint/2010/main">
-            <mc:Choice Requires="p14">
-              <p:contentPart p14:bwMode="auto" r:id="rId91">
-                <p14:nvContentPartPr>
-                  <p14:cNvPr id="24" name="Ink 23">
-                    <a:extLst>
-                      <a:ext uri="{FF2B5EF4-FFF2-40B4-BE49-F238E27FC236}">
-                        <a16:creationId xmlns:a16="http://schemas.microsoft.com/office/drawing/2014/main" id="{2F10EE69-16FC-A0B8-2C4F-2C2CC0BA6477}"/>
-                      </a:ext>
-                    </a:extLst>
-                  </p14:cNvPr>
-                  <p14:cNvContentPartPr/>
-                  <p14:nvPr/>
-                </p14:nvContentPartPr>
-                <p14:xfrm>
-                  <a:off x="10588899" y="4558633"/>
-                  <a:ext cx="214920" cy="227520"/>
-                </p14:xfrm>
-              </p:contentPart>
-            </mc:Choice>
-            <mc:Fallback xmlns="">
-              <p:pic>
-                <p:nvPicPr>
-                  <p:cNvPr id="135" name="Ink 134">
-                    <a:extLst>
-                      <a:ext uri="{FF2B5EF4-FFF2-40B4-BE49-F238E27FC236}">
-                        <a16:creationId xmlns:a16="http://schemas.microsoft.com/office/drawing/2014/main" id="{E0B1CEC3-EA27-8714-48C5-14E31AD99652}"/>
-                      </a:ext>
-                    </a:extLst>
-                  </p:cNvPr>
-                  <p:cNvPicPr/>
-                  <p:nvPr/>
-                </p:nvPicPr>
-                <p:blipFill>
-                  <a:blip r:embed="rId92"/>
-                  <a:stretch>
-                    <a:fillRect/>
-                  </a:stretch>
-                </p:blipFill>
-                <p:spPr>
-                  <a:xfrm>
-                    <a:off x="10570899" y="4540633"/>
-                    <a:ext cx="250560" cy="263160"/>
-                  </a:xfrm>
-                  <a:prstGeom prst="rect">
-                    <a:avLst/>
-                  </a:prstGeom>
-                </p:spPr>
-              </p:pic>
-            </mc:Fallback>
-          </mc:AlternateContent>
-        </p:grpSp>
-        <p:grpSp>
-          <p:nvGrpSpPr>
-            <p:cNvPr id="25" name="Group 24">
-              <a:extLst>
-                <a:ext uri="{FF2B5EF4-FFF2-40B4-BE49-F238E27FC236}">
-                  <a16:creationId xmlns:a16="http://schemas.microsoft.com/office/drawing/2014/main" id="{00CB87C7-0F33-9810-223A-3BBA26953A59}"/>
-                </a:ext>
-              </a:extLst>
-            </p:cNvPr>
-            <p:cNvGrpSpPr/>
-            <p:nvPr/>
-          </p:nvGrpSpPr>
-          <p:grpSpPr>
-            <a:xfrm>
-              <a:off x="11035299" y="5052913"/>
-              <a:ext cx="735840" cy="469800"/>
-              <a:chOff x="11035299" y="5052913"/>
-              <a:chExt cx="735840" cy="469800"/>
-            </a:xfrm>
-          </p:grpSpPr>
-          <mc:AlternateContent xmlns:mc="http://schemas.openxmlformats.org/markup-compatibility/2006" xmlns:p14="http://schemas.microsoft.com/office/powerpoint/2010/main">
-            <mc:Choice Requires="p14">
-              <p:contentPart p14:bwMode="auto" r:id="rId93">
-                <p14:nvContentPartPr>
-                  <p14:cNvPr id="26" name="Ink 25">
-                    <a:extLst>
-                      <a:ext uri="{FF2B5EF4-FFF2-40B4-BE49-F238E27FC236}">
-                        <a16:creationId xmlns:a16="http://schemas.microsoft.com/office/drawing/2014/main" id="{7DF1EA0A-92E1-32E7-2413-9473D1CF7CE6}"/>
-                      </a:ext>
-                    </a:extLst>
-                  </p14:cNvPr>
-                  <p14:cNvContentPartPr/>
-                  <p14:nvPr/>
-                </p14:nvContentPartPr>
-                <p14:xfrm>
-                  <a:off x="11035299" y="5140753"/>
-                  <a:ext cx="135000" cy="245520"/>
-                </p14:xfrm>
-              </p:contentPart>
-            </mc:Choice>
-            <mc:Fallback xmlns="">
-              <p:pic>
-                <p:nvPicPr>
-                  <p:cNvPr id="137" name="Ink 136">
-                    <a:extLst>
-                      <a:ext uri="{FF2B5EF4-FFF2-40B4-BE49-F238E27FC236}">
-                        <a16:creationId xmlns:a16="http://schemas.microsoft.com/office/drawing/2014/main" id="{1C0B5351-E854-F97A-9DD4-A5E2968A349D}"/>
-                      </a:ext>
-                    </a:extLst>
-                  </p:cNvPr>
-                  <p:cNvPicPr/>
-                  <p:nvPr/>
-                </p:nvPicPr>
-                <p:blipFill>
-                  <a:blip r:embed="rId94"/>
-                  <a:stretch>
-                    <a:fillRect/>
-                  </a:stretch>
-                </p:blipFill>
-                <p:spPr>
-                  <a:xfrm>
-                    <a:off x="11017299" y="5123113"/>
-                    <a:ext cx="170640" cy="281160"/>
-                  </a:xfrm>
-                  <a:prstGeom prst="rect">
-                    <a:avLst/>
-                  </a:prstGeom>
-                </p:spPr>
-              </p:pic>
-            </mc:Fallback>
-          </mc:AlternateContent>
-          <mc:AlternateContent xmlns:mc="http://schemas.openxmlformats.org/markup-compatibility/2006" xmlns:p14="http://schemas.microsoft.com/office/powerpoint/2010/main">
-            <mc:Choice Requires="p14">
-              <p:contentPart p14:bwMode="auto" r:id="rId95">
-                <p14:nvContentPartPr>
-                  <p14:cNvPr id="27" name="Ink 26">
-                    <a:extLst>
-                      <a:ext uri="{FF2B5EF4-FFF2-40B4-BE49-F238E27FC236}">
-                        <a16:creationId xmlns:a16="http://schemas.microsoft.com/office/drawing/2014/main" id="{902FEEE6-894B-8DDE-2780-4115190FB345}"/>
-                      </a:ext>
-                    </a:extLst>
-                  </p14:cNvPr>
-                  <p14:cNvContentPartPr/>
-                  <p14:nvPr/>
-                </p14:nvContentPartPr>
-                <p14:xfrm>
-                  <a:off x="11258499" y="5377273"/>
-                  <a:ext cx="45720" cy="145440"/>
-                </p14:xfrm>
-              </p:contentPart>
-            </mc:Choice>
-            <mc:Fallback xmlns="">
-              <p:pic>
-                <p:nvPicPr>
-                  <p:cNvPr id="138" name="Ink 137">
-                    <a:extLst>
-                      <a:ext uri="{FF2B5EF4-FFF2-40B4-BE49-F238E27FC236}">
-                        <a16:creationId xmlns:a16="http://schemas.microsoft.com/office/drawing/2014/main" id="{6F0F127B-FADC-5B33-FFF1-718BF70EC972}"/>
-                      </a:ext>
-                    </a:extLst>
-                  </p:cNvPr>
-                  <p:cNvPicPr/>
-                  <p:nvPr/>
-                </p:nvPicPr>
-                <p:blipFill>
-                  <a:blip r:embed="rId96"/>
-                  <a:stretch>
-                    <a:fillRect/>
-                  </a:stretch>
-                </p:blipFill>
-                <p:spPr>
-                  <a:xfrm>
-                    <a:off x="11240499" y="5359633"/>
-                    <a:ext cx="81360" cy="181080"/>
-                  </a:xfrm>
-                  <a:prstGeom prst="rect">
-                    <a:avLst/>
-                  </a:prstGeom>
-                </p:spPr>
-              </p:pic>
-            </mc:Fallback>
-          </mc:AlternateContent>
-          <mc:AlternateContent xmlns:mc="http://schemas.openxmlformats.org/markup-compatibility/2006" xmlns:p14="http://schemas.microsoft.com/office/powerpoint/2010/main">
-            <mc:Choice Requires="p14">
-              <p:contentPart p14:bwMode="auto" r:id="rId97">
-                <p14:nvContentPartPr>
-                  <p14:cNvPr id="28" name="Ink 27">
-                    <a:extLst>
-                      <a:ext uri="{FF2B5EF4-FFF2-40B4-BE49-F238E27FC236}">
-                        <a16:creationId xmlns:a16="http://schemas.microsoft.com/office/drawing/2014/main" id="{73DFBEE3-54C6-8150-DBD5-16DDD98D02DA}"/>
-                      </a:ext>
-                    </a:extLst>
-                  </p14:cNvPr>
-                  <p14:cNvContentPartPr/>
-                  <p14:nvPr/>
-                </p14:nvContentPartPr>
-                <p14:xfrm>
-                  <a:off x="11272539" y="5280073"/>
-                  <a:ext cx="12960" cy="23760"/>
-                </p14:xfrm>
-              </p:contentPart>
-            </mc:Choice>
-            <mc:Fallback xmlns="">
-              <p:pic>
-                <p:nvPicPr>
-                  <p:cNvPr id="139" name="Ink 138">
-                    <a:extLst>
-                      <a:ext uri="{FF2B5EF4-FFF2-40B4-BE49-F238E27FC236}">
-                        <a16:creationId xmlns:a16="http://schemas.microsoft.com/office/drawing/2014/main" id="{71FE41B3-8F21-C5DB-37D1-D66F55C1694B}"/>
-                      </a:ext>
-                    </a:extLst>
-                  </p:cNvPr>
-                  <p:cNvPicPr/>
-                  <p:nvPr/>
-                </p:nvPicPr>
-                <p:blipFill>
-                  <a:blip r:embed="rId98"/>
-                  <a:stretch>
-                    <a:fillRect/>
-                  </a:stretch>
-                </p:blipFill>
-                <p:spPr>
-                  <a:xfrm>
-                    <a:off x="11254539" y="5262073"/>
-                    <a:ext cx="48600" cy="59400"/>
-                  </a:xfrm>
-                  <a:prstGeom prst="rect">
-                    <a:avLst/>
-                  </a:prstGeom>
-                </p:spPr>
-              </p:pic>
-            </mc:Fallback>
-          </mc:AlternateContent>
-          <mc:AlternateContent xmlns:mc="http://schemas.openxmlformats.org/markup-compatibility/2006" xmlns:p14="http://schemas.microsoft.com/office/powerpoint/2010/main">
-            <mc:Choice Requires="p14">
-              <p:contentPart p14:bwMode="auto" r:id="rId99">
-                <p14:nvContentPartPr>
-                  <p14:cNvPr id="29" name="Ink 28">
-                    <a:extLst>
-                      <a:ext uri="{FF2B5EF4-FFF2-40B4-BE49-F238E27FC236}">
-                        <a16:creationId xmlns:a16="http://schemas.microsoft.com/office/drawing/2014/main" id="{99FA8DCD-62FD-9B2D-019E-53FEDA18B231}"/>
-                      </a:ext>
-                    </a:extLst>
-                  </p14:cNvPr>
-                  <p14:cNvContentPartPr/>
-                  <p14:nvPr/>
-                </p14:nvContentPartPr>
-                <p14:xfrm>
-                  <a:off x="11450019" y="5052913"/>
-                  <a:ext cx="109440" cy="395280"/>
-                </p14:xfrm>
-              </p:contentPart>
-            </mc:Choice>
-            <mc:Fallback xmlns="">
-              <p:pic>
-                <p:nvPicPr>
-                  <p:cNvPr id="140" name="Ink 139">
-                    <a:extLst>
-                      <a:ext uri="{FF2B5EF4-FFF2-40B4-BE49-F238E27FC236}">
-                        <a16:creationId xmlns:a16="http://schemas.microsoft.com/office/drawing/2014/main" id="{ED3AF57E-E82A-C1AC-F7BA-59288964CC1C}"/>
-                      </a:ext>
-                    </a:extLst>
-                  </p:cNvPr>
-                  <p:cNvPicPr/>
-                  <p:nvPr/>
-                </p:nvPicPr>
-                <p:blipFill>
-                  <a:blip r:embed="rId100"/>
-                  <a:stretch>
-                    <a:fillRect/>
-                  </a:stretch>
-                </p:blipFill>
-                <p:spPr>
-                  <a:xfrm>
-                    <a:off x="11432019" y="5035273"/>
-                    <a:ext cx="145080" cy="430920"/>
-                  </a:xfrm>
-                  <a:prstGeom prst="rect">
-                    <a:avLst/>
-                  </a:prstGeom>
-                </p:spPr>
-              </p:pic>
-            </mc:Fallback>
-          </mc:AlternateContent>
-          <mc:AlternateContent xmlns:mc="http://schemas.openxmlformats.org/markup-compatibility/2006" xmlns:p14="http://schemas.microsoft.com/office/powerpoint/2010/main">
-            <mc:Choice Requires="p14">
-              <p:contentPart p14:bwMode="auto" r:id="rId101">
-                <p14:nvContentPartPr>
-                  <p14:cNvPr id="30" name="Ink 29">
-                    <a:extLst>
-                      <a:ext uri="{FF2B5EF4-FFF2-40B4-BE49-F238E27FC236}">
-                        <a16:creationId xmlns:a16="http://schemas.microsoft.com/office/drawing/2014/main" id="{0337EF08-9D41-6D68-BA59-0CE8304ACDF9}"/>
-                      </a:ext>
-                    </a:extLst>
-                  </p14:cNvPr>
-                  <p14:cNvContentPartPr/>
-                  <p14:nvPr/>
-                </p14:nvContentPartPr>
-                <p14:xfrm>
-                  <a:off x="11550819" y="5218153"/>
-                  <a:ext cx="117720" cy="220680"/>
-                </p14:xfrm>
-              </p:contentPart>
-            </mc:Choice>
-            <mc:Fallback xmlns="">
-              <p:pic>
-                <p:nvPicPr>
-                  <p:cNvPr id="141" name="Ink 140">
-                    <a:extLst>
-                      <a:ext uri="{FF2B5EF4-FFF2-40B4-BE49-F238E27FC236}">
-                        <a16:creationId xmlns:a16="http://schemas.microsoft.com/office/drawing/2014/main" id="{FE25B9B0-6BAE-EF07-5CFE-DB3427AB43FE}"/>
-                      </a:ext>
-                    </a:extLst>
-                  </p:cNvPr>
-                  <p:cNvPicPr/>
-                  <p:nvPr/>
-                </p:nvPicPr>
-                <p:blipFill>
-                  <a:blip r:embed="rId102"/>
-                  <a:stretch>
-                    <a:fillRect/>
-                  </a:stretch>
-                </p:blipFill>
-                <p:spPr>
-                  <a:xfrm>
-                    <a:off x="11532819" y="5200513"/>
-                    <a:ext cx="153360" cy="256320"/>
-                  </a:xfrm>
-                  <a:prstGeom prst="rect">
-                    <a:avLst/>
-                  </a:prstGeom>
-                </p:spPr>
-              </p:pic>
-            </mc:Fallback>
-          </mc:AlternateContent>
-          <mc:AlternateContent xmlns:mc="http://schemas.openxmlformats.org/markup-compatibility/2006" xmlns:p14="http://schemas.microsoft.com/office/powerpoint/2010/main">
-            <mc:Choice Requires="p14">
-              <p:contentPart p14:bwMode="auto" r:id="rId103">
-                <p14:nvContentPartPr>
-                  <p14:cNvPr id="31" name="Ink 30">
-                    <a:extLst>
-                      <a:ext uri="{FF2B5EF4-FFF2-40B4-BE49-F238E27FC236}">
-                        <a16:creationId xmlns:a16="http://schemas.microsoft.com/office/drawing/2014/main" id="{7B6D3893-8BD2-3557-F34C-9E68CC839304}"/>
-                      </a:ext>
-                    </a:extLst>
-                  </p14:cNvPr>
-                  <p14:cNvContentPartPr/>
-                  <p14:nvPr/>
-                </p14:nvContentPartPr>
-                <p14:xfrm>
-                  <a:off x="11716059" y="5079553"/>
-                  <a:ext cx="55080" cy="438840"/>
-                </p14:xfrm>
-              </p:contentPart>
-            </mc:Choice>
-            <mc:Fallback xmlns="">
-              <p:pic>
-                <p:nvPicPr>
-                  <p:cNvPr id="142" name="Ink 141">
-                    <a:extLst>
-                      <a:ext uri="{FF2B5EF4-FFF2-40B4-BE49-F238E27FC236}">
-                        <a16:creationId xmlns:a16="http://schemas.microsoft.com/office/drawing/2014/main" id="{A06EE5A2-EA47-73EC-5CEB-6384ED0A29F6}"/>
-                      </a:ext>
-                    </a:extLst>
-                  </p:cNvPr>
-                  <p:cNvPicPr/>
-                  <p:nvPr/>
-                </p:nvPicPr>
-                <p:blipFill>
-                  <a:blip r:embed="rId104"/>
-                  <a:stretch>
-                    <a:fillRect/>
-                  </a:stretch>
-                </p:blipFill>
-                <p:spPr>
-                  <a:xfrm>
-                    <a:off x="11698419" y="5061553"/>
-                    <a:ext cx="90720" cy="474480"/>
-                  </a:xfrm>
-                  <a:prstGeom prst="rect">
-                    <a:avLst/>
-                  </a:prstGeom>
-                </p:spPr>
-              </p:pic>
-            </mc:Fallback>
-          </mc:AlternateContent>
-        </p:grpSp>
-        <mc:AlternateContent xmlns:mc="http://schemas.openxmlformats.org/markup-compatibility/2006" xmlns:p14="http://schemas.microsoft.com/office/powerpoint/2010/main">
-          <mc:Choice Requires="p14">
-            <p:contentPart p14:bwMode="auto" r:id="rId105">
-              <p14:nvContentPartPr>
-                <p14:cNvPr id="32" name="Ink 31">
-                  <a:extLst>
-                    <a:ext uri="{FF2B5EF4-FFF2-40B4-BE49-F238E27FC236}">
-                      <a16:creationId xmlns:a16="http://schemas.microsoft.com/office/drawing/2014/main" id="{184F525F-E24F-53F2-1828-EE6DF3772E2F}"/>
-                    </a:ext>
-                  </a:extLst>
-                </p14:cNvPr>
-                <p14:cNvContentPartPr/>
-                <p14:nvPr/>
-              </p14:nvContentPartPr>
-              <p14:xfrm>
-                <a:off x="9346539" y="4389433"/>
-                <a:ext cx="77400" cy="342000"/>
-              </p14:xfrm>
-            </p:contentPart>
-          </mc:Choice>
-          <mc:Fallback xmlns="">
-            <p:pic>
-              <p:nvPicPr>
-                <p:cNvPr id="32" name="Ink 31">
-                  <a:extLst>
-                    <a:ext uri="{FF2B5EF4-FFF2-40B4-BE49-F238E27FC236}">
-                      <a16:creationId xmlns:a16="http://schemas.microsoft.com/office/drawing/2014/main" id="{BDF44944-2237-3E10-A25C-4DD311289A79}"/>
-                    </a:ext>
-                  </a:extLst>
-                </p:cNvPr>
-                <p:cNvPicPr/>
-                <p:nvPr/>
-              </p:nvPicPr>
-              <p:blipFill>
-                <a:blip r:embed="rId106"/>
-                <a:stretch>
-                  <a:fillRect/>
-                </a:stretch>
-              </p:blipFill>
-              <p:spPr>
-                <a:xfrm>
-                  <a:off x="9318291" y="4355772"/>
-                  <a:ext cx="133331" cy="408650"/>
-                </a:xfrm>
-                <a:prstGeom prst="rect">
-                  <a:avLst/>
-                </a:prstGeom>
-              </p:spPr>
-            </p:pic>
-          </mc:Fallback>
-        </mc:AlternateContent>
-        <mc:AlternateContent xmlns:mc="http://schemas.openxmlformats.org/markup-compatibility/2006" xmlns:p14="http://schemas.microsoft.com/office/powerpoint/2010/main">
-          <mc:Choice Requires="p14">
-            <p:contentPart p14:bwMode="auto" r:id="rId107">
-              <p14:nvContentPartPr>
-                <p14:cNvPr id="33" name="Ink 32">
-                  <a:extLst>
-                    <a:ext uri="{FF2B5EF4-FFF2-40B4-BE49-F238E27FC236}">
-                      <a16:creationId xmlns:a16="http://schemas.microsoft.com/office/drawing/2014/main" id="{7266C4B7-24B2-6C56-BF4B-B09CAE3338B8}"/>
-                    </a:ext>
-                  </a:extLst>
-                </p14:cNvPr>
-                <p14:cNvContentPartPr/>
-                <p14:nvPr/>
-              </p14:nvContentPartPr>
-              <p14:xfrm>
-                <a:off x="9309819" y="4362073"/>
-                <a:ext cx="274680" cy="327960"/>
-              </p14:xfrm>
-            </p:contentPart>
-          </mc:Choice>
-          <mc:Fallback xmlns="">
-            <p:pic>
-              <p:nvPicPr>
-                <p:cNvPr id="33" name="Ink 32">
-                  <a:extLst>
-                    <a:ext uri="{FF2B5EF4-FFF2-40B4-BE49-F238E27FC236}">
-                      <a16:creationId xmlns:a16="http://schemas.microsoft.com/office/drawing/2014/main" id="{23EC2E60-D3AA-E9BB-7948-E7833A2F0311}"/>
-                    </a:ext>
-                  </a:extLst>
-                </p:cNvPr>
-                <p:cNvPicPr/>
-                <p:nvPr/>
-              </p:nvPicPr>
-              <p:blipFill>
-                <a:blip r:embed="rId108"/>
-                <a:stretch>
-                  <a:fillRect/>
-                </a:stretch>
-              </p:blipFill>
-              <p:spPr>
-                <a:xfrm>
-                  <a:off x="9281443" y="4328402"/>
-                  <a:ext cx="330865" cy="394629"/>
-                </a:xfrm>
-                <a:prstGeom prst="rect">
-                  <a:avLst/>
-                </a:prstGeom>
-              </p:spPr>
-            </p:pic>
-          </mc:Fallback>
-        </mc:AlternateContent>
-        <mc:AlternateContent xmlns:mc="http://schemas.openxmlformats.org/markup-compatibility/2006" xmlns:p14="http://schemas.microsoft.com/office/powerpoint/2010/main">
-          <mc:Choice Requires="p14">
-            <p:contentPart p14:bwMode="auto" r:id="rId109">
-              <p14:nvContentPartPr>
-                <p14:cNvPr id="34" name="Ink 33">
-                  <a:extLst>
-                    <a:ext uri="{FF2B5EF4-FFF2-40B4-BE49-F238E27FC236}">
-                      <a16:creationId xmlns:a16="http://schemas.microsoft.com/office/drawing/2014/main" id="{D0FF7571-D5D2-F952-A7ED-92D27507D3B1}"/>
-                    </a:ext>
-                  </a:extLst>
-                </p14:cNvPr>
-                <p14:cNvContentPartPr/>
-                <p14:nvPr/>
-              </p14:nvContentPartPr>
-              <p14:xfrm>
-                <a:off x="9583059" y="4472233"/>
-                <a:ext cx="158760" cy="201600"/>
-              </p14:xfrm>
-            </p:contentPart>
-          </mc:Choice>
-          <mc:Fallback xmlns="">
-            <p:pic>
-              <p:nvPicPr>
-                <p:cNvPr id="34" name="Ink 33">
-                  <a:extLst>
-                    <a:ext uri="{FF2B5EF4-FFF2-40B4-BE49-F238E27FC236}">
-                      <a16:creationId xmlns:a16="http://schemas.microsoft.com/office/drawing/2014/main" id="{EA83B7A7-EC2E-E7CF-DFF3-8DD8677DF053}"/>
-                    </a:ext>
-                  </a:extLst>
-                </p:cNvPr>
-                <p:cNvPicPr/>
-                <p:nvPr/>
-              </p:nvPicPr>
-              <p:blipFill>
-                <a:blip r:embed="rId110"/>
-                <a:stretch>
-                  <a:fillRect/>
-                </a:stretch>
-              </p:blipFill>
-              <p:spPr>
-                <a:xfrm>
-                  <a:off x="9554709" y="4438633"/>
-                  <a:ext cx="214893" cy="268128"/>
-                </a:xfrm>
-                <a:prstGeom prst="rect">
-                  <a:avLst/>
-                </a:prstGeom>
-              </p:spPr>
-            </p:pic>
-          </mc:Fallback>
-        </mc:AlternateContent>
-        <mc:AlternateContent xmlns:mc="http://schemas.openxmlformats.org/markup-compatibility/2006" xmlns:p14="http://schemas.microsoft.com/office/powerpoint/2010/main">
-          <mc:Choice Requires="p14">
-            <p:contentPart p14:bwMode="auto" r:id="rId111">
-              <p14:nvContentPartPr>
-                <p14:cNvPr id="35" name="Ink 34">
-                  <a:extLst>
-                    <a:ext uri="{FF2B5EF4-FFF2-40B4-BE49-F238E27FC236}">
-                      <a16:creationId xmlns:a16="http://schemas.microsoft.com/office/drawing/2014/main" id="{C6548EA6-166A-0FBF-3DC5-FA7AA97BD79B}"/>
-                    </a:ext>
-                  </a:extLst>
-                </p14:cNvPr>
-                <p14:cNvContentPartPr/>
-                <p14:nvPr/>
-              </p14:nvContentPartPr>
-              <p14:xfrm>
-                <a:off x="9788259" y="4468633"/>
-                <a:ext cx="200880" cy="140400"/>
-              </p14:xfrm>
-            </p:contentPart>
-          </mc:Choice>
-          <mc:Fallback xmlns="">
-            <p:pic>
-              <p:nvPicPr>
-                <p:cNvPr id="35" name="Ink 34">
-                  <a:extLst>
-                    <a:ext uri="{FF2B5EF4-FFF2-40B4-BE49-F238E27FC236}">
-                      <a16:creationId xmlns:a16="http://schemas.microsoft.com/office/drawing/2014/main" id="{F0B31749-BBD2-50C3-62EA-C051C4B63D0F}"/>
-                    </a:ext>
-                  </a:extLst>
-                </p:cNvPr>
-                <p:cNvPicPr/>
-                <p:nvPr/>
-              </p:nvPicPr>
-              <p:blipFill>
-                <a:blip r:embed="rId112"/>
-                <a:stretch>
-                  <a:fillRect/>
-                </a:stretch>
-              </p:blipFill>
-              <p:spPr>
-                <a:xfrm>
-                  <a:off x="9759886" y="4435044"/>
-                  <a:ext cx="257058" cy="206905"/>
-                </a:xfrm>
-                <a:prstGeom prst="rect">
-                  <a:avLst/>
-                </a:prstGeom>
-              </p:spPr>
-            </p:pic>
-          </mc:Fallback>
-        </mc:AlternateContent>
-        <mc:AlternateContent xmlns:mc="http://schemas.openxmlformats.org/markup-compatibility/2006" xmlns:p14="http://schemas.microsoft.com/office/powerpoint/2010/main">
-          <mc:Choice Requires="p14">
-            <p:contentPart p14:bwMode="auto" r:id="rId113">
-              <p14:nvContentPartPr>
-                <p14:cNvPr id="36" name="Ink 35">
-                  <a:extLst>
-                    <a:ext uri="{FF2B5EF4-FFF2-40B4-BE49-F238E27FC236}">
-                      <a16:creationId xmlns:a16="http://schemas.microsoft.com/office/drawing/2014/main" id="{3E1CCDD4-122F-5FEB-D291-2EDEC372DBFB}"/>
-                    </a:ext>
-                  </a:extLst>
-                </p14:cNvPr>
-                <p14:cNvContentPartPr/>
-                <p14:nvPr/>
-              </p14:nvContentPartPr>
-              <p14:xfrm>
-                <a:off x="10021179" y="4170193"/>
-                <a:ext cx="324360" cy="360360"/>
-              </p14:xfrm>
-            </p:contentPart>
-          </mc:Choice>
-          <mc:Fallback xmlns="">
-            <p:pic>
-              <p:nvPicPr>
-                <p:cNvPr id="36" name="Ink 35">
-                  <a:extLst>
-                    <a:ext uri="{FF2B5EF4-FFF2-40B4-BE49-F238E27FC236}">
-                      <a16:creationId xmlns:a16="http://schemas.microsoft.com/office/drawing/2014/main" id="{9E06490F-D3C4-0828-7DA9-9BF27CA9A1C9}"/>
-                    </a:ext>
-                  </a:extLst>
-                </p:cNvPr>
-                <p:cNvPicPr/>
-                <p:nvPr/>
-              </p:nvPicPr>
-              <p:blipFill>
-                <a:blip r:embed="rId114"/>
-                <a:stretch>
-                  <a:fillRect/>
-                </a:stretch>
-              </p:blipFill>
-              <p:spPr>
-                <a:xfrm>
-                  <a:off x="9992776" y="4136514"/>
-                  <a:ext cx="380598" cy="427043"/>
-                </a:xfrm>
-                <a:prstGeom prst="rect">
-                  <a:avLst/>
-                </a:prstGeom>
-              </p:spPr>
-            </p:pic>
-          </mc:Fallback>
-        </mc:AlternateContent>
-        <mc:AlternateContent xmlns:mc="http://schemas.openxmlformats.org/markup-compatibility/2006" xmlns:p14="http://schemas.microsoft.com/office/powerpoint/2010/main">
-          <mc:Choice Requires="p14">
-            <p:contentPart p14:bwMode="auto" r:id="rId115">
-              <p14:nvContentPartPr>
-                <p14:cNvPr id="37" name="Ink 36">
-                  <a:extLst>
-                    <a:ext uri="{FF2B5EF4-FFF2-40B4-BE49-F238E27FC236}">
-                      <a16:creationId xmlns:a16="http://schemas.microsoft.com/office/drawing/2014/main" id="{2E5A39D1-D64C-79CF-175A-E150C43ABBD8}"/>
-                    </a:ext>
-                  </a:extLst>
-                </p14:cNvPr>
-                <p14:cNvContentPartPr/>
-                <p14:nvPr/>
-              </p14:nvContentPartPr>
-              <p14:xfrm>
-                <a:off x="10501779" y="4018633"/>
-                <a:ext cx="453960" cy="330120"/>
-              </p14:xfrm>
-            </p:contentPart>
-          </mc:Choice>
-          <mc:Fallback xmlns="">
-            <p:pic>
-              <p:nvPicPr>
-                <p:cNvPr id="37" name="Ink 36">
-                  <a:extLst>
-                    <a:ext uri="{FF2B5EF4-FFF2-40B4-BE49-F238E27FC236}">
-                      <a16:creationId xmlns:a16="http://schemas.microsoft.com/office/drawing/2014/main" id="{AF04F5A1-B1EC-B998-14B1-ADEBD00BC11A}"/>
-                    </a:ext>
-                  </a:extLst>
-                </p:cNvPr>
-                <p:cNvPicPr/>
-                <p:nvPr/>
-              </p:nvPicPr>
-              <p:blipFill>
-                <a:blip r:embed="rId116"/>
-                <a:stretch>
-                  <a:fillRect/>
-                </a:stretch>
-              </p:blipFill>
-              <p:spPr>
-                <a:xfrm>
-                  <a:off x="10473406" y="3985016"/>
-                  <a:ext cx="510138" cy="396682"/>
-                </a:xfrm>
-                <a:prstGeom prst="rect">
-                  <a:avLst/>
-                </a:prstGeom>
-              </p:spPr>
-            </p:pic>
-          </mc:Fallback>
-        </mc:AlternateContent>
-        <mc:AlternateContent xmlns:mc="http://schemas.openxmlformats.org/markup-compatibility/2006" xmlns:p14="http://schemas.microsoft.com/office/powerpoint/2010/main">
-          <mc:Choice Requires="p14">
-            <p:contentPart p14:bwMode="auto" r:id="rId117">
-              <p14:nvContentPartPr>
-                <p14:cNvPr id="38" name="Ink 37">
-                  <a:extLst>
-                    <a:ext uri="{FF2B5EF4-FFF2-40B4-BE49-F238E27FC236}">
-                      <a16:creationId xmlns:a16="http://schemas.microsoft.com/office/drawing/2014/main" id="{351330EB-BA5B-181A-A0A7-686ECBA16F92}"/>
-                    </a:ext>
-                  </a:extLst>
-                </p14:cNvPr>
-                <p14:cNvContentPartPr/>
-                <p14:nvPr/>
-              </p14:nvContentPartPr>
-              <p14:xfrm>
-                <a:off x="10916859" y="3874993"/>
-                <a:ext cx="232560" cy="381600"/>
-              </p14:xfrm>
-            </p:contentPart>
-          </mc:Choice>
-          <mc:Fallback xmlns="">
-            <p:pic>
-              <p:nvPicPr>
-                <p:cNvPr id="38" name="Ink 37">
-                  <a:extLst>
-                    <a:ext uri="{FF2B5EF4-FFF2-40B4-BE49-F238E27FC236}">
-                      <a16:creationId xmlns:a16="http://schemas.microsoft.com/office/drawing/2014/main" id="{BD2FA4AB-CBC7-5647-0950-47CA187A75A7}"/>
-                    </a:ext>
-                  </a:extLst>
-                </p:cNvPr>
-                <p:cNvPicPr/>
-                <p:nvPr/>
-              </p:nvPicPr>
-              <p:blipFill>
-                <a:blip r:embed="rId118"/>
-                <a:stretch>
-                  <a:fillRect/>
-                </a:stretch>
-              </p:blipFill>
-              <p:spPr>
-                <a:xfrm>
-                  <a:off x="10888498" y="3841342"/>
-                  <a:ext cx="288715" cy="448229"/>
-                </a:xfrm>
-                <a:prstGeom prst="rect">
-                  <a:avLst/>
-                </a:prstGeom>
-              </p:spPr>
-            </p:pic>
-          </mc:Fallback>
-        </mc:AlternateContent>
-        <p:grpSp>
-          <p:nvGrpSpPr>
-            <p:cNvPr id="39" name="Group 38">
-              <a:extLst>
-                <a:ext uri="{FF2B5EF4-FFF2-40B4-BE49-F238E27FC236}">
-                  <a16:creationId xmlns:a16="http://schemas.microsoft.com/office/drawing/2014/main" id="{26779F89-5E92-C316-1D92-1286B03E7A6C}"/>
-                </a:ext>
-              </a:extLst>
-            </p:cNvPr>
-            <p:cNvGrpSpPr/>
-            <p:nvPr/>
-          </p:nvGrpSpPr>
-          <p:grpSpPr>
-            <a:xfrm>
-              <a:off x="11352459" y="3831793"/>
-              <a:ext cx="742320" cy="344160"/>
-              <a:chOff x="11352459" y="3831793"/>
-              <a:chExt cx="742320" cy="344160"/>
-            </a:xfrm>
-          </p:grpSpPr>
-          <mc:AlternateContent xmlns:mc="http://schemas.openxmlformats.org/markup-compatibility/2006" xmlns:p14="http://schemas.microsoft.com/office/powerpoint/2010/main">
-            <mc:Choice Requires="p14">
-              <p:contentPart p14:bwMode="auto" r:id="rId119">
-                <p14:nvContentPartPr>
-                  <p14:cNvPr id="40" name="Ink 39">
-                    <a:extLst>
-                      <a:ext uri="{FF2B5EF4-FFF2-40B4-BE49-F238E27FC236}">
-                        <a16:creationId xmlns:a16="http://schemas.microsoft.com/office/drawing/2014/main" id="{C5921AC9-179B-2CD9-52A6-5E42FDBDD57B}"/>
-                      </a:ext>
-                    </a:extLst>
-                  </p14:cNvPr>
-                  <p14:cNvContentPartPr/>
-                  <p14:nvPr/>
-                </p14:nvContentPartPr>
-                <p14:xfrm>
-                  <a:off x="11352459" y="3831793"/>
-                  <a:ext cx="172800" cy="339480"/>
-                </p14:xfrm>
-              </p:contentPart>
-            </mc:Choice>
-            <mc:Fallback xmlns="">
-              <p:pic>
-                <p:nvPicPr>
-                  <p:cNvPr id="164" name="Ink 163">
-                    <a:extLst>
-                      <a:ext uri="{FF2B5EF4-FFF2-40B4-BE49-F238E27FC236}">
-                        <a16:creationId xmlns:a16="http://schemas.microsoft.com/office/drawing/2014/main" id="{DF94B5A8-7AF7-E5A3-C9DB-8D55459AD517}"/>
-                      </a:ext>
-                    </a:extLst>
-                  </p:cNvPr>
-                  <p:cNvPicPr/>
-                  <p:nvPr/>
-                </p:nvPicPr>
-                <p:blipFill>
-                  <a:blip r:embed="rId166"/>
-                  <a:stretch>
-                    <a:fillRect/>
-                  </a:stretch>
-                </p:blipFill>
-                <p:spPr>
-                  <a:xfrm>
-                    <a:off x="11334819" y="3814153"/>
-                    <a:ext cx="208440" cy="375120"/>
-                  </a:xfrm>
-                  <a:prstGeom prst="rect">
-                    <a:avLst/>
-                  </a:prstGeom>
-                </p:spPr>
-              </p:pic>
-            </mc:Fallback>
-          </mc:AlternateContent>
-          <mc:AlternateContent xmlns:mc="http://schemas.openxmlformats.org/markup-compatibility/2006" xmlns:p14="http://schemas.microsoft.com/office/powerpoint/2010/main">
-            <mc:Choice Requires="p14">
-              <p:contentPart p14:bwMode="auto" r:id="rId167">
-                <p14:nvContentPartPr>
-                  <p14:cNvPr id="41" name="Ink 40">
-                    <a:extLst>
-                      <a:ext uri="{FF2B5EF4-FFF2-40B4-BE49-F238E27FC236}">
-                        <a16:creationId xmlns:a16="http://schemas.microsoft.com/office/drawing/2014/main" id="{A44275DB-8E89-0EBD-C175-E132ACBC2C85}"/>
-                      </a:ext>
-                    </a:extLst>
-                  </p14:cNvPr>
-                  <p14:cNvContentPartPr/>
-                  <p14:nvPr/>
-                </p14:nvContentPartPr>
-                <p14:xfrm>
-                  <a:off x="11583219" y="4023673"/>
-                  <a:ext cx="59040" cy="152280"/>
-                </p14:xfrm>
-              </p:contentPart>
-            </mc:Choice>
-            <mc:Fallback xmlns="">
-              <p:pic>
-                <p:nvPicPr>
-                  <p:cNvPr id="165" name="Ink 164">
-                    <a:extLst>
-                      <a:ext uri="{FF2B5EF4-FFF2-40B4-BE49-F238E27FC236}">
-                        <a16:creationId xmlns:a16="http://schemas.microsoft.com/office/drawing/2014/main" id="{F6F30440-F3A4-C838-3951-4BDCA2442428}"/>
-                      </a:ext>
-                    </a:extLst>
-                  </p:cNvPr>
-                  <p:cNvPicPr/>
-                  <p:nvPr/>
-                </p:nvPicPr>
-                <p:blipFill>
-                  <a:blip r:embed="rId168"/>
-                  <a:stretch>
-                    <a:fillRect/>
-                  </a:stretch>
-                </p:blipFill>
-                <p:spPr>
-                  <a:xfrm>
-                    <a:off x="11565579" y="4006033"/>
-                    <a:ext cx="94680" cy="187920"/>
-                  </a:xfrm>
-                  <a:prstGeom prst="rect">
-                    <a:avLst/>
-                  </a:prstGeom>
-                </p:spPr>
-              </p:pic>
-            </mc:Fallback>
-          </mc:AlternateContent>
-          <mc:AlternateContent xmlns:mc="http://schemas.openxmlformats.org/markup-compatibility/2006" xmlns:p14="http://schemas.microsoft.com/office/powerpoint/2010/main">
-            <mc:Choice Requires="p14">
-              <p:contentPart p14:bwMode="auto" r:id="rId169">
-                <p14:nvContentPartPr>
-                  <p14:cNvPr id="46" name="Ink 45">
-                    <a:extLst>
-                      <a:ext uri="{FF2B5EF4-FFF2-40B4-BE49-F238E27FC236}">
-                        <a16:creationId xmlns:a16="http://schemas.microsoft.com/office/drawing/2014/main" id="{AD430704-B033-47F8-8B70-D954C494EA4E}"/>
-                      </a:ext>
-                    </a:extLst>
-                  </p14:cNvPr>
-                  <p14:cNvContentPartPr/>
-                  <p14:nvPr/>
-                </p14:nvContentPartPr>
-                <p14:xfrm>
-                  <a:off x="11566659" y="3928993"/>
-                  <a:ext cx="49680" cy="77760"/>
-                </p14:xfrm>
-              </p:contentPart>
-            </mc:Choice>
-            <mc:Fallback xmlns="">
-              <p:pic>
-                <p:nvPicPr>
-                  <p:cNvPr id="166" name="Ink 165">
-                    <a:extLst>
-                      <a:ext uri="{FF2B5EF4-FFF2-40B4-BE49-F238E27FC236}">
-                        <a16:creationId xmlns:a16="http://schemas.microsoft.com/office/drawing/2014/main" id="{A3C37E32-E17F-6633-E2D1-D32A6937D6FD}"/>
-                      </a:ext>
-                    </a:extLst>
-                  </p:cNvPr>
-                  <p:cNvPicPr/>
-                  <p:nvPr/>
-                </p:nvPicPr>
-                <p:blipFill>
-                  <a:blip r:embed="rId170"/>
-                  <a:stretch>
-                    <a:fillRect/>
-                  </a:stretch>
-                </p:blipFill>
-                <p:spPr>
-                  <a:xfrm>
-                    <a:off x="11549019" y="3911353"/>
-                    <a:ext cx="85320" cy="113400"/>
-                  </a:xfrm>
-                  <a:prstGeom prst="rect">
-                    <a:avLst/>
-                  </a:prstGeom>
-                </p:spPr>
-              </p:pic>
-            </mc:Fallback>
-          </mc:AlternateContent>
-          <mc:AlternateContent xmlns:mc="http://schemas.openxmlformats.org/markup-compatibility/2006" xmlns:p14="http://schemas.microsoft.com/office/powerpoint/2010/main">
-            <mc:Choice Requires="p14">
-              <p:contentPart p14:bwMode="auto" r:id="rId171">
-                <p14:nvContentPartPr>
-                  <p14:cNvPr id="49" name="Ink 48">
-                    <a:extLst>
-                      <a:ext uri="{FF2B5EF4-FFF2-40B4-BE49-F238E27FC236}">
-                        <a16:creationId xmlns:a16="http://schemas.microsoft.com/office/drawing/2014/main" id="{93ECC22C-F700-EC08-443C-F0CE19C2D714}"/>
-                      </a:ext>
-                    </a:extLst>
-                  </p14:cNvPr>
-                  <p14:cNvContentPartPr/>
-                  <p14:nvPr/>
-                </p14:nvContentPartPr>
-                <p14:xfrm>
-                  <a:off x="11711739" y="3997033"/>
-                  <a:ext cx="178920" cy="162360"/>
-                </p14:xfrm>
-              </p:contentPart>
-            </mc:Choice>
-            <mc:Fallback xmlns="">
-              <p:pic>
-                <p:nvPicPr>
-                  <p:cNvPr id="167" name="Ink 166">
-                    <a:extLst>
-                      <a:ext uri="{FF2B5EF4-FFF2-40B4-BE49-F238E27FC236}">
-                        <a16:creationId xmlns:a16="http://schemas.microsoft.com/office/drawing/2014/main" id="{BF19BAF6-4B20-AE92-BE4E-5D3C00312B3E}"/>
-                      </a:ext>
-                    </a:extLst>
-                  </p:cNvPr>
-                  <p:cNvPicPr/>
-                  <p:nvPr/>
-                </p:nvPicPr>
-                <p:blipFill>
-                  <a:blip r:embed="rId172"/>
-                  <a:stretch>
-                    <a:fillRect/>
-                  </a:stretch>
-                </p:blipFill>
-                <p:spPr>
-                  <a:xfrm>
-                    <a:off x="11693739" y="3979393"/>
-                    <a:ext cx="214560" cy="198000"/>
-                  </a:xfrm>
-                  <a:prstGeom prst="rect">
-                    <a:avLst/>
-                  </a:prstGeom>
-                </p:spPr>
-              </p:pic>
-            </mc:Fallback>
-          </mc:AlternateContent>
-          <mc:AlternateContent xmlns:mc="http://schemas.openxmlformats.org/markup-compatibility/2006" xmlns:p14="http://schemas.microsoft.com/office/powerpoint/2010/main">
-            <mc:Choice Requires="p14">
-              <p:contentPart p14:bwMode="auto" r:id="rId173">
-                <p14:nvContentPartPr>
-                  <p14:cNvPr id="51" name="Ink 50">
-                    <a:extLst>
-                      <a:ext uri="{FF2B5EF4-FFF2-40B4-BE49-F238E27FC236}">
-                        <a16:creationId xmlns:a16="http://schemas.microsoft.com/office/drawing/2014/main" id="{956A6AA9-7B8E-457B-427E-EC66E77DD6EE}"/>
-                      </a:ext>
-                    </a:extLst>
-                  </p14:cNvPr>
-                  <p14:cNvContentPartPr/>
-                  <p14:nvPr/>
-                </p14:nvContentPartPr>
-                <p14:xfrm>
-                  <a:off x="11913699" y="4037713"/>
-                  <a:ext cx="99000" cy="87120"/>
-                </p14:xfrm>
-              </p:contentPart>
-            </mc:Choice>
-            <mc:Fallback xmlns="">
-              <p:pic>
-                <p:nvPicPr>
-                  <p:cNvPr id="168" name="Ink 167">
-                    <a:extLst>
-                      <a:ext uri="{FF2B5EF4-FFF2-40B4-BE49-F238E27FC236}">
-                        <a16:creationId xmlns:a16="http://schemas.microsoft.com/office/drawing/2014/main" id="{1C59FDA9-4CF6-3D97-86A8-BEFE2883C15E}"/>
-                      </a:ext>
-                    </a:extLst>
-                  </p:cNvPr>
-                  <p:cNvPicPr/>
-                  <p:nvPr/>
-                </p:nvPicPr>
-                <p:blipFill>
-                  <a:blip r:embed="rId174"/>
-                  <a:stretch>
-                    <a:fillRect/>
-                  </a:stretch>
-                </p:blipFill>
-                <p:spPr>
-                  <a:xfrm>
-                    <a:off x="11895699" y="4020073"/>
-                    <a:ext cx="134640" cy="122760"/>
-                  </a:xfrm>
-                  <a:prstGeom prst="rect">
-                    <a:avLst/>
-                  </a:prstGeom>
-                </p:spPr>
-              </p:pic>
-            </mc:Fallback>
-          </mc:AlternateContent>
-          <mc:AlternateContent xmlns:mc="http://schemas.openxmlformats.org/markup-compatibility/2006" xmlns:p14="http://schemas.microsoft.com/office/powerpoint/2010/main">
-            <mc:Choice Requires="p14">
-              <p:contentPart p14:bwMode="auto" r:id="rId175">
-                <p14:nvContentPartPr>
-                  <p14:cNvPr id="55" name="Ink 54">
-                    <a:extLst>
-                      <a:ext uri="{FF2B5EF4-FFF2-40B4-BE49-F238E27FC236}">
-                        <a16:creationId xmlns:a16="http://schemas.microsoft.com/office/drawing/2014/main" id="{9AE10449-2567-B9B5-2C3B-3EEBAD91626C}"/>
-                      </a:ext>
-                    </a:extLst>
-                  </p14:cNvPr>
-                  <p14:cNvContentPartPr/>
-                  <p14:nvPr/>
-                </p14:nvContentPartPr>
-                <p14:xfrm>
-                  <a:off x="12060939" y="4102513"/>
-                  <a:ext cx="33840" cy="28440"/>
-                </p14:xfrm>
-              </p:contentPart>
-            </mc:Choice>
-            <mc:Fallback xmlns="">
-              <p:pic>
-                <p:nvPicPr>
-                  <p:cNvPr id="169" name="Ink 168">
-                    <a:extLst>
-                      <a:ext uri="{FF2B5EF4-FFF2-40B4-BE49-F238E27FC236}">
-                        <a16:creationId xmlns:a16="http://schemas.microsoft.com/office/drawing/2014/main" id="{2D54F1F9-86A1-6678-A181-1319235F16DD}"/>
-                      </a:ext>
-                    </a:extLst>
-                  </p:cNvPr>
-                  <p:cNvPicPr/>
-                  <p:nvPr/>
-                </p:nvPicPr>
-                <p:blipFill>
-                  <a:blip r:embed="rId176"/>
-                  <a:stretch>
-                    <a:fillRect/>
-                  </a:stretch>
-                </p:blipFill>
-                <p:spPr>
-                  <a:xfrm>
-                    <a:off x="12043299" y="4084513"/>
-                    <a:ext cx="69480" cy="64080"/>
-                  </a:xfrm>
-                  <a:prstGeom prst="rect">
-                    <a:avLst/>
-                  </a:prstGeom>
-                </p:spPr>
-              </p:pic>
-            </mc:Fallback>
-          </mc:AlternateContent>
-          <mc:AlternateContent xmlns:mc="http://schemas.openxmlformats.org/markup-compatibility/2006" xmlns:p14="http://schemas.microsoft.com/office/powerpoint/2010/main">
-            <mc:Choice Requires="p14">
-              <p:contentPart p14:bwMode="auto" r:id="rId177">
-                <p14:nvContentPartPr>
-                  <p14:cNvPr id="56" name="Ink 55">
-                    <a:extLst>
-                      <a:ext uri="{FF2B5EF4-FFF2-40B4-BE49-F238E27FC236}">
-                        <a16:creationId xmlns:a16="http://schemas.microsoft.com/office/drawing/2014/main" id="{0DDC77C9-8EC3-DFD7-D3BA-139D90348C99}"/>
-                      </a:ext>
-                    </a:extLst>
-                  </p14:cNvPr>
-                  <p14:cNvContentPartPr/>
-                  <p14:nvPr/>
-                </p14:nvContentPartPr>
-                <p14:xfrm>
-                  <a:off x="11902179" y="4042393"/>
-                  <a:ext cx="115920" cy="100440"/>
-                </p14:xfrm>
-              </p:contentPart>
-            </mc:Choice>
-            <mc:Fallback xmlns="">
-              <p:pic>
-                <p:nvPicPr>
-                  <p:cNvPr id="171" name="Ink 170">
-                    <a:extLst>
-                      <a:ext uri="{FF2B5EF4-FFF2-40B4-BE49-F238E27FC236}">
-                        <a16:creationId xmlns:a16="http://schemas.microsoft.com/office/drawing/2014/main" id="{1AF59291-F3EE-00E3-6FFE-98A20A86A8BF}"/>
-                      </a:ext>
-                    </a:extLst>
-                  </p:cNvPr>
-                  <p:cNvPicPr/>
-                  <p:nvPr/>
-                </p:nvPicPr>
-                <p:blipFill>
-                  <a:blip r:embed="rId178"/>
-                  <a:stretch>
-                    <a:fillRect/>
-                  </a:stretch>
-                </p:blipFill>
-                <p:spPr>
-                  <a:xfrm>
-                    <a:off x="11884179" y="4024753"/>
-                    <a:ext cx="151560" cy="136080"/>
-                  </a:xfrm>
-                  <a:prstGeom prst="rect">
-                    <a:avLst/>
-                  </a:prstGeom>
-                </p:spPr>
-              </p:pic>
-            </mc:Fallback>
-          </mc:AlternateContent>
-        </p:grpSp>
-      </p:grpSp>
       <p:sp>
         <p:nvSpPr>
           <p:cNvPr id="58" name="TextBox 57">
@@ -12208,8 +9513,8 @@
           </a:p>
         </p:txBody>
       </p:sp>
-      <mc:AlternateContent xmlns:mc="http://schemas.openxmlformats.org/markup-compatibility/2006" xmlns:a14="http://schemas.microsoft.com/office/drawing/2010/main">
-        <mc:Choice Requires="a14">
+      <mc:AlternateContent xmlns:mc="http://schemas.openxmlformats.org/markup-compatibility/2006">
+        <mc:Choice xmlns:a14="http://schemas.microsoft.com/office/drawing/2010/main" Requires="a14">
           <p:sp>
             <p:nvSpPr>
               <p:cNvPr id="17" name="TextBox 16">
@@ -12259,22 +9564,22 @@
                     </m:oMathParaPr>
                     <m:oMath xmlns:m="http://schemas.openxmlformats.org/officeDocument/2006/math">
                       <m:r>
-                        <a:rPr lang="en-US" sz="2400" b="0" i="1" smtClean="0">
+                        <a:rPr lang="en-US" sz="2400" i="1">
                           <a:latin typeface="Cambria Math" panose="02040503050406030204" pitchFamily="18" charset="0"/>
                         </a:rPr>
-                        <m:t>𝑣𝑎𝑙𝑢𝑒</m:t>
+                        <m:t>𝑈</m:t>
                       </m:r>
                       <m:d>
                         <m:dPr>
                           <m:ctrlPr>
-                            <a:rPr lang="en-US" sz="2400" b="0" i="1" smtClean="0">
+                            <a:rPr lang="en-US" sz="2400" i="1">
                               <a:latin typeface="Cambria Math" panose="02040503050406030204" pitchFamily="18" charset="0"/>
                             </a:rPr>
                           </m:ctrlPr>
                         </m:dPr>
                         <m:e>
                           <m:r>
-                            <a:rPr lang="en-US" sz="2400" b="0" i="1" smtClean="0">
+                            <a:rPr lang="en-US" sz="2400" i="1">
                               <a:latin typeface="Cambria Math" panose="02040503050406030204" pitchFamily="18" charset="0"/>
                             </a:rPr>
                             <m:t>𝑠</m:t>
@@ -12282,22 +9587,22 @@
                         </m:e>
                       </m:d>
                       <m:r>
-                        <a:rPr lang="en-US" sz="2400" b="0" i="1" smtClean="0">
+                        <a:rPr lang="en-US" sz="2400" i="1">
                           <a:latin typeface="Cambria Math" panose="02040503050406030204" pitchFamily="18" charset="0"/>
                         </a:rPr>
-                        <m:t>≈</m:t>
+                        <m:t>=</m:t>
                       </m:r>
                       <m:sSub>
                         <m:sSubPr>
                           <m:ctrlPr>
-                            <a:rPr lang="en-US" sz="2400" b="0" i="1" smtClean="0">
+                            <a:rPr lang="en-US" sz="2400" i="1">
                               <a:latin typeface="Cambria Math" panose="02040503050406030204" pitchFamily="18" charset="0"/>
                             </a:rPr>
                           </m:ctrlPr>
                         </m:sSubPr>
                         <m:e>
                           <m:r>
-                            <a:rPr lang="en-US" sz="2400" b="0" i="1" smtClean="0">
+                            <a:rPr lang="en-US" sz="2400" i="1">
                               <a:latin typeface="Cambria Math" panose="02040503050406030204" pitchFamily="18" charset="0"/>
                               <a:ea typeface="Cambria Math" panose="02040503050406030204" pitchFamily="18" charset="0"/>
                             </a:rPr>
@@ -12308,14 +9613,14 @@
                           <m:sSub>
                             <m:sSubPr>
                               <m:ctrlPr>
-                                <a:rPr lang="en-US" sz="2400" b="0" i="1" smtClean="0">
+                                <a:rPr lang="en-US" sz="2400" i="1">
                                   <a:latin typeface="Cambria Math" panose="02040503050406030204" pitchFamily="18" charset="0"/>
                                 </a:rPr>
                               </m:ctrlPr>
                             </m:sSubPr>
                             <m:e>
                               <m:r>
-                                <a:rPr lang="en-US" sz="2400" b="0" i="1" smtClean="0">
+                                <a:rPr lang="en-US" sz="2400" i="1">
                                   <a:latin typeface="Cambria Math" panose="02040503050406030204" pitchFamily="18" charset="0"/>
                                 </a:rPr>
                                 <m:t>𝜋</m:t>
@@ -12323,7 +9628,7 @@
                             </m:e>
                             <m:sub>
                               <m:r>
-                                <a:rPr lang="en-US" sz="2400" b="0" i="1" smtClean="0">
+                                <a:rPr lang="en-US" sz="2400" i="1">
                                   <a:latin typeface="Cambria Math" panose="02040503050406030204" pitchFamily="18" charset="0"/>
                                 </a:rPr>
                                 <m:t>𝑥</m:t>
@@ -12331,7 +9636,7 @@
                             </m:sub>
                           </m:sSub>
                           <m:r>
-                            <a:rPr lang="en-US" sz="2400" b="0" i="1" smtClean="0">
+                            <a:rPr lang="en-US" sz="2400" i="1">
                               <a:latin typeface="Cambria Math" panose="02040503050406030204" pitchFamily="18" charset="0"/>
                             </a:rPr>
                             <m:t>,</m:t>
@@ -12339,14 +9644,14 @@
                           <m:sSub>
                             <m:sSubPr>
                               <m:ctrlPr>
-                                <a:rPr lang="en-US" sz="2400" b="0" i="1" smtClean="0">
+                                <a:rPr lang="en-US" sz="2400" i="1">
                                   <a:latin typeface="Cambria Math" panose="02040503050406030204" pitchFamily="18" charset="0"/>
                                 </a:rPr>
                               </m:ctrlPr>
                             </m:sSubPr>
                             <m:e>
                               <m:r>
-                                <a:rPr lang="en-US" sz="2400" b="0" i="1" smtClean="0">
+                                <a:rPr lang="en-US" sz="2400" i="1">
                                   <a:latin typeface="Cambria Math" panose="02040503050406030204" pitchFamily="18" charset="0"/>
                                 </a:rPr>
                                 <m:t>𝜋</m:t>
@@ -12354,7 +9659,7 @@
                             </m:e>
                             <m:sub>
                               <m:r>
-                                <a:rPr lang="en-US" sz="2400" b="0" i="1" smtClean="0">
+                                <a:rPr lang="en-US" sz="2400" i="1">
                                   <a:latin typeface="Cambria Math" panose="02040503050406030204" pitchFamily="18" charset="0"/>
                                 </a:rPr>
                                 <m:t>𝑜</m:t>
@@ -12363,36 +9668,68 @@
                           </m:sSub>
                         </m:sub>
                       </m:sSub>
-                      <m:r>
-                        <a:rPr lang="en-US" sz="2400" b="0" i="1" smtClean="0">
-                          <a:latin typeface="Cambria Math" panose="02040503050406030204" pitchFamily="18" charset="0"/>
-                        </a:rPr>
-                        <m:t>[</m:t>
-                      </m:r>
-                      <m:r>
-                        <a:rPr lang="en-US" sz="2400" b="0" i="1" smtClean="0">
-                          <a:latin typeface="Cambria Math" panose="02040503050406030204" pitchFamily="18" charset="0"/>
-                        </a:rPr>
-                        <m:t>𝑈</m:t>
-                      </m:r>
-                      <m:r>
-                        <a:rPr lang="en-US" sz="2400" b="0" i="1" smtClean="0">
-                          <a:latin typeface="Cambria Math" panose="02040503050406030204" pitchFamily="18" charset="0"/>
-                        </a:rPr>
-                        <m:t>(</m:t>
-                      </m:r>
-                      <m:r>
-                        <a:rPr lang="en-US" sz="2400" b="0" i="1" smtClean="0">
-                          <a:latin typeface="Cambria Math" panose="02040503050406030204" pitchFamily="18" charset="0"/>
-                        </a:rPr>
-                        <m:t>𝑠</m:t>
-                      </m:r>
-                      <m:r>
-                        <a:rPr lang="en-US" sz="2400" b="0" i="1" smtClean="0">
-                          <a:latin typeface="Cambria Math" panose="02040503050406030204" pitchFamily="18" charset="0"/>
-                        </a:rPr>
-                        <m:t>)]</m:t>
-                      </m:r>
+                      <m:d>
+                        <m:dPr>
+                          <m:begChr m:val="["/>
+                          <m:endChr m:val="]"/>
+                          <m:ctrlPr>
+                            <a:rPr lang="en-US" sz="2400" i="1">
+                              <a:latin typeface="Cambria Math" panose="02040503050406030204" pitchFamily="18" charset="0"/>
+                            </a:rPr>
+                          </m:ctrlPr>
+                        </m:dPr>
+                        <m:e>
+                          <m:r>
+                            <a:rPr lang="en-US" sz="2400" i="1">
+                              <a:latin typeface="Cambria Math" panose="02040503050406030204" pitchFamily="18" charset="0"/>
+                            </a:rPr>
+                            <m:t>𝑢</m:t>
+                          </m:r>
+                          <m:r>
+                            <a:rPr lang="en-US" sz="2400" i="1">
+                              <a:latin typeface="Cambria Math" panose="02040503050406030204" pitchFamily="18" charset="0"/>
+                            </a:rPr>
+                            <m:t>|</m:t>
+                          </m:r>
+                          <m:sSub>
+                            <m:sSubPr>
+                              <m:ctrlPr>
+                                <a:rPr lang="en-US" sz="2400" i="1">
+                                  <a:latin typeface="Cambria Math" panose="02040503050406030204" pitchFamily="18" charset="0"/>
+                                </a:rPr>
+                              </m:ctrlPr>
+                            </m:sSubPr>
+                            <m:e>
+                              <m:r>
+                                <a:rPr lang="en-US" sz="2400" i="1">
+                                  <a:latin typeface="Cambria Math" panose="02040503050406030204" pitchFamily="18" charset="0"/>
+                                </a:rPr>
+                                <m:t>𝑠</m:t>
+                              </m:r>
+                            </m:e>
+                            <m:sub>
+                              <m:r>
+                                <a:rPr lang="en-US" sz="2400" i="1">
+                                  <a:latin typeface="Cambria Math" panose="02040503050406030204" pitchFamily="18" charset="0"/>
+                                </a:rPr>
+                                <m:t>0</m:t>
+                              </m:r>
+                            </m:sub>
+                          </m:sSub>
+                          <m:r>
+                            <a:rPr lang="en-US" sz="2400" i="1">
+                              <a:latin typeface="Cambria Math" panose="02040503050406030204" pitchFamily="18" charset="0"/>
+                            </a:rPr>
+                            <m:t>=</m:t>
+                          </m:r>
+                          <m:r>
+                            <a:rPr lang="en-US" sz="2400" i="1">
+                              <a:latin typeface="Cambria Math" panose="02040503050406030204" pitchFamily="18" charset="0"/>
+                            </a:rPr>
+                            <m:t>𝑠</m:t>
+                          </m:r>
+                        </m:e>
+                      </m:d>
                     </m:oMath>
                   </m:oMathPara>
                 </a14:m>
@@ -12401,7 +9738,7 @@
             </p:txBody>
           </p:sp>
         </mc:Choice>
-        <mc:Fallback xmlns="">
+        <mc:Fallback>
           <p:sp>
             <p:nvSpPr>
               <p:cNvPr id="17" name="TextBox 16">
@@ -12425,9 +9762,323 @@
                 <a:avLst/>
               </a:prstGeom>
               <a:blipFill>
-                <a:blip r:embed="rId179"/>
+                <a:blip r:embed="rId44"/>
                 <a:stretch>
-                  <a:fillRect l="-353" b="-6977"/>
+                  <a:fillRect l="-176" b="-6977"/>
+                </a:stretch>
+              </a:blipFill>
+            </p:spPr>
+            <p:txBody>
+              <a:bodyPr/>
+              <a:lstStyle/>
+              <a:p>
+                <a:r>
+                  <a:rPr lang="en-US">
+                    <a:noFill/>
+                  </a:rPr>
+                  <a:t> </a:t>
+                </a:r>
+              </a:p>
+            </p:txBody>
+          </p:sp>
+        </mc:Fallback>
+      </mc:AlternateContent>
+      <mc:AlternateContent xmlns:mc="http://schemas.openxmlformats.org/markup-compatibility/2006">
+        <mc:Choice xmlns:a14="http://schemas.microsoft.com/office/drawing/2010/main" Requires="a14">
+          <p:sp>
+            <p:nvSpPr>
+              <p:cNvPr id="6" name="TextBox 5">
+                <a:extLst>
+                  <a:ext uri="{FF2B5EF4-FFF2-40B4-BE49-F238E27FC236}">
+                    <a16:creationId xmlns:a16="http://schemas.microsoft.com/office/drawing/2014/main" id="{FE22F023-9FD2-647F-45C6-7C9FF5C9AC50}"/>
+                  </a:ext>
+                </a:extLst>
+              </p:cNvPr>
+              <p:cNvSpPr txBox="1"/>
+              <p:nvPr/>
+            </p:nvSpPr>
+            <p:spPr>
+              <a:xfrm>
+                <a:off x="9131533" y="123677"/>
+                <a:ext cx="2896350" cy="1148263"/>
+              </a:xfrm>
+              <a:prstGeom prst="rect">
+                <a:avLst/>
+              </a:prstGeom>
+              <a:noFill/>
+            </p:spPr>
+            <p:txBody>
+              <a:bodyPr wrap="square" rtlCol="0">
+                <a:spAutoFit/>
+              </a:bodyPr>
+              <a:lstStyle/>
+              <a:p>
+                <a:pPr algn="ctr"/>
+                <a:r>
+                  <a:rPr lang="en-US" b="1" dirty="0">
+                    <a:solidFill>
+                      <a:srgbClr val="FF0000"/>
+                    </a:solidFill>
+                  </a:rPr>
+                  <a:t>Monte Carlo Sim.</a:t>
+                </a:r>
+                <a:br>
+                  <a:rPr lang="en-US" b="1" dirty="0">
+                    <a:solidFill>
+                      <a:srgbClr val="FF0000"/>
+                    </a:solidFill>
+                  </a:rPr>
+                </a:br>
+                <a14:m>
+                  <m:oMathPara xmlns:m="http://schemas.openxmlformats.org/officeDocument/2006/math">
+                    <m:oMathParaPr>
+                      <m:jc m:val="centerGroup"/>
+                    </m:oMathParaPr>
+                    <m:oMath xmlns:m="http://schemas.openxmlformats.org/officeDocument/2006/math">
+                      <m:r>
+                        <a:rPr lang="en-US" b="1" i="1" smtClean="0">
+                          <a:solidFill>
+                            <a:srgbClr val="FF0000"/>
+                          </a:solidFill>
+                          <a:latin typeface="Cambria Math" panose="02040503050406030204" pitchFamily="18" charset="0"/>
+                        </a:rPr>
+                        <m:t>≈</m:t>
+                      </m:r>
+                      <m:f>
+                        <m:fPr>
+                          <m:ctrlPr>
+                            <a:rPr lang="en-US" b="1" i="1" smtClean="0">
+                              <a:solidFill>
+                                <a:srgbClr val="FF0000"/>
+                              </a:solidFill>
+                              <a:latin typeface="Cambria Math" panose="02040503050406030204" pitchFamily="18" charset="0"/>
+                            </a:rPr>
+                          </m:ctrlPr>
+                        </m:fPr>
+                        <m:num>
+                          <m:r>
+                            <a:rPr lang="en-US" b="1" i="1" smtClean="0">
+                              <a:solidFill>
+                                <a:srgbClr val="FF0000"/>
+                              </a:solidFill>
+                              <a:latin typeface="Cambria Math" panose="02040503050406030204" pitchFamily="18" charset="0"/>
+                            </a:rPr>
+                            <m:t>𝟏</m:t>
+                          </m:r>
+                        </m:num>
+                        <m:den>
+                          <m:r>
+                            <a:rPr lang="en-US" b="1" i="1" smtClean="0">
+                              <a:solidFill>
+                                <a:srgbClr val="FF0000"/>
+                              </a:solidFill>
+                              <a:latin typeface="Cambria Math" panose="02040503050406030204" pitchFamily="18" charset="0"/>
+                            </a:rPr>
+                            <m:t>𝑵</m:t>
+                          </m:r>
+                        </m:den>
+                      </m:f>
+                      <m:nary>
+                        <m:naryPr>
+                          <m:chr m:val="∑"/>
+                          <m:ctrlPr>
+                            <a:rPr lang="en-US" b="1" i="1" smtClean="0">
+                              <a:solidFill>
+                                <a:srgbClr val="FF0000"/>
+                              </a:solidFill>
+                              <a:latin typeface="Cambria Math" panose="02040503050406030204" pitchFamily="18" charset="0"/>
+                            </a:rPr>
+                          </m:ctrlPr>
+                        </m:naryPr>
+                        <m:sub>
+                          <m:r>
+                            <m:rPr>
+                              <m:brk m:alnAt="23"/>
+                            </m:rPr>
+                            <a:rPr lang="en-US" b="1" i="1" smtClean="0">
+                              <a:solidFill>
+                                <a:srgbClr val="FF0000"/>
+                              </a:solidFill>
+                              <a:latin typeface="Cambria Math" panose="02040503050406030204" pitchFamily="18" charset="0"/>
+                            </a:rPr>
+                            <m:t>𝒊</m:t>
+                          </m:r>
+                          <m:r>
+                            <a:rPr lang="en-US" b="1" i="1" smtClean="0">
+                              <a:solidFill>
+                                <a:srgbClr val="FF0000"/>
+                              </a:solidFill>
+                              <a:latin typeface="Cambria Math" panose="02040503050406030204" pitchFamily="18" charset="0"/>
+                            </a:rPr>
+                            <m:t>=</m:t>
+                          </m:r>
+                          <m:r>
+                            <a:rPr lang="en-US" b="1" i="1" smtClean="0">
+                              <a:solidFill>
+                                <a:srgbClr val="FF0000"/>
+                              </a:solidFill>
+                              <a:latin typeface="Cambria Math" panose="02040503050406030204" pitchFamily="18" charset="0"/>
+                            </a:rPr>
+                            <m:t>𝟏</m:t>
+                          </m:r>
+                        </m:sub>
+                        <m:sup>
+                          <m:r>
+                            <a:rPr lang="en-US" b="1" i="1" smtClean="0">
+                              <a:solidFill>
+                                <a:srgbClr val="FF0000"/>
+                              </a:solidFill>
+                              <a:latin typeface="Cambria Math" panose="02040503050406030204" pitchFamily="18" charset="0"/>
+                            </a:rPr>
+                            <m:t>𝑵</m:t>
+                          </m:r>
+                        </m:sup>
+                        <m:e>
+                          <m:sSub>
+                            <m:sSubPr>
+                              <m:ctrlPr>
+                                <a:rPr lang="en-US" b="1" i="1" smtClean="0">
+                                  <a:solidFill>
+                                    <a:srgbClr val="FF0000"/>
+                                  </a:solidFill>
+                                  <a:latin typeface="Cambria Math" panose="02040503050406030204" pitchFamily="18" charset="0"/>
+                                </a:rPr>
+                              </m:ctrlPr>
+                            </m:sSubPr>
+                            <m:e>
+                              <m:r>
+                                <a:rPr lang="en-US" b="1" i="1" smtClean="0">
+                                  <a:solidFill>
+                                    <a:srgbClr val="FF0000"/>
+                                  </a:solidFill>
+                                  <a:latin typeface="Cambria Math" panose="02040503050406030204" pitchFamily="18" charset="0"/>
+                                </a:rPr>
+                                <m:t>𝒖</m:t>
+                              </m:r>
+                            </m:e>
+                            <m:sub>
+                              <m:r>
+                                <a:rPr lang="en-US" b="1" i="1" smtClean="0">
+                                  <a:solidFill>
+                                    <a:srgbClr val="FF0000"/>
+                                  </a:solidFill>
+                                  <a:latin typeface="Cambria Math" panose="02040503050406030204" pitchFamily="18" charset="0"/>
+                                </a:rPr>
+                                <m:t>𝒊</m:t>
+                              </m:r>
+                            </m:sub>
+                          </m:sSub>
+                          <m:r>
+                            <a:rPr lang="en-US" b="1" i="1" smtClean="0">
+                              <a:solidFill>
+                                <a:srgbClr val="FF0000"/>
+                              </a:solidFill>
+                              <a:latin typeface="Cambria Math" panose="02040503050406030204" pitchFamily="18" charset="0"/>
+                            </a:rPr>
+                            <m:t>|</m:t>
+                          </m:r>
+                          <m:sSub>
+                            <m:sSubPr>
+                              <m:ctrlPr>
+                                <a:rPr lang="en-US" b="1" i="1" smtClean="0">
+                                  <a:solidFill>
+                                    <a:srgbClr val="FF0000"/>
+                                  </a:solidFill>
+                                  <a:latin typeface="Cambria Math" panose="02040503050406030204" pitchFamily="18" charset="0"/>
+                                </a:rPr>
+                              </m:ctrlPr>
+                            </m:sSubPr>
+                            <m:e>
+                              <m:r>
+                                <a:rPr lang="en-US" b="1" i="1" smtClean="0">
+                                  <a:solidFill>
+                                    <a:srgbClr val="FF0000"/>
+                                  </a:solidFill>
+                                  <a:latin typeface="Cambria Math" panose="02040503050406030204" pitchFamily="18" charset="0"/>
+                                </a:rPr>
+                                <m:t>𝒔</m:t>
+                              </m:r>
+                            </m:e>
+                            <m:sub>
+                              <m:r>
+                                <a:rPr lang="en-US" b="1" i="1" smtClean="0">
+                                  <a:solidFill>
+                                    <a:srgbClr val="FF0000"/>
+                                  </a:solidFill>
+                                  <a:latin typeface="Cambria Math" panose="02040503050406030204" pitchFamily="18" charset="0"/>
+                                </a:rPr>
+                                <m:t>𝟎</m:t>
+                              </m:r>
+                            </m:sub>
+                          </m:sSub>
+                          <m:r>
+                            <a:rPr lang="en-US" b="1" i="1" smtClean="0">
+                              <a:solidFill>
+                                <a:srgbClr val="FF0000"/>
+                              </a:solidFill>
+                              <a:latin typeface="Cambria Math" panose="02040503050406030204" pitchFamily="18" charset="0"/>
+                            </a:rPr>
+                            <m:t>=</m:t>
+                          </m:r>
+                          <m:r>
+                            <a:rPr lang="en-US" b="1" i="1" smtClean="0">
+                              <a:solidFill>
+                                <a:srgbClr val="FF0000"/>
+                              </a:solidFill>
+                              <a:latin typeface="Cambria Math" panose="02040503050406030204" pitchFamily="18" charset="0"/>
+                            </a:rPr>
+                            <m:t>𝒔</m:t>
+                          </m:r>
+                          <m:r>
+                            <a:rPr lang="en-US" b="1" i="1" smtClean="0">
+                              <a:solidFill>
+                                <a:srgbClr val="FF0000"/>
+                              </a:solidFill>
+                              <a:latin typeface="Cambria Math" panose="02040503050406030204" pitchFamily="18" charset="0"/>
+                            </a:rPr>
+                            <m:t> </m:t>
+                          </m:r>
+                        </m:e>
+                      </m:nary>
+                    </m:oMath>
+                  </m:oMathPara>
+                </a14:m>
+                <a:endParaRPr lang="en-US" b="1" dirty="0">
+                  <a:solidFill>
+                    <a:srgbClr val="FF0000"/>
+                  </a:solidFill>
+                </a:endParaRPr>
+              </a:p>
+            </p:txBody>
+          </p:sp>
+        </mc:Choice>
+        <mc:Fallback>
+          <p:sp>
+            <p:nvSpPr>
+              <p:cNvPr id="6" name="TextBox 5">
+                <a:extLst>
+                  <a:ext uri="{FF2B5EF4-FFF2-40B4-BE49-F238E27FC236}">
+                    <a16:creationId xmlns:a16="http://schemas.microsoft.com/office/drawing/2014/main" id="{FE22F023-9FD2-647F-45C6-7C9FF5C9AC50}"/>
+                  </a:ext>
+                </a:extLst>
+              </p:cNvPr>
+              <p:cNvSpPr txBox="1">
+                <a:spLocks noRot="1" noChangeAspect="1" noMove="1" noResize="1" noEditPoints="1" noAdjustHandles="1" noChangeArrowheads="1" noChangeShapeType="1" noTextEdit="1"/>
+              </p:cNvSpPr>
+              <p:nvPr/>
+            </p:nvSpPr>
+            <p:spPr>
+              <a:xfrm>
+                <a:off x="9131533" y="123677"/>
+                <a:ext cx="2896350" cy="1148263"/>
+              </a:xfrm>
+              <a:prstGeom prst="rect">
+                <a:avLst/>
+              </a:prstGeom>
+              <a:blipFill>
+                <a:blip r:embed="rId45"/>
+                <a:stretch>
+                  <a:fillRect t="-2646"/>
                 </a:stretch>
               </a:blipFill>
             </p:spPr>
@@ -12477,7 +10128,7 @@
                             </p:stCondLst>
                             <p:childTnLst>
                               <p:par>
-                                <p:cTn id="5" presetID="1" presetClass="entr" presetSubtype="0" fill="hold" nodeType="clickEffect">
+                                <p:cTn id="5" presetID="1" presetClass="entr" presetSubtype="0" fill="hold" grpId="0" nodeType="clickEffect">
                                   <p:stCondLst>
                                     <p:cond delay="0"/>
                                   </p:stCondLst>
@@ -12490,7 +10141,7 @@
                                           </p:stCondLst>
                                         </p:cTn>
                                         <p:tgtEl>
-                                          <p:spTgt spid="57"/>
+                                          <p:spTgt spid="62"/>
                                         </p:tgtEl>
                                         <p:attrNameLst>
                                           <p:attrName>style.visibility</p:attrName>
@@ -12535,7 +10186,7 @@
                                           </p:stCondLst>
                                         </p:cTn>
                                         <p:tgtEl>
-                                          <p:spTgt spid="62"/>
+                                          <p:spTgt spid="128"/>
                                         </p:tgtEl>
                                         <p:attrNameLst>
                                           <p:attrName>style.visibility</p:attrName>
@@ -12580,51 +10231,6 @@
                                           </p:stCondLst>
                                         </p:cTn>
                                         <p:tgtEl>
-                                          <p:spTgt spid="128"/>
-                                        </p:tgtEl>
-                                        <p:attrNameLst>
-                                          <p:attrName>style.visibility</p:attrName>
-                                        </p:attrNameLst>
-                                      </p:cBhvr>
-                                      <p:to>
-                                        <p:strVal val="visible"/>
-                                      </p:to>
-                                    </p:set>
-                                  </p:childTnLst>
-                                </p:cTn>
-                              </p:par>
-                            </p:childTnLst>
-                          </p:cTn>
-                        </p:par>
-                      </p:childTnLst>
-                    </p:cTn>
-                  </p:par>
-                  <p:par>
-                    <p:cTn id="15" fill="hold">
-                      <p:stCondLst>
-                        <p:cond delay="indefinite"/>
-                      </p:stCondLst>
-                      <p:childTnLst>
-                        <p:par>
-                          <p:cTn id="16" fill="hold">
-                            <p:stCondLst>
-                              <p:cond delay="0"/>
-                            </p:stCondLst>
-                            <p:childTnLst>
-                              <p:par>
-                                <p:cTn id="17" presetID="1" presetClass="entr" presetSubtype="0" fill="hold" grpId="0" nodeType="clickEffect">
-                                  <p:stCondLst>
-                                    <p:cond delay="0"/>
-                                  </p:stCondLst>
-                                  <p:childTnLst>
-                                    <p:set>
-                                      <p:cBhvr>
-                                        <p:cTn id="18" dur="1" fill="hold">
-                                          <p:stCondLst>
-                                            <p:cond delay="0"/>
-                                          </p:stCondLst>
-                                        </p:cTn>
-                                        <p:tgtEl>
                                           <p:spTgt spid="15"/>
                                         </p:tgtEl>
                                         <p:attrNameLst>
@@ -12639,20 +10245,47 @@
                                 </p:cTn>
                               </p:par>
                               <p:par>
-                                <p:cTn id="19" presetID="1" presetClass="entr" presetSubtype="0" fill="hold" grpId="0" nodeType="withEffect">
+                                <p:cTn id="15" presetID="1" presetClass="entr" presetSubtype="0" fill="hold" grpId="0" nodeType="withEffect">
                                   <p:stCondLst>
                                     <p:cond delay="0"/>
                                   </p:stCondLst>
                                   <p:childTnLst>
                                     <p:set>
                                       <p:cBhvr>
-                                        <p:cTn id="20" dur="1" fill="hold">
+                                        <p:cTn id="16" dur="1" fill="hold">
                                           <p:stCondLst>
                                             <p:cond delay="0"/>
                                           </p:stCondLst>
                                         </p:cTn>
                                         <p:tgtEl>
                                           <p:spTgt spid="61"/>
+                                        </p:tgtEl>
+                                        <p:attrNameLst>
+                                          <p:attrName>style.visibility</p:attrName>
+                                        </p:attrNameLst>
+                                      </p:cBhvr>
+                                      <p:to>
+                                        <p:strVal val="visible"/>
+                                      </p:to>
+                                    </p:set>
+                                  </p:childTnLst>
+                                </p:cTn>
+                              </p:par>
+                              <p:par>
+                                <p:cTn id="17" presetID="1" presetClass="entr" presetSubtype="0" fill="hold" grpId="0" nodeType="withEffect">
+                                  <p:stCondLst>
+                                    <p:cond delay="0"/>
+                                  </p:stCondLst>
+                                  <p:childTnLst>
+                                    <p:set>
+                                      <p:cBhvr>
+                                        <p:cTn id="18" dur="1" fill="hold">
+                                          <p:stCondLst>
+                                            <p:cond delay="0"/>
+                                          </p:stCondLst>
+                                        </p:cTn>
+                                        <p:tgtEl>
+                                          <p:spTgt spid="6"/>
                                         </p:tgtEl>
                                         <p:attrNameLst>
                                           <p:attrName>style.visibility</p:attrName>
@@ -12697,6 +10330,7 @@
       <p:bldP spid="61" grpId="0" animBg="1"/>
       <p:bldP spid="62" grpId="0"/>
       <p:bldP spid="128" grpId="0"/>
+      <p:bldP spid="6" grpId="0"/>
     </p:bldLst>
   </p:timing>
 </p:sld>
@@ -12725,8 +10359,8 @@
           <a:chExt cx="0" cy="0"/>
         </a:xfrm>
       </p:grpSpPr>
-      <mc:AlternateContent xmlns:mc="http://schemas.openxmlformats.org/markup-compatibility/2006" xmlns:a14="http://schemas.microsoft.com/office/drawing/2010/main">
-        <mc:Choice Requires="a14">
+      <mc:AlternateContent xmlns:mc="http://schemas.openxmlformats.org/markup-compatibility/2006">
+        <mc:Choice xmlns:a14="http://schemas.microsoft.com/office/drawing/2010/main" Requires="a14">
           <p:graphicFrame>
             <p:nvGraphicFramePr>
               <p:cNvPr id="5" name="Table 4">
@@ -12742,7 +10376,7 @@
               <p:nvPr>
                 <p:extLst>
                   <p:ext uri="{D42A27DB-BD31-4B8C-83A1-F6EECF244321}">
-                    <p14:modId xmlns:p14="http://schemas.microsoft.com/office/powerpoint/2010/main" val="3887302280"/>
+                    <p14:modId xmlns:p14="http://schemas.microsoft.com/office/powerpoint/2010/main" val="2901276821"/>
                   </p:ext>
                 </p:extLst>
               </p:nvPr>
@@ -12995,59 +10629,6 @@
                           <a:endParaRPr lang="en-US" sz="1800" b="0" i="1" dirty="0">
                             <a:latin typeface="Cambria Math" panose="02040503050406030204" pitchFamily="18" charset="0"/>
                           </a:endParaRPr>
-                        </a:p>
-                        <a:p>
-                          <a:pPr marL="0" marR="0" lvl="0" indent="0" algn="ctr" defTabSz="914400" rtl="0" eaLnBrk="1" fontAlgn="auto" latinLnBrk="0" hangingPunct="1">
-                            <a:lnSpc>
-                              <a:spcPct val="100000"/>
-                            </a:lnSpc>
-                            <a:spcBef>
-                              <a:spcPts val="0"/>
-                            </a:spcBef>
-                            <a:spcAft>
-                              <a:spcPts val="0"/>
-                            </a:spcAft>
-                            <a:buClrTx/>
-                            <a:buSzTx/>
-                            <a:buFontTx/>
-                            <a:buNone/>
-                            <a:tabLst/>
-                            <a:defRPr/>
-                          </a:pPr>
-                          <a14:m>
-                            <m:oMathPara xmlns:m="http://schemas.openxmlformats.org/officeDocument/2006/math">
-                              <m:oMathParaPr>
-                                <m:jc m:val="centerGroup"/>
-                              </m:oMathParaPr>
-                              <m:oMath xmlns:m="http://schemas.openxmlformats.org/officeDocument/2006/math">
-                                <m:r>
-                                  <a:rPr lang="en-US" sz="1800" b="0" i="1" smtClean="0">
-                                    <a:latin typeface="Cambria Math" panose="02040503050406030204" pitchFamily="18" charset="0"/>
-                                  </a:rPr>
-                                  <m:t>𝑒𝑣𝑎𝑙</m:t>
-                                </m:r>
-                                <m:r>
-                                  <a:rPr lang="en-US" sz="1800" b="0" i="1" smtClean="0">
-                                    <a:latin typeface="Cambria Math" panose="02040503050406030204" pitchFamily="18" charset="0"/>
-                                  </a:rPr>
-                                  <m:t>(</m:t>
-                                </m:r>
-                                <m:r>
-                                  <a:rPr lang="en-US" sz="1800" b="0" i="1" smtClean="0">
-                                    <a:latin typeface="Cambria Math" panose="02040503050406030204" pitchFamily="18" charset="0"/>
-                                  </a:rPr>
-                                  <m:t>𝑠</m:t>
-                                </m:r>
-                                <m:r>
-                                  <a:rPr lang="en-US" sz="1800" b="0" i="1" smtClean="0">
-                                    <a:latin typeface="Cambria Math" panose="02040503050406030204" pitchFamily="18" charset="0"/>
-                                  </a:rPr>
-                                  <m:t>)</m:t>
-                                </m:r>
-                              </m:oMath>
-                            </m:oMathPara>
-                          </a14:m>
-                          <a:endParaRPr lang="en-US" sz="1800" b="0" dirty="0"/>
                         </a:p>
                       </a:txBody>
                       <a:tcPr/>
@@ -13383,7 +10964,7 @@
             </a:graphic>
           </p:graphicFrame>
         </mc:Choice>
-        <mc:Fallback xmlns="">
+        <mc:Fallback>
           <p:graphicFrame>
             <p:nvGraphicFramePr>
               <p:cNvPr id="5" name="Table 4">
@@ -13399,7 +10980,7 @@
               <p:nvPr>
                 <p:extLst>
                   <p:ext uri="{D42A27DB-BD31-4B8C-83A1-F6EECF244321}">
-                    <p14:modId xmlns:p14="http://schemas.microsoft.com/office/powerpoint/2010/main" val="3887302280"/>
+                    <p14:modId xmlns:p14="http://schemas.microsoft.com/office/powerpoint/2010/main" val="2901276821"/>
                   </p:ext>
                 </p:extLst>
               </p:nvPr>
@@ -13508,17 +11089,33 @@
                         <a:bodyPr/>
                         <a:lstStyle/>
                         <a:p>
-                          <a:endParaRPr lang="en-US"/>
+                          <a:pPr marL="0" marR="0" lvl="0" indent="0" algn="ctr" defTabSz="914400" rtl="0" eaLnBrk="1" fontAlgn="auto" latinLnBrk="0" hangingPunct="1">
+                            <a:lnSpc>
+                              <a:spcPct val="100000"/>
+                            </a:lnSpc>
+                            <a:spcBef>
+                              <a:spcPts val="0"/>
+                            </a:spcBef>
+                            <a:spcAft>
+                              <a:spcPts val="0"/>
+                            </a:spcAft>
+                            <a:buClrTx/>
+                            <a:buSzTx/>
+                            <a:buFontTx/>
+                            <a:buNone/>
+                            <a:tabLst/>
+                            <a:defRPr/>
+                          </a:pPr>
+                          <a:r>
+                            <a:rPr lang="en-US" sz="1800" b="0" dirty="0"/>
+                            <a:t>Monte Carlo simulation</a:t>
+                          </a:r>
+                          <a:endParaRPr lang="en-US" sz="1800" b="0" i="1" dirty="0">
+                            <a:latin typeface="Cambria Math" panose="02040503050406030204" pitchFamily="18" charset="0"/>
+                          </a:endParaRPr>
                         </a:p>
                       </a:txBody>
-                      <a:tcPr>
-                        <a:blipFill>
-                          <a:blip r:embed="rId2"/>
-                          <a:stretch>
-                            <a:fillRect l="-300375" t="-2874" r="-101498" b="-263793"/>
-                          </a:stretch>
-                        </a:blipFill>
-                      </a:tcPr>
+                      <a:tcPr/>
                     </a:tc>
                     <a:tc>
                       <a:txBody>
@@ -15613,8 +13210,8 @@
           </a:p>
         </p:txBody>
       </p:sp>
-      <mc:AlternateContent xmlns:mc="http://schemas.openxmlformats.org/markup-compatibility/2006" xmlns:a14="http://schemas.microsoft.com/office/drawing/2010/main">
-        <mc:Choice Requires="a14">
+      <mc:AlternateContent xmlns:mc="http://schemas.openxmlformats.org/markup-compatibility/2006">
+        <mc:Choice xmlns:a14="http://schemas.microsoft.com/office/drawing/2010/main" Requires="a14">
           <p:sp>
             <p:nvSpPr>
               <p:cNvPr id="7" name="TextBox 6">
@@ -15664,22 +13261,22 @@
                     </m:oMathParaPr>
                     <m:oMath xmlns:m="http://schemas.openxmlformats.org/officeDocument/2006/math">
                       <m:r>
-                        <a:rPr lang="en-US" sz="2400" b="0" i="1" smtClean="0">
+                        <a:rPr lang="en-US" sz="2400" i="1">
                           <a:latin typeface="Cambria Math" panose="02040503050406030204" pitchFamily="18" charset="0"/>
                         </a:rPr>
-                        <m:t>𝑣𝑎𝑙𝑢𝑒</m:t>
+                        <m:t>𝑈</m:t>
                       </m:r>
                       <m:d>
                         <m:dPr>
                           <m:ctrlPr>
-                            <a:rPr lang="en-US" sz="2400" b="0" i="1" smtClean="0">
+                            <a:rPr lang="en-US" sz="2400" i="1">
                               <a:latin typeface="Cambria Math" panose="02040503050406030204" pitchFamily="18" charset="0"/>
                             </a:rPr>
                           </m:ctrlPr>
                         </m:dPr>
                         <m:e>
                           <m:r>
-                            <a:rPr lang="en-US" sz="2400" b="0" i="1" smtClean="0">
+                            <a:rPr lang="en-US" sz="2400" i="1">
                               <a:latin typeface="Cambria Math" panose="02040503050406030204" pitchFamily="18" charset="0"/>
                             </a:rPr>
                             <m:t>𝑠</m:t>
@@ -15687,22 +13284,22 @@
                         </m:e>
                       </m:d>
                       <m:r>
-                        <a:rPr lang="en-US" sz="2400" b="0" i="1" smtClean="0">
+                        <a:rPr lang="en-US" sz="2400" i="1">
                           <a:latin typeface="Cambria Math" panose="02040503050406030204" pitchFamily="18" charset="0"/>
                         </a:rPr>
-                        <m:t>≈</m:t>
+                        <m:t>=</m:t>
                       </m:r>
                       <m:sSub>
                         <m:sSubPr>
                           <m:ctrlPr>
-                            <a:rPr lang="en-US" sz="2400" b="0" i="1" smtClean="0">
+                            <a:rPr lang="en-US" sz="2400" i="1">
                               <a:latin typeface="Cambria Math" panose="02040503050406030204" pitchFamily="18" charset="0"/>
                             </a:rPr>
                           </m:ctrlPr>
                         </m:sSubPr>
                         <m:e>
                           <m:r>
-                            <a:rPr lang="en-US" sz="2400" b="0" i="1" smtClean="0">
+                            <a:rPr lang="en-US" sz="2400" i="1">
                               <a:latin typeface="Cambria Math" panose="02040503050406030204" pitchFamily="18" charset="0"/>
                               <a:ea typeface="Cambria Math" panose="02040503050406030204" pitchFamily="18" charset="0"/>
                             </a:rPr>
@@ -15713,14 +13310,14 @@
                           <m:sSub>
                             <m:sSubPr>
                               <m:ctrlPr>
-                                <a:rPr lang="en-US" sz="2400" b="0" i="1" smtClean="0">
+                                <a:rPr lang="en-US" sz="2400" i="1">
                                   <a:latin typeface="Cambria Math" panose="02040503050406030204" pitchFamily="18" charset="0"/>
                                 </a:rPr>
                               </m:ctrlPr>
                             </m:sSubPr>
                             <m:e>
                               <m:r>
-                                <a:rPr lang="en-US" sz="2400" b="0" i="1" smtClean="0">
+                                <a:rPr lang="en-US" sz="2400" i="1">
                                   <a:latin typeface="Cambria Math" panose="02040503050406030204" pitchFamily="18" charset="0"/>
                                 </a:rPr>
                                 <m:t>𝜋</m:t>
@@ -15728,7 +13325,7 @@
                             </m:e>
                             <m:sub>
                               <m:r>
-                                <a:rPr lang="en-US" sz="2400" b="0" i="1" smtClean="0">
+                                <a:rPr lang="en-US" sz="2400" i="1">
                                   <a:latin typeface="Cambria Math" panose="02040503050406030204" pitchFamily="18" charset="0"/>
                                 </a:rPr>
                                 <m:t>𝑥</m:t>
@@ -15736,7 +13333,7 @@
                             </m:sub>
                           </m:sSub>
                           <m:r>
-                            <a:rPr lang="en-US" sz="2400" b="0" i="1" smtClean="0">
+                            <a:rPr lang="en-US" sz="2400" i="1">
                               <a:latin typeface="Cambria Math" panose="02040503050406030204" pitchFamily="18" charset="0"/>
                             </a:rPr>
                             <m:t>,</m:t>
@@ -15744,14 +13341,14 @@
                           <m:sSub>
                             <m:sSubPr>
                               <m:ctrlPr>
-                                <a:rPr lang="en-US" sz="2400" b="0" i="1" smtClean="0">
+                                <a:rPr lang="en-US" sz="2400" i="1">
                                   <a:latin typeface="Cambria Math" panose="02040503050406030204" pitchFamily="18" charset="0"/>
                                 </a:rPr>
                               </m:ctrlPr>
                             </m:sSubPr>
                             <m:e>
                               <m:r>
-                                <a:rPr lang="en-US" sz="2400" b="0" i="1" smtClean="0">
+                                <a:rPr lang="en-US" sz="2400" i="1">
                                   <a:latin typeface="Cambria Math" panose="02040503050406030204" pitchFamily="18" charset="0"/>
                                 </a:rPr>
                                 <m:t>𝜋</m:t>
@@ -15759,7 +13356,7 @@
                             </m:e>
                             <m:sub>
                               <m:r>
-                                <a:rPr lang="en-US" sz="2400" b="0" i="1" smtClean="0">
+                                <a:rPr lang="en-US" sz="2400" i="1">
                                   <a:latin typeface="Cambria Math" panose="02040503050406030204" pitchFamily="18" charset="0"/>
                                 </a:rPr>
                                 <m:t>𝑜</m:t>
@@ -15768,36 +13365,68 @@
                           </m:sSub>
                         </m:sub>
                       </m:sSub>
-                      <m:r>
-                        <a:rPr lang="en-US" sz="2400" b="0" i="1" smtClean="0">
-                          <a:latin typeface="Cambria Math" panose="02040503050406030204" pitchFamily="18" charset="0"/>
-                        </a:rPr>
-                        <m:t>[</m:t>
-                      </m:r>
-                      <m:r>
-                        <a:rPr lang="en-US" sz="2400" b="0" i="1" smtClean="0">
-                          <a:latin typeface="Cambria Math" panose="02040503050406030204" pitchFamily="18" charset="0"/>
-                        </a:rPr>
-                        <m:t>𝑈</m:t>
-                      </m:r>
-                      <m:r>
-                        <a:rPr lang="en-US" sz="2400" b="0" i="1" smtClean="0">
-                          <a:latin typeface="Cambria Math" panose="02040503050406030204" pitchFamily="18" charset="0"/>
-                        </a:rPr>
-                        <m:t>(</m:t>
-                      </m:r>
-                      <m:r>
-                        <a:rPr lang="en-US" sz="2400" b="0" i="1" smtClean="0">
-                          <a:latin typeface="Cambria Math" panose="02040503050406030204" pitchFamily="18" charset="0"/>
-                        </a:rPr>
-                        <m:t>𝑠</m:t>
-                      </m:r>
-                      <m:r>
-                        <a:rPr lang="en-US" sz="2400" b="0" i="1" smtClean="0">
-                          <a:latin typeface="Cambria Math" panose="02040503050406030204" pitchFamily="18" charset="0"/>
-                        </a:rPr>
-                        <m:t>)]</m:t>
-                      </m:r>
+                      <m:d>
+                        <m:dPr>
+                          <m:begChr m:val="["/>
+                          <m:endChr m:val="]"/>
+                          <m:ctrlPr>
+                            <a:rPr lang="en-US" sz="2400" i="1">
+                              <a:latin typeface="Cambria Math" panose="02040503050406030204" pitchFamily="18" charset="0"/>
+                            </a:rPr>
+                          </m:ctrlPr>
+                        </m:dPr>
+                        <m:e>
+                          <m:r>
+                            <a:rPr lang="en-US" sz="2400" i="1">
+                              <a:latin typeface="Cambria Math" panose="02040503050406030204" pitchFamily="18" charset="0"/>
+                            </a:rPr>
+                            <m:t>𝑢</m:t>
+                          </m:r>
+                          <m:r>
+                            <a:rPr lang="en-US" sz="2400" i="1">
+                              <a:latin typeface="Cambria Math" panose="02040503050406030204" pitchFamily="18" charset="0"/>
+                            </a:rPr>
+                            <m:t>|</m:t>
+                          </m:r>
+                          <m:sSub>
+                            <m:sSubPr>
+                              <m:ctrlPr>
+                                <a:rPr lang="en-US" sz="2400" i="1">
+                                  <a:latin typeface="Cambria Math" panose="02040503050406030204" pitchFamily="18" charset="0"/>
+                                </a:rPr>
+                              </m:ctrlPr>
+                            </m:sSubPr>
+                            <m:e>
+                              <m:r>
+                                <a:rPr lang="en-US" sz="2400" i="1">
+                                  <a:latin typeface="Cambria Math" panose="02040503050406030204" pitchFamily="18" charset="0"/>
+                                </a:rPr>
+                                <m:t>𝑠</m:t>
+                              </m:r>
+                            </m:e>
+                            <m:sub>
+                              <m:r>
+                                <a:rPr lang="en-US" sz="2400" i="1">
+                                  <a:latin typeface="Cambria Math" panose="02040503050406030204" pitchFamily="18" charset="0"/>
+                                </a:rPr>
+                                <m:t>0</m:t>
+                              </m:r>
+                            </m:sub>
+                          </m:sSub>
+                          <m:r>
+                            <a:rPr lang="en-US" sz="2400" i="1">
+                              <a:latin typeface="Cambria Math" panose="02040503050406030204" pitchFamily="18" charset="0"/>
+                            </a:rPr>
+                            <m:t>=</m:t>
+                          </m:r>
+                          <m:r>
+                            <a:rPr lang="en-US" sz="2400" i="1">
+                              <a:latin typeface="Cambria Math" panose="02040503050406030204" pitchFamily="18" charset="0"/>
+                            </a:rPr>
+                            <m:t>𝑠</m:t>
+                          </m:r>
+                        </m:e>
+                      </m:d>
                     </m:oMath>
                   </m:oMathPara>
                 </a14:m>
@@ -15806,7 +13435,7 @@
             </p:txBody>
           </p:sp>
         </mc:Choice>
-        <mc:Fallback xmlns="">
+        <mc:Fallback>
           <p:sp>
             <p:nvSpPr>
               <p:cNvPr id="7" name="TextBox 6">
@@ -15830,9 +13459,148 @@
                 <a:avLst/>
               </a:prstGeom>
               <a:blipFill>
-                <a:blip r:embed="rId210"/>
+                <a:blip r:embed="rId44"/>
                 <a:stretch>
-                  <a:fillRect l="-353" b="-8235"/>
+                  <a:fillRect l="-176" b="-8235"/>
+                </a:stretch>
+              </a:blipFill>
+            </p:spPr>
+            <p:txBody>
+              <a:bodyPr/>
+              <a:lstStyle/>
+              <a:p>
+                <a:r>
+                  <a:rPr lang="en-US">
+                    <a:noFill/>
+                  </a:rPr>
+                  <a:t> </a:t>
+                </a:r>
+              </a:p>
+            </p:txBody>
+          </p:sp>
+        </mc:Fallback>
+      </mc:AlternateContent>
+      <mc:AlternateContent xmlns:mc="http://schemas.openxmlformats.org/markup-compatibility/2006">
+        <mc:Choice xmlns:a14="http://schemas.microsoft.com/office/drawing/2010/main" Requires="a14">
+          <p:sp>
+            <p:nvSpPr>
+              <p:cNvPr id="6" name="TextBox 5">
+                <a:extLst>
+                  <a:ext uri="{FF2B5EF4-FFF2-40B4-BE49-F238E27FC236}">
+                    <a16:creationId xmlns:a16="http://schemas.microsoft.com/office/drawing/2014/main" id="{A913DB3D-9C01-2609-6C91-15B41657B014}"/>
+                  </a:ext>
+                </a:extLst>
+              </p:cNvPr>
+              <p:cNvSpPr txBox="1"/>
+              <p:nvPr/>
+            </p:nvSpPr>
+            <p:spPr>
+              <a:xfrm>
+                <a:off x="9518354" y="589962"/>
+                <a:ext cx="1192706" cy="369332"/>
+              </a:xfrm>
+              <a:prstGeom prst="rect">
+                <a:avLst/>
+              </a:prstGeom>
+              <a:noFill/>
+            </p:spPr>
+            <p:txBody>
+              <a:bodyPr wrap="square" rtlCol="0">
+                <a:spAutoFit/>
+              </a:bodyPr>
+              <a:lstStyle/>
+              <a:p>
+                <a:pPr algn="ctr"/>
+                <a14:m>
+                  <m:oMathPara xmlns:m="http://schemas.openxmlformats.org/officeDocument/2006/math">
+                    <m:oMathParaPr>
+                      <m:jc m:val="centerGroup"/>
+                    </m:oMathParaPr>
+                    <m:oMath xmlns:m="http://schemas.openxmlformats.org/officeDocument/2006/math">
+                      <m:r>
+                        <a:rPr lang="en-US" b="1" i="1" smtClean="0">
+                          <a:solidFill>
+                            <a:srgbClr val="FF0000"/>
+                          </a:solidFill>
+                          <a:latin typeface="Cambria Math" panose="02040503050406030204" pitchFamily="18" charset="0"/>
+                        </a:rPr>
+                        <m:t>≈</m:t>
+                      </m:r>
+                      <m:r>
+                        <a:rPr lang="en-US" b="1" i="1" smtClean="0">
+                          <a:solidFill>
+                            <a:srgbClr val="FF0000"/>
+                          </a:solidFill>
+                          <a:latin typeface="Cambria Math" panose="02040503050406030204" pitchFamily="18" charset="0"/>
+                        </a:rPr>
+                        <m:t>𝒉</m:t>
+                      </m:r>
+                      <m:r>
+                        <a:rPr lang="en-US" b="1" i="1" smtClean="0">
+                          <a:solidFill>
+                            <a:srgbClr val="FF0000"/>
+                          </a:solidFill>
+                          <a:latin typeface="Cambria Math" panose="02040503050406030204" pitchFamily="18" charset="0"/>
+                        </a:rPr>
+                        <m:t>(</m:t>
+                      </m:r>
+                      <m:r>
+                        <a:rPr lang="en-US" b="1" i="1" smtClean="0">
+                          <a:solidFill>
+                            <a:srgbClr val="FF0000"/>
+                          </a:solidFill>
+                          <a:latin typeface="Cambria Math" panose="02040503050406030204" pitchFamily="18" charset="0"/>
+                        </a:rPr>
+                        <m:t>𝒔</m:t>
+                      </m:r>
+                      <m:r>
+                        <a:rPr lang="en-US" b="1" i="1" smtClean="0">
+                          <a:solidFill>
+                            <a:srgbClr val="FF0000"/>
+                          </a:solidFill>
+                          <a:latin typeface="Cambria Math" panose="02040503050406030204" pitchFamily="18" charset="0"/>
+                        </a:rPr>
+                        <m:t>)</m:t>
+                      </m:r>
+                    </m:oMath>
+                  </m:oMathPara>
+                </a14:m>
+                <a:endParaRPr lang="en-US" b="1" dirty="0">
+                  <a:solidFill>
+                    <a:srgbClr val="FF0000"/>
+                  </a:solidFill>
+                </a:endParaRPr>
+              </a:p>
+            </p:txBody>
+          </p:sp>
+        </mc:Choice>
+        <mc:Fallback>
+          <p:sp>
+            <p:nvSpPr>
+              <p:cNvPr id="6" name="TextBox 5">
+                <a:extLst>
+                  <a:ext uri="{FF2B5EF4-FFF2-40B4-BE49-F238E27FC236}">
+                    <a16:creationId xmlns:a16="http://schemas.microsoft.com/office/drawing/2014/main" id="{A913DB3D-9C01-2609-6C91-15B41657B014}"/>
+                  </a:ext>
+                </a:extLst>
+              </p:cNvPr>
+              <p:cNvSpPr txBox="1">
+                <a:spLocks noRot="1" noChangeAspect="1" noMove="1" noResize="1" noEditPoints="1" noAdjustHandles="1" noChangeArrowheads="1" noChangeShapeType="1" noTextEdit="1"/>
+              </p:cNvSpPr>
+              <p:nvPr/>
+            </p:nvSpPr>
+            <p:spPr>
+              <a:xfrm>
+                <a:off x="9518354" y="589962"/>
+                <a:ext cx="1192706" cy="369332"/>
+              </a:xfrm>
+              <a:prstGeom prst="rect">
+                <a:avLst/>
+              </a:prstGeom>
+              <a:blipFill>
+                <a:blip r:embed="rId45"/>
+                <a:stretch>
+                  <a:fillRect b="-13333"/>
                 </a:stretch>
               </a:blipFill>
             </p:spPr>
@@ -16007,6 +13775,33 @@
                                   </p:childTnLst>
                                 </p:cTn>
                               </p:par>
+                              <p:par>
+                                <p:cTn id="15" presetID="1" presetClass="entr" presetSubtype="0" fill="hold" grpId="0" nodeType="withEffect">
+                                  <p:stCondLst>
+                                    <p:cond delay="0"/>
+                                  </p:stCondLst>
+                                  <p:childTnLst>
+                                    <p:set>
+                                      <p:cBhvr>
+                                        <p:cTn id="16" dur="1" fill="hold">
+                                          <p:stCondLst>
+                                            <p:cond delay="0"/>
+                                          </p:stCondLst>
+                                        </p:cTn>
+                                        <p:tgtEl>
+                                          <p:spTgt spid="6"/>
+                                        </p:tgtEl>
+                                        <p:attrNameLst>
+                                          <p:attrName>style.visibility</p:attrName>
+                                        </p:attrNameLst>
+                                      </p:cBhvr>
+                                      <p:to>
+                                        <p:strVal val="visible"/>
+                                      </p:to>
+                                    </p:set>
+                                  </p:childTnLst>
+                                </p:cTn>
+                              </p:par>
                             </p:childTnLst>
                           </p:cTn>
                         </p:par>
@@ -16014,26 +13809,26 @@
                     </p:cTn>
                   </p:par>
                   <p:par>
-                    <p:cTn id="15" fill="hold">
+                    <p:cTn id="17" fill="hold">
                       <p:stCondLst>
                         <p:cond delay="indefinite"/>
                       </p:stCondLst>
                       <p:childTnLst>
                         <p:par>
-                          <p:cTn id="16" fill="hold">
+                          <p:cTn id="18" fill="hold">
                             <p:stCondLst>
                               <p:cond delay="0"/>
                             </p:stCondLst>
                             <p:childTnLst>
                               <p:par>
-                                <p:cTn id="17" presetID="1" presetClass="entr" presetSubtype="0" fill="hold" grpId="0" nodeType="clickEffect">
+                                <p:cTn id="19" presetID="1" presetClass="entr" presetSubtype="0" fill="hold" grpId="0" nodeType="clickEffect">
                                   <p:stCondLst>
                                     <p:cond delay="0"/>
                                   </p:stCondLst>
                                   <p:childTnLst>
                                     <p:set>
                                       <p:cBhvr>
-                                        <p:cTn id="18" dur="1" fill="hold">
+                                        <p:cTn id="20" dur="1" fill="hold">
                                           <p:stCondLst>
                                             <p:cond delay="0"/>
                                           </p:stCondLst>
@@ -16085,6 +13880,7 @@
       <p:bldP spid="174" grpId="0"/>
       <p:bldP spid="176" grpId="0"/>
       <p:bldP spid="183" grpId="0" animBg="1"/>
+      <p:bldP spid="6" grpId="0"/>
     </p:bldLst>
   </p:timing>
 </p:sld>
@@ -20844,8 +18640,8 @@
           </a:p>
         </p:txBody>
       </p:sp>
-      <mc:AlternateContent xmlns:mc="http://schemas.openxmlformats.org/markup-compatibility/2006" xmlns:a14="http://schemas.microsoft.com/office/drawing/2010/main">
-        <mc:Choice Requires="a14">
+      <mc:AlternateContent xmlns:mc="http://schemas.openxmlformats.org/markup-compatibility/2006">
+        <mc:Choice xmlns:a14="http://schemas.microsoft.com/office/drawing/2010/main" Requires="a14">
           <p:sp>
             <p:nvSpPr>
               <p:cNvPr id="13" name="Content Placeholder 12">
@@ -20974,7 +18770,7 @@
                         <a:rPr lang="en-US" b="0" i="1" smtClean="0">
                           <a:latin typeface="Cambria Math" panose="02040503050406030204" pitchFamily="18" charset="0"/>
                         </a:rPr>
-                        <m:t>𝑣𝑎𝑙𝑢𝑒</m:t>
+                        <m:t>𝑈</m:t>
                       </m:r>
                       <m:d>
                         <m:dPr>
@@ -21062,7 +18858,7 @@
                         <a:rPr lang="en-US" sz="2900" b="0" i="1" smtClean="0">
                           <a:latin typeface="Cambria Math" panose="02040503050406030204" pitchFamily="18" charset="0"/>
                         </a:rPr>
-                        <m:t>𝑣𝑎𝑙𝑢𝑒</m:t>
+                        <m:t>𝑈</m:t>
                       </m:r>
                       <m:d>
                         <m:dPr>
@@ -21178,16 +18974,22 @@
                             <a:rPr lang="en-US" sz="2900" b="0" i="1" smtClean="0">
                               <a:latin typeface="Cambria Math" panose="02040503050406030204" pitchFamily="18" charset="0"/>
                             </a:rPr>
-                            <m:t>𝑈</m:t>
+                            <m:t>𝑢</m:t>
                           </m:r>
-                          <m:d>
-                            <m:dPr>
+                          <m:r>
+                            <a:rPr lang="en-US" sz="2900" b="0" i="1" smtClean="0">
+                              <a:latin typeface="Cambria Math" panose="02040503050406030204" pitchFamily="18" charset="0"/>
+                            </a:rPr>
+                            <m:t>|</m:t>
+                          </m:r>
+                          <m:sSub>
+                            <m:sSubPr>
                               <m:ctrlPr>
                                 <a:rPr lang="en-US" sz="2900" b="0" i="1" smtClean="0">
                                   <a:latin typeface="Cambria Math" panose="02040503050406030204" pitchFamily="18" charset="0"/>
                                 </a:rPr>
                               </m:ctrlPr>
-                            </m:dPr>
+                            </m:sSubPr>
                             <m:e>
                               <m:r>
                                 <a:rPr lang="en-US" sz="2900" b="0" i="1" smtClean="0">
@@ -21196,7 +18998,27 @@
                                 <m:t>𝑠</m:t>
                               </m:r>
                             </m:e>
-                          </m:d>
+                            <m:sub>
+                              <m:r>
+                                <a:rPr lang="en-US" sz="2900" b="0" i="1" smtClean="0">
+                                  <a:latin typeface="Cambria Math" panose="02040503050406030204" pitchFamily="18" charset="0"/>
+                                </a:rPr>
+                                <m:t>0</m:t>
+                              </m:r>
+                            </m:sub>
+                          </m:sSub>
+                          <m:r>
+                            <a:rPr lang="en-US" sz="2900" b="0" i="1" smtClean="0">
+                              <a:latin typeface="Cambria Math" panose="02040503050406030204" pitchFamily="18" charset="0"/>
+                            </a:rPr>
+                            <m:t>=</m:t>
+                          </m:r>
+                          <m:r>
+                            <a:rPr lang="en-US" sz="2900" b="0" i="1" smtClean="0">
+                              <a:latin typeface="Cambria Math" panose="02040503050406030204" pitchFamily="18" charset="0"/>
+                            </a:rPr>
+                            <m:t>𝑠</m:t>
+                          </m:r>
                         </m:e>
                       </m:d>
                       <m:r>
@@ -21328,7 +19150,7 @@
             </p:txBody>
           </p:sp>
         </mc:Choice>
-        <mc:Fallback xmlns="">
+        <mc:Fallback>
           <p:sp>
             <p:nvSpPr>
               <p:cNvPr id="13" name="Content Placeholder 12">
@@ -21387,13 +19209,13 @@
         <p:grpSpPr>
           <a:xfrm>
             <a:off x="4300963" y="1526790"/>
-            <a:ext cx="4020140" cy="1183474"/>
+            <a:ext cx="5662108" cy="1183474"/>
             <a:chOff x="1023624" y="2250062"/>
-            <a:chExt cx="4020140" cy="1183474"/>
+            <a:chExt cx="5662108" cy="1183474"/>
           </a:xfrm>
         </p:grpSpPr>
-        <mc:AlternateContent xmlns:mc="http://schemas.openxmlformats.org/markup-compatibility/2006" xmlns:a14="http://schemas.microsoft.com/office/drawing/2010/main">
-          <mc:Choice Requires="a14">
+        <mc:AlternateContent xmlns:mc="http://schemas.openxmlformats.org/markup-compatibility/2006">
+          <mc:Choice xmlns:a14="http://schemas.microsoft.com/office/drawing/2010/main" Requires="a14">
             <p:sp>
               <p:nvSpPr>
                 <p:cNvPr id="193" name="TextBox 192">
@@ -21409,7 +19231,7 @@
               <p:spPr>
                 <a:xfrm>
                   <a:off x="3556658" y="2768256"/>
-                  <a:ext cx="1487106" cy="461665"/>
+                  <a:ext cx="3129074" cy="461665"/>
                 </a:xfrm>
                 <a:prstGeom prst="rect">
                   <a:avLst/>
@@ -21433,7 +19255,7 @@
                           <a:rPr lang="en-US" sz="2400" b="0" i="1" smtClean="0">
                             <a:latin typeface="Cambria Math" panose="02040503050406030204" pitchFamily="18" charset="0"/>
                           </a:rPr>
-                          <m:t>𝑣𝑎𝑙𝑢𝑒</m:t>
+                          <m:t>𝑈</m:t>
                         </m:r>
                         <m:d>
                           <m:dPr>
@@ -21460,7 +19282,7 @@
               </p:txBody>
             </p:sp>
           </mc:Choice>
-          <mc:Fallback xmlns="">
+          <mc:Fallback>
             <p:sp>
               <p:nvSpPr>
                 <p:cNvPr id="193" name="TextBox 192">
@@ -21478,7 +19300,7 @@
               <p:spPr>
                 <a:xfrm>
                   <a:off x="3556658" y="2768256"/>
-                  <a:ext cx="1487106" cy="461665"/>
+                  <a:ext cx="3129074" cy="461665"/>
                 </a:xfrm>
                 <a:prstGeom prst="rect">
                   <a:avLst/>
@@ -22197,55 +20019,138 @@
           </p:txBody>
         </p:sp>
       </p:grpSp>
-      <p:sp>
-        <p:nvSpPr>
-          <p:cNvPr id="15" name="TextBox 14">
-            <a:extLst>
-              <a:ext uri="{FF2B5EF4-FFF2-40B4-BE49-F238E27FC236}">
-                <a16:creationId xmlns:a16="http://schemas.microsoft.com/office/drawing/2014/main" id="{BC080439-A80D-6FE2-F592-E74DE29D0F27}"/>
-              </a:ext>
-            </a:extLst>
-          </p:cNvPr>
-          <p:cNvSpPr txBox="1"/>
-          <p:nvPr/>
-        </p:nvSpPr>
-        <p:spPr>
-          <a:xfrm>
-            <a:off x="8372214" y="4582960"/>
-            <a:ext cx="1975608" cy="738664"/>
-          </a:xfrm>
-          <a:prstGeom prst="rect">
-            <a:avLst/>
-          </a:prstGeom>
-        </p:spPr>
-        <p:style>
-          <a:lnRef idx="3">
-            <a:schemeClr val="lt1"/>
-          </a:lnRef>
-          <a:fillRef idx="1">
-            <a:schemeClr val="accent3"/>
-          </a:fillRef>
-          <a:effectRef idx="1">
-            <a:schemeClr val="accent3"/>
-          </a:effectRef>
-          <a:fontRef idx="minor">
-            <a:schemeClr val="lt1"/>
-          </a:fontRef>
-        </p:style>
-        <p:txBody>
-          <a:bodyPr wrap="square" rtlCol="0">
-            <a:spAutoFit/>
-          </a:bodyPr>
-          <a:lstStyle/>
-          <a:p>
-            <a:pPr algn="ctr"/>
-            <a:r>
-              <a:rPr lang="en-US" sz="1400" dirty="0"/>
-              <a:t>Expectation is used for stochastic playout strategies!</a:t>
-            </a:r>
-          </a:p>
-        </p:txBody>
-      </p:sp>
+      <mc:AlternateContent xmlns:mc="http://schemas.openxmlformats.org/markup-compatibility/2006">
+        <mc:Choice xmlns:a14="http://schemas.microsoft.com/office/drawing/2010/main" Requires="a14">
+          <p:sp>
+            <p:nvSpPr>
+              <p:cNvPr id="15" name="TextBox 14">
+                <a:extLst>
+                  <a:ext uri="{FF2B5EF4-FFF2-40B4-BE49-F238E27FC236}">
+                    <a16:creationId xmlns:a16="http://schemas.microsoft.com/office/drawing/2014/main" id="{BC080439-A80D-6FE2-F592-E74DE29D0F27}"/>
+                  </a:ext>
+                </a:extLst>
+              </p:cNvPr>
+              <p:cNvSpPr txBox="1"/>
+              <p:nvPr/>
+            </p:nvSpPr>
+            <p:spPr>
+              <a:xfrm>
+                <a:off x="7838814" y="4549404"/>
+                <a:ext cx="3514986" cy="1169551"/>
+              </a:xfrm>
+              <a:prstGeom prst="rect">
+                <a:avLst/>
+              </a:prstGeom>
+            </p:spPr>
+            <p:style>
+              <a:lnRef idx="3">
+                <a:schemeClr val="lt1"/>
+              </a:lnRef>
+              <a:fillRef idx="1">
+                <a:schemeClr val="accent3"/>
+              </a:fillRef>
+              <a:effectRef idx="1">
+                <a:schemeClr val="accent3"/>
+              </a:effectRef>
+              <a:fontRef idx="minor">
+                <a:schemeClr val="lt1"/>
+              </a:fontRef>
+            </p:style>
+            <p:txBody>
+              <a:bodyPr wrap="square" rtlCol="0">
+                <a:spAutoFit/>
+              </a:bodyPr>
+              <a:lstStyle/>
+              <a:p>
+                <a:pPr algn="ctr"/>
+                <a14:m>
+                  <m:oMath xmlns:m="http://schemas.openxmlformats.org/officeDocument/2006/math">
+                    <m:r>
+                      <a:rPr lang="en-US" sz="1400" b="0" i="1" smtClean="0">
+                        <a:latin typeface="Cambria Math" panose="02040503050406030204" pitchFamily="18" charset="0"/>
+                      </a:rPr>
+                      <m:t>𝑢</m:t>
+                    </m:r>
+                  </m:oMath>
+                </a14:m>
+                <a:r>
+                  <a:rPr lang="en-US" sz="1400" dirty="0"/>
+                  <a:t> is the observed utility of when finishing a game starting at board </a:t>
+                </a:r>
+                <a14:m>
+                  <m:oMath xmlns:m="http://schemas.openxmlformats.org/officeDocument/2006/math">
+                    <m:r>
+                      <a:rPr lang="en-US" sz="1400" i="1" dirty="0" smtClean="0">
+                        <a:latin typeface="Cambria Math" panose="02040503050406030204" pitchFamily="18" charset="0"/>
+                      </a:rPr>
+                      <m:t>𝑠</m:t>
+                    </m:r>
+                  </m:oMath>
+                </a14:m>
+                <a:r>
+                  <a:rPr lang="en-US" sz="1400" dirty="0"/>
+                  <a:t>.</a:t>
+                </a:r>
+              </a:p>
+              <a:p>
+                <a:pPr algn="ctr"/>
+                <a:endParaRPr lang="en-US" sz="1400" dirty="0"/>
+              </a:p>
+              <a:p>
+                <a:pPr algn="ctr"/>
+                <a:r>
+                  <a:rPr lang="en-US" sz="1400" dirty="0"/>
+                  <a:t>Expectation is used for stochastic playout strategies!</a:t>
+                </a:r>
+              </a:p>
+            </p:txBody>
+          </p:sp>
+        </mc:Choice>
+        <mc:Fallback>
+          <p:sp>
+            <p:nvSpPr>
+              <p:cNvPr id="15" name="TextBox 14">
+                <a:extLst>
+                  <a:ext uri="{FF2B5EF4-FFF2-40B4-BE49-F238E27FC236}">
+                    <a16:creationId xmlns:a16="http://schemas.microsoft.com/office/drawing/2014/main" id="{BC080439-A80D-6FE2-F592-E74DE29D0F27}"/>
+                  </a:ext>
+                </a:extLst>
+              </p:cNvPr>
+              <p:cNvSpPr txBox="1">
+                <a:spLocks noRot="1" noChangeAspect="1" noMove="1" noResize="1" noEditPoints="1" noAdjustHandles="1" noChangeArrowheads="1" noChangeShapeType="1" noTextEdit="1"/>
+              </p:cNvSpPr>
+              <p:nvPr/>
+            </p:nvSpPr>
+            <p:spPr>
+              <a:xfrm>
+                <a:off x="7838814" y="4549404"/>
+                <a:ext cx="3514986" cy="1169551"/>
+              </a:xfrm>
+              <a:prstGeom prst="rect">
+                <a:avLst/>
+              </a:prstGeom>
+              <a:blipFill>
+                <a:blip r:embed="rId43"/>
+                <a:stretch>
+                  <a:fillRect b="-3571"/>
+                </a:stretch>
+              </a:blipFill>
+            </p:spPr>
+            <p:txBody>
+              <a:bodyPr/>
+              <a:lstStyle/>
+              <a:p>
+                <a:r>
+                  <a:rPr lang="en-US">
+                    <a:noFill/>
+                  </a:rPr>
+                  <a:t> </a:t>
+                </a:r>
+              </a:p>
+            </p:txBody>
+          </p:sp>
+        </mc:Fallback>
+      </mc:AlternateContent>
     </p:spTree>
     <p:extLst>
       <p:ext uri="{BB962C8B-B14F-4D97-AF65-F5344CB8AC3E}">
@@ -22282,8 +20187,8 @@
           <a:chExt cx="0" cy="0"/>
         </a:xfrm>
       </p:grpSpPr>
-      <mc:AlternateContent xmlns:mc="http://schemas.openxmlformats.org/markup-compatibility/2006" xmlns:a14="http://schemas.microsoft.com/office/drawing/2010/main">
-        <mc:Choice Requires="a14">
+      <mc:AlternateContent xmlns:mc="http://schemas.openxmlformats.org/markup-compatibility/2006">
+        <mc:Choice xmlns:a14="http://schemas.microsoft.com/office/drawing/2010/main" Requires="a14">
           <p:graphicFrame>
             <p:nvGraphicFramePr>
               <p:cNvPr id="5" name="Table 4">
@@ -22299,7 +20204,7 @@
               <p:nvPr>
                 <p:extLst>
                   <p:ext uri="{D42A27DB-BD31-4B8C-83A1-F6EECF244321}">
-                    <p14:modId xmlns:p14="http://schemas.microsoft.com/office/powerpoint/2010/main" val="3884915298"/>
+                    <p14:modId xmlns:p14="http://schemas.microsoft.com/office/powerpoint/2010/main" val="2419946311"/>
                   </p:ext>
                 </p:extLst>
               </p:nvPr>
@@ -22459,65 +20364,6 @@
                             <a:tabLst/>
                             <a:defRPr/>
                           </a:pPr>
-                          <a:r>
-                            <a:rPr lang="en-US" sz="1800" b="0" dirty="0"/>
-                            <a:t>Expert code</a:t>
-                          </a:r>
-                          <a:endParaRPr lang="en-US" sz="1800" b="0" i="1" dirty="0">
-                            <a:latin typeface="Cambria Math" panose="02040503050406030204" pitchFamily="18" charset="0"/>
-                          </a:endParaRPr>
-                        </a:p>
-                        <a:p>
-                          <a:pPr marL="0" marR="0" lvl="0" indent="0" algn="ctr" defTabSz="914400" rtl="0" eaLnBrk="1" fontAlgn="auto" latinLnBrk="0" hangingPunct="1">
-                            <a:lnSpc>
-                              <a:spcPct val="100000"/>
-                            </a:lnSpc>
-                            <a:spcBef>
-                              <a:spcPts val="0"/>
-                            </a:spcBef>
-                            <a:spcAft>
-                              <a:spcPts val="0"/>
-                            </a:spcAft>
-                            <a:buClrTx/>
-                            <a:buSzTx/>
-                            <a:buFontTx/>
-                            <a:buNone/>
-                            <a:tabLst/>
-                            <a:defRPr/>
-                          </a:pPr>
-                          <a14:m>
-                            <m:oMathPara xmlns:m="http://schemas.openxmlformats.org/officeDocument/2006/math">
-                              <m:oMathParaPr>
-                                <m:jc m:val="centerGroup"/>
-                              </m:oMathParaPr>
-                              <m:oMath xmlns:m="http://schemas.openxmlformats.org/officeDocument/2006/math">
-                                <m:r>
-                                  <a:rPr lang="en-US" sz="1800" b="0" i="1" smtClean="0">
-                                    <a:latin typeface="Cambria Math" panose="02040503050406030204" pitchFamily="18" charset="0"/>
-                                  </a:rPr>
-                                  <m:t>𝑒𝑣𝑎𝑙</m:t>
-                                </m:r>
-                                <m:r>
-                                  <a:rPr lang="en-US" sz="1800" b="0" i="1" smtClean="0">
-                                    <a:latin typeface="Cambria Math" panose="02040503050406030204" pitchFamily="18" charset="0"/>
-                                  </a:rPr>
-                                  <m:t>(</m:t>
-                                </m:r>
-                                <m:r>
-                                  <a:rPr lang="en-US" sz="1800" b="0" i="1" smtClean="0">
-                                    <a:latin typeface="Cambria Math" panose="02040503050406030204" pitchFamily="18" charset="0"/>
-                                  </a:rPr>
-                                  <m:t>𝑠</m:t>
-                                </m:r>
-                                <m:r>
-                                  <a:rPr lang="en-US" sz="1800" b="0" i="1" smtClean="0">
-                                    <a:latin typeface="Cambria Math" panose="02040503050406030204" pitchFamily="18" charset="0"/>
-                                  </a:rPr>
-                                  <m:t>)</m:t>
-                                </m:r>
-                              </m:oMath>
-                            </m:oMathPara>
-                          </a14:m>
                           <a:endParaRPr lang="en-US" sz="1800" b="0" dirty="0"/>
                         </a:p>
                       </a:txBody>
@@ -22823,7 +20669,7 @@
             </a:graphic>
           </p:graphicFrame>
         </mc:Choice>
-        <mc:Fallback xmlns="">
+        <mc:Fallback>
           <p:graphicFrame>
             <p:nvGraphicFramePr>
               <p:cNvPr id="5" name="Table 4">
@@ -22839,7 +20685,7 @@
               <p:nvPr>
                 <p:extLst>
                   <p:ext uri="{D42A27DB-BD31-4B8C-83A1-F6EECF244321}">
-                    <p14:modId xmlns:p14="http://schemas.microsoft.com/office/powerpoint/2010/main" val="3884915298"/>
+                    <p14:modId xmlns:p14="http://schemas.microsoft.com/office/powerpoint/2010/main" val="2419946311"/>
                   </p:ext>
                 </p:extLst>
               </p:nvPr>
@@ -22931,17 +20777,27 @@
                         <a:bodyPr/>
                         <a:lstStyle/>
                         <a:p>
-                          <a:endParaRPr lang="en-US"/>
+                          <a:pPr marL="0" marR="0" lvl="0" indent="0" algn="ctr" defTabSz="914400" rtl="0" eaLnBrk="1" fontAlgn="auto" latinLnBrk="0" hangingPunct="1">
+                            <a:lnSpc>
+                              <a:spcPct val="100000"/>
+                            </a:lnSpc>
+                            <a:spcBef>
+                              <a:spcPts val="0"/>
+                            </a:spcBef>
+                            <a:spcAft>
+                              <a:spcPts val="0"/>
+                            </a:spcAft>
+                            <a:buClrTx/>
+                            <a:buSzTx/>
+                            <a:buFontTx/>
+                            <a:buNone/>
+                            <a:tabLst/>
+                            <a:defRPr/>
+                          </a:pPr>
+                          <a:endParaRPr lang="en-US" sz="1800" b="0" dirty="0"/>
                         </a:p>
                       </a:txBody>
-                      <a:tcPr>
-                        <a:blipFill>
-                          <a:blip r:embed="rId2"/>
-                          <a:stretch>
-                            <a:fillRect l="-200375" t="-2874" r="-201498" b="-263793"/>
-                          </a:stretch>
-                        </a:blipFill>
-                      </a:tcPr>
+                      <a:tcPr/>
                     </a:tc>
                     <a:tc>
                       <a:txBody>
@@ -24388,8 +22244,8 @@
           </a:p>
         </p:txBody>
       </p:sp>
-      <mc:AlternateContent xmlns:mc="http://schemas.openxmlformats.org/markup-compatibility/2006" xmlns:a14="http://schemas.microsoft.com/office/drawing/2010/main">
-        <mc:Choice Requires="a14">
+      <mc:AlternateContent xmlns:mc="http://schemas.openxmlformats.org/markup-compatibility/2006">
+        <mc:Choice xmlns:a14="http://schemas.microsoft.com/office/drawing/2010/main" Requires="a14">
           <p:sp>
             <p:nvSpPr>
               <p:cNvPr id="6" name="TextBox 5">
@@ -24439,22 +22295,22 @@
                     </m:oMathParaPr>
                     <m:oMath xmlns:m="http://schemas.openxmlformats.org/officeDocument/2006/math">
                       <m:r>
-                        <a:rPr lang="en-US" sz="2400" b="0" i="1" smtClean="0">
+                        <a:rPr lang="en-US" sz="2400" i="1" smtClean="0">
                           <a:latin typeface="Cambria Math" panose="02040503050406030204" pitchFamily="18" charset="0"/>
                         </a:rPr>
-                        <m:t>𝑣𝑎𝑙𝑢𝑒</m:t>
+                        <m:t>𝑈</m:t>
                       </m:r>
                       <m:d>
                         <m:dPr>
                           <m:ctrlPr>
-                            <a:rPr lang="en-US" sz="2400" b="0" i="1" smtClean="0">
+                            <a:rPr lang="en-US" sz="2400" i="1">
                               <a:latin typeface="Cambria Math" panose="02040503050406030204" pitchFamily="18" charset="0"/>
                             </a:rPr>
                           </m:ctrlPr>
                         </m:dPr>
                         <m:e>
                           <m:r>
-                            <a:rPr lang="en-US" sz="2400" b="0" i="1" smtClean="0">
+                            <a:rPr lang="en-US" sz="2400" i="1">
                               <a:latin typeface="Cambria Math" panose="02040503050406030204" pitchFamily="18" charset="0"/>
                             </a:rPr>
                             <m:t>𝑠</m:t>
@@ -24462,22 +22318,22 @@
                         </m:e>
                       </m:d>
                       <m:r>
-                        <a:rPr lang="en-US" sz="2400" b="0" i="1" smtClean="0">
+                        <a:rPr lang="en-US" sz="2400" i="1">
                           <a:latin typeface="Cambria Math" panose="02040503050406030204" pitchFamily="18" charset="0"/>
                         </a:rPr>
-                        <m:t>≈</m:t>
+                        <m:t>=</m:t>
                       </m:r>
                       <m:sSub>
                         <m:sSubPr>
                           <m:ctrlPr>
-                            <a:rPr lang="en-US" sz="2400" b="0" i="1" smtClean="0">
+                            <a:rPr lang="en-US" sz="2400" i="1">
                               <a:latin typeface="Cambria Math" panose="02040503050406030204" pitchFamily="18" charset="0"/>
                             </a:rPr>
                           </m:ctrlPr>
                         </m:sSubPr>
                         <m:e>
                           <m:r>
-                            <a:rPr lang="en-US" sz="2400" b="0" i="1" smtClean="0">
+                            <a:rPr lang="en-US" sz="2400" i="1">
                               <a:latin typeface="Cambria Math" panose="02040503050406030204" pitchFamily="18" charset="0"/>
                               <a:ea typeface="Cambria Math" panose="02040503050406030204" pitchFamily="18" charset="0"/>
                             </a:rPr>
@@ -24488,14 +22344,14 @@
                           <m:sSub>
                             <m:sSubPr>
                               <m:ctrlPr>
-                                <a:rPr lang="en-US" sz="2400" b="0" i="1" smtClean="0">
+                                <a:rPr lang="en-US" sz="2400" i="1">
                                   <a:latin typeface="Cambria Math" panose="02040503050406030204" pitchFamily="18" charset="0"/>
                                 </a:rPr>
                               </m:ctrlPr>
                             </m:sSubPr>
                             <m:e>
                               <m:r>
-                                <a:rPr lang="en-US" sz="2400" b="0" i="1" smtClean="0">
+                                <a:rPr lang="en-US" sz="2400" i="1">
                                   <a:latin typeface="Cambria Math" panose="02040503050406030204" pitchFamily="18" charset="0"/>
                                 </a:rPr>
                                 <m:t>𝜋</m:t>
@@ -24503,7 +22359,7 @@
                             </m:e>
                             <m:sub>
                               <m:r>
-                                <a:rPr lang="en-US" sz="2400" b="0" i="1" smtClean="0">
+                                <a:rPr lang="en-US" sz="2400" i="1">
                                   <a:latin typeface="Cambria Math" panose="02040503050406030204" pitchFamily="18" charset="0"/>
                                 </a:rPr>
                                 <m:t>𝑥</m:t>
@@ -24511,7 +22367,7 @@
                             </m:sub>
                           </m:sSub>
                           <m:r>
-                            <a:rPr lang="en-US" sz="2400" b="0" i="1" smtClean="0">
+                            <a:rPr lang="en-US" sz="2400" i="1">
                               <a:latin typeface="Cambria Math" panose="02040503050406030204" pitchFamily="18" charset="0"/>
                             </a:rPr>
                             <m:t>,</m:t>
@@ -24519,14 +22375,14 @@
                           <m:sSub>
                             <m:sSubPr>
                               <m:ctrlPr>
-                                <a:rPr lang="en-US" sz="2400" b="0" i="1" smtClean="0">
+                                <a:rPr lang="en-US" sz="2400" i="1">
                                   <a:latin typeface="Cambria Math" panose="02040503050406030204" pitchFamily="18" charset="0"/>
                                 </a:rPr>
                               </m:ctrlPr>
                             </m:sSubPr>
                             <m:e>
                               <m:r>
-                                <a:rPr lang="en-US" sz="2400" b="0" i="1" smtClean="0">
+                                <a:rPr lang="en-US" sz="2400" i="1">
                                   <a:latin typeface="Cambria Math" panose="02040503050406030204" pitchFamily="18" charset="0"/>
                                 </a:rPr>
                                 <m:t>𝜋</m:t>
@@ -24534,7 +22390,7 @@
                             </m:e>
                             <m:sub>
                               <m:r>
-                                <a:rPr lang="en-US" sz="2400" b="0" i="1" smtClean="0">
+                                <a:rPr lang="en-US" sz="2400" i="1">
                                   <a:latin typeface="Cambria Math" panose="02040503050406030204" pitchFamily="18" charset="0"/>
                                 </a:rPr>
                                 <m:t>𝑜</m:t>
@@ -24543,36 +22399,68 @@
                           </m:sSub>
                         </m:sub>
                       </m:sSub>
-                      <m:r>
-                        <a:rPr lang="en-US" sz="2400" b="0" i="1" smtClean="0">
-                          <a:latin typeface="Cambria Math" panose="02040503050406030204" pitchFamily="18" charset="0"/>
-                        </a:rPr>
-                        <m:t>[</m:t>
-                      </m:r>
-                      <m:r>
-                        <a:rPr lang="en-US" sz="2400" b="0" i="1" smtClean="0">
-                          <a:latin typeface="Cambria Math" panose="02040503050406030204" pitchFamily="18" charset="0"/>
-                        </a:rPr>
-                        <m:t>𝑈</m:t>
-                      </m:r>
-                      <m:r>
-                        <a:rPr lang="en-US" sz="2400" b="0" i="1" smtClean="0">
-                          <a:latin typeface="Cambria Math" panose="02040503050406030204" pitchFamily="18" charset="0"/>
-                        </a:rPr>
-                        <m:t>(</m:t>
-                      </m:r>
-                      <m:r>
-                        <a:rPr lang="en-US" sz="2400" b="0" i="1" smtClean="0">
-                          <a:latin typeface="Cambria Math" panose="02040503050406030204" pitchFamily="18" charset="0"/>
-                        </a:rPr>
-                        <m:t>𝑠</m:t>
-                      </m:r>
-                      <m:r>
-                        <a:rPr lang="en-US" sz="2400" b="0" i="1" smtClean="0">
-                          <a:latin typeface="Cambria Math" panose="02040503050406030204" pitchFamily="18" charset="0"/>
-                        </a:rPr>
-                        <m:t>)]</m:t>
-                      </m:r>
+                      <m:d>
+                        <m:dPr>
+                          <m:begChr m:val="["/>
+                          <m:endChr m:val="]"/>
+                          <m:ctrlPr>
+                            <a:rPr lang="en-US" sz="2400" i="1">
+                              <a:latin typeface="Cambria Math" panose="02040503050406030204" pitchFamily="18" charset="0"/>
+                            </a:rPr>
+                          </m:ctrlPr>
+                        </m:dPr>
+                        <m:e>
+                          <m:r>
+                            <a:rPr lang="en-US" sz="2400" i="1">
+                              <a:latin typeface="Cambria Math" panose="02040503050406030204" pitchFamily="18" charset="0"/>
+                            </a:rPr>
+                            <m:t>𝑢</m:t>
+                          </m:r>
+                          <m:r>
+                            <a:rPr lang="en-US" sz="2400" i="1">
+                              <a:latin typeface="Cambria Math" panose="02040503050406030204" pitchFamily="18" charset="0"/>
+                            </a:rPr>
+                            <m:t>|</m:t>
+                          </m:r>
+                          <m:sSub>
+                            <m:sSubPr>
+                              <m:ctrlPr>
+                                <a:rPr lang="en-US" sz="2400" i="1">
+                                  <a:latin typeface="Cambria Math" panose="02040503050406030204" pitchFamily="18" charset="0"/>
+                                </a:rPr>
+                              </m:ctrlPr>
+                            </m:sSubPr>
+                            <m:e>
+                              <m:r>
+                                <a:rPr lang="en-US" sz="2400" i="1">
+                                  <a:latin typeface="Cambria Math" panose="02040503050406030204" pitchFamily="18" charset="0"/>
+                                </a:rPr>
+                                <m:t>𝑠</m:t>
+                              </m:r>
+                            </m:e>
+                            <m:sub>
+                              <m:r>
+                                <a:rPr lang="en-US" sz="2400" i="1">
+                                  <a:latin typeface="Cambria Math" panose="02040503050406030204" pitchFamily="18" charset="0"/>
+                                </a:rPr>
+                                <m:t>0</m:t>
+                              </m:r>
+                            </m:sub>
+                          </m:sSub>
+                          <m:r>
+                            <a:rPr lang="en-US" sz="2400" i="1">
+                              <a:latin typeface="Cambria Math" panose="02040503050406030204" pitchFamily="18" charset="0"/>
+                            </a:rPr>
+                            <m:t>=</m:t>
+                          </m:r>
+                          <m:r>
+                            <a:rPr lang="en-US" sz="2400" i="1">
+                              <a:latin typeface="Cambria Math" panose="02040503050406030204" pitchFamily="18" charset="0"/>
+                            </a:rPr>
+                            <m:t>𝑠</m:t>
+                          </m:r>
+                        </m:e>
+                      </m:d>
                     </m:oMath>
                   </m:oMathPara>
                 </a14:m>
@@ -24581,7 +22469,7 @@
             </p:txBody>
           </p:sp>
         </mc:Choice>
-        <mc:Fallback xmlns="">
+        <mc:Fallback>
           <p:sp>
             <p:nvSpPr>
               <p:cNvPr id="6" name="TextBox 5">
@@ -24607,7 +22495,7 @@
               <a:blipFill>
                 <a:blip r:embed="rId43"/>
                 <a:stretch>
-                  <a:fillRect l="-353" b="-8235"/>
+                  <a:fillRect l="-176" b="-8235"/>
                 </a:stretch>
               </a:blipFill>
             </p:spPr>
@@ -25508,6 +23396,59 @@
           </a:p>
         </p:txBody>
       </p:sp>
+      <p:sp>
+        <p:nvSpPr>
+          <p:cNvPr id="15" name="Speech Bubble: Rectangle with Corners Rounded 14">
+            <a:extLst>
+              <a:ext uri="{FF2B5EF4-FFF2-40B4-BE49-F238E27FC236}">
+                <a16:creationId xmlns:a16="http://schemas.microsoft.com/office/drawing/2014/main" id="{83E2C129-2D12-0369-CCEC-52C5012AB7D2}"/>
+              </a:ext>
+            </a:extLst>
+          </p:cNvPr>
+          <p:cNvSpPr/>
+          <p:nvPr/>
+        </p:nvSpPr>
+        <p:spPr>
+          <a:xfrm>
+            <a:off x="8517213" y="1308683"/>
+            <a:ext cx="2220309" cy="958806"/>
+          </a:xfrm>
+          <a:prstGeom prst="wedgeRoundRectCallout">
+            <a:avLst>
+              <a:gd name="adj1" fmla="val -45959"/>
+              <a:gd name="adj2" fmla="val -67168"/>
+              <a:gd name="adj3" fmla="val 16667"/>
+            </a:avLst>
+          </a:prstGeom>
+        </p:spPr>
+        <p:style>
+          <a:lnRef idx="2">
+            <a:schemeClr val="accent2">
+              <a:shade val="15000"/>
+            </a:schemeClr>
+          </a:lnRef>
+          <a:fillRef idx="1">
+            <a:schemeClr val="accent2"/>
+          </a:fillRef>
+          <a:effectRef idx="0">
+            <a:schemeClr val="accent2"/>
+          </a:effectRef>
+          <a:fontRef idx="minor">
+            <a:schemeClr val="lt1"/>
+          </a:fontRef>
+        </p:style>
+        <p:txBody>
+          <a:bodyPr rtlCol="0" anchor="ctr"/>
+          <a:lstStyle/>
+          <a:p>
+            <a:pPr algn="ctr"/>
+            <a:r>
+              <a:rPr lang="en-US" dirty="0"/>
+              <a:t>Minimax replaces the expectation with optimal play!</a:t>
+            </a:r>
+          </a:p>
+        </p:txBody>
+      </p:sp>
     </p:spTree>
     <p:extLst>
       <p:ext uri="{BB962C8B-B14F-4D97-AF65-F5344CB8AC3E}">
@@ -25772,6 +23713,33 @@
                                   </p:childTnLst>
                                 </p:cTn>
                               </p:par>
+                              <p:par>
+                                <p:cTn id="25" presetID="1" presetClass="entr" presetSubtype="0" fill="hold" grpId="0" nodeType="withEffect">
+                                  <p:stCondLst>
+                                    <p:cond delay="0"/>
+                                  </p:stCondLst>
+                                  <p:childTnLst>
+                                    <p:set>
+                                      <p:cBhvr>
+                                        <p:cTn id="26" dur="1" fill="hold">
+                                          <p:stCondLst>
+                                            <p:cond delay="0"/>
+                                          </p:stCondLst>
+                                        </p:cTn>
+                                        <p:tgtEl>
+                                          <p:spTgt spid="15"/>
+                                        </p:tgtEl>
+                                        <p:attrNameLst>
+                                          <p:attrName>style.visibility</p:attrName>
+                                        </p:attrNameLst>
+                                      </p:cBhvr>
+                                      <p:to>
+                                        <p:strVal val="visible"/>
+                                      </p:to>
+                                    </p:set>
+                                  </p:childTnLst>
+                                </p:cTn>
+                              </p:par>
                             </p:childTnLst>
                           </p:cTn>
                         </p:par>
@@ -25804,6 +23772,7 @@
       <p:bldP spid="25" grpId="0" animBg="1"/>
       <p:bldP spid="17" grpId="0"/>
       <p:bldP spid="27" grpId="0"/>
+      <p:bldP spid="15" grpId="0" animBg="1"/>
     </p:bldLst>
   </p:timing>
 </p:sld>
@@ -27140,8 +25109,8 @@
           </a:p>
         </p:txBody>
       </p:sp>
-      <mc:AlternateContent xmlns:mc="http://schemas.openxmlformats.org/markup-compatibility/2006" xmlns:a14="http://schemas.microsoft.com/office/drawing/2010/main">
-        <mc:Choice Requires="a14">
+      <mc:AlternateContent xmlns:mc="http://schemas.openxmlformats.org/markup-compatibility/2006">
+        <mc:Choice xmlns:a14="http://schemas.microsoft.com/office/drawing/2010/main" Requires="a14">
           <p:graphicFrame>
             <p:nvGraphicFramePr>
               <p:cNvPr id="15" name="Table 14">
@@ -27157,7 +25126,7 @@
               <p:nvPr>
                 <p:extLst>
                   <p:ext uri="{D42A27DB-BD31-4B8C-83A1-F6EECF244321}">
-                    <p14:modId xmlns:p14="http://schemas.microsoft.com/office/powerpoint/2010/main" val="2774848263"/>
+                    <p14:modId xmlns:p14="http://schemas.microsoft.com/office/powerpoint/2010/main" val="116518605"/>
                   </p:ext>
                 </p:extLst>
               </p:nvPr>
@@ -27403,65 +25372,6 @@
                             <a:tabLst/>
                             <a:defRPr/>
                           </a:pPr>
-                          <a:r>
-                            <a:rPr lang="en-US" sz="1800" b="0" dirty="0"/>
-                            <a:t>Monte Carlo simulation</a:t>
-                          </a:r>
-                          <a:endParaRPr lang="en-US" sz="1800" b="0" i="1" dirty="0">
-                            <a:latin typeface="Cambria Math" panose="02040503050406030204" pitchFamily="18" charset="0"/>
-                          </a:endParaRPr>
-                        </a:p>
-                        <a:p>
-                          <a:pPr marL="0" marR="0" lvl="0" indent="0" algn="ctr" defTabSz="914400" rtl="0" eaLnBrk="1" fontAlgn="auto" latinLnBrk="0" hangingPunct="1">
-                            <a:lnSpc>
-                              <a:spcPct val="100000"/>
-                            </a:lnSpc>
-                            <a:spcBef>
-                              <a:spcPts val="0"/>
-                            </a:spcBef>
-                            <a:spcAft>
-                              <a:spcPts val="0"/>
-                            </a:spcAft>
-                            <a:buClrTx/>
-                            <a:buSzTx/>
-                            <a:buFontTx/>
-                            <a:buNone/>
-                            <a:tabLst/>
-                            <a:defRPr/>
-                          </a:pPr>
-                          <a14:m>
-                            <m:oMathPara xmlns:m="http://schemas.openxmlformats.org/officeDocument/2006/math">
-                              <m:oMathParaPr>
-                                <m:jc m:val="centerGroup"/>
-                              </m:oMathParaPr>
-                              <m:oMath xmlns:m="http://schemas.openxmlformats.org/officeDocument/2006/math">
-                                <m:r>
-                                  <a:rPr lang="en-US" sz="1800" b="0" i="1" smtClean="0">
-                                    <a:latin typeface="Cambria Math" panose="02040503050406030204" pitchFamily="18" charset="0"/>
-                                  </a:rPr>
-                                  <m:t>𝑒𝑣𝑎𝑙</m:t>
-                                </m:r>
-                                <m:r>
-                                  <a:rPr lang="en-US" sz="1800" b="0" i="1" smtClean="0">
-                                    <a:latin typeface="Cambria Math" panose="02040503050406030204" pitchFamily="18" charset="0"/>
-                                  </a:rPr>
-                                  <m:t>(</m:t>
-                                </m:r>
-                                <m:r>
-                                  <a:rPr lang="en-US" sz="1800" b="0" i="1" smtClean="0">
-                                    <a:latin typeface="Cambria Math" panose="02040503050406030204" pitchFamily="18" charset="0"/>
-                                  </a:rPr>
-                                  <m:t>𝑠</m:t>
-                                </m:r>
-                                <m:r>
-                                  <a:rPr lang="en-US" sz="1800" b="0" i="1" smtClean="0">
-                                    <a:latin typeface="Cambria Math" panose="02040503050406030204" pitchFamily="18" charset="0"/>
-                                  </a:rPr>
-                                  <m:t>)</m:t>
-                                </m:r>
-                              </m:oMath>
-                            </m:oMathPara>
-                          </a14:m>
                           <a:endParaRPr lang="en-US" sz="1800" b="0" dirty="0"/>
                         </a:p>
                       </a:txBody>
@@ -27746,7 +25656,7 @@
             </a:graphic>
           </p:graphicFrame>
         </mc:Choice>
-        <mc:Fallback xmlns="">
+        <mc:Fallback>
           <p:graphicFrame>
             <p:nvGraphicFramePr>
               <p:cNvPr id="15" name="Table 14">
@@ -27762,7 +25672,7 @@
               <p:nvPr>
                 <p:extLst>
                   <p:ext uri="{D42A27DB-BD31-4B8C-83A1-F6EECF244321}">
-                    <p14:modId xmlns:p14="http://schemas.microsoft.com/office/powerpoint/2010/main" val="2774848263"/>
+                    <p14:modId xmlns:p14="http://schemas.microsoft.com/office/powerpoint/2010/main" val="116518605"/>
                   </p:ext>
                 </p:extLst>
               </p:nvPr>
@@ -27871,17 +25781,27 @@
                         <a:bodyPr/>
                         <a:lstStyle/>
                         <a:p>
-                          <a:endParaRPr lang="en-US"/>
+                          <a:pPr marL="0" marR="0" lvl="0" indent="0" algn="ctr" defTabSz="914400" rtl="0" eaLnBrk="1" fontAlgn="auto" latinLnBrk="0" hangingPunct="1">
+                            <a:lnSpc>
+                              <a:spcPct val="100000"/>
+                            </a:lnSpc>
+                            <a:spcBef>
+                              <a:spcPts val="0"/>
+                            </a:spcBef>
+                            <a:spcAft>
+                              <a:spcPts val="0"/>
+                            </a:spcAft>
+                            <a:buClrTx/>
+                            <a:buSzTx/>
+                            <a:buFontTx/>
+                            <a:buNone/>
+                            <a:tabLst/>
+                            <a:defRPr/>
+                          </a:pPr>
+                          <a:endParaRPr lang="en-US" sz="1800" b="0" dirty="0"/>
                         </a:p>
                       </a:txBody>
-                      <a:tcPr>
-                        <a:blipFill>
-                          <a:blip r:embed="rId46"/>
-                          <a:stretch>
-                            <a:fillRect l="-300375" t="-2874" r="-101498" b="-263793"/>
-                          </a:stretch>
-                        </a:blipFill>
-                      </a:tcPr>
+                      <a:tcPr/>
                     </a:tc>
                     <a:tc>
                       <a:txBody>
@@ -29558,8 +27478,8 @@
           </a:p>
         </p:txBody>
       </p:sp>
-      <mc:AlternateContent xmlns:mc="http://schemas.openxmlformats.org/markup-compatibility/2006" xmlns:a14="http://schemas.microsoft.com/office/drawing/2010/main">
-        <mc:Choice Requires="a14">
+      <mc:AlternateContent xmlns:mc="http://schemas.openxmlformats.org/markup-compatibility/2006">
+        <mc:Choice xmlns:a14="http://schemas.microsoft.com/office/drawing/2010/main" Requires="a14">
           <p:sp>
             <p:nvSpPr>
               <p:cNvPr id="8" name="TextBox 7">
@@ -29609,22 +27529,22 @@
                     </m:oMathParaPr>
                     <m:oMath xmlns:m="http://schemas.openxmlformats.org/officeDocument/2006/math">
                       <m:r>
-                        <a:rPr lang="en-US" sz="2400" b="0" i="1" smtClean="0">
+                        <a:rPr lang="en-US" sz="2400" i="1">
                           <a:latin typeface="Cambria Math" panose="02040503050406030204" pitchFamily="18" charset="0"/>
                         </a:rPr>
-                        <m:t>𝑣𝑎𝑙𝑢𝑒</m:t>
+                        <m:t>𝑈</m:t>
                       </m:r>
                       <m:d>
                         <m:dPr>
                           <m:ctrlPr>
-                            <a:rPr lang="en-US" sz="2400" b="0" i="1" smtClean="0">
+                            <a:rPr lang="en-US" sz="2400" i="1">
                               <a:latin typeface="Cambria Math" panose="02040503050406030204" pitchFamily="18" charset="0"/>
                             </a:rPr>
                           </m:ctrlPr>
                         </m:dPr>
                         <m:e>
                           <m:r>
-                            <a:rPr lang="en-US" sz="2400" b="0" i="1" smtClean="0">
+                            <a:rPr lang="en-US" sz="2400" i="1">
                               <a:latin typeface="Cambria Math" panose="02040503050406030204" pitchFamily="18" charset="0"/>
                             </a:rPr>
                             <m:t>𝑠</m:t>
@@ -29632,22 +27552,22 @@
                         </m:e>
                       </m:d>
                       <m:r>
-                        <a:rPr lang="en-US" sz="2400" b="0" i="1" smtClean="0">
+                        <a:rPr lang="en-US" sz="2400" i="1">
                           <a:latin typeface="Cambria Math" panose="02040503050406030204" pitchFamily="18" charset="0"/>
                         </a:rPr>
-                        <m:t>≈</m:t>
+                        <m:t>=</m:t>
                       </m:r>
                       <m:sSub>
                         <m:sSubPr>
                           <m:ctrlPr>
-                            <a:rPr lang="en-US" sz="2400" b="0" i="1" smtClean="0">
+                            <a:rPr lang="en-US" sz="2400" i="1">
                               <a:latin typeface="Cambria Math" panose="02040503050406030204" pitchFamily="18" charset="0"/>
                             </a:rPr>
                           </m:ctrlPr>
                         </m:sSubPr>
                         <m:e>
                           <m:r>
-                            <a:rPr lang="en-US" sz="2400" b="0" i="1" smtClean="0">
+                            <a:rPr lang="en-US" sz="2400" i="1">
                               <a:latin typeface="Cambria Math" panose="02040503050406030204" pitchFamily="18" charset="0"/>
                               <a:ea typeface="Cambria Math" panose="02040503050406030204" pitchFamily="18" charset="0"/>
                             </a:rPr>
@@ -29658,14 +27578,14 @@
                           <m:sSub>
                             <m:sSubPr>
                               <m:ctrlPr>
-                                <a:rPr lang="en-US" sz="2400" b="0" i="1" smtClean="0">
+                                <a:rPr lang="en-US" sz="2400" i="1">
                                   <a:latin typeface="Cambria Math" panose="02040503050406030204" pitchFamily="18" charset="0"/>
                                 </a:rPr>
                               </m:ctrlPr>
                             </m:sSubPr>
                             <m:e>
                               <m:r>
-                                <a:rPr lang="en-US" sz="2400" b="0" i="1" smtClean="0">
+                                <a:rPr lang="en-US" sz="2400" i="1">
                                   <a:latin typeface="Cambria Math" panose="02040503050406030204" pitchFamily="18" charset="0"/>
                                 </a:rPr>
                                 <m:t>𝜋</m:t>
@@ -29673,7 +27593,7 @@
                             </m:e>
                             <m:sub>
                               <m:r>
-                                <a:rPr lang="en-US" sz="2400" b="0" i="1" smtClean="0">
+                                <a:rPr lang="en-US" sz="2400" i="1">
                                   <a:latin typeface="Cambria Math" panose="02040503050406030204" pitchFamily="18" charset="0"/>
                                 </a:rPr>
                                 <m:t>𝑥</m:t>
@@ -29681,7 +27601,7 @@
                             </m:sub>
                           </m:sSub>
                           <m:r>
-                            <a:rPr lang="en-US" sz="2400" b="0" i="1" smtClean="0">
+                            <a:rPr lang="en-US" sz="2400" i="1">
                               <a:latin typeface="Cambria Math" panose="02040503050406030204" pitchFamily="18" charset="0"/>
                             </a:rPr>
                             <m:t>,</m:t>
@@ -29689,14 +27609,14 @@
                           <m:sSub>
                             <m:sSubPr>
                               <m:ctrlPr>
-                                <a:rPr lang="en-US" sz="2400" b="0" i="1" smtClean="0">
+                                <a:rPr lang="en-US" sz="2400" i="1">
                                   <a:latin typeface="Cambria Math" panose="02040503050406030204" pitchFamily="18" charset="0"/>
                                 </a:rPr>
                               </m:ctrlPr>
                             </m:sSubPr>
                             <m:e>
                               <m:r>
-                                <a:rPr lang="en-US" sz="2400" b="0" i="1" smtClean="0">
+                                <a:rPr lang="en-US" sz="2400" i="1">
                                   <a:latin typeface="Cambria Math" panose="02040503050406030204" pitchFamily="18" charset="0"/>
                                 </a:rPr>
                                 <m:t>𝜋</m:t>
@@ -29704,7 +27624,7 @@
                             </m:e>
                             <m:sub>
                               <m:r>
-                                <a:rPr lang="en-US" sz="2400" b="0" i="1" smtClean="0">
+                                <a:rPr lang="en-US" sz="2400" i="1">
                                   <a:latin typeface="Cambria Math" panose="02040503050406030204" pitchFamily="18" charset="0"/>
                                 </a:rPr>
                                 <m:t>𝑜</m:t>
@@ -29713,36 +27633,68 @@
                           </m:sSub>
                         </m:sub>
                       </m:sSub>
-                      <m:r>
-                        <a:rPr lang="en-US" sz="2400" b="0" i="1" smtClean="0">
-                          <a:latin typeface="Cambria Math" panose="02040503050406030204" pitchFamily="18" charset="0"/>
-                        </a:rPr>
-                        <m:t>[</m:t>
-                      </m:r>
-                      <m:r>
-                        <a:rPr lang="en-US" sz="2400" b="0" i="1" smtClean="0">
-                          <a:latin typeface="Cambria Math" panose="02040503050406030204" pitchFamily="18" charset="0"/>
-                        </a:rPr>
-                        <m:t>𝑈</m:t>
-                      </m:r>
-                      <m:r>
-                        <a:rPr lang="en-US" sz="2400" b="0" i="1" smtClean="0">
-                          <a:latin typeface="Cambria Math" panose="02040503050406030204" pitchFamily="18" charset="0"/>
-                        </a:rPr>
-                        <m:t>(</m:t>
-                      </m:r>
-                      <m:r>
-                        <a:rPr lang="en-US" sz="2400" b="0" i="1" smtClean="0">
-                          <a:latin typeface="Cambria Math" panose="02040503050406030204" pitchFamily="18" charset="0"/>
-                        </a:rPr>
-                        <m:t>𝑠</m:t>
-                      </m:r>
-                      <m:r>
-                        <a:rPr lang="en-US" sz="2400" b="0" i="1" smtClean="0">
-                          <a:latin typeface="Cambria Math" panose="02040503050406030204" pitchFamily="18" charset="0"/>
-                        </a:rPr>
-                        <m:t>)]</m:t>
-                      </m:r>
+                      <m:d>
+                        <m:dPr>
+                          <m:begChr m:val="["/>
+                          <m:endChr m:val="]"/>
+                          <m:ctrlPr>
+                            <a:rPr lang="en-US" sz="2400" i="1">
+                              <a:latin typeface="Cambria Math" panose="02040503050406030204" pitchFamily="18" charset="0"/>
+                            </a:rPr>
+                          </m:ctrlPr>
+                        </m:dPr>
+                        <m:e>
+                          <m:r>
+                            <a:rPr lang="en-US" sz="2400" i="1">
+                              <a:latin typeface="Cambria Math" panose="02040503050406030204" pitchFamily="18" charset="0"/>
+                            </a:rPr>
+                            <m:t>𝑢</m:t>
+                          </m:r>
+                          <m:r>
+                            <a:rPr lang="en-US" sz="2400" i="1">
+                              <a:latin typeface="Cambria Math" panose="02040503050406030204" pitchFamily="18" charset="0"/>
+                            </a:rPr>
+                            <m:t>|</m:t>
+                          </m:r>
+                          <m:sSub>
+                            <m:sSubPr>
+                              <m:ctrlPr>
+                                <a:rPr lang="en-US" sz="2400" i="1">
+                                  <a:latin typeface="Cambria Math" panose="02040503050406030204" pitchFamily="18" charset="0"/>
+                                </a:rPr>
+                              </m:ctrlPr>
+                            </m:sSubPr>
+                            <m:e>
+                              <m:r>
+                                <a:rPr lang="en-US" sz="2400" i="1">
+                                  <a:latin typeface="Cambria Math" panose="02040503050406030204" pitchFamily="18" charset="0"/>
+                                </a:rPr>
+                                <m:t>𝑠</m:t>
+                              </m:r>
+                            </m:e>
+                            <m:sub>
+                              <m:r>
+                                <a:rPr lang="en-US" sz="2400" i="1">
+                                  <a:latin typeface="Cambria Math" panose="02040503050406030204" pitchFamily="18" charset="0"/>
+                                </a:rPr>
+                                <m:t>0</m:t>
+                              </m:r>
+                            </m:sub>
+                          </m:sSub>
+                          <m:r>
+                            <a:rPr lang="en-US" sz="2400" i="1">
+                              <a:latin typeface="Cambria Math" panose="02040503050406030204" pitchFamily="18" charset="0"/>
+                            </a:rPr>
+                            <m:t>=</m:t>
+                          </m:r>
+                          <m:r>
+                            <a:rPr lang="en-US" sz="2400" i="1">
+                              <a:latin typeface="Cambria Math" panose="02040503050406030204" pitchFamily="18" charset="0"/>
+                            </a:rPr>
+                            <m:t>𝑠</m:t>
+                          </m:r>
+                        </m:e>
+                      </m:d>
                     </m:oMath>
                   </m:oMathPara>
                 </a14:m>
@@ -29751,7 +27703,7 @@
             </p:txBody>
           </p:sp>
         </mc:Choice>
-        <mc:Fallback xmlns="">
+        <mc:Fallback>
           <p:sp>
             <p:nvSpPr>
               <p:cNvPr id="8" name="TextBox 7">
@@ -29777,7 +27729,145 @@
               <a:blipFill>
                 <a:blip r:embed="rId71"/>
                 <a:stretch>
-                  <a:fillRect l="-353" b="-8235"/>
+                  <a:fillRect l="-176" b="-8235"/>
+                </a:stretch>
+              </a:blipFill>
+            </p:spPr>
+            <p:txBody>
+              <a:bodyPr/>
+              <a:lstStyle/>
+              <a:p>
+                <a:r>
+                  <a:rPr lang="en-US">
+                    <a:noFill/>
+                  </a:rPr>
+                  <a:t> </a:t>
+                </a:r>
+              </a:p>
+            </p:txBody>
+          </p:sp>
+        </mc:Fallback>
+      </mc:AlternateContent>
+      <mc:AlternateContent xmlns:mc="http://schemas.openxmlformats.org/markup-compatibility/2006">
+        <mc:Choice xmlns:a14="http://schemas.microsoft.com/office/drawing/2010/main" Requires="a14">
+          <p:sp>
+            <p:nvSpPr>
+              <p:cNvPr id="6" name="TextBox 5">
+                <a:extLst>
+                  <a:ext uri="{FF2B5EF4-FFF2-40B4-BE49-F238E27FC236}">
+                    <a16:creationId xmlns:a16="http://schemas.microsoft.com/office/drawing/2014/main" id="{FEA64C98-8579-50BF-D125-8E781F144E79}"/>
+                  </a:ext>
+                </a:extLst>
+              </p:cNvPr>
+              <p:cNvSpPr txBox="1"/>
+              <p:nvPr/>
+            </p:nvSpPr>
+            <p:spPr>
+              <a:xfrm>
+                <a:off x="10639366" y="593222"/>
+                <a:ext cx="1188299" cy="369332"/>
+              </a:xfrm>
+              <a:prstGeom prst="rect">
+                <a:avLst/>
+              </a:prstGeom>
+              <a:noFill/>
+            </p:spPr>
+            <p:txBody>
+              <a:bodyPr wrap="square" rtlCol="0">
+                <a:spAutoFit/>
+              </a:bodyPr>
+              <a:lstStyle/>
+              <a:p>
+                <a14:m>
+                  <m:oMathPara xmlns:m="http://schemas.openxmlformats.org/officeDocument/2006/math">
+                    <m:oMathParaPr>
+                      <m:jc m:val="centerGroup"/>
+                    </m:oMathParaPr>
+                    <m:oMath xmlns:m="http://schemas.openxmlformats.org/officeDocument/2006/math">
+                      <m:r>
+                        <a:rPr lang="en-US" b="1" i="1" smtClean="0">
+                          <a:solidFill>
+                            <a:srgbClr val="FF0000"/>
+                          </a:solidFill>
+                          <a:latin typeface="Cambria Math" panose="02040503050406030204" pitchFamily="18" charset="0"/>
+                        </a:rPr>
+                        <m:t>≈</m:t>
+                      </m:r>
+                      <m:r>
+                        <a:rPr lang="en-US" b="1" i="1" smtClean="0">
+                          <a:solidFill>
+                            <a:srgbClr val="FF0000"/>
+                          </a:solidFill>
+                          <a:latin typeface="Cambria Math" panose="02040503050406030204" pitchFamily="18" charset="0"/>
+                        </a:rPr>
+                        <m:t>𝒆𝒗𝒂𝒍</m:t>
+                      </m:r>
+                      <m:r>
+                        <a:rPr lang="en-US" b="1" i="1" smtClean="0">
+                          <a:solidFill>
+                            <a:srgbClr val="FF0000"/>
+                          </a:solidFill>
+                          <a:latin typeface="Cambria Math" panose="02040503050406030204" pitchFamily="18" charset="0"/>
+                        </a:rPr>
+                        <m:t>(</m:t>
+                      </m:r>
+                      <m:r>
+                        <a:rPr lang="en-US" b="1" i="1" smtClean="0">
+                          <a:solidFill>
+                            <a:srgbClr val="FF0000"/>
+                          </a:solidFill>
+                          <a:latin typeface="Cambria Math" panose="02040503050406030204" pitchFamily="18" charset="0"/>
+                        </a:rPr>
+                        <m:t>𝒔</m:t>
+                      </m:r>
+                      <m:r>
+                        <a:rPr lang="en-US" b="1" i="1" smtClean="0">
+                          <a:solidFill>
+                            <a:srgbClr val="FF0000"/>
+                          </a:solidFill>
+                          <a:latin typeface="Cambria Math" panose="02040503050406030204" pitchFamily="18" charset="0"/>
+                        </a:rPr>
+                        <m:t>)</m:t>
+                      </m:r>
+                    </m:oMath>
+                  </m:oMathPara>
+                </a14:m>
+                <a:endParaRPr lang="en-US" b="1" dirty="0">
+                  <a:solidFill>
+                    <a:srgbClr val="FF0000"/>
+                  </a:solidFill>
+                </a:endParaRPr>
+              </a:p>
+            </p:txBody>
+          </p:sp>
+        </mc:Choice>
+        <mc:Fallback>
+          <p:sp>
+            <p:nvSpPr>
+              <p:cNvPr id="6" name="TextBox 5">
+                <a:extLst>
+                  <a:ext uri="{FF2B5EF4-FFF2-40B4-BE49-F238E27FC236}">
+                    <a16:creationId xmlns:a16="http://schemas.microsoft.com/office/drawing/2014/main" id="{FEA64C98-8579-50BF-D125-8E781F144E79}"/>
+                  </a:ext>
+                </a:extLst>
+              </p:cNvPr>
+              <p:cNvSpPr txBox="1">
+                <a:spLocks noRot="1" noChangeAspect="1" noMove="1" noResize="1" noEditPoints="1" noAdjustHandles="1" noChangeArrowheads="1" noChangeShapeType="1" noTextEdit="1"/>
+              </p:cNvSpPr>
+              <p:nvPr/>
+            </p:nvSpPr>
+            <p:spPr>
+              <a:xfrm>
+                <a:off x="10639366" y="593222"/>
+                <a:ext cx="1188299" cy="369332"/>
+              </a:xfrm>
+              <a:prstGeom prst="rect">
+                <a:avLst/>
+              </a:prstGeom>
+              <a:blipFill>
+                <a:blip r:embed="rId72"/>
+                <a:stretch>
+                  <a:fillRect r="-3590" b="-13115"/>
                 </a:stretch>
               </a:blipFill>
             </p:spPr>
@@ -30060,6 +28150,33 @@
                                   </p:childTnLst>
                                 </p:cTn>
                               </p:par>
+                              <p:par>
+                                <p:cTn id="25" presetID="1" presetClass="entr" presetSubtype="0" fill="hold" grpId="0" nodeType="withEffect">
+                                  <p:stCondLst>
+                                    <p:cond delay="0"/>
+                                  </p:stCondLst>
+                                  <p:childTnLst>
+                                    <p:set>
+                                      <p:cBhvr>
+                                        <p:cTn id="26" dur="1" fill="hold">
+                                          <p:stCondLst>
+                                            <p:cond delay="0"/>
+                                          </p:stCondLst>
+                                        </p:cTn>
+                                        <p:tgtEl>
+                                          <p:spTgt spid="6"/>
+                                        </p:tgtEl>
+                                        <p:attrNameLst>
+                                          <p:attrName>style.visibility</p:attrName>
+                                        </p:attrNameLst>
+                                      </p:cBhvr>
+                                      <p:to>
+                                        <p:strVal val="visible"/>
+                                      </p:to>
+                                    </p:set>
+                                  </p:childTnLst>
+                                </p:cTn>
+                              </p:par>
                             </p:childTnLst>
                           </p:cTn>
                         </p:par>
@@ -30092,6 +28209,7 @@
       <p:bldP spid="3" grpId="0" animBg="1"/>
       <p:bldP spid="11" grpId="0"/>
       <p:bldP spid="18" grpId="0"/>
+      <p:bldP spid="6" grpId="0"/>
     </p:bldLst>
   </p:timing>
 </p:sld>
